--- a/selfcafe-miraiya-kickoff-deck/akita-schedule-sheet.pptx
+++ b/selfcafe-miraiya-kickoff-deck/akita-schedule-sheet.pptx
@@ -1045,11 +1045,11 @@
         <p:spPr>
           <a:xfrm>
             <a:off x="384048" y="914400"/>
-            <a:ext cx="2356866" cy="402336"/>
+            <a:ext cx="1881835" cy="384048"/>
           </a:xfrm>
           <a:prstGeom prst="roundRect">
             <a:avLst>
-              <a:gd name="adj" fmla="val 11364"/>
+              <a:gd name="adj" fmla="val 11905"/>
             </a:avLst>
           </a:prstGeom>
           <a:solidFill>
@@ -1071,24 +1071,24 @@
         </p:nvSpPr>
         <p:spPr>
           <a:xfrm>
-            <a:off x="530352" y="950976"/>
-            <a:ext cx="2064258" cy="164592"/>
-          </a:xfrm>
-          <a:prstGeom prst="rect">
-            <a:avLst/>
-          </a:prstGeom>
-          <a:noFill/>
-          <a:ln/>
-        </p:spPr>
-        <p:txBody>
-          <a:bodyPr wrap="square" lIns="0" tIns="0" rIns="0" bIns="0" rtlCol="0" anchor="ctr"/>
-          <a:lstStyle/>
-          <a:p>
-            <a:pPr indent="0" marL="0">
-              <a:buNone/>
-            </a:pPr>
-            <a:r>
-              <a:rPr lang="en-US" sz="750" dirty="0">
+            <a:off x="512064" y="941832"/>
+            <a:ext cx="1625803" cy="155448"/>
+          </a:xfrm>
+          <a:prstGeom prst="rect">
+            <a:avLst/>
+          </a:prstGeom>
+          <a:noFill/>
+          <a:ln/>
+        </p:spPr>
+        <p:txBody>
+          <a:bodyPr wrap="square" lIns="0" tIns="0" rIns="0" bIns="0" rtlCol="0" anchor="ctr"/>
+          <a:lstStyle/>
+          <a:p>
+            <a:pPr indent="0" marL="0">
+              <a:buNone/>
+            </a:pPr>
+            <a:r>
+              <a:rPr lang="en-US" sz="700" dirty="0">
                 <a:solidFill>
                   <a:srgbClr val="7E8882"/>
                 </a:solidFill>
@@ -1098,7 +1098,7 @@
               </a:rPr>
               <a:t>区画</a:t>
             </a:r>
-            <a:endParaRPr lang="en-US" sz="750" dirty="0"/>
+            <a:endParaRPr lang="en-US" sz="700" dirty="0"/>
           </a:p>
         </p:txBody>
       </p:sp>
@@ -1110,24 +1110,24 @@
         </p:nvSpPr>
         <p:spPr>
           <a:xfrm>
-            <a:off x="530352" y="1097280"/>
-            <a:ext cx="2064258" cy="182880"/>
-          </a:xfrm>
-          <a:prstGeom prst="rect">
-            <a:avLst/>
-          </a:prstGeom>
-          <a:noFill/>
-          <a:ln/>
-        </p:spPr>
-        <p:txBody>
-          <a:bodyPr wrap="square" lIns="0" tIns="0" rIns="0" bIns="0" rtlCol="0" anchor="ctr"/>
-          <a:lstStyle/>
-          <a:p>
-            <a:pPr indent="0" marL="0">
-              <a:buNone/>
-            </a:pPr>
-            <a:r>
-              <a:rPr lang="en-US" sz="1100" b="1" dirty="0">
+            <a:off x="512064" y="1088136"/>
+            <a:ext cx="1625803" cy="182880"/>
+          </a:xfrm>
+          <a:prstGeom prst="rect">
+            <a:avLst/>
+          </a:prstGeom>
+          <a:noFill/>
+          <a:ln/>
+        </p:spPr>
+        <p:txBody>
+          <a:bodyPr wrap="square" lIns="0" tIns="0" rIns="0" bIns="0" rtlCol="0" anchor="ctr"/>
+          <a:lstStyle/>
+          <a:p>
+            <a:pPr indent="0" marL="0">
+              <a:buNone/>
+            </a:pPr>
+            <a:r>
+              <a:rPr lang="en-US" sz="1050" b="1" dirty="0">
                 <a:solidFill>
                   <a:srgbClr val="106838"/>
                 </a:solidFill>
@@ -1137,7 +1137,7 @@
               </a:rPr>
               <a:t>30坪</a:t>
             </a:r>
-            <a:endParaRPr lang="en-US" sz="1100" dirty="0"/>
+            <a:endParaRPr lang="en-US" sz="1050" dirty="0"/>
           </a:p>
         </p:txBody>
       </p:sp>
@@ -1149,12 +1149,12 @@
         </p:nvSpPr>
         <p:spPr>
           <a:xfrm>
-            <a:off x="2905506" y="914400"/>
-            <a:ext cx="2356866" cy="402336"/>
+            <a:off x="2393899" y="914400"/>
+            <a:ext cx="1881835" cy="384048"/>
           </a:xfrm>
           <a:prstGeom prst="roundRect">
             <a:avLst>
-              <a:gd name="adj" fmla="val 11364"/>
+              <a:gd name="adj" fmla="val 11905"/>
             </a:avLst>
           </a:prstGeom>
           <a:solidFill>
@@ -1176,24 +1176,24 @@
         </p:nvSpPr>
         <p:spPr>
           <a:xfrm>
-            <a:off x="3051810" y="950976"/>
-            <a:ext cx="2064258" cy="164592"/>
-          </a:xfrm>
-          <a:prstGeom prst="rect">
-            <a:avLst/>
-          </a:prstGeom>
-          <a:noFill/>
-          <a:ln/>
-        </p:spPr>
-        <p:txBody>
-          <a:bodyPr wrap="square" lIns="0" tIns="0" rIns="0" bIns="0" rtlCol="0" anchor="ctr"/>
-          <a:lstStyle/>
-          <a:p>
-            <a:pPr indent="0" marL="0">
-              <a:buNone/>
-            </a:pPr>
-            <a:r>
-              <a:rPr lang="en-US" sz="750" dirty="0">
+            <a:off x="2521915" y="941832"/>
+            <a:ext cx="1625803" cy="155448"/>
+          </a:xfrm>
+          <a:prstGeom prst="rect">
+            <a:avLst/>
+          </a:prstGeom>
+          <a:noFill/>
+          <a:ln/>
+        </p:spPr>
+        <p:txBody>
+          <a:bodyPr wrap="square" lIns="0" tIns="0" rIns="0" bIns="0" rtlCol="0" anchor="ctr"/>
+          <a:lstStyle/>
+          <a:p>
+            <a:pPr indent="0" marL="0">
+              <a:buNone/>
+            </a:pPr>
+            <a:r>
+              <a:rPr lang="en-US" sz="700" dirty="0">
                 <a:solidFill>
                   <a:srgbClr val="7E8882"/>
                 </a:solidFill>
@@ -1201,9 +1201,9 @@
                 <a:ea typeface="Yu Gothic" pitchFamily="34" charset="-122"/>
                 <a:cs typeface="Yu Gothic" pitchFamily="34" charset="-120"/>
               </a:rPr>
-              <a:t>オープン目標</a:t>
-            </a:r>
-            <a:endParaRPr lang="en-US" sz="750" dirty="0"/>
+              <a:t>契約形態</a:t>
+            </a:r>
+            <a:endParaRPr lang="en-US" sz="700" dirty="0"/>
           </a:p>
         </p:txBody>
       </p:sp>
@@ -1215,24 +1215,24 @@
         </p:nvSpPr>
         <p:spPr>
           <a:xfrm>
-            <a:off x="3051810" y="1097280"/>
-            <a:ext cx="2064258" cy="182880"/>
-          </a:xfrm>
-          <a:prstGeom prst="rect">
-            <a:avLst/>
-          </a:prstGeom>
-          <a:noFill/>
-          <a:ln/>
-        </p:spPr>
-        <p:txBody>
-          <a:bodyPr wrap="square" lIns="0" tIns="0" rIns="0" bIns="0" rtlCol="0" anchor="ctr"/>
-          <a:lstStyle/>
-          <a:p>
-            <a:pPr indent="0" marL="0">
-              <a:buNone/>
-            </a:pPr>
-            <a:r>
-              <a:rPr lang="en-US" sz="1100" b="1" dirty="0">
+            <a:off x="2521915" y="1088136"/>
+            <a:ext cx="1625803" cy="182880"/>
+          </a:xfrm>
+          <a:prstGeom prst="rect">
+            <a:avLst/>
+          </a:prstGeom>
+          <a:noFill/>
+          <a:ln/>
+        </p:spPr>
+        <p:txBody>
+          <a:bodyPr wrap="square" lIns="0" tIns="0" rIns="0" bIns="0" rtlCol="0" anchor="ctr"/>
+          <a:lstStyle/>
+          <a:p>
+            <a:pPr indent="0" marL="0">
+              <a:buNone/>
+            </a:pPr>
+            <a:r>
+              <a:rPr lang="en-US" sz="1050" b="1" dirty="0">
                 <a:solidFill>
                   <a:srgbClr val="106838"/>
                 </a:solidFill>
@@ -1240,9 +1240,9 @@
                 <a:ea typeface="Yu Gothic" pitchFamily="34" charset="-122"/>
                 <a:cs typeface="Yu Gothic" pitchFamily="34" charset="-120"/>
               </a:rPr>
-              <a:t>2027年2月末</a:t>
-            </a:r>
-            <a:endParaRPr lang="en-US" sz="1100" dirty="0"/>
+              <a:t>業務委託型・3年</a:t>
+            </a:r>
+            <a:endParaRPr lang="en-US" sz="1050" dirty="0"/>
           </a:p>
         </p:txBody>
       </p:sp>
@@ -1254,12 +1254,12 @@
         </p:nvSpPr>
         <p:spPr>
           <a:xfrm>
-            <a:off x="5426964" y="914400"/>
-            <a:ext cx="2356866" cy="402336"/>
+            <a:off x="4403750" y="914400"/>
+            <a:ext cx="1881835" cy="384048"/>
           </a:xfrm>
           <a:prstGeom prst="roundRect">
             <a:avLst>
-              <a:gd name="adj" fmla="val 11364"/>
+              <a:gd name="adj" fmla="val 11905"/>
             </a:avLst>
           </a:prstGeom>
           <a:solidFill>
@@ -1281,24 +1281,24 @@
         </p:nvSpPr>
         <p:spPr>
           <a:xfrm>
-            <a:off x="5573268" y="950976"/>
-            <a:ext cx="2064258" cy="164592"/>
-          </a:xfrm>
-          <a:prstGeom prst="rect">
-            <a:avLst/>
-          </a:prstGeom>
-          <a:noFill/>
-          <a:ln/>
-        </p:spPr>
-        <p:txBody>
-          <a:bodyPr wrap="square" lIns="0" tIns="0" rIns="0" bIns="0" rtlCol="0" anchor="ctr"/>
-          <a:lstStyle/>
-          <a:p>
-            <a:pPr indent="0" marL="0">
-              <a:buNone/>
-            </a:pPr>
-            <a:r>
-              <a:rPr lang="en-US" sz="750" dirty="0">
+            <a:off x="4531766" y="941832"/>
+            <a:ext cx="1625803" cy="155448"/>
+          </a:xfrm>
+          <a:prstGeom prst="rect">
+            <a:avLst/>
+          </a:prstGeom>
+          <a:noFill/>
+          <a:ln/>
+        </p:spPr>
+        <p:txBody>
+          <a:bodyPr wrap="square" lIns="0" tIns="0" rIns="0" bIns="0" rtlCol="0" anchor="ctr"/>
+          <a:lstStyle/>
+          <a:p>
+            <a:pPr indent="0" marL="0">
+              <a:buNone/>
+            </a:pPr>
+            <a:r>
+              <a:rPr lang="en-US" sz="700" dirty="0">
                 <a:solidFill>
                   <a:srgbClr val="7E8882"/>
                 </a:solidFill>
@@ -1306,9 +1306,9 @@
                 <a:ea typeface="Yu Gothic" pitchFamily="34" charset="-122"/>
                 <a:cs typeface="Yu Gothic" pitchFamily="34" charset="-120"/>
               </a:rPr>
-              <a:t>契約形態</a:t>
-            </a:r>
-            <a:endParaRPr lang="en-US" sz="750" dirty="0"/>
+              <a:t>御社の初期費用（設置工事費）</a:t>
+            </a:r>
+            <a:endParaRPr lang="en-US" sz="700" dirty="0"/>
           </a:p>
         </p:txBody>
       </p:sp>
@@ -1320,24 +1320,24 @@
         </p:nvSpPr>
         <p:spPr>
           <a:xfrm>
-            <a:off x="5573268" y="1097280"/>
-            <a:ext cx="2064258" cy="182880"/>
-          </a:xfrm>
-          <a:prstGeom prst="rect">
-            <a:avLst/>
-          </a:prstGeom>
-          <a:noFill/>
-          <a:ln/>
-        </p:spPr>
-        <p:txBody>
-          <a:bodyPr wrap="square" lIns="0" tIns="0" rIns="0" bIns="0" rtlCol="0" anchor="ctr"/>
-          <a:lstStyle/>
-          <a:p>
-            <a:pPr indent="0" marL="0">
-              <a:buNone/>
-            </a:pPr>
-            <a:r>
-              <a:rPr lang="en-US" sz="1100" b="1" dirty="0">
+            <a:off x="4531766" y="1088136"/>
+            <a:ext cx="1625803" cy="182880"/>
+          </a:xfrm>
+          <a:prstGeom prst="rect">
+            <a:avLst/>
+          </a:prstGeom>
+          <a:noFill/>
+          <a:ln/>
+        </p:spPr>
+        <p:txBody>
+          <a:bodyPr wrap="square" lIns="0" tIns="0" rIns="0" bIns="0" rtlCol="0" anchor="ctr"/>
+          <a:lstStyle/>
+          <a:p>
+            <a:pPr indent="0" marL="0">
+              <a:buNone/>
+            </a:pPr>
+            <a:r>
+              <a:rPr lang="en-US" sz="1050" b="1" dirty="0">
                 <a:solidFill>
                   <a:srgbClr val="106838"/>
                 </a:solidFill>
@@ -1345,9 +1345,9 @@
                 <a:ea typeface="Yu Gothic" pitchFamily="34" charset="-122"/>
                 <a:cs typeface="Yu Gothic" pitchFamily="34" charset="-120"/>
               </a:rPr>
-              <a:t>業務委託（3年）</a:t>
-            </a:r>
-            <a:endParaRPr lang="en-US" sz="1100" dirty="0"/>
+              <a:t>30〜50万円</a:t>
+            </a:r>
+            <a:endParaRPr lang="en-US" sz="1050" dirty="0"/>
           </a:p>
         </p:txBody>
       </p:sp>
@@ -1359,12 +1359,12 @@
         </p:nvSpPr>
         <p:spPr>
           <a:xfrm>
-            <a:off x="7948422" y="914400"/>
-            <a:ext cx="2356866" cy="402336"/>
+            <a:off x="6413602" y="914400"/>
+            <a:ext cx="1881835" cy="384048"/>
           </a:xfrm>
           <a:prstGeom prst="roundRect">
             <a:avLst>
-              <a:gd name="adj" fmla="val 11364"/>
+              <a:gd name="adj" fmla="val 11905"/>
             </a:avLst>
           </a:prstGeom>
           <a:solidFill>
@@ -1386,24 +1386,24 @@
         </p:nvSpPr>
         <p:spPr>
           <a:xfrm>
-            <a:off x="8094726" y="950976"/>
-            <a:ext cx="2064258" cy="164592"/>
-          </a:xfrm>
-          <a:prstGeom prst="rect">
-            <a:avLst/>
-          </a:prstGeom>
-          <a:noFill/>
-          <a:ln/>
-        </p:spPr>
-        <p:txBody>
-          <a:bodyPr wrap="square" lIns="0" tIns="0" rIns="0" bIns="0" rtlCol="0" anchor="ctr"/>
-          <a:lstStyle/>
-          <a:p>
-            <a:pPr indent="0" marL="0">
-              <a:buNone/>
-            </a:pPr>
-            <a:r>
-              <a:rPr lang="en-US" sz="750" dirty="0">
+            <a:off x="6541618" y="941832"/>
+            <a:ext cx="1625803" cy="155448"/>
+          </a:xfrm>
+          <a:prstGeom prst="rect">
+            <a:avLst/>
+          </a:prstGeom>
+          <a:noFill/>
+          <a:ln/>
+        </p:spPr>
+        <p:txBody>
+          <a:bodyPr wrap="square" lIns="0" tIns="0" rIns="0" bIns="0" rtlCol="0" anchor="ctr"/>
+          <a:lstStyle/>
+          <a:p>
+            <a:pPr indent="0" marL="0">
+              <a:buNone/>
+            </a:pPr>
+            <a:r>
+              <a:rPr lang="en-US" sz="700" dirty="0">
                 <a:solidFill>
                   <a:srgbClr val="7E8882"/>
                 </a:solidFill>
@@ -1411,38 +1411,143 @@
                 <a:ea typeface="Yu Gothic" pitchFamily="34" charset="-122"/>
                 <a:cs typeface="Yu Gothic" pitchFamily="34" charset="-120"/>
               </a:rPr>
+              <a:t>オープン目標</a:t>
+            </a:r>
+            <a:endParaRPr lang="en-US" sz="700" dirty="0"/>
+          </a:p>
+        </p:txBody>
+      </p:sp>
+      <p:sp>
+        <p:nvSpPr>
+          <p:cNvPr id="18" name="Text 15"/>
+          <p:cNvSpPr/>
+          <p:nvPr/>
+        </p:nvSpPr>
+        <p:spPr>
+          <a:xfrm>
+            <a:off x="6541618" y="1088136"/>
+            <a:ext cx="1625803" cy="182880"/>
+          </a:xfrm>
+          <a:prstGeom prst="rect">
+            <a:avLst/>
+          </a:prstGeom>
+          <a:noFill/>
+          <a:ln/>
+        </p:spPr>
+        <p:txBody>
+          <a:bodyPr wrap="square" lIns="0" tIns="0" rIns="0" bIns="0" rtlCol="0" anchor="ctr"/>
+          <a:lstStyle/>
+          <a:p>
+            <a:pPr indent="0" marL="0">
+              <a:buNone/>
+            </a:pPr>
+            <a:r>
+              <a:rPr lang="en-US" sz="1050" b="1" dirty="0">
+                <a:solidFill>
+                  <a:srgbClr val="106838"/>
+                </a:solidFill>
+                <a:latin typeface="Yu Gothic" pitchFamily="34" charset="0"/>
+                <a:ea typeface="Yu Gothic" pitchFamily="34" charset="-122"/>
+                <a:cs typeface="Yu Gothic" pitchFamily="34" charset="-120"/>
+              </a:rPr>
+              <a:t>2027年2月末</a:t>
+            </a:r>
+            <a:endParaRPr lang="en-US" sz="1050" dirty="0"/>
+          </a:p>
+        </p:txBody>
+      </p:sp>
+      <p:sp>
+        <p:nvSpPr>
+          <p:cNvPr id="19" name="Shape 16"/>
+          <p:cNvSpPr/>
+          <p:nvPr/>
+        </p:nvSpPr>
+        <p:spPr>
+          <a:xfrm>
+            <a:off x="8423453" y="914400"/>
+            <a:ext cx="1881835" cy="384048"/>
+          </a:xfrm>
+          <a:prstGeom prst="roundRect">
+            <a:avLst>
+              <a:gd name="adj" fmla="val 11905"/>
+            </a:avLst>
+          </a:prstGeom>
+          <a:solidFill>
+            <a:srgbClr val="F1F8F3"/>
+          </a:solidFill>
+          <a:ln w="9525">
+            <a:solidFill>
+              <a:srgbClr val="D2E7DA"/>
+            </a:solidFill>
+            <a:prstDash val="solid"/>
+          </a:ln>
+        </p:spPr>
+      </p:sp>
+      <p:sp>
+        <p:nvSpPr>
+          <p:cNvPr id="20" name="Text 17"/>
+          <p:cNvSpPr/>
+          <p:nvPr/>
+        </p:nvSpPr>
+        <p:spPr>
+          <a:xfrm>
+            <a:off x="8551469" y="941832"/>
+            <a:ext cx="1625803" cy="155448"/>
+          </a:xfrm>
+          <a:prstGeom prst="rect">
+            <a:avLst/>
+          </a:prstGeom>
+          <a:noFill/>
+          <a:ln/>
+        </p:spPr>
+        <p:txBody>
+          <a:bodyPr wrap="square" lIns="0" tIns="0" rIns="0" bIns="0" rtlCol="0" anchor="ctr"/>
+          <a:lstStyle/>
+          <a:p>
+            <a:pPr indent="0" marL="0">
+              <a:buNone/>
+            </a:pPr>
+            <a:r>
+              <a:rPr lang="en-US" sz="700" dirty="0">
+                <a:solidFill>
+                  <a:srgbClr val="7E8882"/>
+                </a:solidFill>
+                <a:latin typeface="Yu Gothic" pitchFamily="34" charset="0"/>
+                <a:ea typeface="Yu Gothic" pitchFamily="34" charset="-122"/>
+                <a:cs typeface="Yu Gothic" pitchFamily="34" charset="-120"/>
+              </a:rPr>
               <a:t>閉店後の工期</a:t>
             </a:r>
-            <a:endParaRPr lang="en-US" sz="750" dirty="0"/>
-          </a:p>
-        </p:txBody>
-      </p:sp>
-      <p:sp>
-        <p:nvSpPr>
-          <p:cNvPr id="18" name="Text 15"/>
-          <p:cNvSpPr/>
-          <p:nvPr/>
-        </p:nvSpPr>
-        <p:spPr>
-          <a:xfrm>
-            <a:off x="8094726" y="1097280"/>
-            <a:ext cx="2064258" cy="182880"/>
-          </a:xfrm>
-          <a:prstGeom prst="rect">
-            <a:avLst/>
-          </a:prstGeom>
-          <a:noFill/>
-          <a:ln/>
-        </p:spPr>
-        <p:txBody>
-          <a:bodyPr wrap="square" lIns="0" tIns="0" rIns="0" bIns="0" rtlCol="0" anchor="ctr"/>
-          <a:lstStyle/>
-          <a:p>
-            <a:pPr indent="0" marL="0">
-              <a:buNone/>
-            </a:pPr>
-            <a:r>
-              <a:rPr lang="en-US" sz="1100" b="1" dirty="0">
+            <a:endParaRPr lang="en-US" sz="700" dirty="0"/>
+          </a:p>
+        </p:txBody>
+      </p:sp>
+      <p:sp>
+        <p:nvSpPr>
+          <p:cNvPr id="21" name="Text 18"/>
+          <p:cNvSpPr/>
+          <p:nvPr/>
+        </p:nvSpPr>
+        <p:spPr>
+          <a:xfrm>
+            <a:off x="8551469" y="1088136"/>
+            <a:ext cx="1625803" cy="182880"/>
+          </a:xfrm>
+          <a:prstGeom prst="rect">
+            <a:avLst/>
+          </a:prstGeom>
+          <a:noFill/>
+          <a:ln/>
+        </p:spPr>
+        <p:txBody>
+          <a:bodyPr wrap="square" lIns="0" tIns="0" rIns="0" bIns="0" rtlCol="0" anchor="ctr"/>
+          <a:lstStyle/>
+          <a:p>
+            <a:pPr indent="0" marL="0">
+              <a:buNone/>
+            </a:pPr>
+            <a:r>
+              <a:rPr lang="en-US" sz="1050" b="1" dirty="0">
                 <a:solidFill>
                   <a:srgbClr val="106838"/>
                 </a:solidFill>
@@ -1452,7 +1557,7 @@
               </a:rPr>
               <a:t>約1か月</a:t>
             </a:r>
-            <a:endParaRPr lang="en-US" sz="1100" dirty="0"/>
+            <a:endParaRPr lang="en-US" sz="1050" dirty="0"/>
           </a:p>
         </p:txBody>
       </p:sp>
@@ -1471,7 +1576,7 @@
           </p:nvPr>
         </p:nvGraphicFramePr>
         <p:xfrm>
-          <a:off x="384048" y="1463040"/>
+          <a:off x="384048" y="1426464"/>
           <a:ext cx="9921240" cy="914400"/>
         </p:xfrm>
         <a:graphic>
@@ -1483,7 +1588,7 @@
                 <a:gridCol w="7077456"/>
                 <a:gridCol w="1472184"/>
               </a:tblGrid>
-              <a:tr h="237744">
+              <a:tr h="228600">
                 <a:tc>
                   <a:txBody>
                     <a:bodyPr/>
@@ -1689,7 +1794,7 @@
                   </a:tcPr>
                 </a:tc>
               </a:tr>
-              <a:tr h="237744">
+              <a:tr h="224028">
                 <a:tc>
                   <a:txBody>
                     <a:bodyPr/>
@@ -1775,7 +1880,7 @@
                           <a:ea typeface="Yu Gothic" pitchFamily="34" charset="-122"/>
                           <a:cs typeface="Yu Gothic" pitchFamily="34" charset="-120"/>
                         </a:rPr>
-                        <a:t>施工担当による現地内見（実測・電源・給排水・残置設備の確認）</a:t>
+                        <a:t>施工担当による現地内見（実測・電源・給排水・既存ネット回線・残置設備）</a:t>
                       </a:r>
                       <a:endParaRPr lang="en-US" sz="850" dirty="0">
                         <a:latin typeface="Yu Gothic" charset="0"/>
@@ -1895,7 +2000,7 @@
                   </a:tcPr>
                 </a:tc>
               </a:tr>
-              <a:tr h="237744">
+              <a:tr h="224028">
                 <a:tc>
                   <a:txBody>
                     <a:bodyPr/>
@@ -1981,7 +2086,7 @@
                           <a:ea typeface="Yu Gothic" pitchFamily="34" charset="-122"/>
                           <a:cs typeface="Yu Gothic" pitchFamily="34" charset="-120"/>
                         </a:rPr>
-                        <a:t>レイアウト図・什器リスト・お見積りのご提出（30坪）</a:t>
+                        <a:t>レイアウト図・什器リストのご提出／設置工事費のご案内（30〜50万円）</a:t>
                       </a:r>
                       <a:endParaRPr lang="en-US" sz="850" dirty="0">
                         <a:latin typeface="Yu Gothic" charset="0"/>
@@ -2101,7 +2206,7 @@
                   </a:tcPr>
                 </a:tc>
               </a:tr>
-              <a:tr h="237744">
+              <a:tr h="224028">
                 <a:tc>
                   <a:txBody>
                     <a:bodyPr/>
@@ -2307,7 +2412,7 @@
                   </a:tcPr>
                 </a:tc>
               </a:tr>
-              <a:tr h="237744">
+              <a:tr h="224028">
                 <a:tc>
                   <a:txBody>
                     <a:bodyPr/>
@@ -2393,7 +2498,7 @@
                           <a:ea typeface="Yu Gothic" pitchFamily="34" charset="-122"/>
                           <a:cs typeface="Yu Gothic" pitchFamily="34" charset="-120"/>
                         </a:rPr>
-                        <a:t>仕様の確定／業務委託契約の締結</a:t>
+                        <a:t>仕様の確定／業務委託契約の締結（カメラ映像の取扱いを含む）</a:t>
                       </a:r>
                       <a:endParaRPr lang="en-US" sz="850" dirty="0">
                         <a:latin typeface="Yu Gothic" charset="0"/>
@@ -2513,7 +2618,7 @@
                   </a:tcPr>
                 </a:tc>
               </a:tr>
-              <a:tr h="237744">
+              <a:tr h="224028">
                 <a:tc>
                   <a:txBody>
                     <a:bodyPr/>
@@ -2719,7 +2824,213 @@
                   </a:tcPr>
                 </a:tc>
               </a:tr>
-              <a:tr h="237744">
+              <a:tr h="224028">
+                <a:tc>
+                  <a:txBody>
+                    <a:bodyPr/>
+                    <a:lstStyle/>
+                    <a:p>
+                      <a:pPr algn="l" indent="0" marL="0">
+                        <a:buNone/>
+                      </a:pPr>
+                      <a:r>
+                        <a:rPr lang="en-US" sz="850" b="1" dirty="0">
+                          <a:solidFill>
+                            <a:srgbClr val="A8761F"/>
+                          </a:solidFill>
+                          <a:latin typeface="Yu Gothic" pitchFamily="34" charset="0"/>
+                          <a:ea typeface="Yu Gothic" pitchFamily="34" charset="-122"/>
+                          <a:cs typeface="Yu Gothic" pitchFamily="34" charset="-120"/>
+                        </a:rPr>
+                        <a:t>12月上旬</a:t>
+                      </a:r>
+                      <a:endParaRPr lang="en-US" sz="850" dirty="0">
+                        <a:latin typeface="Yu Gothic" charset="0"/>
+                        <a:ea typeface="Yu Gothic" charset="0"/>
+                        <a:cs typeface="Yu Gothic" charset="0"/>
+                      </a:endParaRPr>
+                    </a:p>
+                  </a:txBody>
+                  <a:tcPr marL="91440" marR="91440" marT="18288" marB="18288" anchor="ctr">
+                    <a:lnL w="9525" cap="flat" cmpd="sng" algn="ctr">
+                      <a:solidFill>
+                        <a:srgbClr val="EFEAE0"/>
+                      </a:solidFill>
+                      <a:prstDash val="solid"/>
+                      <a:round/>
+                      <a:headEnd type="none" w="med" len="med"/>
+                      <a:tailEnd type="none" w="med" len="med"/>
+                    </a:lnL>
+                    <a:lnR w="9525" cap="flat" cmpd="sng" algn="ctr">
+                      <a:solidFill>
+                        <a:srgbClr val="EFEAE0"/>
+                      </a:solidFill>
+                      <a:prstDash val="solid"/>
+                      <a:round/>
+                      <a:headEnd type="none" w="med" len="med"/>
+                      <a:tailEnd type="none" w="med" len="med"/>
+                    </a:lnR>
+                    <a:lnT w="9525" cap="flat" cmpd="sng" algn="ctr">
+                      <a:solidFill>
+                        <a:srgbClr val="EFEAE0"/>
+                      </a:solidFill>
+                      <a:prstDash val="solid"/>
+                      <a:round/>
+                      <a:headEnd type="none" w="med" len="med"/>
+                      <a:tailEnd type="none" w="med" len="med"/>
+                    </a:lnT>
+                    <a:lnB w="9525" cap="flat" cmpd="sng" algn="ctr">
+                      <a:solidFill>
+                        <a:srgbClr val="EFEAE0"/>
+                      </a:solidFill>
+                      <a:prstDash val="solid"/>
+                      <a:round/>
+                      <a:headEnd type="none" w="med" len="med"/>
+                      <a:tailEnd type="none" w="med" len="med"/>
+                    </a:lnB>
+                    <a:solidFill>
+                      <a:srgbClr val="FFFFFF"/>
+                    </a:solidFill>
+                  </a:tcPr>
+                </a:tc>
+                <a:tc>
+                  <a:txBody>
+                    <a:bodyPr/>
+                    <a:lstStyle/>
+                    <a:p>
+                      <a:pPr algn="l" indent="0" marL="0">
+                        <a:buNone/>
+                      </a:pPr>
+                      <a:r>
+                        <a:rPr lang="en-US" sz="850" b="1" dirty="0">
+                          <a:solidFill>
+                            <a:srgbClr val="0A3D23"/>
+                          </a:solidFill>
+                          <a:latin typeface="Yu Gothic" pitchFamily="34" charset="0"/>
+                          <a:ea typeface="Yu Gothic" pitchFamily="34" charset="-122"/>
+                          <a:cs typeface="Yu Gothic" pitchFamily="34" charset="-120"/>
+                        </a:rPr>
+                        <a:t>ネット回線の新規お申込み（開通まで1〜2か月）</a:t>
+                      </a:r>
+                      <a:endParaRPr lang="en-US" sz="850" dirty="0">
+                        <a:latin typeface="Yu Gothic" charset="0"/>
+                        <a:ea typeface="Yu Gothic" charset="0"/>
+                        <a:cs typeface="Yu Gothic" charset="0"/>
+                      </a:endParaRPr>
+                    </a:p>
+                  </a:txBody>
+                  <a:tcPr marL="91440" marR="91440" marT="18288" marB="18288" anchor="ctr">
+                    <a:lnL w="9525" cap="flat" cmpd="sng" algn="ctr">
+                      <a:solidFill>
+                        <a:srgbClr val="EFEAE0"/>
+                      </a:solidFill>
+                      <a:prstDash val="solid"/>
+                      <a:round/>
+                      <a:headEnd type="none" w="med" len="med"/>
+                      <a:tailEnd type="none" w="med" len="med"/>
+                    </a:lnL>
+                    <a:lnR w="9525" cap="flat" cmpd="sng" algn="ctr">
+                      <a:solidFill>
+                        <a:srgbClr val="EFEAE0"/>
+                      </a:solidFill>
+                      <a:prstDash val="solid"/>
+                      <a:round/>
+                      <a:headEnd type="none" w="med" len="med"/>
+                      <a:tailEnd type="none" w="med" len="med"/>
+                    </a:lnR>
+                    <a:lnT w="9525" cap="flat" cmpd="sng" algn="ctr">
+                      <a:solidFill>
+                        <a:srgbClr val="EFEAE0"/>
+                      </a:solidFill>
+                      <a:prstDash val="solid"/>
+                      <a:round/>
+                      <a:headEnd type="none" w="med" len="med"/>
+                      <a:tailEnd type="none" w="med" len="med"/>
+                    </a:lnT>
+                    <a:lnB w="9525" cap="flat" cmpd="sng" algn="ctr">
+                      <a:solidFill>
+                        <a:srgbClr val="EFEAE0"/>
+                      </a:solidFill>
+                      <a:prstDash val="solid"/>
+                      <a:round/>
+                      <a:headEnd type="none" w="med" len="med"/>
+                      <a:tailEnd type="none" w="med" len="med"/>
+                    </a:lnB>
+                    <a:solidFill>
+                      <a:srgbClr val="FBF4E4"/>
+                    </a:solidFill>
+                  </a:tcPr>
+                </a:tc>
+                <a:tc>
+                  <a:txBody>
+                    <a:bodyPr/>
+                    <a:lstStyle/>
+                    <a:p>
+                      <a:pPr algn="ctr" indent="0" marL="0">
+                        <a:buNone/>
+                      </a:pPr>
+                      <a:r>
+                        <a:rPr lang="en-US" sz="800" b="1" dirty="0">
+                          <a:solidFill>
+                            <a:srgbClr val="A8761F"/>
+                          </a:solidFill>
+                          <a:latin typeface="Yu Gothic" pitchFamily="34" charset="0"/>
+                          <a:ea typeface="Yu Gothic" pitchFamily="34" charset="-122"/>
+                          <a:cs typeface="Yu Gothic" pitchFamily="34" charset="-120"/>
+                        </a:rPr>
+                        <a:t>未来屋書店様</a:t>
+                      </a:r>
+                      <a:endParaRPr lang="en-US" sz="800" dirty="0">
+                        <a:latin typeface="Yu Gothic" charset="0"/>
+                        <a:ea typeface="Yu Gothic" charset="0"/>
+                        <a:cs typeface="Yu Gothic" charset="0"/>
+                      </a:endParaRPr>
+                    </a:p>
+                  </a:txBody>
+                  <a:tcPr marL="91440" marR="91440" marT="18288" marB="18288" anchor="ctr">
+                    <a:lnL w="9525" cap="flat" cmpd="sng" algn="ctr">
+                      <a:solidFill>
+                        <a:srgbClr val="EFEAE0"/>
+                      </a:solidFill>
+                      <a:prstDash val="solid"/>
+                      <a:round/>
+                      <a:headEnd type="none" w="med" len="med"/>
+                      <a:tailEnd type="none" w="med" len="med"/>
+                    </a:lnL>
+                    <a:lnR w="9525" cap="flat" cmpd="sng" algn="ctr">
+                      <a:solidFill>
+                        <a:srgbClr val="EFEAE0"/>
+                      </a:solidFill>
+                      <a:prstDash val="solid"/>
+                      <a:round/>
+                      <a:headEnd type="none" w="med" len="med"/>
+                      <a:tailEnd type="none" w="med" len="med"/>
+                    </a:lnR>
+                    <a:lnT w="9525" cap="flat" cmpd="sng" algn="ctr">
+                      <a:solidFill>
+                        <a:srgbClr val="EFEAE0"/>
+                      </a:solidFill>
+                      <a:prstDash val="solid"/>
+                      <a:round/>
+                      <a:headEnd type="none" w="med" len="med"/>
+                      <a:tailEnd type="none" w="med" len="med"/>
+                    </a:lnT>
+                    <a:lnB w="9525" cap="flat" cmpd="sng" algn="ctr">
+                      <a:solidFill>
+                        <a:srgbClr val="EFEAE0"/>
+                      </a:solidFill>
+                      <a:prstDash val="solid"/>
+                      <a:round/>
+                      <a:headEnd type="none" w="med" len="med"/>
+                      <a:tailEnd type="none" w="med" len="med"/>
+                    </a:lnB>
+                    <a:solidFill>
+                      <a:srgbClr val="FBF4E4"/>
+                    </a:solidFill>
+                  </a:tcPr>
+                </a:tc>
+              </a:tr>
+              <a:tr h="224028">
                 <a:tc>
                   <a:txBody>
                     <a:bodyPr/>
@@ -2925,7 +3236,7 @@
                   </a:tcPr>
                 </a:tc>
               </a:tr>
-              <a:tr h="237744">
+              <a:tr h="224028">
                 <a:tc>
                   <a:txBody>
                     <a:bodyPr/>
@@ -3131,7 +3442,7 @@
                   </a:tcPr>
                 </a:tc>
               </a:tr>
-              <a:tr h="237744">
+              <a:tr h="224028">
                 <a:tc>
                   <a:txBody>
                     <a:bodyPr/>
@@ -3217,7 +3528,7 @@
                           <a:ea typeface="Yu Gothic" pitchFamily="34" charset="-122"/>
                           <a:cs typeface="Yu Gothic" pitchFamily="34" charset="-120"/>
                         </a:rPr>
-                        <a:t>内装工事 → 機器設置・試運転 → 什器搬入</a:t>
+                        <a:t>内装工事 → 機器設置・試運転 → 什器搬入／回線開通の確認</a:t>
                       </a:r>
                       <a:endParaRPr lang="en-US" sz="850" dirty="0">
                         <a:latin typeface="Yu Gothic" charset="0"/>
@@ -3337,7 +3648,7 @@
                   </a:tcPr>
                 </a:tc>
               </a:tr>
-              <a:tr h="237744">
+              <a:tr h="224028">
                 <a:tc>
                   <a:txBody>
                     <a:bodyPr/>
@@ -3543,7 +3854,7 @@
                   </a:tcPr>
                 </a:tc>
               </a:tr>
-              <a:tr h="274320">
+              <a:tr h="265176">
                 <a:tc>
                   <a:txBody>
                     <a:bodyPr/>
@@ -3755,18 +4066,18 @@
       </p:graphicFrame>
       <p:sp>
         <p:nvSpPr>
-          <p:cNvPr id="20" name="Shape 16"/>
-          <p:cNvSpPr/>
-          <p:nvPr/>
-        </p:nvSpPr>
-        <p:spPr>
-          <a:xfrm>
-            <a:off x="384048" y="4224528"/>
-            <a:ext cx="9921240" cy="566928"/>
+          <p:cNvPr id="23" name="Shape 19"/>
+          <p:cNvSpPr/>
+          <p:nvPr/>
+        </p:nvSpPr>
+        <p:spPr>
+          <a:xfrm>
+            <a:off x="384048" y="4261104"/>
+            <a:ext cx="9921240" cy="640080"/>
           </a:xfrm>
           <a:prstGeom prst="roundRect">
             <a:avLst>
-              <a:gd name="adj" fmla="val 8065"/>
+              <a:gd name="adj" fmla="val 7143"/>
             </a:avLst>
           </a:prstGeom>
           <a:solidFill>
@@ -3777,14 +4088,14 @@
       </p:sp>
       <p:sp>
         <p:nvSpPr>
-          <p:cNvPr id="21" name="Text 17"/>
-          <p:cNvSpPr/>
-          <p:nvPr/>
-        </p:nvSpPr>
-        <p:spPr>
-          <a:xfrm>
-            <a:off x="621792" y="4224528"/>
-            <a:ext cx="9445752" cy="566928"/>
+          <p:cNvPr id="24" name="Text 20"/>
+          <p:cNvSpPr/>
+          <p:nvPr/>
+        </p:nvSpPr>
+        <p:spPr>
+          <a:xfrm>
+            <a:off x="621792" y="4261104"/>
+            <a:ext cx="9445752" cy="640080"/>
           </a:xfrm>
           <a:prstGeom prst="rect">
             <a:avLst/>
@@ -3803,7 +4114,7 @@
               <a:buNone/>
             </a:pPr>
             <a:r>
-              <a:rPr lang="en-US" sz="1000" b="1" dirty="0">
+              <a:rPr lang="en-US" sz="950" b="1" dirty="0">
                 <a:solidFill>
                   <a:srgbClr val="FFFFFF"/>
                 </a:solidFill>
@@ -3811,9 +4122,9 @@
                 <a:ea typeface="Yu Gothic" pitchFamily="34" charset="-122"/>
                 <a:cs typeface="Yu Gothic" pitchFamily="34" charset="-120"/>
               </a:rPr>
-              <a:t>工期約1か月は、造作・床・給排水・電気が残置される前提です。</a:t>
-            </a:r>
-            <a:endParaRPr lang="en-US" sz="1000" dirty="0"/>
+              <a:t>工期約1か月は造作・床・給排水・電気が残置される前提です。ネット回線は12月中のお申込みが必要です。</a:t>
+            </a:r>
+            <a:endParaRPr lang="en-US" sz="950" dirty="0"/>
           </a:p>
           <a:p>
             <a:pPr indent="0" marL="0">
@@ -3831,26 +4142,26 @@
                 <a:ea typeface="Yu Gothic" pitchFamily="34" charset="-122"/>
                 <a:cs typeface="Yu Gothic" pitchFamily="34" charset="-120"/>
               </a:rPr>
-              <a:t>スケルトン戻しとなる場合は工期が延び、2月末オープンが厳しくなります。また1/31閉店→2/28オープンは正味28日のためバッファがありません。閉店を1月中旬〜下旬に前倒しできると安全です。</a:t>
-            </a:r>
-            <a:endParaRPr lang="en-US" sz="1000" dirty="0"/>
-          </a:p>
-        </p:txBody>
-      </p:sp>
-      <p:sp>
-        <p:nvSpPr>
-          <p:cNvPr id="22" name="Shape 18"/>
-          <p:cNvSpPr/>
-          <p:nvPr/>
-        </p:nvSpPr>
-        <p:spPr>
-          <a:xfrm>
-            <a:off x="384048" y="4956048"/>
-            <a:ext cx="3703320" cy="2249424"/>
+              <a:t>スケルトン戻しとなる場合は工期が延び、2月末オープンが厳しくなります。回線は申込から開通まで1〜2か月かかります。また1/31閉店→2/28オープンは正味28日のためバッファがありません。閉店を1月中旬〜下旬に前倒しできると安全です。</a:t>
+            </a:r>
+            <a:endParaRPr lang="en-US" sz="950" dirty="0"/>
+          </a:p>
+        </p:txBody>
+      </p:sp>
+      <p:sp>
+        <p:nvSpPr>
+          <p:cNvPr id="25" name="Shape 21"/>
+          <p:cNvSpPr/>
+          <p:nvPr/>
+        </p:nvSpPr>
+        <p:spPr>
+          <a:xfrm>
+            <a:off x="384048" y="4992624"/>
+            <a:ext cx="3703320" cy="2212848"/>
           </a:xfrm>
           <a:prstGeom prst="roundRect">
             <a:avLst>
-              <a:gd name="adj" fmla="val 2439"/>
+              <a:gd name="adj" fmla="val 2479"/>
             </a:avLst>
           </a:prstGeom>
           <a:solidFill>
@@ -3866,13 +4177,13 @@
       </p:sp>
       <p:sp>
         <p:nvSpPr>
-          <p:cNvPr id="23" name="Text 19"/>
-          <p:cNvSpPr/>
-          <p:nvPr/>
-        </p:nvSpPr>
-        <p:spPr>
-          <a:xfrm>
-            <a:off x="585216" y="5084064"/>
+          <p:cNvPr id="26" name="Text 22"/>
+          <p:cNvSpPr/>
+          <p:nvPr/>
+        </p:nvSpPr>
+        <p:spPr>
+          <a:xfrm>
+            <a:off x="585216" y="5102352"/>
             <a:ext cx="3300984" cy="219456"/>
           </a:xfrm>
           <a:prstGeom prst="rect">
@@ -3905,7 +4216,7 @@
       </p:sp>
       <p:sp>
         <p:nvSpPr>
-          <p:cNvPr id="24" name="Shape 20"/>
+          <p:cNvPr id="27" name="Shape 23"/>
           <p:cNvSpPr/>
           <p:nvPr/>
         </p:nvSpPr>
@@ -3925,14 +4236,14 @@
       </p:sp>
       <p:sp>
         <p:nvSpPr>
-          <p:cNvPr id="25" name="Text 21"/>
-          <p:cNvSpPr/>
-          <p:nvPr/>
-        </p:nvSpPr>
-        <p:spPr>
-          <a:xfrm>
-            <a:off x="603504" y="5431536"/>
-            <a:ext cx="146304" cy="182880"/>
+          <p:cNvPr id="28" name="Text 24"/>
+          <p:cNvSpPr/>
+          <p:nvPr/>
+        </p:nvSpPr>
+        <p:spPr>
+          <a:xfrm>
+            <a:off x="603504" y="5449824"/>
+            <a:ext cx="146304" cy="173736"/>
           </a:xfrm>
           <a:prstGeom prst="rect">
             <a:avLst/>
@@ -3964,14 +4275,14 @@
       </p:sp>
       <p:sp>
         <p:nvSpPr>
-          <p:cNvPr id="26" name="Text 22"/>
-          <p:cNvSpPr/>
-          <p:nvPr/>
-        </p:nvSpPr>
-        <p:spPr>
-          <a:xfrm>
-            <a:off x="768096" y="5431536"/>
-            <a:ext cx="3118104" cy="182880"/>
+          <p:cNvPr id="29" name="Text 25"/>
+          <p:cNvSpPr/>
+          <p:nvPr/>
+        </p:nvSpPr>
+        <p:spPr>
+          <a:xfrm>
+            <a:off x="768096" y="5449824"/>
+            <a:ext cx="3118104" cy="173736"/>
           </a:xfrm>
           <a:prstGeom prst="rect">
             <a:avLst/>
@@ -4003,14 +4314,14 @@
       </p:sp>
       <p:sp>
         <p:nvSpPr>
-          <p:cNvPr id="27" name="Text 23"/>
-          <p:cNvSpPr/>
-          <p:nvPr/>
-        </p:nvSpPr>
-        <p:spPr>
-          <a:xfrm>
-            <a:off x="603504" y="5618988"/>
-            <a:ext cx="146304" cy="182880"/>
+          <p:cNvPr id="30" name="Text 26"/>
+          <p:cNvSpPr/>
+          <p:nvPr/>
+        </p:nvSpPr>
+        <p:spPr>
+          <a:xfrm>
+            <a:off x="603504" y="5623560"/>
+            <a:ext cx="146304" cy="173736"/>
           </a:xfrm>
           <a:prstGeom prst="rect">
             <a:avLst/>
@@ -4042,14 +4353,14 @@
       </p:sp>
       <p:sp>
         <p:nvSpPr>
-          <p:cNvPr id="28" name="Text 24"/>
-          <p:cNvSpPr/>
-          <p:nvPr/>
-        </p:nvSpPr>
-        <p:spPr>
-          <a:xfrm>
-            <a:off x="768096" y="5618988"/>
-            <a:ext cx="3118104" cy="182880"/>
+          <p:cNvPr id="31" name="Text 27"/>
+          <p:cNvSpPr/>
+          <p:nvPr/>
+        </p:nvSpPr>
+        <p:spPr>
+          <a:xfrm>
+            <a:off x="768096" y="5623560"/>
+            <a:ext cx="3118104" cy="173736"/>
           </a:xfrm>
           <a:prstGeom prst="rect">
             <a:avLst/>
@@ -4081,14 +4392,14 @@
       </p:sp>
       <p:sp>
         <p:nvSpPr>
-          <p:cNvPr id="29" name="Text 25"/>
-          <p:cNvSpPr/>
-          <p:nvPr/>
-        </p:nvSpPr>
-        <p:spPr>
-          <a:xfrm>
-            <a:off x="603504" y="5806440"/>
-            <a:ext cx="146304" cy="182880"/>
+          <p:cNvPr id="32" name="Text 28"/>
+          <p:cNvSpPr/>
+          <p:nvPr/>
+        </p:nvSpPr>
+        <p:spPr>
+          <a:xfrm>
+            <a:off x="603504" y="5797296"/>
+            <a:ext cx="146304" cy="173736"/>
           </a:xfrm>
           <a:prstGeom prst="rect">
             <a:avLst/>
@@ -4120,14 +4431,14 @@
       </p:sp>
       <p:sp>
         <p:nvSpPr>
-          <p:cNvPr id="30" name="Text 26"/>
-          <p:cNvSpPr/>
-          <p:nvPr/>
-        </p:nvSpPr>
-        <p:spPr>
-          <a:xfrm>
-            <a:off x="768096" y="5806440"/>
-            <a:ext cx="3118104" cy="182880"/>
+          <p:cNvPr id="33" name="Text 29"/>
+          <p:cNvSpPr/>
+          <p:nvPr/>
+        </p:nvSpPr>
+        <p:spPr>
+          <a:xfrm>
+            <a:off x="768096" y="5797296"/>
+            <a:ext cx="3118104" cy="173736"/>
           </a:xfrm>
           <a:prstGeom prst="rect">
             <a:avLst/>
@@ -4151,7 +4462,7 @@
                 <a:ea typeface="Yu Gothic" pitchFamily="34" charset="-122"/>
                 <a:cs typeface="Yu Gothic" pitchFamily="34" charset="-120"/>
               </a:rPr>
-              <a:t>工事費・初期費用のお見積り提出</a:t>
+              <a:t>設置工事費のご案内（30〜50万円）</a:t>
             </a:r>
             <a:endParaRPr lang="en-US" sz="850" dirty="0"/>
           </a:p>
@@ -4159,14 +4470,14 @@
       </p:sp>
       <p:sp>
         <p:nvSpPr>
-          <p:cNvPr id="31" name="Text 27"/>
-          <p:cNvSpPr/>
-          <p:nvPr/>
-        </p:nvSpPr>
-        <p:spPr>
-          <a:xfrm>
-            <a:off x="603504" y="5993892"/>
-            <a:ext cx="146304" cy="182880"/>
+          <p:cNvPr id="34" name="Text 30"/>
+          <p:cNvSpPr/>
+          <p:nvPr/>
+        </p:nvSpPr>
+        <p:spPr>
+          <a:xfrm>
+            <a:off x="603504" y="5971032"/>
+            <a:ext cx="146304" cy="173736"/>
           </a:xfrm>
           <a:prstGeom prst="rect">
             <a:avLst/>
@@ -4198,14 +4509,14 @@
       </p:sp>
       <p:sp>
         <p:nvSpPr>
-          <p:cNvPr id="32" name="Text 28"/>
-          <p:cNvSpPr/>
-          <p:nvPr/>
-        </p:nvSpPr>
-        <p:spPr>
-          <a:xfrm>
-            <a:off x="768096" y="5993892"/>
-            <a:ext cx="3118104" cy="182880"/>
+          <p:cNvPr id="35" name="Text 31"/>
+          <p:cNvSpPr/>
+          <p:nvPr/>
+        </p:nvSpPr>
+        <p:spPr>
+          <a:xfrm>
+            <a:off x="768096" y="5971032"/>
+            <a:ext cx="3118104" cy="173736"/>
           </a:xfrm>
           <a:prstGeom prst="rect">
             <a:avLst/>
@@ -4237,14 +4548,14 @@
       </p:sp>
       <p:sp>
         <p:nvSpPr>
-          <p:cNvPr id="33" name="Text 29"/>
-          <p:cNvSpPr/>
-          <p:nvPr/>
-        </p:nvSpPr>
-        <p:spPr>
-          <a:xfrm>
-            <a:off x="603504" y="6181344"/>
-            <a:ext cx="146304" cy="182880"/>
+          <p:cNvPr id="36" name="Text 32"/>
+          <p:cNvSpPr/>
+          <p:nvPr/>
+        </p:nvSpPr>
+        <p:spPr>
+          <a:xfrm>
+            <a:off x="603504" y="6144768"/>
+            <a:ext cx="146304" cy="173736"/>
           </a:xfrm>
           <a:prstGeom prst="rect">
             <a:avLst/>
@@ -4276,14 +4587,14 @@
       </p:sp>
       <p:sp>
         <p:nvSpPr>
-          <p:cNvPr id="34" name="Text 30"/>
-          <p:cNvSpPr/>
-          <p:nvPr/>
-        </p:nvSpPr>
-        <p:spPr>
-          <a:xfrm>
-            <a:off x="768096" y="6181344"/>
-            <a:ext cx="3118104" cy="182880"/>
+          <p:cNvPr id="37" name="Text 33"/>
+          <p:cNvSpPr/>
+          <p:nvPr/>
+        </p:nvSpPr>
+        <p:spPr>
+          <a:xfrm>
+            <a:off x="768096" y="6144768"/>
+            <a:ext cx="3118104" cy="173736"/>
           </a:xfrm>
           <a:prstGeom prst="rect">
             <a:avLst/>
@@ -4307,6 +4618,84 @@
                 <a:ea typeface="Yu Gothic" pitchFamily="34" charset="-122"/>
                 <a:cs typeface="Yu Gothic" pitchFamily="34" charset="-120"/>
               </a:rPr>
+              <a:t>カメラ映像の取扱いに関する取り決めのご提示</a:t>
+            </a:r>
+            <a:endParaRPr lang="en-US" sz="850" dirty="0"/>
+          </a:p>
+        </p:txBody>
+      </p:sp>
+      <p:sp>
+        <p:nvSpPr>
+          <p:cNvPr id="38" name="Text 34"/>
+          <p:cNvSpPr/>
+          <p:nvPr/>
+        </p:nvSpPr>
+        <p:spPr>
+          <a:xfrm>
+            <a:off x="603504" y="6318504"/>
+            <a:ext cx="146304" cy="173736"/>
+          </a:xfrm>
+          <a:prstGeom prst="rect">
+            <a:avLst/>
+          </a:prstGeom>
+          <a:noFill/>
+          <a:ln/>
+        </p:spPr>
+        <p:txBody>
+          <a:bodyPr wrap="square" lIns="0" tIns="0" rIns="0" bIns="0" rtlCol="0" anchor="ctr"/>
+          <a:lstStyle/>
+          <a:p>
+            <a:pPr indent="0" marL="0">
+              <a:buNone/>
+            </a:pPr>
+            <a:r>
+              <a:rPr lang="en-US" sz="850" dirty="0">
+                <a:solidFill>
+                  <a:srgbClr val="106838"/>
+                </a:solidFill>
+                <a:latin typeface="Yu Gothic" pitchFamily="34" charset="0"/>
+                <a:ea typeface="Yu Gothic" pitchFamily="34" charset="-122"/>
+                <a:cs typeface="Yu Gothic" pitchFamily="34" charset="-120"/>
+              </a:rPr>
+              <a:t>・</a:t>
+            </a:r>
+            <a:endParaRPr lang="en-US" sz="850" dirty="0"/>
+          </a:p>
+        </p:txBody>
+      </p:sp>
+      <p:sp>
+        <p:nvSpPr>
+          <p:cNvPr id="39" name="Text 35"/>
+          <p:cNvSpPr/>
+          <p:nvPr/>
+        </p:nvSpPr>
+        <p:spPr>
+          <a:xfrm>
+            <a:off x="768096" y="6318504"/>
+            <a:ext cx="3118104" cy="173736"/>
+          </a:xfrm>
+          <a:prstGeom prst="rect">
+            <a:avLst/>
+          </a:prstGeom>
+          <a:noFill/>
+          <a:ln/>
+        </p:spPr>
+        <p:txBody>
+          <a:bodyPr wrap="square" lIns="0" tIns="0" rIns="0" bIns="0" rtlCol="0" anchor="ctr"/>
+          <a:lstStyle/>
+          <a:p>
+            <a:pPr indent="0" marL="0">
+              <a:buNone/>
+            </a:pPr>
+            <a:r>
+              <a:rPr lang="en-US" sz="850" dirty="0">
+                <a:solidFill>
+                  <a:srgbClr val="0A3D23"/>
+                </a:solidFill>
+                <a:latin typeface="Yu Gothic" pitchFamily="34" charset="0"/>
+                <a:ea typeface="Yu Gothic" pitchFamily="34" charset="-122"/>
+                <a:cs typeface="Yu Gothic" pitchFamily="34" charset="-120"/>
+              </a:rPr>
               <a:t>館への工事申請用 図面・仕様書の作成</a:t>
             </a:r>
             <a:endParaRPr lang="en-US" sz="850" dirty="0"/>
@@ -4315,14 +4704,14 @@
       </p:sp>
       <p:sp>
         <p:nvSpPr>
-          <p:cNvPr id="35" name="Text 31"/>
-          <p:cNvSpPr/>
-          <p:nvPr/>
-        </p:nvSpPr>
-        <p:spPr>
-          <a:xfrm>
-            <a:off x="603504" y="6368796"/>
-            <a:ext cx="146304" cy="182880"/>
+          <p:cNvPr id="40" name="Text 36"/>
+          <p:cNvSpPr/>
+          <p:nvPr/>
+        </p:nvSpPr>
+        <p:spPr>
+          <a:xfrm>
+            <a:off x="603504" y="6492240"/>
+            <a:ext cx="146304" cy="173736"/>
           </a:xfrm>
           <a:prstGeom prst="rect">
             <a:avLst/>
@@ -4354,14 +4743,14 @@
       </p:sp>
       <p:sp>
         <p:nvSpPr>
-          <p:cNvPr id="36" name="Text 32"/>
-          <p:cNvSpPr/>
-          <p:nvPr/>
-        </p:nvSpPr>
-        <p:spPr>
-          <a:xfrm>
-            <a:off x="768096" y="6368796"/>
-            <a:ext cx="3118104" cy="182880"/>
+          <p:cNvPr id="41" name="Text 37"/>
+          <p:cNvSpPr/>
+          <p:nvPr/>
+        </p:nvSpPr>
+        <p:spPr>
+          <a:xfrm>
+            <a:off x="768096" y="6492240"/>
+            <a:ext cx="3118104" cy="173736"/>
           </a:xfrm>
           <a:prstGeom prst="rect">
             <a:avLst/>
@@ -4393,14 +4782,14 @@
       </p:sp>
       <p:sp>
         <p:nvSpPr>
-          <p:cNvPr id="37" name="Text 33"/>
-          <p:cNvSpPr/>
-          <p:nvPr/>
-        </p:nvSpPr>
-        <p:spPr>
-          <a:xfrm>
-            <a:off x="603504" y="6556248"/>
-            <a:ext cx="146304" cy="182880"/>
+          <p:cNvPr id="42" name="Text 38"/>
+          <p:cNvSpPr/>
+          <p:nvPr/>
+        </p:nvSpPr>
+        <p:spPr>
+          <a:xfrm>
+            <a:off x="603504" y="6665976"/>
+            <a:ext cx="146304" cy="173736"/>
           </a:xfrm>
           <a:prstGeom prst="rect">
             <a:avLst/>
@@ -4432,14 +4821,14 @@
       </p:sp>
       <p:sp>
         <p:nvSpPr>
-          <p:cNvPr id="38" name="Text 34"/>
-          <p:cNvSpPr/>
-          <p:nvPr/>
-        </p:nvSpPr>
-        <p:spPr>
-          <a:xfrm>
-            <a:off x="768096" y="6556248"/>
-            <a:ext cx="3118104" cy="182880"/>
+          <p:cNvPr id="43" name="Text 39"/>
+          <p:cNvSpPr/>
+          <p:nvPr/>
+        </p:nvSpPr>
+        <p:spPr>
+          <a:xfrm>
+            <a:off x="768096" y="6665976"/>
+            <a:ext cx="3118104" cy="173736"/>
           </a:xfrm>
           <a:prstGeom prst="rect">
             <a:avLst/>
@@ -4471,14 +4860,14 @@
       </p:sp>
       <p:sp>
         <p:nvSpPr>
-          <p:cNvPr id="39" name="Text 35"/>
-          <p:cNvSpPr/>
-          <p:nvPr/>
-        </p:nvSpPr>
-        <p:spPr>
-          <a:xfrm>
-            <a:off x="603504" y="6743700"/>
-            <a:ext cx="146304" cy="182880"/>
+          <p:cNvPr id="44" name="Text 40"/>
+          <p:cNvSpPr/>
+          <p:nvPr/>
+        </p:nvSpPr>
+        <p:spPr>
+          <a:xfrm>
+            <a:off x="603504" y="6839712"/>
+            <a:ext cx="146304" cy="173736"/>
           </a:xfrm>
           <a:prstGeom prst="rect">
             <a:avLst/>
@@ -4510,14 +4899,14 @@
       </p:sp>
       <p:sp>
         <p:nvSpPr>
-          <p:cNvPr id="40" name="Text 36"/>
-          <p:cNvSpPr/>
-          <p:nvPr/>
-        </p:nvSpPr>
-        <p:spPr>
-          <a:xfrm>
-            <a:off x="768096" y="6743700"/>
-            <a:ext cx="3118104" cy="182880"/>
+          <p:cNvPr id="45" name="Text 41"/>
+          <p:cNvSpPr/>
+          <p:nvPr/>
+        </p:nvSpPr>
+        <p:spPr>
+          <a:xfrm>
+            <a:off x="768096" y="6839712"/>
+            <a:ext cx="3118104" cy="173736"/>
           </a:xfrm>
           <a:prstGeom prst="rect">
             <a:avLst/>
@@ -4549,14 +4938,14 @@
       </p:sp>
       <p:sp>
         <p:nvSpPr>
-          <p:cNvPr id="41" name="Text 37"/>
-          <p:cNvSpPr/>
-          <p:nvPr/>
-        </p:nvSpPr>
-        <p:spPr>
-          <a:xfrm>
-            <a:off x="603504" y="6931152"/>
-            <a:ext cx="146304" cy="182880"/>
+          <p:cNvPr id="46" name="Text 42"/>
+          <p:cNvSpPr/>
+          <p:nvPr/>
+        </p:nvSpPr>
+        <p:spPr>
+          <a:xfrm>
+            <a:off x="603504" y="7013448"/>
+            <a:ext cx="146304" cy="173736"/>
           </a:xfrm>
           <a:prstGeom prst="rect">
             <a:avLst/>
@@ -4588,14 +4977,14 @@
       </p:sp>
       <p:sp>
         <p:nvSpPr>
-          <p:cNvPr id="42" name="Text 38"/>
-          <p:cNvSpPr/>
-          <p:nvPr/>
-        </p:nvSpPr>
-        <p:spPr>
-          <a:xfrm>
-            <a:off x="768096" y="6931152"/>
-            <a:ext cx="3118104" cy="182880"/>
+          <p:cNvPr id="47" name="Text 43"/>
+          <p:cNvSpPr/>
+          <p:nvPr/>
+        </p:nvSpPr>
+        <p:spPr>
+          <a:xfrm>
+            <a:off x="768096" y="7013448"/>
+            <a:ext cx="3118104" cy="173736"/>
           </a:xfrm>
           <a:prstGeom prst="rect">
             <a:avLst/>
@@ -4627,18 +5016,18 @@
       </p:sp>
       <p:sp>
         <p:nvSpPr>
-          <p:cNvPr id="43" name="Shape 39"/>
-          <p:cNvSpPr/>
-          <p:nvPr/>
-        </p:nvSpPr>
-        <p:spPr>
-          <a:xfrm>
-            <a:off x="4306824" y="4956048"/>
-            <a:ext cx="5998464" cy="2249424"/>
+          <p:cNvPr id="48" name="Shape 44"/>
+          <p:cNvSpPr/>
+          <p:nvPr/>
+        </p:nvSpPr>
+        <p:spPr>
+          <a:xfrm>
+            <a:off x="4306824" y="4992624"/>
+            <a:ext cx="5998464" cy="2212848"/>
           </a:xfrm>
           <a:prstGeom prst="roundRect">
             <a:avLst>
-              <a:gd name="adj" fmla="val 2439"/>
+              <a:gd name="adj" fmla="val 2479"/>
             </a:avLst>
           </a:prstGeom>
           <a:solidFill>
@@ -4654,13 +5043,13 @@
       </p:sp>
       <p:sp>
         <p:nvSpPr>
-          <p:cNvPr id="44" name="Text 40"/>
-          <p:cNvSpPr/>
-          <p:nvPr/>
-        </p:nvSpPr>
-        <p:spPr>
-          <a:xfrm>
-            <a:off x="4507992" y="5084064"/>
+          <p:cNvPr id="49" name="Text 45"/>
+          <p:cNvSpPr/>
+          <p:nvPr/>
+        </p:nvSpPr>
+        <p:spPr>
+          <a:xfrm>
+            <a:off x="4507992" y="5102352"/>
             <a:ext cx="5596128" cy="219456"/>
           </a:xfrm>
           <a:prstGeom prst="rect">
@@ -4693,7 +5082,7 @@
       </p:sp>
       <p:sp>
         <p:nvSpPr>
-          <p:cNvPr id="45" name="Shape 41"/>
+          <p:cNvPr id="50" name="Shape 46"/>
           <p:cNvSpPr/>
           <p:nvPr/>
         </p:nvSpPr>
@@ -4713,14 +5102,92 @@
       </p:sp>
       <p:sp>
         <p:nvSpPr>
-          <p:cNvPr id="46" name="Text 42"/>
-          <p:cNvSpPr/>
-          <p:nvPr/>
-        </p:nvSpPr>
-        <p:spPr>
-          <a:xfrm>
-            <a:off x="4507992" y="5413248"/>
-            <a:ext cx="2660904" cy="182880"/>
+          <p:cNvPr id="51" name="Text 47"/>
+          <p:cNvSpPr/>
+          <p:nvPr/>
+        </p:nvSpPr>
+        <p:spPr>
+          <a:xfrm>
+            <a:off x="4507992" y="5394960"/>
+            <a:ext cx="2660904" cy="164592"/>
+          </a:xfrm>
+          <a:prstGeom prst="rect">
+            <a:avLst/>
+          </a:prstGeom>
+          <a:noFill/>
+          <a:ln/>
+        </p:spPr>
+        <p:txBody>
+          <a:bodyPr wrap="square" lIns="0" tIns="0" rIns="0" bIns="0" rtlCol="0" anchor="ctr"/>
+          <a:lstStyle/>
+          <a:p>
+            <a:pPr indent="0" marL="0">
+              <a:buNone/>
+            </a:pPr>
+            <a:r>
+              <a:rPr lang="en-US" sz="800" b="1" dirty="0">
+                <a:solidFill>
+                  <a:srgbClr val="7E8882"/>
+                </a:solidFill>
+                <a:latin typeface="Yu Gothic" pitchFamily="34" charset="0"/>
+                <a:ea typeface="Yu Gothic" pitchFamily="34" charset="-122"/>
+                <a:cs typeface="Yu Gothic" pitchFamily="34" charset="-120"/>
+              </a:rPr>
+              <a:t>ご確認事項（★＝工期・コストに直結）</a:t>
+            </a:r>
+            <a:endParaRPr lang="en-US" sz="800" dirty="0"/>
+          </a:p>
+        </p:txBody>
+      </p:sp>
+      <p:sp>
+        <p:nvSpPr>
+          <p:cNvPr id="52" name="Text 48"/>
+          <p:cNvSpPr/>
+          <p:nvPr/>
+        </p:nvSpPr>
+        <p:spPr>
+          <a:xfrm>
+            <a:off x="4526280" y="5577840"/>
+            <a:ext cx="164592" cy="178308"/>
+          </a:xfrm>
+          <a:prstGeom prst="rect">
+            <a:avLst/>
+          </a:prstGeom>
+          <a:noFill/>
+          <a:ln/>
+        </p:spPr>
+        <p:txBody>
+          <a:bodyPr wrap="square" lIns="0" tIns="0" rIns="0" bIns="0" rtlCol="0" anchor="ctr"/>
+          <a:lstStyle/>
+          <a:p>
+            <a:pPr indent="0" marL="0">
+              <a:buNone/>
+            </a:pPr>
+            <a:r>
+              <a:rPr lang="en-US" sz="750" b="1" dirty="0">
+                <a:solidFill>
+                  <a:srgbClr val="A8761F"/>
+                </a:solidFill>
+                <a:latin typeface="Yu Gothic" pitchFamily="34" charset="0"/>
+                <a:ea typeface="Yu Gothic" pitchFamily="34" charset="-122"/>
+                <a:cs typeface="Yu Gothic" pitchFamily="34" charset="-120"/>
+              </a:rPr>
+              <a:t>★</a:t>
+            </a:r>
+            <a:endParaRPr lang="en-US" sz="750" dirty="0"/>
+          </a:p>
+        </p:txBody>
+      </p:sp>
+      <p:sp>
+        <p:nvSpPr>
+          <p:cNvPr id="53" name="Text 49"/>
+          <p:cNvSpPr/>
+          <p:nvPr/>
+        </p:nvSpPr>
+        <p:spPr>
+          <a:xfrm>
+            <a:off x="4709160" y="5577840"/>
+            <a:ext cx="2478024" cy="178308"/>
           </a:xfrm>
           <a:prstGeom prst="rect">
             <a:avLst/>
@@ -4738,13 +5205,286 @@
             <a:r>
               <a:rPr lang="en-US" sz="850" b="1" dirty="0">
                 <a:solidFill>
+                  <a:srgbClr val="0A3D23"/>
+                </a:solidFill>
+                <a:latin typeface="Yu Gothic" pitchFamily="34" charset="0"/>
+                <a:ea typeface="Yu Gothic" pitchFamily="34" charset="-122"/>
+                <a:cs typeface="Yu Gothic" pitchFamily="34" charset="-120"/>
+              </a:rPr>
+              <a:t>クリエ様の解約条件・閉店日の確定</a:t>
+            </a:r>
+            <a:endParaRPr lang="en-US" sz="850" dirty="0"/>
+          </a:p>
+        </p:txBody>
+      </p:sp>
+      <p:sp>
+        <p:nvSpPr>
+          <p:cNvPr id="54" name="Text 50"/>
+          <p:cNvSpPr/>
+          <p:nvPr/>
+        </p:nvSpPr>
+        <p:spPr>
+          <a:xfrm>
+            <a:off x="4526280" y="5756148"/>
+            <a:ext cx="164592" cy="178308"/>
+          </a:xfrm>
+          <a:prstGeom prst="rect">
+            <a:avLst/>
+          </a:prstGeom>
+          <a:noFill/>
+          <a:ln/>
+        </p:spPr>
+        <p:txBody>
+          <a:bodyPr wrap="square" lIns="0" tIns="0" rIns="0" bIns="0" rtlCol="0" anchor="ctr"/>
+          <a:lstStyle/>
+          <a:p>
+            <a:pPr indent="0" marL="0">
+              <a:buNone/>
+            </a:pPr>
+            <a:r>
+              <a:rPr lang="en-US" sz="750" b="1" dirty="0">
+                <a:solidFill>
+                  <a:srgbClr val="A8761F"/>
+                </a:solidFill>
+                <a:latin typeface="Yu Gothic" pitchFamily="34" charset="0"/>
+                <a:ea typeface="Yu Gothic" pitchFamily="34" charset="-122"/>
+                <a:cs typeface="Yu Gothic" pitchFamily="34" charset="-120"/>
+              </a:rPr>
+              <a:t>★</a:t>
+            </a:r>
+            <a:endParaRPr lang="en-US" sz="750" dirty="0"/>
+          </a:p>
+        </p:txBody>
+      </p:sp>
+      <p:sp>
+        <p:nvSpPr>
+          <p:cNvPr id="55" name="Text 51"/>
+          <p:cNvSpPr/>
+          <p:nvPr/>
+        </p:nvSpPr>
+        <p:spPr>
+          <a:xfrm>
+            <a:off x="4709160" y="5756148"/>
+            <a:ext cx="2478024" cy="178308"/>
+          </a:xfrm>
+          <a:prstGeom prst="rect">
+            <a:avLst/>
+          </a:prstGeom>
+          <a:noFill/>
+          <a:ln/>
+        </p:spPr>
+        <p:txBody>
+          <a:bodyPr wrap="square" lIns="0" tIns="0" rIns="0" bIns="0" rtlCol="0" anchor="ctr"/>
+          <a:lstStyle/>
+          <a:p>
+            <a:pPr indent="0" marL="0">
+              <a:buNone/>
+            </a:pPr>
+            <a:r>
+              <a:rPr lang="en-US" sz="850" b="1" dirty="0">
+                <a:solidFill>
+                  <a:srgbClr val="0A3D23"/>
+                </a:solidFill>
+                <a:latin typeface="Yu Gothic" pitchFamily="34" charset="0"/>
+                <a:ea typeface="Yu Gothic" pitchFamily="34" charset="-122"/>
+                <a:cs typeface="Yu Gothic" pitchFamily="34" charset="-120"/>
+              </a:rPr>
+              <a:t>原状回復の範囲（造作・床・設備の残置）</a:t>
+            </a:r>
+            <a:endParaRPr lang="en-US" sz="850" dirty="0"/>
+          </a:p>
+        </p:txBody>
+      </p:sp>
+      <p:sp>
+        <p:nvSpPr>
+          <p:cNvPr id="56" name="Text 52"/>
+          <p:cNvSpPr/>
+          <p:nvPr/>
+        </p:nvSpPr>
+        <p:spPr>
+          <a:xfrm>
+            <a:off x="4526280" y="5934456"/>
+            <a:ext cx="164592" cy="178308"/>
+          </a:xfrm>
+          <a:prstGeom prst="rect">
+            <a:avLst/>
+          </a:prstGeom>
+          <a:noFill/>
+          <a:ln/>
+        </p:spPr>
+        <p:txBody>
+          <a:bodyPr wrap="square" lIns="0" tIns="0" rIns="0" bIns="0" rtlCol="0" anchor="ctr"/>
+          <a:lstStyle/>
+          <a:p>
+            <a:pPr indent="0" marL="0">
+              <a:buNone/>
+            </a:pPr>
+            <a:r>
+              <a:rPr lang="en-US" sz="750" b="1" dirty="0">
+                <a:solidFill>
+                  <a:srgbClr val="A8761F"/>
+                </a:solidFill>
+                <a:latin typeface="Yu Gothic" pitchFamily="34" charset="0"/>
+                <a:ea typeface="Yu Gothic" pitchFamily="34" charset="-122"/>
+                <a:cs typeface="Yu Gothic" pitchFamily="34" charset="-120"/>
+              </a:rPr>
+              <a:t>★</a:t>
+            </a:r>
+            <a:endParaRPr lang="en-US" sz="750" dirty="0"/>
+          </a:p>
+        </p:txBody>
+      </p:sp>
+      <p:sp>
+        <p:nvSpPr>
+          <p:cNvPr id="57" name="Text 53"/>
+          <p:cNvSpPr/>
+          <p:nvPr/>
+        </p:nvSpPr>
+        <p:spPr>
+          <a:xfrm>
+            <a:off x="4709160" y="5934456"/>
+            <a:ext cx="2478024" cy="178308"/>
+          </a:xfrm>
+          <a:prstGeom prst="rect">
+            <a:avLst/>
+          </a:prstGeom>
+          <a:noFill/>
+          <a:ln/>
+        </p:spPr>
+        <p:txBody>
+          <a:bodyPr wrap="square" lIns="0" tIns="0" rIns="0" bIns="0" rtlCol="0" anchor="ctr"/>
+          <a:lstStyle/>
+          <a:p>
+            <a:pPr indent="0" marL="0">
+              <a:buNone/>
+            </a:pPr>
+            <a:r>
+              <a:rPr lang="en-US" sz="850" b="1" dirty="0">
+                <a:solidFill>
+                  <a:srgbClr val="0A3D23"/>
+                </a:solidFill>
+                <a:latin typeface="Yu Gothic" pitchFamily="34" charset="0"/>
+                <a:ea typeface="Yu Gothic" pitchFamily="34" charset="-122"/>
+                <a:cs typeface="Yu Gothic" pitchFamily="34" charset="-120"/>
+              </a:rPr>
+              <a:t>残置する既存設備（給排水・電気容量）</a:t>
+            </a:r>
+            <a:endParaRPr lang="en-US" sz="850" dirty="0"/>
+          </a:p>
+        </p:txBody>
+      </p:sp>
+      <p:sp>
+        <p:nvSpPr>
+          <p:cNvPr id="58" name="Text 54"/>
+          <p:cNvSpPr/>
+          <p:nvPr/>
+        </p:nvSpPr>
+        <p:spPr>
+          <a:xfrm>
+            <a:off x="4526280" y="6112764"/>
+            <a:ext cx="164592" cy="178308"/>
+          </a:xfrm>
+          <a:prstGeom prst="rect">
+            <a:avLst/>
+          </a:prstGeom>
+          <a:noFill/>
+          <a:ln/>
+        </p:spPr>
+        <p:txBody>
+          <a:bodyPr wrap="square" lIns="0" tIns="0" rIns="0" bIns="0" rtlCol="0" anchor="ctr"/>
+          <a:lstStyle/>
+          <a:p>
+            <a:pPr indent="0" marL="0">
+              <a:buNone/>
+            </a:pPr>
+            <a:r>
+              <a:rPr lang="en-US" sz="750" b="1" dirty="0">
+                <a:solidFill>
+                  <a:srgbClr val="A8761F"/>
+                </a:solidFill>
+                <a:latin typeface="Yu Gothic" pitchFamily="34" charset="0"/>
+                <a:ea typeface="Yu Gothic" pitchFamily="34" charset="-122"/>
+                <a:cs typeface="Yu Gothic" pitchFamily="34" charset="-120"/>
+              </a:rPr>
+              <a:t>★</a:t>
+            </a:r>
+            <a:endParaRPr lang="en-US" sz="750" dirty="0"/>
+          </a:p>
+        </p:txBody>
+      </p:sp>
+      <p:sp>
+        <p:nvSpPr>
+          <p:cNvPr id="59" name="Text 55"/>
+          <p:cNvSpPr/>
+          <p:nvPr/>
+        </p:nvSpPr>
+        <p:spPr>
+          <a:xfrm>
+            <a:off x="4709160" y="6112764"/>
+            <a:ext cx="2478024" cy="178308"/>
+          </a:xfrm>
+          <a:prstGeom prst="rect">
+            <a:avLst/>
+          </a:prstGeom>
+          <a:noFill/>
+          <a:ln/>
+        </p:spPr>
+        <p:txBody>
+          <a:bodyPr wrap="square" lIns="0" tIns="0" rIns="0" bIns="0" rtlCol="0" anchor="ctr"/>
+          <a:lstStyle/>
+          <a:p>
+            <a:pPr indent="0" marL="0">
+              <a:buNone/>
+            </a:pPr>
+            <a:r>
+              <a:rPr lang="en-US" sz="850" b="1" dirty="0">
+                <a:solidFill>
+                  <a:srgbClr val="0A3D23"/>
+                </a:solidFill>
+                <a:latin typeface="Yu Gothic" pitchFamily="34" charset="0"/>
+                <a:ea typeface="Yu Gothic" pitchFamily="34" charset="-122"/>
+                <a:cs typeface="Yu Gothic" pitchFamily="34" charset="-120"/>
+              </a:rPr>
+              <a:t>ネット回線の新規敷設（12月中に申込）</a:t>
+            </a:r>
+            <a:endParaRPr lang="en-US" sz="850" dirty="0"/>
+          </a:p>
+        </p:txBody>
+      </p:sp>
+      <p:sp>
+        <p:nvSpPr>
+          <p:cNvPr id="60" name="Text 56"/>
+          <p:cNvSpPr/>
+          <p:nvPr/>
+        </p:nvSpPr>
+        <p:spPr>
+          <a:xfrm>
+            <a:off x="4526280" y="6291072"/>
+            <a:ext cx="164592" cy="178308"/>
+          </a:xfrm>
+          <a:prstGeom prst="rect">
+            <a:avLst/>
+          </a:prstGeom>
+          <a:noFill/>
+          <a:ln/>
+        </p:spPr>
+        <p:txBody>
+          <a:bodyPr wrap="square" lIns="0" tIns="0" rIns="0" bIns="0" rtlCol="0" anchor="ctr"/>
+          <a:lstStyle/>
+          <a:p>
+            <a:pPr indent="0" marL="0">
+              <a:buNone/>
+            </a:pPr>
+            <a:r>
+              <a:rPr lang="en-US" sz="850" dirty="0">
+                <a:solidFill>
                   <a:srgbClr val="7E8882"/>
                 </a:solidFill>
                 <a:latin typeface="Yu Gothic" pitchFamily="34" charset="0"/>
                 <a:ea typeface="Yu Gothic" pitchFamily="34" charset="-122"/>
                 <a:cs typeface="Yu Gothic" pitchFamily="34" charset="-120"/>
               </a:rPr>
-              <a:t>ご確認事項（★＝工期・コストに直結）</a:t>
+              <a:t>・</a:t>
             </a:r>
             <a:endParaRPr lang="en-US" sz="850" dirty="0"/>
           </a:p>
@@ -4752,14 +5492,365 @@
       </p:sp>
       <p:sp>
         <p:nvSpPr>
-          <p:cNvPr id="47" name="Text 43"/>
-          <p:cNvSpPr/>
-          <p:nvPr/>
-        </p:nvSpPr>
-        <p:spPr>
-          <a:xfrm>
-            <a:off x="4526280" y="5614416"/>
-            <a:ext cx="164592" cy="201168"/>
+          <p:cNvPr id="61" name="Text 57"/>
+          <p:cNvSpPr/>
+          <p:nvPr/>
+        </p:nvSpPr>
+        <p:spPr>
+          <a:xfrm>
+            <a:off x="4709160" y="6291072"/>
+            <a:ext cx="2478024" cy="178308"/>
+          </a:xfrm>
+          <a:prstGeom prst="rect">
+            <a:avLst/>
+          </a:prstGeom>
+          <a:noFill/>
+          <a:ln/>
+        </p:spPr>
+        <p:txBody>
+          <a:bodyPr wrap="square" lIns="0" tIns="0" rIns="0" bIns="0" rtlCol="0" anchor="ctr"/>
+          <a:lstStyle/>
+          <a:p>
+            <a:pPr indent="0" marL="0">
+              <a:buNone/>
+            </a:pPr>
+            <a:r>
+              <a:rPr lang="en-US" sz="850" dirty="0">
+                <a:solidFill>
+                  <a:srgbClr val="0A3D23"/>
+                </a:solidFill>
+                <a:latin typeface="Yu Gothic" pitchFamily="34" charset="0"/>
+                <a:ea typeface="Yu Gothic" pitchFamily="34" charset="-122"/>
+                <a:cs typeface="Yu Gothic" pitchFamily="34" charset="-120"/>
+              </a:rPr>
+              <a:t>カメラ映像（個人情報）の取扱いの取決め</a:t>
+            </a:r>
+            <a:endParaRPr lang="en-US" sz="850" dirty="0"/>
+          </a:p>
+        </p:txBody>
+      </p:sp>
+      <p:sp>
+        <p:nvSpPr>
+          <p:cNvPr id="62" name="Text 58"/>
+          <p:cNvSpPr/>
+          <p:nvPr/>
+        </p:nvSpPr>
+        <p:spPr>
+          <a:xfrm>
+            <a:off x="4526280" y="6469380"/>
+            <a:ext cx="164592" cy="178308"/>
+          </a:xfrm>
+          <a:prstGeom prst="rect">
+            <a:avLst/>
+          </a:prstGeom>
+          <a:noFill/>
+          <a:ln/>
+        </p:spPr>
+        <p:txBody>
+          <a:bodyPr wrap="square" lIns="0" tIns="0" rIns="0" bIns="0" rtlCol="0" anchor="ctr"/>
+          <a:lstStyle/>
+          <a:p>
+            <a:pPr indent="0" marL="0">
+              <a:buNone/>
+            </a:pPr>
+            <a:r>
+              <a:rPr lang="en-US" sz="850" dirty="0">
+                <a:solidFill>
+                  <a:srgbClr val="7E8882"/>
+                </a:solidFill>
+                <a:latin typeface="Yu Gothic" pitchFamily="34" charset="0"/>
+                <a:ea typeface="Yu Gothic" pitchFamily="34" charset="-122"/>
+                <a:cs typeface="Yu Gothic" pitchFamily="34" charset="-120"/>
+              </a:rPr>
+              <a:t>・</a:t>
+            </a:r>
+            <a:endParaRPr lang="en-US" sz="850" dirty="0"/>
+          </a:p>
+        </p:txBody>
+      </p:sp>
+      <p:sp>
+        <p:nvSpPr>
+          <p:cNvPr id="63" name="Text 59"/>
+          <p:cNvSpPr/>
+          <p:nvPr/>
+        </p:nvSpPr>
+        <p:spPr>
+          <a:xfrm>
+            <a:off x="4709160" y="6469380"/>
+            <a:ext cx="2478024" cy="178308"/>
+          </a:xfrm>
+          <a:prstGeom prst="rect">
+            <a:avLst/>
+          </a:prstGeom>
+          <a:noFill/>
+          <a:ln/>
+        </p:spPr>
+        <p:txBody>
+          <a:bodyPr wrap="square" lIns="0" tIns="0" rIns="0" bIns="0" rtlCol="0" anchor="ctr"/>
+          <a:lstStyle/>
+          <a:p>
+            <a:pPr indent="0" marL="0">
+              <a:buNone/>
+            </a:pPr>
+            <a:r>
+              <a:rPr lang="en-US" sz="850" dirty="0">
+                <a:solidFill>
+                  <a:srgbClr val="0A3D23"/>
+                </a:solidFill>
+                <a:latin typeface="Yu Gothic" pitchFamily="34" charset="0"/>
+                <a:ea typeface="Yu Gothic" pitchFamily="34" charset="-122"/>
+                <a:cs typeface="Yu Gothic" pitchFamily="34" charset="-120"/>
+              </a:rPr>
+              <a:t>館への工事申請（様式・期限・搬入ルート）</a:t>
+            </a:r>
+            <a:endParaRPr lang="en-US" sz="850" dirty="0"/>
+          </a:p>
+        </p:txBody>
+      </p:sp>
+      <p:sp>
+        <p:nvSpPr>
+          <p:cNvPr id="64" name="Text 60"/>
+          <p:cNvSpPr/>
+          <p:nvPr/>
+        </p:nvSpPr>
+        <p:spPr>
+          <a:xfrm>
+            <a:off x="4526280" y="6647688"/>
+            <a:ext cx="164592" cy="178308"/>
+          </a:xfrm>
+          <a:prstGeom prst="rect">
+            <a:avLst/>
+          </a:prstGeom>
+          <a:noFill/>
+          <a:ln/>
+        </p:spPr>
+        <p:txBody>
+          <a:bodyPr wrap="square" lIns="0" tIns="0" rIns="0" bIns="0" rtlCol="0" anchor="ctr"/>
+          <a:lstStyle/>
+          <a:p>
+            <a:pPr indent="0" marL="0">
+              <a:buNone/>
+            </a:pPr>
+            <a:r>
+              <a:rPr lang="en-US" sz="850" dirty="0">
+                <a:solidFill>
+                  <a:srgbClr val="7E8882"/>
+                </a:solidFill>
+                <a:latin typeface="Yu Gothic" pitchFamily="34" charset="0"/>
+                <a:ea typeface="Yu Gothic" pitchFamily="34" charset="-122"/>
+                <a:cs typeface="Yu Gothic" pitchFamily="34" charset="-120"/>
+              </a:rPr>
+              <a:t>・</a:t>
+            </a:r>
+            <a:endParaRPr lang="en-US" sz="850" dirty="0"/>
+          </a:p>
+        </p:txBody>
+      </p:sp>
+      <p:sp>
+        <p:nvSpPr>
+          <p:cNvPr id="65" name="Text 61"/>
+          <p:cNvSpPr/>
+          <p:nvPr/>
+        </p:nvSpPr>
+        <p:spPr>
+          <a:xfrm>
+            <a:off x="4709160" y="6647688"/>
+            <a:ext cx="2478024" cy="178308"/>
+          </a:xfrm>
+          <a:prstGeom prst="rect">
+            <a:avLst/>
+          </a:prstGeom>
+          <a:noFill/>
+          <a:ln/>
+        </p:spPr>
+        <p:txBody>
+          <a:bodyPr wrap="square" lIns="0" tIns="0" rIns="0" bIns="0" rtlCol="0" anchor="ctr"/>
+          <a:lstStyle/>
+          <a:p>
+            <a:pPr indent="0" marL="0">
+              <a:buNone/>
+            </a:pPr>
+            <a:r>
+              <a:rPr lang="en-US" sz="850" dirty="0">
+                <a:solidFill>
+                  <a:srgbClr val="0A3D23"/>
+                </a:solidFill>
+                <a:latin typeface="Yu Gothic" pitchFamily="34" charset="0"/>
+                <a:ea typeface="Yu Gothic" pitchFamily="34" charset="-122"/>
+                <a:cs typeface="Yu Gothic" pitchFamily="34" charset="-120"/>
+              </a:rPr>
+              <a:t>サイン表記の確定（MIRAIYA Book &amp; Cafe）</a:t>
+            </a:r>
+            <a:endParaRPr lang="en-US" sz="850" dirty="0"/>
+          </a:p>
+        </p:txBody>
+      </p:sp>
+      <p:sp>
+        <p:nvSpPr>
+          <p:cNvPr id="66" name="Text 62"/>
+          <p:cNvSpPr/>
+          <p:nvPr/>
+        </p:nvSpPr>
+        <p:spPr>
+          <a:xfrm>
+            <a:off x="4526280" y="6825996"/>
+            <a:ext cx="164592" cy="178308"/>
+          </a:xfrm>
+          <a:prstGeom prst="rect">
+            <a:avLst/>
+          </a:prstGeom>
+          <a:noFill/>
+          <a:ln/>
+        </p:spPr>
+        <p:txBody>
+          <a:bodyPr wrap="square" lIns="0" tIns="0" rIns="0" bIns="0" rtlCol="0" anchor="ctr"/>
+          <a:lstStyle/>
+          <a:p>
+            <a:pPr indent="0" marL="0">
+              <a:buNone/>
+            </a:pPr>
+            <a:r>
+              <a:rPr lang="en-US" sz="850" dirty="0">
+                <a:solidFill>
+                  <a:srgbClr val="7E8882"/>
+                </a:solidFill>
+                <a:latin typeface="Yu Gothic" pitchFamily="34" charset="0"/>
+                <a:ea typeface="Yu Gothic" pitchFamily="34" charset="-122"/>
+                <a:cs typeface="Yu Gothic" pitchFamily="34" charset="-120"/>
+              </a:rPr>
+              <a:t>・</a:t>
+            </a:r>
+            <a:endParaRPr lang="en-US" sz="850" dirty="0"/>
+          </a:p>
+        </p:txBody>
+      </p:sp>
+      <p:sp>
+        <p:nvSpPr>
+          <p:cNvPr id="67" name="Text 63"/>
+          <p:cNvSpPr/>
+          <p:nvPr/>
+        </p:nvSpPr>
+        <p:spPr>
+          <a:xfrm>
+            <a:off x="4709160" y="6825996"/>
+            <a:ext cx="2478024" cy="178308"/>
+          </a:xfrm>
+          <a:prstGeom prst="rect">
+            <a:avLst/>
+          </a:prstGeom>
+          <a:noFill/>
+          <a:ln/>
+        </p:spPr>
+        <p:txBody>
+          <a:bodyPr wrap="square" lIns="0" tIns="0" rIns="0" bIns="0" rtlCol="0" anchor="ctr"/>
+          <a:lstStyle/>
+          <a:p>
+            <a:pPr indent="0" marL="0">
+              <a:buNone/>
+            </a:pPr>
+            <a:r>
+              <a:rPr lang="en-US" sz="850" dirty="0">
+                <a:solidFill>
+                  <a:srgbClr val="0A3D23"/>
+                </a:solidFill>
+                <a:latin typeface="Yu Gothic" pitchFamily="34" charset="0"/>
+                <a:ea typeface="Yu Gothic" pitchFamily="34" charset="-122"/>
+                <a:cs typeface="Yu Gothic" pitchFamily="34" charset="-120"/>
+              </a:rPr>
+              <a:t>社内稟議の進捗・決裁完了の目処</a:t>
+            </a:r>
+            <a:endParaRPr lang="en-US" sz="850" dirty="0"/>
+          </a:p>
+        </p:txBody>
+      </p:sp>
+      <p:sp>
+        <p:nvSpPr>
+          <p:cNvPr id="68" name="Text 64"/>
+          <p:cNvSpPr/>
+          <p:nvPr/>
+        </p:nvSpPr>
+        <p:spPr>
+          <a:xfrm>
+            <a:off x="4526280" y="7004304"/>
+            <a:ext cx="164592" cy="178308"/>
+          </a:xfrm>
+          <a:prstGeom prst="rect">
+            <a:avLst/>
+          </a:prstGeom>
+          <a:noFill/>
+          <a:ln/>
+        </p:spPr>
+        <p:txBody>
+          <a:bodyPr wrap="square" lIns="0" tIns="0" rIns="0" bIns="0" rtlCol="0" anchor="ctr"/>
+          <a:lstStyle/>
+          <a:p>
+            <a:pPr indent="0" marL="0">
+              <a:buNone/>
+            </a:pPr>
+            <a:r>
+              <a:rPr lang="en-US" sz="850" dirty="0">
+                <a:solidFill>
+                  <a:srgbClr val="7E8882"/>
+                </a:solidFill>
+                <a:latin typeface="Yu Gothic" pitchFamily="34" charset="0"/>
+                <a:ea typeface="Yu Gothic" pitchFamily="34" charset="-122"/>
+                <a:cs typeface="Yu Gothic" pitchFamily="34" charset="-120"/>
+              </a:rPr>
+              <a:t>・</a:t>
+            </a:r>
+            <a:endParaRPr lang="en-US" sz="850" dirty="0"/>
+          </a:p>
+        </p:txBody>
+      </p:sp>
+      <p:sp>
+        <p:nvSpPr>
+          <p:cNvPr id="69" name="Text 65"/>
+          <p:cNvSpPr/>
+          <p:nvPr/>
+        </p:nvSpPr>
+        <p:spPr>
+          <a:xfrm>
+            <a:off x="4709160" y="7004304"/>
+            <a:ext cx="2478024" cy="178308"/>
+          </a:xfrm>
+          <a:prstGeom prst="rect">
+            <a:avLst/>
+          </a:prstGeom>
+          <a:noFill/>
+          <a:ln/>
+        </p:spPr>
+        <p:txBody>
+          <a:bodyPr wrap="square" lIns="0" tIns="0" rIns="0" bIns="0" rtlCol="0" anchor="ctr"/>
+          <a:lstStyle/>
+          <a:p>
+            <a:pPr indent="0" marL="0">
+              <a:buNone/>
+            </a:pPr>
+            <a:r>
+              <a:rPr lang="en-US" sz="850" dirty="0">
+                <a:solidFill>
+                  <a:srgbClr val="0A3D23"/>
+                </a:solidFill>
+                <a:latin typeface="Yu Gothic" pitchFamily="34" charset="0"/>
+                <a:ea typeface="Yu Gothic" pitchFamily="34" charset="-122"/>
+                <a:cs typeface="Yu Gothic" pitchFamily="34" charset="-120"/>
+              </a:rPr>
+              <a:t>運営体制（営業時間・清掃補充の担当分け）</a:t>
+            </a:r>
+            <a:endParaRPr lang="en-US" sz="850" dirty="0"/>
+          </a:p>
+        </p:txBody>
+      </p:sp>
+      <p:sp>
+        <p:nvSpPr>
+          <p:cNvPr id="70" name="Text 66"/>
+          <p:cNvSpPr/>
+          <p:nvPr/>
+        </p:nvSpPr>
+        <p:spPr>
+          <a:xfrm>
+            <a:off x="7443216" y="5394960"/>
+            <a:ext cx="2660904" cy="164592"/>
           </a:xfrm>
           <a:prstGeom prst="rect">
             <a:avLst/>
@@ -4777,1042 +5868,613 @@
             <a:r>
               <a:rPr lang="en-US" sz="800" b="1" dirty="0">
                 <a:solidFill>
+                  <a:srgbClr val="7E8882"/>
+                </a:solidFill>
+                <a:latin typeface="Yu Gothic" pitchFamily="34" charset="0"/>
+                <a:ea typeface="Yu Gothic" pitchFamily="34" charset="-122"/>
+                <a:cs typeface="Yu Gothic" pitchFamily="34" charset="-120"/>
+              </a:rPr>
+              <a:t>ご提供いただきたい資料</a:t>
+            </a:r>
+            <a:endParaRPr lang="en-US" sz="800" dirty="0"/>
+          </a:p>
+        </p:txBody>
+      </p:sp>
+      <p:sp>
+        <p:nvSpPr>
+          <p:cNvPr id="71" name="Text 67"/>
+          <p:cNvSpPr/>
+          <p:nvPr/>
+        </p:nvSpPr>
+        <p:spPr>
+          <a:xfrm>
+            <a:off x="7461504" y="5577840"/>
+            <a:ext cx="146304" cy="178308"/>
+          </a:xfrm>
+          <a:prstGeom prst="rect">
+            <a:avLst/>
+          </a:prstGeom>
+          <a:noFill/>
+          <a:ln/>
+        </p:spPr>
+        <p:txBody>
+          <a:bodyPr wrap="square" lIns="0" tIns="0" rIns="0" bIns="0" rtlCol="0" anchor="ctr"/>
+          <a:lstStyle/>
+          <a:p>
+            <a:pPr indent="0" marL="0">
+              <a:buNone/>
+            </a:pPr>
+            <a:r>
+              <a:rPr lang="en-US" sz="850" dirty="0">
+                <a:solidFill>
+                  <a:srgbClr val="7E8882"/>
+                </a:solidFill>
+                <a:latin typeface="Yu Gothic" pitchFamily="34" charset="0"/>
+                <a:ea typeface="Yu Gothic" pitchFamily="34" charset="-122"/>
+                <a:cs typeface="Yu Gothic" pitchFamily="34" charset="-120"/>
+              </a:rPr>
+              <a:t>・</a:t>
+            </a:r>
+            <a:endParaRPr lang="en-US" sz="850" dirty="0"/>
+          </a:p>
+        </p:txBody>
+      </p:sp>
+      <p:sp>
+        <p:nvSpPr>
+          <p:cNvPr id="72" name="Text 68"/>
+          <p:cNvSpPr/>
+          <p:nvPr/>
+        </p:nvSpPr>
+        <p:spPr>
+          <a:xfrm>
+            <a:off x="7626096" y="5577840"/>
+            <a:ext cx="2478024" cy="178308"/>
+          </a:xfrm>
+          <a:prstGeom prst="rect">
+            <a:avLst/>
+          </a:prstGeom>
+          <a:noFill/>
+          <a:ln/>
+        </p:spPr>
+        <p:txBody>
+          <a:bodyPr wrap="square" lIns="0" tIns="0" rIns="0" bIns="0" rtlCol="0" anchor="ctr"/>
+          <a:lstStyle/>
+          <a:p>
+            <a:pPr indent="0" marL="0">
+              <a:buNone/>
+            </a:pPr>
+            <a:r>
+              <a:rPr lang="en-US" sz="850" dirty="0">
+                <a:solidFill>
+                  <a:srgbClr val="0A3D23"/>
+                </a:solidFill>
+                <a:latin typeface="Yu Gothic" pitchFamily="34" charset="0"/>
+                <a:ea typeface="Yu Gothic" pitchFamily="34" charset="-122"/>
+                <a:cs typeface="Yu Gothic" pitchFamily="34" charset="-120"/>
+              </a:rPr>
+              <a:t>区画図面（平面図・展開図／CADデータ）</a:t>
+            </a:r>
+            <a:endParaRPr lang="en-US" sz="850" dirty="0"/>
+          </a:p>
+        </p:txBody>
+      </p:sp>
+      <p:sp>
+        <p:nvSpPr>
+          <p:cNvPr id="73" name="Text 69"/>
+          <p:cNvSpPr/>
+          <p:nvPr/>
+        </p:nvSpPr>
+        <p:spPr>
+          <a:xfrm>
+            <a:off x="7461504" y="5756148"/>
+            <a:ext cx="146304" cy="178308"/>
+          </a:xfrm>
+          <a:prstGeom prst="rect">
+            <a:avLst/>
+          </a:prstGeom>
+          <a:noFill/>
+          <a:ln/>
+        </p:spPr>
+        <p:txBody>
+          <a:bodyPr wrap="square" lIns="0" tIns="0" rIns="0" bIns="0" rtlCol="0" anchor="ctr"/>
+          <a:lstStyle/>
+          <a:p>
+            <a:pPr indent="0" marL="0">
+              <a:buNone/>
+            </a:pPr>
+            <a:r>
+              <a:rPr lang="en-US" sz="850" dirty="0">
+                <a:solidFill>
+                  <a:srgbClr val="7E8882"/>
+                </a:solidFill>
+                <a:latin typeface="Yu Gothic" pitchFamily="34" charset="0"/>
+                <a:ea typeface="Yu Gothic" pitchFamily="34" charset="-122"/>
+                <a:cs typeface="Yu Gothic" pitchFamily="34" charset="-120"/>
+              </a:rPr>
+              <a:t>・</a:t>
+            </a:r>
+            <a:endParaRPr lang="en-US" sz="850" dirty="0"/>
+          </a:p>
+        </p:txBody>
+      </p:sp>
+      <p:sp>
+        <p:nvSpPr>
+          <p:cNvPr id="74" name="Text 70"/>
+          <p:cNvSpPr/>
+          <p:nvPr/>
+        </p:nvSpPr>
+        <p:spPr>
+          <a:xfrm>
+            <a:off x="7626096" y="5756148"/>
+            <a:ext cx="2478024" cy="178308"/>
+          </a:xfrm>
+          <a:prstGeom prst="rect">
+            <a:avLst/>
+          </a:prstGeom>
+          <a:noFill/>
+          <a:ln/>
+        </p:spPr>
+        <p:txBody>
+          <a:bodyPr wrap="square" lIns="0" tIns="0" rIns="0" bIns="0" rtlCol="0" anchor="ctr"/>
+          <a:lstStyle/>
+          <a:p>
+            <a:pPr indent="0" marL="0">
+              <a:buNone/>
+            </a:pPr>
+            <a:r>
+              <a:rPr lang="en-US" sz="850" dirty="0">
+                <a:solidFill>
+                  <a:srgbClr val="0A3D23"/>
+                </a:solidFill>
+                <a:latin typeface="Yu Gothic" pitchFamily="34" charset="0"/>
+                <a:ea typeface="Yu Gothic" pitchFamily="34" charset="-122"/>
+                <a:cs typeface="Yu Gothic" pitchFamily="34" charset="-120"/>
+              </a:rPr>
+              <a:t>電気容量・分電盤の位置</a:t>
+            </a:r>
+            <a:endParaRPr lang="en-US" sz="850" dirty="0"/>
+          </a:p>
+        </p:txBody>
+      </p:sp>
+      <p:sp>
+        <p:nvSpPr>
+          <p:cNvPr id="75" name="Text 71"/>
+          <p:cNvSpPr/>
+          <p:nvPr/>
+        </p:nvSpPr>
+        <p:spPr>
+          <a:xfrm>
+            <a:off x="7461504" y="5934456"/>
+            <a:ext cx="146304" cy="178308"/>
+          </a:xfrm>
+          <a:prstGeom prst="rect">
+            <a:avLst/>
+          </a:prstGeom>
+          <a:noFill/>
+          <a:ln/>
+        </p:spPr>
+        <p:txBody>
+          <a:bodyPr wrap="square" lIns="0" tIns="0" rIns="0" bIns="0" rtlCol="0" anchor="ctr"/>
+          <a:lstStyle/>
+          <a:p>
+            <a:pPr indent="0" marL="0">
+              <a:buNone/>
+            </a:pPr>
+            <a:r>
+              <a:rPr lang="en-US" sz="850" dirty="0">
+                <a:solidFill>
+                  <a:srgbClr val="7E8882"/>
+                </a:solidFill>
+                <a:latin typeface="Yu Gothic" pitchFamily="34" charset="0"/>
+                <a:ea typeface="Yu Gothic" pitchFamily="34" charset="-122"/>
+                <a:cs typeface="Yu Gothic" pitchFamily="34" charset="-120"/>
+              </a:rPr>
+              <a:t>・</a:t>
+            </a:r>
+            <a:endParaRPr lang="en-US" sz="850" dirty="0"/>
+          </a:p>
+        </p:txBody>
+      </p:sp>
+      <p:sp>
+        <p:nvSpPr>
+          <p:cNvPr id="76" name="Text 72"/>
+          <p:cNvSpPr/>
+          <p:nvPr/>
+        </p:nvSpPr>
+        <p:spPr>
+          <a:xfrm>
+            <a:off x="7626096" y="5934456"/>
+            <a:ext cx="2478024" cy="178308"/>
+          </a:xfrm>
+          <a:prstGeom prst="rect">
+            <a:avLst/>
+          </a:prstGeom>
+          <a:noFill/>
+          <a:ln/>
+        </p:spPr>
+        <p:txBody>
+          <a:bodyPr wrap="square" lIns="0" tIns="0" rIns="0" bIns="0" rtlCol="0" anchor="ctr"/>
+          <a:lstStyle/>
+          <a:p>
+            <a:pPr indent="0" marL="0">
+              <a:buNone/>
+            </a:pPr>
+            <a:r>
+              <a:rPr lang="en-US" sz="850" dirty="0">
+                <a:solidFill>
+                  <a:srgbClr val="0A3D23"/>
+                </a:solidFill>
+                <a:latin typeface="Yu Gothic" pitchFamily="34" charset="0"/>
+                <a:ea typeface="Yu Gothic" pitchFamily="34" charset="-122"/>
+                <a:cs typeface="Yu Gothic" pitchFamily="34" charset="-120"/>
+              </a:rPr>
+              <a:t>給排水の位置・系統</a:t>
+            </a:r>
+            <a:endParaRPr lang="en-US" sz="850" dirty="0"/>
+          </a:p>
+        </p:txBody>
+      </p:sp>
+      <p:sp>
+        <p:nvSpPr>
+          <p:cNvPr id="77" name="Text 73"/>
+          <p:cNvSpPr/>
+          <p:nvPr/>
+        </p:nvSpPr>
+        <p:spPr>
+          <a:xfrm>
+            <a:off x="7461504" y="6112764"/>
+            <a:ext cx="146304" cy="178308"/>
+          </a:xfrm>
+          <a:prstGeom prst="rect">
+            <a:avLst/>
+          </a:prstGeom>
+          <a:noFill/>
+          <a:ln/>
+        </p:spPr>
+        <p:txBody>
+          <a:bodyPr wrap="square" lIns="0" tIns="0" rIns="0" bIns="0" rtlCol="0" anchor="ctr"/>
+          <a:lstStyle/>
+          <a:p>
+            <a:pPr indent="0" marL="0">
+              <a:buNone/>
+            </a:pPr>
+            <a:r>
+              <a:rPr lang="en-US" sz="850" dirty="0">
+                <a:solidFill>
+                  <a:srgbClr val="7E8882"/>
+                </a:solidFill>
+                <a:latin typeface="Yu Gothic" pitchFamily="34" charset="0"/>
+                <a:ea typeface="Yu Gothic" pitchFamily="34" charset="-122"/>
+                <a:cs typeface="Yu Gothic" pitchFamily="34" charset="-120"/>
+              </a:rPr>
+              <a:t>・</a:t>
+            </a:r>
+            <a:endParaRPr lang="en-US" sz="850" dirty="0"/>
+          </a:p>
+        </p:txBody>
+      </p:sp>
+      <p:sp>
+        <p:nvSpPr>
+          <p:cNvPr id="78" name="Text 74"/>
+          <p:cNvSpPr/>
+          <p:nvPr/>
+        </p:nvSpPr>
+        <p:spPr>
+          <a:xfrm>
+            <a:off x="7626096" y="6112764"/>
+            <a:ext cx="2478024" cy="178308"/>
+          </a:xfrm>
+          <a:prstGeom prst="rect">
+            <a:avLst/>
+          </a:prstGeom>
+          <a:noFill/>
+          <a:ln/>
+        </p:spPr>
+        <p:txBody>
+          <a:bodyPr wrap="square" lIns="0" tIns="0" rIns="0" bIns="0" rtlCol="0" anchor="ctr"/>
+          <a:lstStyle/>
+          <a:p>
+            <a:pPr indent="0" marL="0">
+              <a:buNone/>
+            </a:pPr>
+            <a:r>
+              <a:rPr lang="en-US" sz="850" dirty="0">
+                <a:solidFill>
+                  <a:srgbClr val="0A3D23"/>
+                </a:solidFill>
+                <a:latin typeface="Yu Gothic" pitchFamily="34" charset="0"/>
+                <a:ea typeface="Yu Gothic" pitchFamily="34" charset="-122"/>
+                <a:cs typeface="Yu Gothic" pitchFamily="34" charset="-120"/>
+              </a:rPr>
+              <a:t>既存ネット回線の有無・引込経路</a:t>
+            </a:r>
+            <a:endParaRPr lang="en-US" sz="850" dirty="0"/>
+          </a:p>
+        </p:txBody>
+      </p:sp>
+      <p:sp>
+        <p:nvSpPr>
+          <p:cNvPr id="79" name="Text 75"/>
+          <p:cNvSpPr/>
+          <p:nvPr/>
+        </p:nvSpPr>
+        <p:spPr>
+          <a:xfrm>
+            <a:off x="7461504" y="6291072"/>
+            <a:ext cx="146304" cy="178308"/>
+          </a:xfrm>
+          <a:prstGeom prst="rect">
+            <a:avLst/>
+          </a:prstGeom>
+          <a:noFill/>
+          <a:ln/>
+        </p:spPr>
+        <p:txBody>
+          <a:bodyPr wrap="square" lIns="0" tIns="0" rIns="0" bIns="0" rtlCol="0" anchor="ctr"/>
+          <a:lstStyle/>
+          <a:p>
+            <a:pPr indent="0" marL="0">
+              <a:buNone/>
+            </a:pPr>
+            <a:r>
+              <a:rPr lang="en-US" sz="850" dirty="0">
+                <a:solidFill>
+                  <a:srgbClr val="7E8882"/>
+                </a:solidFill>
+                <a:latin typeface="Yu Gothic" pitchFamily="34" charset="0"/>
+                <a:ea typeface="Yu Gothic" pitchFamily="34" charset="-122"/>
+                <a:cs typeface="Yu Gothic" pitchFamily="34" charset="-120"/>
+              </a:rPr>
+              <a:t>・</a:t>
+            </a:r>
+            <a:endParaRPr lang="en-US" sz="850" dirty="0"/>
+          </a:p>
+        </p:txBody>
+      </p:sp>
+      <p:sp>
+        <p:nvSpPr>
+          <p:cNvPr id="80" name="Text 76"/>
+          <p:cNvSpPr/>
+          <p:nvPr/>
+        </p:nvSpPr>
+        <p:spPr>
+          <a:xfrm>
+            <a:off x="7626096" y="6291072"/>
+            <a:ext cx="2478024" cy="178308"/>
+          </a:xfrm>
+          <a:prstGeom prst="rect">
+            <a:avLst/>
+          </a:prstGeom>
+          <a:noFill/>
+          <a:ln/>
+        </p:spPr>
+        <p:txBody>
+          <a:bodyPr wrap="square" lIns="0" tIns="0" rIns="0" bIns="0" rtlCol="0" anchor="ctr"/>
+          <a:lstStyle/>
+          <a:p>
+            <a:pPr indent="0" marL="0">
+              <a:buNone/>
+            </a:pPr>
+            <a:r>
+              <a:rPr lang="en-US" sz="850" dirty="0">
+                <a:solidFill>
+                  <a:srgbClr val="0A3D23"/>
+                </a:solidFill>
+                <a:latin typeface="Yu Gothic" pitchFamily="34" charset="0"/>
+                <a:ea typeface="Yu Gothic" pitchFamily="34" charset="-122"/>
+                <a:cs typeface="Yu Gothic" pitchFamily="34" charset="-120"/>
+              </a:rPr>
+              <a:t>現況写真（既存設備・厨房まわり）</a:t>
+            </a:r>
+            <a:endParaRPr lang="en-US" sz="850" dirty="0"/>
+          </a:p>
+        </p:txBody>
+      </p:sp>
+      <p:sp>
+        <p:nvSpPr>
+          <p:cNvPr id="81" name="Text 77"/>
+          <p:cNvSpPr/>
+          <p:nvPr/>
+        </p:nvSpPr>
+        <p:spPr>
+          <a:xfrm>
+            <a:off x="7461504" y="6469380"/>
+            <a:ext cx="146304" cy="178308"/>
+          </a:xfrm>
+          <a:prstGeom prst="rect">
+            <a:avLst/>
+          </a:prstGeom>
+          <a:noFill/>
+          <a:ln/>
+        </p:spPr>
+        <p:txBody>
+          <a:bodyPr wrap="square" lIns="0" tIns="0" rIns="0" bIns="0" rtlCol="0" anchor="ctr"/>
+          <a:lstStyle/>
+          <a:p>
+            <a:pPr indent="0" marL="0">
+              <a:buNone/>
+            </a:pPr>
+            <a:r>
+              <a:rPr lang="en-US" sz="850" dirty="0">
+                <a:solidFill>
+                  <a:srgbClr val="7E8882"/>
+                </a:solidFill>
+                <a:latin typeface="Yu Gothic" pitchFamily="34" charset="0"/>
+                <a:ea typeface="Yu Gothic" pitchFamily="34" charset="-122"/>
+                <a:cs typeface="Yu Gothic" pitchFamily="34" charset="-120"/>
+              </a:rPr>
+              <a:t>・</a:t>
+            </a:r>
+            <a:endParaRPr lang="en-US" sz="850" dirty="0"/>
+          </a:p>
+        </p:txBody>
+      </p:sp>
+      <p:sp>
+        <p:nvSpPr>
+          <p:cNvPr id="82" name="Text 78"/>
+          <p:cNvSpPr/>
+          <p:nvPr/>
+        </p:nvSpPr>
+        <p:spPr>
+          <a:xfrm>
+            <a:off x="7626096" y="6469380"/>
+            <a:ext cx="2478024" cy="178308"/>
+          </a:xfrm>
+          <a:prstGeom prst="rect">
+            <a:avLst/>
+          </a:prstGeom>
+          <a:noFill/>
+          <a:ln/>
+        </p:spPr>
+        <p:txBody>
+          <a:bodyPr wrap="square" lIns="0" tIns="0" rIns="0" bIns="0" rtlCol="0" anchor="ctr"/>
+          <a:lstStyle/>
+          <a:p>
+            <a:pPr indent="0" marL="0">
+              <a:buNone/>
+            </a:pPr>
+            <a:r>
+              <a:rPr lang="en-US" sz="850" dirty="0">
+                <a:solidFill>
+                  <a:srgbClr val="0A3D23"/>
+                </a:solidFill>
+                <a:latin typeface="Yu Gothic" pitchFamily="34" charset="0"/>
+                <a:ea typeface="Yu Gothic" pitchFamily="34" charset="-122"/>
+                <a:cs typeface="Yu Gothic" pitchFamily="34" charset="-120"/>
+              </a:rPr>
+              <a:t>館の工事規定・申請様式</a:t>
+            </a:r>
+            <a:endParaRPr lang="en-US" sz="850" dirty="0"/>
+          </a:p>
+        </p:txBody>
+      </p:sp>
+      <p:sp>
+        <p:nvSpPr>
+          <p:cNvPr id="83" name="Text 79"/>
+          <p:cNvSpPr/>
+          <p:nvPr/>
+        </p:nvSpPr>
+        <p:spPr>
+          <a:xfrm>
+            <a:off x="7461504" y="6647688"/>
+            <a:ext cx="146304" cy="178308"/>
+          </a:xfrm>
+          <a:prstGeom prst="rect">
+            <a:avLst/>
+          </a:prstGeom>
+          <a:noFill/>
+          <a:ln/>
+        </p:spPr>
+        <p:txBody>
+          <a:bodyPr wrap="square" lIns="0" tIns="0" rIns="0" bIns="0" rtlCol="0" anchor="ctr"/>
+          <a:lstStyle/>
+          <a:p>
+            <a:pPr indent="0" marL="0">
+              <a:buNone/>
+            </a:pPr>
+            <a:r>
+              <a:rPr lang="en-US" sz="850" dirty="0">
+                <a:solidFill>
+                  <a:srgbClr val="7E8882"/>
+                </a:solidFill>
+                <a:latin typeface="Yu Gothic" pitchFamily="34" charset="0"/>
+                <a:ea typeface="Yu Gothic" pitchFamily="34" charset="-122"/>
+                <a:cs typeface="Yu Gothic" pitchFamily="34" charset="-120"/>
+              </a:rPr>
+              <a:t>・</a:t>
+            </a:r>
+            <a:endParaRPr lang="en-US" sz="850" dirty="0"/>
+          </a:p>
+        </p:txBody>
+      </p:sp>
+      <p:sp>
+        <p:nvSpPr>
+          <p:cNvPr id="84" name="Text 80"/>
+          <p:cNvSpPr/>
+          <p:nvPr/>
+        </p:nvSpPr>
+        <p:spPr>
+          <a:xfrm>
+            <a:off x="7626096" y="6647688"/>
+            <a:ext cx="2478024" cy="178308"/>
+          </a:xfrm>
+          <a:prstGeom prst="rect">
+            <a:avLst/>
+          </a:prstGeom>
+          <a:noFill/>
+          <a:ln/>
+        </p:spPr>
+        <p:txBody>
+          <a:bodyPr wrap="square" lIns="0" tIns="0" rIns="0" bIns="0" rtlCol="0" anchor="ctr"/>
+          <a:lstStyle/>
+          <a:p>
+            <a:pPr indent="0" marL="0">
+              <a:buNone/>
+            </a:pPr>
+            <a:r>
+              <a:rPr lang="en-US" sz="850" dirty="0">
+                <a:solidFill>
+                  <a:srgbClr val="0A3D23"/>
+                </a:solidFill>
+                <a:latin typeface="Yu Gothic" pitchFamily="34" charset="0"/>
+                <a:ea typeface="Yu Gothic" pitchFamily="34" charset="-122"/>
+                <a:cs typeface="Yu Gothic" pitchFamily="34" charset="-120"/>
+              </a:rPr>
+              <a:t>クリエ様の原状回復条件がわかる資料</a:t>
+            </a:r>
+            <a:endParaRPr lang="en-US" sz="850" dirty="0"/>
+          </a:p>
+        </p:txBody>
+      </p:sp>
+      <p:sp>
+        <p:nvSpPr>
+          <p:cNvPr id="85" name="Text 81"/>
+          <p:cNvSpPr/>
+          <p:nvPr/>
+        </p:nvSpPr>
+        <p:spPr>
+          <a:xfrm>
+            <a:off x="384048" y="7251192"/>
+            <a:ext cx="9921240" cy="146304"/>
+          </a:xfrm>
+          <a:prstGeom prst="rect">
+            <a:avLst/>
+          </a:prstGeom>
+          <a:noFill/>
+          <a:ln/>
+        </p:spPr>
+        <p:txBody>
+          <a:bodyPr wrap="square" lIns="0" tIns="0" rIns="0" bIns="0" rtlCol="0" anchor="ctr"/>
+          <a:lstStyle/>
+          <a:p>
+            <a:pPr indent="0" marL="0">
+              <a:buNone/>
+            </a:pPr>
+            <a:r>
+              <a:rPr lang="en-US" sz="750" dirty="0">
+                <a:solidFill>
                   <a:srgbClr val="A8761F"/>
                 </a:solidFill>
                 <a:latin typeface="Yu Gothic" pitchFamily="34" charset="0"/>
                 <a:ea typeface="Yu Gothic" pitchFamily="34" charset="-122"/>
                 <a:cs typeface="Yu Gothic" pitchFamily="34" charset="-120"/>
               </a:rPr>
-              <a:t>★</a:t>
-            </a:r>
-            <a:endParaRPr lang="en-US" sz="800" dirty="0"/>
-          </a:p>
-        </p:txBody>
-      </p:sp>
-      <p:sp>
-        <p:nvSpPr>
-          <p:cNvPr id="48" name="Text 44"/>
-          <p:cNvSpPr/>
-          <p:nvPr/>
-        </p:nvSpPr>
-        <p:spPr>
-          <a:xfrm>
-            <a:off x="4709160" y="5614416"/>
-            <a:ext cx="2478024" cy="201168"/>
-          </a:xfrm>
-          <a:prstGeom prst="rect">
-            <a:avLst/>
-          </a:prstGeom>
-          <a:noFill/>
-          <a:ln/>
-        </p:spPr>
-        <p:txBody>
-          <a:bodyPr wrap="square" lIns="0" tIns="0" rIns="0" bIns="0" rtlCol="0" anchor="ctr"/>
-          <a:lstStyle/>
-          <a:p>
-            <a:pPr indent="0" marL="0">
-              <a:buNone/>
-            </a:pPr>
-            <a:r>
-              <a:rPr lang="en-US" sz="850" b="1" dirty="0">
-                <a:solidFill>
-                  <a:srgbClr val="0A3D23"/>
-                </a:solidFill>
-                <a:latin typeface="Yu Gothic" pitchFamily="34" charset="0"/>
-                <a:ea typeface="Yu Gothic" pitchFamily="34" charset="-122"/>
-                <a:cs typeface="Yu Gothic" pitchFamily="34" charset="-120"/>
-              </a:rPr>
-              <a:t>クリエ様の解約条件・閉店日の確定</a:t>
-            </a:r>
-            <a:endParaRPr lang="en-US" sz="850" dirty="0"/>
-          </a:p>
-        </p:txBody>
-      </p:sp>
-      <p:sp>
-        <p:nvSpPr>
-          <p:cNvPr id="49" name="Text 45"/>
-          <p:cNvSpPr/>
-          <p:nvPr/>
-        </p:nvSpPr>
-        <p:spPr>
-          <a:xfrm>
-            <a:off x="4526280" y="5829300"/>
-            <a:ext cx="164592" cy="201168"/>
-          </a:xfrm>
-          <a:prstGeom prst="rect">
-            <a:avLst/>
-          </a:prstGeom>
-          <a:noFill/>
-          <a:ln/>
-        </p:spPr>
-        <p:txBody>
-          <a:bodyPr wrap="square" lIns="0" tIns="0" rIns="0" bIns="0" rtlCol="0" anchor="ctr"/>
-          <a:lstStyle/>
-          <a:p>
-            <a:pPr indent="0" marL="0">
-              <a:buNone/>
-            </a:pPr>
-            <a:r>
-              <a:rPr lang="en-US" sz="800" b="1" dirty="0">
-                <a:solidFill>
-                  <a:srgbClr val="A8761F"/>
-                </a:solidFill>
-                <a:latin typeface="Yu Gothic" pitchFamily="34" charset="0"/>
-                <a:ea typeface="Yu Gothic" pitchFamily="34" charset="-122"/>
-                <a:cs typeface="Yu Gothic" pitchFamily="34" charset="-120"/>
-              </a:rPr>
-              <a:t>★</a:t>
-            </a:r>
-            <a:endParaRPr lang="en-US" sz="800" dirty="0"/>
-          </a:p>
-        </p:txBody>
-      </p:sp>
-      <p:sp>
-        <p:nvSpPr>
-          <p:cNvPr id="50" name="Text 46"/>
-          <p:cNvSpPr/>
-          <p:nvPr/>
-        </p:nvSpPr>
-        <p:spPr>
-          <a:xfrm>
-            <a:off x="4709160" y="5829300"/>
-            <a:ext cx="2478024" cy="201168"/>
-          </a:xfrm>
-          <a:prstGeom prst="rect">
-            <a:avLst/>
-          </a:prstGeom>
-          <a:noFill/>
-          <a:ln/>
-        </p:spPr>
-        <p:txBody>
-          <a:bodyPr wrap="square" lIns="0" tIns="0" rIns="0" bIns="0" rtlCol="0" anchor="ctr"/>
-          <a:lstStyle/>
-          <a:p>
-            <a:pPr indent="0" marL="0">
-              <a:buNone/>
-            </a:pPr>
-            <a:r>
-              <a:rPr lang="en-US" sz="850" b="1" dirty="0">
-                <a:solidFill>
-                  <a:srgbClr val="0A3D23"/>
-                </a:solidFill>
-                <a:latin typeface="Yu Gothic" pitchFamily="34" charset="0"/>
-                <a:ea typeface="Yu Gothic" pitchFamily="34" charset="-122"/>
-                <a:cs typeface="Yu Gothic" pitchFamily="34" charset="-120"/>
-              </a:rPr>
-              <a:t>原状回復の範囲（造作・床・設備の残置）</a:t>
-            </a:r>
-            <a:endParaRPr lang="en-US" sz="850" dirty="0"/>
-          </a:p>
-        </p:txBody>
-      </p:sp>
-      <p:sp>
-        <p:nvSpPr>
-          <p:cNvPr id="51" name="Text 47"/>
-          <p:cNvSpPr/>
-          <p:nvPr/>
-        </p:nvSpPr>
-        <p:spPr>
-          <a:xfrm>
-            <a:off x="4526280" y="6044184"/>
-            <a:ext cx="164592" cy="201168"/>
-          </a:xfrm>
-          <a:prstGeom prst="rect">
-            <a:avLst/>
-          </a:prstGeom>
-          <a:noFill/>
-          <a:ln/>
-        </p:spPr>
-        <p:txBody>
-          <a:bodyPr wrap="square" lIns="0" tIns="0" rIns="0" bIns="0" rtlCol="0" anchor="ctr"/>
-          <a:lstStyle/>
-          <a:p>
-            <a:pPr indent="0" marL="0">
-              <a:buNone/>
-            </a:pPr>
-            <a:r>
-              <a:rPr lang="en-US" sz="800" b="1" dirty="0">
-                <a:solidFill>
-                  <a:srgbClr val="A8761F"/>
-                </a:solidFill>
-                <a:latin typeface="Yu Gothic" pitchFamily="34" charset="0"/>
-                <a:ea typeface="Yu Gothic" pitchFamily="34" charset="-122"/>
-                <a:cs typeface="Yu Gothic" pitchFamily="34" charset="-120"/>
-              </a:rPr>
-              <a:t>★</a:t>
-            </a:r>
-            <a:endParaRPr lang="en-US" sz="800" dirty="0"/>
-          </a:p>
-        </p:txBody>
-      </p:sp>
-      <p:sp>
-        <p:nvSpPr>
-          <p:cNvPr id="52" name="Text 48"/>
-          <p:cNvSpPr/>
-          <p:nvPr/>
-        </p:nvSpPr>
-        <p:spPr>
-          <a:xfrm>
-            <a:off x="4709160" y="6044184"/>
-            <a:ext cx="2478024" cy="201168"/>
-          </a:xfrm>
-          <a:prstGeom prst="rect">
-            <a:avLst/>
-          </a:prstGeom>
-          <a:noFill/>
-          <a:ln/>
-        </p:spPr>
-        <p:txBody>
-          <a:bodyPr wrap="square" lIns="0" tIns="0" rIns="0" bIns="0" rtlCol="0" anchor="ctr"/>
-          <a:lstStyle/>
-          <a:p>
-            <a:pPr indent="0" marL="0">
-              <a:buNone/>
-            </a:pPr>
-            <a:r>
-              <a:rPr lang="en-US" sz="850" b="1" dirty="0">
-                <a:solidFill>
-                  <a:srgbClr val="0A3D23"/>
-                </a:solidFill>
-                <a:latin typeface="Yu Gothic" pitchFamily="34" charset="0"/>
-                <a:ea typeface="Yu Gothic" pitchFamily="34" charset="-122"/>
-                <a:cs typeface="Yu Gothic" pitchFamily="34" charset="-120"/>
-              </a:rPr>
-              <a:t>残置する既存設備（給排水・電気容量・ダクト）</a:t>
-            </a:r>
-            <a:endParaRPr lang="en-US" sz="850" dirty="0"/>
-          </a:p>
-        </p:txBody>
-      </p:sp>
-      <p:sp>
-        <p:nvSpPr>
-          <p:cNvPr id="53" name="Text 49"/>
-          <p:cNvSpPr/>
-          <p:nvPr/>
-        </p:nvSpPr>
-        <p:spPr>
-          <a:xfrm>
-            <a:off x="4526280" y="6259068"/>
-            <a:ext cx="164592" cy="201168"/>
-          </a:xfrm>
-          <a:prstGeom prst="rect">
-            <a:avLst/>
-          </a:prstGeom>
-          <a:noFill/>
-          <a:ln/>
-        </p:spPr>
-        <p:txBody>
-          <a:bodyPr wrap="square" lIns="0" tIns="0" rIns="0" bIns="0" rtlCol="0" anchor="ctr"/>
-          <a:lstStyle/>
-          <a:p>
-            <a:pPr indent="0" marL="0">
-              <a:buNone/>
-            </a:pPr>
-            <a:r>
-              <a:rPr lang="en-US" sz="850" dirty="0">
-                <a:solidFill>
-                  <a:srgbClr val="7E8882"/>
-                </a:solidFill>
-                <a:latin typeface="Yu Gothic" pitchFamily="34" charset="0"/>
-                <a:ea typeface="Yu Gothic" pitchFamily="34" charset="-122"/>
-                <a:cs typeface="Yu Gothic" pitchFamily="34" charset="-120"/>
-              </a:rPr>
-              <a:t>・</a:t>
-            </a:r>
-            <a:endParaRPr lang="en-US" sz="850" dirty="0"/>
-          </a:p>
-        </p:txBody>
-      </p:sp>
-      <p:sp>
-        <p:nvSpPr>
-          <p:cNvPr id="54" name="Text 50"/>
-          <p:cNvSpPr/>
-          <p:nvPr/>
-        </p:nvSpPr>
-        <p:spPr>
-          <a:xfrm>
-            <a:off x="4709160" y="6259068"/>
-            <a:ext cx="2478024" cy="201168"/>
-          </a:xfrm>
-          <a:prstGeom prst="rect">
-            <a:avLst/>
-          </a:prstGeom>
-          <a:noFill/>
-          <a:ln/>
-        </p:spPr>
-        <p:txBody>
-          <a:bodyPr wrap="square" lIns="0" tIns="0" rIns="0" bIns="0" rtlCol="0" anchor="ctr"/>
-          <a:lstStyle/>
-          <a:p>
-            <a:pPr indent="0" marL="0">
-              <a:buNone/>
-            </a:pPr>
-            <a:r>
-              <a:rPr lang="en-US" sz="850" dirty="0">
-                <a:solidFill>
-                  <a:srgbClr val="0A3D23"/>
-                </a:solidFill>
-                <a:latin typeface="Yu Gothic" pitchFamily="34" charset="0"/>
-                <a:ea typeface="Yu Gothic" pitchFamily="34" charset="-122"/>
-                <a:cs typeface="Yu Gothic" pitchFamily="34" charset="-120"/>
-              </a:rPr>
-              <a:t>館への工事申請（様式・期限・搬入ルート）</a:t>
-            </a:r>
-            <a:endParaRPr lang="en-US" sz="850" dirty="0"/>
-          </a:p>
-        </p:txBody>
-      </p:sp>
-      <p:sp>
-        <p:nvSpPr>
-          <p:cNvPr id="55" name="Text 51"/>
-          <p:cNvSpPr/>
-          <p:nvPr/>
-        </p:nvSpPr>
-        <p:spPr>
-          <a:xfrm>
-            <a:off x="4526280" y="6473952"/>
-            <a:ext cx="164592" cy="201168"/>
-          </a:xfrm>
-          <a:prstGeom prst="rect">
-            <a:avLst/>
-          </a:prstGeom>
-          <a:noFill/>
-          <a:ln/>
-        </p:spPr>
-        <p:txBody>
-          <a:bodyPr wrap="square" lIns="0" tIns="0" rIns="0" bIns="0" rtlCol="0" anchor="ctr"/>
-          <a:lstStyle/>
-          <a:p>
-            <a:pPr indent="0" marL="0">
-              <a:buNone/>
-            </a:pPr>
-            <a:r>
-              <a:rPr lang="en-US" sz="850" dirty="0">
-                <a:solidFill>
-                  <a:srgbClr val="7E8882"/>
-                </a:solidFill>
-                <a:latin typeface="Yu Gothic" pitchFamily="34" charset="0"/>
-                <a:ea typeface="Yu Gothic" pitchFamily="34" charset="-122"/>
-                <a:cs typeface="Yu Gothic" pitchFamily="34" charset="-120"/>
-              </a:rPr>
-              <a:t>・</a:t>
-            </a:r>
-            <a:endParaRPr lang="en-US" sz="850" dirty="0"/>
-          </a:p>
-        </p:txBody>
-      </p:sp>
-      <p:sp>
-        <p:nvSpPr>
-          <p:cNvPr id="56" name="Text 52"/>
-          <p:cNvSpPr/>
-          <p:nvPr/>
-        </p:nvSpPr>
-        <p:spPr>
-          <a:xfrm>
-            <a:off x="4709160" y="6473952"/>
-            <a:ext cx="2478024" cy="201168"/>
-          </a:xfrm>
-          <a:prstGeom prst="rect">
-            <a:avLst/>
-          </a:prstGeom>
-          <a:noFill/>
-          <a:ln/>
-        </p:spPr>
-        <p:txBody>
-          <a:bodyPr wrap="square" lIns="0" tIns="0" rIns="0" bIns="0" rtlCol="0" anchor="ctr"/>
-          <a:lstStyle/>
-          <a:p>
-            <a:pPr indent="0" marL="0">
-              <a:buNone/>
-            </a:pPr>
-            <a:r>
-              <a:rPr lang="en-US" sz="850" dirty="0">
-                <a:solidFill>
-                  <a:srgbClr val="0A3D23"/>
-                </a:solidFill>
-                <a:latin typeface="Yu Gothic" pitchFamily="34" charset="0"/>
-                <a:ea typeface="Yu Gothic" pitchFamily="34" charset="-122"/>
-                <a:cs typeface="Yu Gothic" pitchFamily="34" charset="-120"/>
-              </a:rPr>
-              <a:t>サイン表記の確定（MIRAIYA Book &amp; Cafe）</a:t>
-            </a:r>
-            <a:endParaRPr lang="en-US" sz="850" dirty="0"/>
-          </a:p>
-        </p:txBody>
-      </p:sp>
-      <p:sp>
-        <p:nvSpPr>
-          <p:cNvPr id="57" name="Text 53"/>
-          <p:cNvSpPr/>
-          <p:nvPr/>
-        </p:nvSpPr>
-        <p:spPr>
-          <a:xfrm>
-            <a:off x="4526280" y="6688836"/>
-            <a:ext cx="164592" cy="201168"/>
-          </a:xfrm>
-          <a:prstGeom prst="rect">
-            <a:avLst/>
-          </a:prstGeom>
-          <a:noFill/>
-          <a:ln/>
-        </p:spPr>
-        <p:txBody>
-          <a:bodyPr wrap="square" lIns="0" tIns="0" rIns="0" bIns="0" rtlCol="0" anchor="ctr"/>
-          <a:lstStyle/>
-          <a:p>
-            <a:pPr indent="0" marL="0">
-              <a:buNone/>
-            </a:pPr>
-            <a:r>
-              <a:rPr lang="en-US" sz="850" dirty="0">
-                <a:solidFill>
-                  <a:srgbClr val="7E8882"/>
-                </a:solidFill>
-                <a:latin typeface="Yu Gothic" pitchFamily="34" charset="0"/>
-                <a:ea typeface="Yu Gothic" pitchFamily="34" charset="-122"/>
-                <a:cs typeface="Yu Gothic" pitchFamily="34" charset="-120"/>
-              </a:rPr>
-              <a:t>・</a:t>
-            </a:r>
-            <a:endParaRPr lang="en-US" sz="850" dirty="0"/>
-          </a:p>
-        </p:txBody>
-      </p:sp>
-      <p:sp>
-        <p:nvSpPr>
-          <p:cNvPr id="58" name="Text 54"/>
-          <p:cNvSpPr/>
-          <p:nvPr/>
-        </p:nvSpPr>
-        <p:spPr>
-          <a:xfrm>
-            <a:off x="4709160" y="6688836"/>
-            <a:ext cx="2478024" cy="201168"/>
-          </a:xfrm>
-          <a:prstGeom prst="rect">
-            <a:avLst/>
-          </a:prstGeom>
-          <a:noFill/>
-          <a:ln/>
-        </p:spPr>
-        <p:txBody>
-          <a:bodyPr wrap="square" lIns="0" tIns="0" rIns="0" bIns="0" rtlCol="0" anchor="ctr"/>
-          <a:lstStyle/>
-          <a:p>
-            <a:pPr indent="0" marL="0">
-              <a:buNone/>
-            </a:pPr>
-            <a:r>
-              <a:rPr lang="en-US" sz="850" dirty="0">
-                <a:solidFill>
-                  <a:srgbClr val="0A3D23"/>
-                </a:solidFill>
-                <a:latin typeface="Yu Gothic" pitchFamily="34" charset="0"/>
-                <a:ea typeface="Yu Gothic" pitchFamily="34" charset="-122"/>
-                <a:cs typeface="Yu Gothic" pitchFamily="34" charset="-120"/>
-              </a:rPr>
-              <a:t>社内稟議の進捗・決裁完了の目処</a:t>
-            </a:r>
-            <a:endParaRPr lang="en-US" sz="850" dirty="0"/>
-          </a:p>
-        </p:txBody>
-      </p:sp>
-      <p:sp>
-        <p:nvSpPr>
-          <p:cNvPr id="59" name="Text 55"/>
-          <p:cNvSpPr/>
-          <p:nvPr/>
-        </p:nvSpPr>
-        <p:spPr>
-          <a:xfrm>
-            <a:off x="4526280" y="6903720"/>
-            <a:ext cx="164592" cy="201168"/>
-          </a:xfrm>
-          <a:prstGeom prst="rect">
-            <a:avLst/>
-          </a:prstGeom>
-          <a:noFill/>
-          <a:ln/>
-        </p:spPr>
-        <p:txBody>
-          <a:bodyPr wrap="square" lIns="0" tIns="0" rIns="0" bIns="0" rtlCol="0" anchor="ctr"/>
-          <a:lstStyle/>
-          <a:p>
-            <a:pPr indent="0" marL="0">
-              <a:buNone/>
-            </a:pPr>
-            <a:r>
-              <a:rPr lang="en-US" sz="850" dirty="0">
-                <a:solidFill>
-                  <a:srgbClr val="7E8882"/>
-                </a:solidFill>
-                <a:latin typeface="Yu Gothic" pitchFamily="34" charset="0"/>
-                <a:ea typeface="Yu Gothic" pitchFamily="34" charset="-122"/>
-                <a:cs typeface="Yu Gothic" pitchFamily="34" charset="-120"/>
-              </a:rPr>
-              <a:t>・</a:t>
-            </a:r>
-            <a:endParaRPr lang="en-US" sz="850" dirty="0"/>
-          </a:p>
-        </p:txBody>
-      </p:sp>
-      <p:sp>
-        <p:nvSpPr>
-          <p:cNvPr id="60" name="Text 56"/>
-          <p:cNvSpPr/>
-          <p:nvPr/>
-        </p:nvSpPr>
-        <p:spPr>
-          <a:xfrm>
-            <a:off x="4709160" y="6903720"/>
-            <a:ext cx="2478024" cy="201168"/>
-          </a:xfrm>
-          <a:prstGeom prst="rect">
-            <a:avLst/>
-          </a:prstGeom>
-          <a:noFill/>
-          <a:ln/>
-        </p:spPr>
-        <p:txBody>
-          <a:bodyPr wrap="square" lIns="0" tIns="0" rIns="0" bIns="0" rtlCol="0" anchor="ctr"/>
-          <a:lstStyle/>
-          <a:p>
-            <a:pPr indent="0" marL="0">
-              <a:buNone/>
-            </a:pPr>
-            <a:r>
-              <a:rPr lang="en-US" sz="850" dirty="0">
-                <a:solidFill>
-                  <a:srgbClr val="0A3D23"/>
-                </a:solidFill>
-                <a:latin typeface="Yu Gothic" pitchFamily="34" charset="0"/>
-                <a:ea typeface="Yu Gothic" pitchFamily="34" charset="-122"/>
-                <a:cs typeface="Yu Gothic" pitchFamily="34" charset="-120"/>
-              </a:rPr>
-              <a:t>運営体制（営業時間・清掃補充の担当分け）</a:t>
-            </a:r>
-            <a:endParaRPr lang="en-US" sz="850" dirty="0"/>
-          </a:p>
-        </p:txBody>
-      </p:sp>
-      <p:sp>
-        <p:nvSpPr>
-          <p:cNvPr id="61" name="Text 57"/>
-          <p:cNvSpPr/>
-          <p:nvPr/>
-        </p:nvSpPr>
-        <p:spPr>
-          <a:xfrm>
-            <a:off x="7443216" y="5413248"/>
-            <a:ext cx="2660904" cy="182880"/>
-          </a:xfrm>
-          <a:prstGeom prst="rect">
-            <a:avLst/>
-          </a:prstGeom>
-          <a:noFill/>
-          <a:ln/>
-        </p:spPr>
-        <p:txBody>
-          <a:bodyPr wrap="square" lIns="0" tIns="0" rIns="0" bIns="0" rtlCol="0" anchor="ctr"/>
-          <a:lstStyle/>
-          <a:p>
-            <a:pPr indent="0" marL="0">
-              <a:buNone/>
-            </a:pPr>
-            <a:r>
-              <a:rPr lang="en-US" sz="850" b="1" dirty="0">
-                <a:solidFill>
-                  <a:srgbClr val="7E8882"/>
-                </a:solidFill>
-                <a:latin typeface="Yu Gothic" pitchFamily="34" charset="0"/>
-                <a:ea typeface="Yu Gothic" pitchFamily="34" charset="-122"/>
-                <a:cs typeface="Yu Gothic" pitchFamily="34" charset="-120"/>
-              </a:rPr>
-              <a:t>ご提供いただきたい資料</a:t>
-            </a:r>
-            <a:endParaRPr lang="en-US" sz="850" dirty="0"/>
-          </a:p>
-        </p:txBody>
-      </p:sp>
-      <p:sp>
-        <p:nvSpPr>
-          <p:cNvPr id="62" name="Text 58"/>
-          <p:cNvSpPr/>
-          <p:nvPr/>
-        </p:nvSpPr>
-        <p:spPr>
-          <a:xfrm>
-            <a:off x="7461504" y="5614416"/>
-            <a:ext cx="146304" cy="201168"/>
-          </a:xfrm>
-          <a:prstGeom prst="rect">
-            <a:avLst/>
-          </a:prstGeom>
-          <a:noFill/>
-          <a:ln/>
-        </p:spPr>
-        <p:txBody>
-          <a:bodyPr wrap="square" lIns="0" tIns="0" rIns="0" bIns="0" rtlCol="0" anchor="ctr"/>
-          <a:lstStyle/>
-          <a:p>
-            <a:pPr indent="0" marL="0">
-              <a:buNone/>
-            </a:pPr>
-            <a:r>
-              <a:rPr lang="en-US" sz="850" dirty="0">
-                <a:solidFill>
-                  <a:srgbClr val="7E8882"/>
-                </a:solidFill>
-                <a:latin typeface="Yu Gothic" pitchFamily="34" charset="0"/>
-                <a:ea typeface="Yu Gothic" pitchFamily="34" charset="-122"/>
-                <a:cs typeface="Yu Gothic" pitchFamily="34" charset="-120"/>
-              </a:rPr>
-              <a:t>・</a:t>
-            </a:r>
-            <a:endParaRPr lang="en-US" sz="850" dirty="0"/>
-          </a:p>
-        </p:txBody>
-      </p:sp>
-      <p:sp>
-        <p:nvSpPr>
-          <p:cNvPr id="63" name="Text 59"/>
-          <p:cNvSpPr/>
-          <p:nvPr/>
-        </p:nvSpPr>
-        <p:spPr>
-          <a:xfrm>
-            <a:off x="7626096" y="5614416"/>
-            <a:ext cx="2478024" cy="201168"/>
-          </a:xfrm>
-          <a:prstGeom prst="rect">
-            <a:avLst/>
-          </a:prstGeom>
-          <a:noFill/>
-          <a:ln/>
-        </p:spPr>
-        <p:txBody>
-          <a:bodyPr wrap="square" lIns="0" tIns="0" rIns="0" bIns="0" rtlCol="0" anchor="ctr"/>
-          <a:lstStyle/>
-          <a:p>
-            <a:pPr indent="0" marL="0">
-              <a:buNone/>
-            </a:pPr>
-            <a:r>
-              <a:rPr lang="en-US" sz="850" dirty="0">
-                <a:solidFill>
-                  <a:srgbClr val="0A3D23"/>
-                </a:solidFill>
-                <a:latin typeface="Yu Gothic" pitchFamily="34" charset="0"/>
-                <a:ea typeface="Yu Gothic" pitchFamily="34" charset="-122"/>
-                <a:cs typeface="Yu Gothic" pitchFamily="34" charset="-120"/>
-              </a:rPr>
-              <a:t>区画図面（平面図・展開図／CADデータ）</a:t>
-            </a:r>
-            <a:endParaRPr lang="en-US" sz="850" dirty="0"/>
-          </a:p>
-        </p:txBody>
-      </p:sp>
-      <p:sp>
-        <p:nvSpPr>
-          <p:cNvPr id="64" name="Text 60"/>
-          <p:cNvSpPr/>
-          <p:nvPr/>
-        </p:nvSpPr>
-        <p:spPr>
-          <a:xfrm>
-            <a:off x="7461504" y="5829300"/>
-            <a:ext cx="146304" cy="201168"/>
-          </a:xfrm>
-          <a:prstGeom prst="rect">
-            <a:avLst/>
-          </a:prstGeom>
-          <a:noFill/>
-          <a:ln/>
-        </p:spPr>
-        <p:txBody>
-          <a:bodyPr wrap="square" lIns="0" tIns="0" rIns="0" bIns="0" rtlCol="0" anchor="ctr"/>
-          <a:lstStyle/>
-          <a:p>
-            <a:pPr indent="0" marL="0">
-              <a:buNone/>
-            </a:pPr>
-            <a:r>
-              <a:rPr lang="en-US" sz="850" dirty="0">
-                <a:solidFill>
-                  <a:srgbClr val="7E8882"/>
-                </a:solidFill>
-                <a:latin typeface="Yu Gothic" pitchFamily="34" charset="0"/>
-                <a:ea typeface="Yu Gothic" pitchFamily="34" charset="-122"/>
-                <a:cs typeface="Yu Gothic" pitchFamily="34" charset="-120"/>
-              </a:rPr>
-              <a:t>・</a:t>
-            </a:r>
-            <a:endParaRPr lang="en-US" sz="850" dirty="0"/>
-          </a:p>
-        </p:txBody>
-      </p:sp>
-      <p:sp>
-        <p:nvSpPr>
-          <p:cNvPr id="65" name="Text 61"/>
-          <p:cNvSpPr/>
-          <p:nvPr/>
-        </p:nvSpPr>
-        <p:spPr>
-          <a:xfrm>
-            <a:off x="7626096" y="5829300"/>
-            <a:ext cx="2478024" cy="201168"/>
-          </a:xfrm>
-          <a:prstGeom prst="rect">
-            <a:avLst/>
-          </a:prstGeom>
-          <a:noFill/>
-          <a:ln/>
-        </p:spPr>
-        <p:txBody>
-          <a:bodyPr wrap="square" lIns="0" tIns="0" rIns="0" bIns="0" rtlCol="0" anchor="ctr"/>
-          <a:lstStyle/>
-          <a:p>
-            <a:pPr indent="0" marL="0">
-              <a:buNone/>
-            </a:pPr>
-            <a:r>
-              <a:rPr lang="en-US" sz="850" dirty="0">
-                <a:solidFill>
-                  <a:srgbClr val="0A3D23"/>
-                </a:solidFill>
-                <a:latin typeface="Yu Gothic" pitchFamily="34" charset="0"/>
-                <a:ea typeface="Yu Gothic" pitchFamily="34" charset="-122"/>
-                <a:cs typeface="Yu Gothic" pitchFamily="34" charset="-120"/>
-              </a:rPr>
-              <a:t>電気容量・分電盤の位置</a:t>
-            </a:r>
-            <a:endParaRPr lang="en-US" sz="850" dirty="0"/>
-          </a:p>
-        </p:txBody>
-      </p:sp>
-      <p:sp>
-        <p:nvSpPr>
-          <p:cNvPr id="66" name="Text 62"/>
-          <p:cNvSpPr/>
-          <p:nvPr/>
-        </p:nvSpPr>
-        <p:spPr>
-          <a:xfrm>
-            <a:off x="7461504" y="6044184"/>
-            <a:ext cx="146304" cy="201168"/>
-          </a:xfrm>
-          <a:prstGeom prst="rect">
-            <a:avLst/>
-          </a:prstGeom>
-          <a:noFill/>
-          <a:ln/>
-        </p:spPr>
-        <p:txBody>
-          <a:bodyPr wrap="square" lIns="0" tIns="0" rIns="0" bIns="0" rtlCol="0" anchor="ctr"/>
-          <a:lstStyle/>
-          <a:p>
-            <a:pPr indent="0" marL="0">
-              <a:buNone/>
-            </a:pPr>
-            <a:r>
-              <a:rPr lang="en-US" sz="850" dirty="0">
-                <a:solidFill>
-                  <a:srgbClr val="7E8882"/>
-                </a:solidFill>
-                <a:latin typeface="Yu Gothic" pitchFamily="34" charset="0"/>
-                <a:ea typeface="Yu Gothic" pitchFamily="34" charset="-122"/>
-                <a:cs typeface="Yu Gothic" pitchFamily="34" charset="-120"/>
-              </a:rPr>
-              <a:t>・</a:t>
-            </a:r>
-            <a:endParaRPr lang="en-US" sz="850" dirty="0"/>
-          </a:p>
-        </p:txBody>
-      </p:sp>
-      <p:sp>
-        <p:nvSpPr>
-          <p:cNvPr id="67" name="Text 63"/>
-          <p:cNvSpPr/>
-          <p:nvPr/>
-        </p:nvSpPr>
-        <p:spPr>
-          <a:xfrm>
-            <a:off x="7626096" y="6044184"/>
-            <a:ext cx="2478024" cy="201168"/>
-          </a:xfrm>
-          <a:prstGeom prst="rect">
-            <a:avLst/>
-          </a:prstGeom>
-          <a:noFill/>
-          <a:ln/>
-        </p:spPr>
-        <p:txBody>
-          <a:bodyPr wrap="square" lIns="0" tIns="0" rIns="0" bIns="0" rtlCol="0" anchor="ctr"/>
-          <a:lstStyle/>
-          <a:p>
-            <a:pPr indent="0" marL="0">
-              <a:buNone/>
-            </a:pPr>
-            <a:r>
-              <a:rPr lang="en-US" sz="850" dirty="0">
-                <a:solidFill>
-                  <a:srgbClr val="0A3D23"/>
-                </a:solidFill>
-                <a:latin typeface="Yu Gothic" pitchFamily="34" charset="0"/>
-                <a:ea typeface="Yu Gothic" pitchFamily="34" charset="-122"/>
-                <a:cs typeface="Yu Gothic" pitchFamily="34" charset="-120"/>
-              </a:rPr>
-              <a:t>給排水の位置・系統</a:t>
-            </a:r>
-            <a:endParaRPr lang="en-US" sz="850" dirty="0"/>
-          </a:p>
-        </p:txBody>
-      </p:sp>
-      <p:sp>
-        <p:nvSpPr>
-          <p:cNvPr id="68" name="Text 64"/>
-          <p:cNvSpPr/>
-          <p:nvPr/>
-        </p:nvSpPr>
-        <p:spPr>
-          <a:xfrm>
-            <a:off x="7461504" y="6259068"/>
-            <a:ext cx="146304" cy="201168"/>
-          </a:xfrm>
-          <a:prstGeom prst="rect">
-            <a:avLst/>
-          </a:prstGeom>
-          <a:noFill/>
-          <a:ln/>
-        </p:spPr>
-        <p:txBody>
-          <a:bodyPr wrap="square" lIns="0" tIns="0" rIns="0" bIns="0" rtlCol="0" anchor="ctr"/>
-          <a:lstStyle/>
-          <a:p>
-            <a:pPr indent="0" marL="0">
-              <a:buNone/>
-            </a:pPr>
-            <a:r>
-              <a:rPr lang="en-US" sz="850" dirty="0">
-                <a:solidFill>
-                  <a:srgbClr val="7E8882"/>
-                </a:solidFill>
-                <a:latin typeface="Yu Gothic" pitchFamily="34" charset="0"/>
-                <a:ea typeface="Yu Gothic" pitchFamily="34" charset="-122"/>
-                <a:cs typeface="Yu Gothic" pitchFamily="34" charset="-120"/>
-              </a:rPr>
-              <a:t>・</a:t>
-            </a:r>
-            <a:endParaRPr lang="en-US" sz="850" dirty="0"/>
-          </a:p>
-        </p:txBody>
-      </p:sp>
-      <p:sp>
-        <p:nvSpPr>
-          <p:cNvPr id="69" name="Text 65"/>
-          <p:cNvSpPr/>
-          <p:nvPr/>
-        </p:nvSpPr>
-        <p:spPr>
-          <a:xfrm>
-            <a:off x="7626096" y="6259068"/>
-            <a:ext cx="2478024" cy="201168"/>
-          </a:xfrm>
-          <a:prstGeom prst="rect">
-            <a:avLst/>
-          </a:prstGeom>
-          <a:noFill/>
-          <a:ln/>
-        </p:spPr>
-        <p:txBody>
-          <a:bodyPr wrap="square" lIns="0" tIns="0" rIns="0" bIns="0" rtlCol="0" anchor="ctr"/>
-          <a:lstStyle/>
-          <a:p>
-            <a:pPr indent="0" marL="0">
-              <a:buNone/>
-            </a:pPr>
-            <a:r>
-              <a:rPr lang="en-US" sz="850" dirty="0">
-                <a:solidFill>
-                  <a:srgbClr val="0A3D23"/>
-                </a:solidFill>
-                <a:latin typeface="Yu Gothic" pitchFamily="34" charset="0"/>
-                <a:ea typeface="Yu Gothic" pitchFamily="34" charset="-122"/>
-                <a:cs typeface="Yu Gothic" pitchFamily="34" charset="-120"/>
-              </a:rPr>
-              <a:t>現況写真（既存設備・厨房まわり）</a:t>
-            </a:r>
-            <a:endParaRPr lang="en-US" sz="850" dirty="0"/>
-          </a:p>
-        </p:txBody>
-      </p:sp>
-      <p:sp>
-        <p:nvSpPr>
-          <p:cNvPr id="70" name="Text 66"/>
-          <p:cNvSpPr/>
-          <p:nvPr/>
-        </p:nvSpPr>
-        <p:spPr>
-          <a:xfrm>
-            <a:off x="7461504" y="6473952"/>
-            <a:ext cx="146304" cy="201168"/>
-          </a:xfrm>
-          <a:prstGeom prst="rect">
-            <a:avLst/>
-          </a:prstGeom>
-          <a:noFill/>
-          <a:ln/>
-        </p:spPr>
-        <p:txBody>
-          <a:bodyPr wrap="square" lIns="0" tIns="0" rIns="0" bIns="0" rtlCol="0" anchor="ctr"/>
-          <a:lstStyle/>
-          <a:p>
-            <a:pPr indent="0" marL="0">
-              <a:buNone/>
-            </a:pPr>
-            <a:r>
-              <a:rPr lang="en-US" sz="850" dirty="0">
-                <a:solidFill>
-                  <a:srgbClr val="7E8882"/>
-                </a:solidFill>
-                <a:latin typeface="Yu Gothic" pitchFamily="34" charset="0"/>
-                <a:ea typeface="Yu Gothic" pitchFamily="34" charset="-122"/>
-                <a:cs typeface="Yu Gothic" pitchFamily="34" charset="-120"/>
-              </a:rPr>
-              <a:t>・</a:t>
-            </a:r>
-            <a:endParaRPr lang="en-US" sz="850" dirty="0"/>
-          </a:p>
-        </p:txBody>
-      </p:sp>
-      <p:sp>
-        <p:nvSpPr>
-          <p:cNvPr id="71" name="Text 67"/>
-          <p:cNvSpPr/>
-          <p:nvPr/>
-        </p:nvSpPr>
-        <p:spPr>
-          <a:xfrm>
-            <a:off x="7626096" y="6473952"/>
-            <a:ext cx="2478024" cy="201168"/>
-          </a:xfrm>
-          <a:prstGeom prst="rect">
-            <a:avLst/>
-          </a:prstGeom>
-          <a:noFill/>
-          <a:ln/>
-        </p:spPr>
-        <p:txBody>
-          <a:bodyPr wrap="square" lIns="0" tIns="0" rIns="0" bIns="0" rtlCol="0" anchor="ctr"/>
-          <a:lstStyle/>
-          <a:p>
-            <a:pPr indent="0" marL="0">
-              <a:buNone/>
-            </a:pPr>
-            <a:r>
-              <a:rPr lang="en-US" sz="850" dirty="0">
-                <a:solidFill>
-                  <a:srgbClr val="0A3D23"/>
-                </a:solidFill>
-                <a:latin typeface="Yu Gothic" pitchFamily="34" charset="0"/>
-                <a:ea typeface="Yu Gothic" pitchFamily="34" charset="-122"/>
-                <a:cs typeface="Yu Gothic" pitchFamily="34" charset="-120"/>
-              </a:rPr>
-              <a:t>館の工事規定・申請様式</a:t>
-            </a:r>
-            <a:endParaRPr lang="en-US" sz="850" dirty="0"/>
-          </a:p>
-        </p:txBody>
-      </p:sp>
-      <p:sp>
-        <p:nvSpPr>
-          <p:cNvPr id="72" name="Text 68"/>
-          <p:cNvSpPr/>
-          <p:nvPr/>
-        </p:nvSpPr>
-        <p:spPr>
-          <a:xfrm>
-            <a:off x="7461504" y="6688836"/>
-            <a:ext cx="146304" cy="201168"/>
-          </a:xfrm>
-          <a:prstGeom prst="rect">
-            <a:avLst/>
-          </a:prstGeom>
-          <a:noFill/>
-          <a:ln/>
-        </p:spPr>
-        <p:txBody>
-          <a:bodyPr wrap="square" lIns="0" tIns="0" rIns="0" bIns="0" rtlCol="0" anchor="ctr"/>
-          <a:lstStyle/>
-          <a:p>
-            <a:pPr indent="0" marL="0">
-              <a:buNone/>
-            </a:pPr>
-            <a:r>
-              <a:rPr lang="en-US" sz="850" dirty="0">
-                <a:solidFill>
-                  <a:srgbClr val="7E8882"/>
-                </a:solidFill>
-                <a:latin typeface="Yu Gothic" pitchFamily="34" charset="0"/>
-                <a:ea typeface="Yu Gothic" pitchFamily="34" charset="-122"/>
-                <a:cs typeface="Yu Gothic" pitchFamily="34" charset="-120"/>
-              </a:rPr>
-              <a:t>・</a:t>
-            </a:r>
-            <a:endParaRPr lang="en-US" sz="850" dirty="0"/>
-          </a:p>
-        </p:txBody>
-      </p:sp>
-      <p:sp>
-        <p:nvSpPr>
-          <p:cNvPr id="73" name="Text 69"/>
-          <p:cNvSpPr/>
-          <p:nvPr/>
-        </p:nvSpPr>
-        <p:spPr>
-          <a:xfrm>
-            <a:off x="7626096" y="6688836"/>
-            <a:ext cx="2478024" cy="201168"/>
-          </a:xfrm>
-          <a:prstGeom prst="rect">
-            <a:avLst/>
-          </a:prstGeom>
-          <a:noFill/>
-          <a:ln/>
-        </p:spPr>
-        <p:txBody>
-          <a:bodyPr wrap="square" lIns="0" tIns="0" rIns="0" bIns="0" rtlCol="0" anchor="ctr"/>
-          <a:lstStyle/>
-          <a:p>
-            <a:pPr indent="0" marL="0">
-              <a:buNone/>
-            </a:pPr>
-            <a:r>
-              <a:rPr lang="en-US" sz="850" dirty="0">
-                <a:solidFill>
-                  <a:srgbClr val="0A3D23"/>
-                </a:solidFill>
-                <a:latin typeface="Yu Gothic" pitchFamily="34" charset="0"/>
-                <a:ea typeface="Yu Gothic" pitchFamily="34" charset="-122"/>
-                <a:cs typeface="Yu Gothic" pitchFamily="34" charset="-120"/>
-              </a:rPr>
-              <a:t>クリエ様の原状回復条件がわかる資料</a:t>
-            </a:r>
-            <a:endParaRPr lang="en-US" sz="850" dirty="0"/>
-          </a:p>
-        </p:txBody>
-      </p:sp>
-      <p:sp>
-        <p:nvSpPr>
-          <p:cNvPr id="74" name="Text 70"/>
-          <p:cNvSpPr/>
-          <p:nvPr/>
-        </p:nvSpPr>
-        <p:spPr>
-          <a:xfrm>
-            <a:off x="384048" y="7315200"/>
-            <a:ext cx="7680960" cy="164592"/>
+              <a:t>※ 業務委託型のため、工事費のお見積り提出はございません。御社にご負担いただくのは設置工事費（30〜50万円・税抜）のみです。</a:t>
+            </a:r>
+            <a:endParaRPr lang="en-US" sz="750" dirty="0"/>
+          </a:p>
+        </p:txBody>
+      </p:sp>
+      <p:sp>
+        <p:nvSpPr>
+          <p:cNvPr id="86" name="Text 82"/>
+          <p:cNvSpPr/>
+          <p:nvPr/>
+        </p:nvSpPr>
+        <p:spPr>
+          <a:xfrm>
+            <a:off x="384048" y="7388352"/>
+            <a:ext cx="6583680" cy="146304"/>
           </a:xfrm>
           <a:prstGeom prst="rect">
             <a:avLst/>
@@ -5844,14 +6506,14 @@
       </p:sp>
       <p:sp>
         <p:nvSpPr>
-          <p:cNvPr id="75" name="Text 71"/>
-          <p:cNvSpPr/>
-          <p:nvPr/>
-        </p:nvSpPr>
-        <p:spPr>
-          <a:xfrm>
-            <a:off x="6647688" y="7315200"/>
-            <a:ext cx="3657600" cy="164592"/>
+          <p:cNvPr id="87" name="Text 83"/>
+          <p:cNvSpPr/>
+          <p:nvPr/>
+        </p:nvSpPr>
+        <p:spPr>
+          <a:xfrm>
+            <a:off x="7013448" y="7388352"/>
+            <a:ext cx="3291840" cy="146304"/>
           </a:xfrm>
           <a:prstGeom prst="rect">
             <a:avLst/>

--- a/selfcafe-miraiya-kickoff-deck/akita-schedule-sheet.pptx
+++ b/selfcafe-miraiya-kickoff-deck/akita-schedule-sheet.pptx
@@ -4243,7 +4243,7 @@
         <p:spPr>
           <a:xfrm>
             <a:off x="603504" y="5449824"/>
-            <a:ext cx="146304" cy="173736"/>
+            <a:ext cx="146304" cy="169164"/>
           </a:xfrm>
           <a:prstGeom prst="rect">
             <a:avLst/>
@@ -4282,7 +4282,7 @@
         <p:spPr>
           <a:xfrm>
             <a:off x="768096" y="5449824"/>
-            <a:ext cx="3118104" cy="173736"/>
+            <a:ext cx="3118104" cy="169164"/>
           </a:xfrm>
           <a:prstGeom prst="rect">
             <a:avLst/>
@@ -4320,8 +4320,8 @@
         </p:nvSpPr>
         <p:spPr>
           <a:xfrm>
-            <a:off x="603504" y="5623560"/>
-            <a:ext cx="146304" cy="173736"/>
+            <a:off x="603504" y="5618988"/>
+            <a:ext cx="146304" cy="169164"/>
           </a:xfrm>
           <a:prstGeom prst="rect">
             <a:avLst/>
@@ -4359,8 +4359,8 @@
         </p:nvSpPr>
         <p:spPr>
           <a:xfrm>
-            <a:off x="768096" y="5623560"/>
-            <a:ext cx="3118104" cy="173736"/>
+            <a:off x="768096" y="5618988"/>
+            <a:ext cx="3118104" cy="169164"/>
           </a:xfrm>
           <a:prstGeom prst="rect">
             <a:avLst/>
@@ -4398,8 +4398,8 @@
         </p:nvSpPr>
         <p:spPr>
           <a:xfrm>
-            <a:off x="603504" y="5797296"/>
-            <a:ext cx="146304" cy="173736"/>
+            <a:off x="603504" y="5788152"/>
+            <a:ext cx="146304" cy="169164"/>
           </a:xfrm>
           <a:prstGeom prst="rect">
             <a:avLst/>
@@ -4437,8 +4437,8 @@
         </p:nvSpPr>
         <p:spPr>
           <a:xfrm>
-            <a:off x="768096" y="5797296"/>
-            <a:ext cx="3118104" cy="173736"/>
+            <a:off x="768096" y="5788152"/>
+            <a:ext cx="3118104" cy="169164"/>
           </a:xfrm>
           <a:prstGeom prst="rect">
             <a:avLst/>
@@ -4476,8 +4476,8 @@
         </p:nvSpPr>
         <p:spPr>
           <a:xfrm>
-            <a:off x="603504" y="5971032"/>
-            <a:ext cx="146304" cy="173736"/>
+            <a:off x="603504" y="5957316"/>
+            <a:ext cx="146304" cy="169164"/>
           </a:xfrm>
           <a:prstGeom prst="rect">
             <a:avLst/>
@@ -4515,8 +4515,8 @@
         </p:nvSpPr>
         <p:spPr>
           <a:xfrm>
-            <a:off x="768096" y="5971032"/>
-            <a:ext cx="3118104" cy="173736"/>
+            <a:off x="768096" y="5957316"/>
+            <a:ext cx="3118104" cy="169164"/>
           </a:xfrm>
           <a:prstGeom prst="rect">
             <a:avLst/>
@@ -4554,8 +4554,8 @@
         </p:nvSpPr>
         <p:spPr>
           <a:xfrm>
-            <a:off x="603504" y="6144768"/>
-            <a:ext cx="146304" cy="173736"/>
+            <a:off x="603504" y="6126480"/>
+            <a:ext cx="146304" cy="169164"/>
           </a:xfrm>
           <a:prstGeom prst="rect">
             <a:avLst/>
@@ -4593,8 +4593,8 @@
         </p:nvSpPr>
         <p:spPr>
           <a:xfrm>
-            <a:off x="768096" y="6144768"/>
-            <a:ext cx="3118104" cy="173736"/>
+            <a:off x="768096" y="6126480"/>
+            <a:ext cx="3118104" cy="169164"/>
           </a:xfrm>
           <a:prstGeom prst="rect">
             <a:avLst/>
@@ -4632,8 +4632,8 @@
         </p:nvSpPr>
         <p:spPr>
           <a:xfrm>
-            <a:off x="603504" y="6318504"/>
-            <a:ext cx="146304" cy="173736"/>
+            <a:off x="603504" y="6295644"/>
+            <a:ext cx="146304" cy="169164"/>
           </a:xfrm>
           <a:prstGeom prst="rect">
             <a:avLst/>
@@ -4671,8 +4671,8 @@
         </p:nvSpPr>
         <p:spPr>
           <a:xfrm>
-            <a:off x="768096" y="6318504"/>
-            <a:ext cx="3118104" cy="173736"/>
+            <a:off x="768096" y="6295644"/>
+            <a:ext cx="3118104" cy="169164"/>
           </a:xfrm>
           <a:prstGeom prst="rect">
             <a:avLst/>
@@ -4710,8 +4710,8 @@
         </p:nvSpPr>
         <p:spPr>
           <a:xfrm>
-            <a:off x="603504" y="6492240"/>
-            <a:ext cx="146304" cy="173736"/>
+            <a:off x="603504" y="6464808"/>
+            <a:ext cx="146304" cy="169164"/>
           </a:xfrm>
           <a:prstGeom prst="rect">
             <a:avLst/>
@@ -4749,8 +4749,8 @@
         </p:nvSpPr>
         <p:spPr>
           <a:xfrm>
-            <a:off x="768096" y="6492240"/>
-            <a:ext cx="3118104" cy="173736"/>
+            <a:off x="768096" y="6464808"/>
+            <a:ext cx="3118104" cy="169164"/>
           </a:xfrm>
           <a:prstGeom prst="rect">
             <a:avLst/>
@@ -4788,8 +4788,8 @@
         </p:nvSpPr>
         <p:spPr>
           <a:xfrm>
-            <a:off x="603504" y="6665976"/>
-            <a:ext cx="146304" cy="173736"/>
+            <a:off x="603504" y="6633972"/>
+            <a:ext cx="146304" cy="169164"/>
           </a:xfrm>
           <a:prstGeom prst="rect">
             <a:avLst/>
@@ -4827,8 +4827,8 @@
         </p:nvSpPr>
         <p:spPr>
           <a:xfrm>
-            <a:off x="768096" y="6665976"/>
-            <a:ext cx="3118104" cy="173736"/>
+            <a:off x="768096" y="6633972"/>
+            <a:ext cx="3118104" cy="169164"/>
           </a:xfrm>
           <a:prstGeom prst="rect">
             <a:avLst/>
@@ -4866,8 +4866,8 @@
         </p:nvSpPr>
         <p:spPr>
           <a:xfrm>
-            <a:off x="603504" y="6839712"/>
-            <a:ext cx="146304" cy="173736"/>
+            <a:off x="603504" y="6803136"/>
+            <a:ext cx="146304" cy="169164"/>
           </a:xfrm>
           <a:prstGeom prst="rect">
             <a:avLst/>
@@ -4905,8 +4905,8 @@
         </p:nvSpPr>
         <p:spPr>
           <a:xfrm>
-            <a:off x="768096" y="6839712"/>
-            <a:ext cx="3118104" cy="173736"/>
+            <a:off x="768096" y="6803136"/>
+            <a:ext cx="3118104" cy="169164"/>
           </a:xfrm>
           <a:prstGeom prst="rect">
             <a:avLst/>
@@ -4944,8 +4944,8 @@
         </p:nvSpPr>
         <p:spPr>
           <a:xfrm>
-            <a:off x="603504" y="7013448"/>
-            <a:ext cx="146304" cy="173736"/>
+            <a:off x="603504" y="6972300"/>
+            <a:ext cx="146304" cy="169164"/>
           </a:xfrm>
           <a:prstGeom prst="rect">
             <a:avLst/>
@@ -4983,8 +4983,8 @@
         </p:nvSpPr>
         <p:spPr>
           <a:xfrm>
-            <a:off x="768096" y="7013448"/>
-            <a:ext cx="3118104" cy="173736"/>
+            <a:off x="768096" y="6972300"/>
+            <a:ext cx="3118104" cy="169164"/>
           </a:xfrm>
           <a:prstGeom prst="rect">
             <a:avLst/>
@@ -5147,24 +5147,24 @@
         </p:nvSpPr>
         <p:spPr>
           <a:xfrm>
-            <a:off x="4526280" y="5577840"/>
-            <a:ext cx="164592" cy="178308"/>
-          </a:xfrm>
-          <a:prstGeom prst="rect">
-            <a:avLst/>
-          </a:prstGeom>
-          <a:noFill/>
-          <a:ln/>
-        </p:spPr>
-        <p:txBody>
-          <a:bodyPr wrap="square" lIns="0" tIns="0" rIns="0" bIns="0" rtlCol="0" anchor="ctr"/>
-          <a:lstStyle/>
-          <a:p>
-            <a:pPr indent="0" marL="0">
-              <a:buNone/>
-            </a:pPr>
-            <a:r>
-              <a:rPr lang="en-US" sz="750" b="1" dirty="0">
+            <a:off x="4526280" y="5559552"/>
+            <a:ext cx="164592" cy="155448"/>
+          </a:xfrm>
+          <a:prstGeom prst="rect">
+            <a:avLst/>
+          </a:prstGeom>
+          <a:noFill/>
+          <a:ln/>
+        </p:spPr>
+        <p:txBody>
+          <a:bodyPr wrap="square" lIns="0" tIns="0" rIns="0" bIns="0" rtlCol="0" anchor="ctr"/>
+          <a:lstStyle/>
+          <a:p>
+            <a:pPr indent="0" marL="0">
+              <a:buNone/>
+            </a:pPr>
+            <a:r>
+              <a:rPr lang="en-US" sz="700" b="1" dirty="0">
                 <a:solidFill>
                   <a:srgbClr val="A8761F"/>
                 </a:solidFill>
@@ -5174,7 +5174,7 @@
               </a:rPr>
               <a:t>★</a:t>
             </a:r>
-            <a:endParaRPr lang="en-US" sz="750" dirty="0"/>
+            <a:endParaRPr lang="en-US" sz="700" dirty="0"/>
           </a:p>
         </p:txBody>
       </p:sp>
@@ -5186,24 +5186,24 @@
         </p:nvSpPr>
         <p:spPr>
           <a:xfrm>
-            <a:off x="4709160" y="5577840"/>
-            <a:ext cx="2478024" cy="178308"/>
-          </a:xfrm>
-          <a:prstGeom prst="rect">
-            <a:avLst/>
-          </a:prstGeom>
-          <a:noFill/>
-          <a:ln/>
-        </p:spPr>
-        <p:txBody>
-          <a:bodyPr wrap="square" lIns="0" tIns="0" rIns="0" bIns="0" rtlCol="0" anchor="ctr"/>
-          <a:lstStyle/>
-          <a:p>
-            <a:pPr indent="0" marL="0">
-              <a:buNone/>
-            </a:pPr>
-            <a:r>
-              <a:rPr lang="en-US" sz="850" b="1" dirty="0">
+            <a:off x="4709160" y="5559552"/>
+            <a:ext cx="2478024" cy="155448"/>
+          </a:xfrm>
+          <a:prstGeom prst="rect">
+            <a:avLst/>
+          </a:prstGeom>
+          <a:noFill/>
+          <a:ln/>
+        </p:spPr>
+        <p:txBody>
+          <a:bodyPr wrap="square" lIns="0" tIns="0" rIns="0" bIns="0" rtlCol="0" anchor="ctr"/>
+          <a:lstStyle/>
+          <a:p>
+            <a:pPr indent="0" marL="0">
+              <a:buNone/>
+            </a:pPr>
+            <a:r>
+              <a:rPr lang="en-US" sz="800" b="1" dirty="0">
                 <a:solidFill>
                   <a:srgbClr val="0A3D23"/>
                 </a:solidFill>
@@ -5213,7 +5213,7 @@
               </a:rPr>
               <a:t>クリエ様の解約条件・閉店日の確定</a:t>
             </a:r>
-            <a:endParaRPr lang="en-US" sz="850" dirty="0"/>
+            <a:endParaRPr lang="en-US" sz="800" dirty="0"/>
           </a:p>
         </p:txBody>
       </p:sp>
@@ -5225,24 +5225,24 @@
         </p:nvSpPr>
         <p:spPr>
           <a:xfrm>
-            <a:off x="4526280" y="5756148"/>
-            <a:ext cx="164592" cy="178308"/>
-          </a:xfrm>
-          <a:prstGeom prst="rect">
-            <a:avLst/>
-          </a:prstGeom>
-          <a:noFill/>
-          <a:ln/>
-        </p:spPr>
-        <p:txBody>
-          <a:bodyPr wrap="square" lIns="0" tIns="0" rIns="0" bIns="0" rtlCol="0" anchor="ctr"/>
-          <a:lstStyle/>
-          <a:p>
-            <a:pPr indent="0" marL="0">
-              <a:buNone/>
-            </a:pPr>
-            <a:r>
-              <a:rPr lang="en-US" sz="750" b="1" dirty="0">
+            <a:off x="4526280" y="5715000"/>
+            <a:ext cx="164592" cy="155448"/>
+          </a:xfrm>
+          <a:prstGeom prst="rect">
+            <a:avLst/>
+          </a:prstGeom>
+          <a:noFill/>
+          <a:ln/>
+        </p:spPr>
+        <p:txBody>
+          <a:bodyPr wrap="square" lIns="0" tIns="0" rIns="0" bIns="0" rtlCol="0" anchor="ctr"/>
+          <a:lstStyle/>
+          <a:p>
+            <a:pPr indent="0" marL="0">
+              <a:buNone/>
+            </a:pPr>
+            <a:r>
+              <a:rPr lang="en-US" sz="700" b="1" dirty="0">
                 <a:solidFill>
                   <a:srgbClr val="A8761F"/>
                 </a:solidFill>
@@ -5252,7 +5252,7 @@
               </a:rPr>
               <a:t>★</a:t>
             </a:r>
-            <a:endParaRPr lang="en-US" sz="750" dirty="0"/>
+            <a:endParaRPr lang="en-US" sz="700" dirty="0"/>
           </a:p>
         </p:txBody>
       </p:sp>
@@ -5264,24 +5264,24 @@
         </p:nvSpPr>
         <p:spPr>
           <a:xfrm>
-            <a:off x="4709160" y="5756148"/>
-            <a:ext cx="2478024" cy="178308"/>
-          </a:xfrm>
-          <a:prstGeom prst="rect">
-            <a:avLst/>
-          </a:prstGeom>
-          <a:noFill/>
-          <a:ln/>
-        </p:spPr>
-        <p:txBody>
-          <a:bodyPr wrap="square" lIns="0" tIns="0" rIns="0" bIns="0" rtlCol="0" anchor="ctr"/>
-          <a:lstStyle/>
-          <a:p>
-            <a:pPr indent="0" marL="0">
-              <a:buNone/>
-            </a:pPr>
-            <a:r>
-              <a:rPr lang="en-US" sz="850" b="1" dirty="0">
+            <a:off x="4709160" y="5715000"/>
+            <a:ext cx="2478024" cy="155448"/>
+          </a:xfrm>
+          <a:prstGeom prst="rect">
+            <a:avLst/>
+          </a:prstGeom>
+          <a:noFill/>
+          <a:ln/>
+        </p:spPr>
+        <p:txBody>
+          <a:bodyPr wrap="square" lIns="0" tIns="0" rIns="0" bIns="0" rtlCol="0" anchor="ctr"/>
+          <a:lstStyle/>
+          <a:p>
+            <a:pPr indent="0" marL="0">
+              <a:buNone/>
+            </a:pPr>
+            <a:r>
+              <a:rPr lang="en-US" sz="800" b="1" dirty="0">
                 <a:solidFill>
                   <a:srgbClr val="0A3D23"/>
                 </a:solidFill>
@@ -5291,7 +5291,7 @@
               </a:rPr>
               <a:t>原状回復の範囲（造作・床・設備の残置）</a:t>
             </a:r>
-            <a:endParaRPr lang="en-US" sz="850" dirty="0"/>
+            <a:endParaRPr lang="en-US" sz="800" dirty="0"/>
           </a:p>
         </p:txBody>
       </p:sp>
@@ -5303,24 +5303,24 @@
         </p:nvSpPr>
         <p:spPr>
           <a:xfrm>
-            <a:off x="4526280" y="5934456"/>
-            <a:ext cx="164592" cy="178308"/>
-          </a:xfrm>
-          <a:prstGeom prst="rect">
-            <a:avLst/>
-          </a:prstGeom>
-          <a:noFill/>
-          <a:ln/>
-        </p:spPr>
-        <p:txBody>
-          <a:bodyPr wrap="square" lIns="0" tIns="0" rIns="0" bIns="0" rtlCol="0" anchor="ctr"/>
-          <a:lstStyle/>
-          <a:p>
-            <a:pPr indent="0" marL="0">
-              <a:buNone/>
-            </a:pPr>
-            <a:r>
-              <a:rPr lang="en-US" sz="750" b="1" dirty="0">
+            <a:off x="4526280" y="5870448"/>
+            <a:ext cx="164592" cy="155448"/>
+          </a:xfrm>
+          <a:prstGeom prst="rect">
+            <a:avLst/>
+          </a:prstGeom>
+          <a:noFill/>
+          <a:ln/>
+        </p:spPr>
+        <p:txBody>
+          <a:bodyPr wrap="square" lIns="0" tIns="0" rIns="0" bIns="0" rtlCol="0" anchor="ctr"/>
+          <a:lstStyle/>
+          <a:p>
+            <a:pPr indent="0" marL="0">
+              <a:buNone/>
+            </a:pPr>
+            <a:r>
+              <a:rPr lang="en-US" sz="700" b="1" dirty="0">
                 <a:solidFill>
                   <a:srgbClr val="A8761F"/>
                 </a:solidFill>
@@ -5330,7 +5330,7 @@
               </a:rPr>
               <a:t>★</a:t>
             </a:r>
-            <a:endParaRPr lang="en-US" sz="750" dirty="0"/>
+            <a:endParaRPr lang="en-US" sz="700" dirty="0"/>
           </a:p>
         </p:txBody>
       </p:sp>
@@ -5342,24 +5342,24 @@
         </p:nvSpPr>
         <p:spPr>
           <a:xfrm>
-            <a:off x="4709160" y="5934456"/>
-            <a:ext cx="2478024" cy="178308"/>
-          </a:xfrm>
-          <a:prstGeom prst="rect">
-            <a:avLst/>
-          </a:prstGeom>
-          <a:noFill/>
-          <a:ln/>
-        </p:spPr>
-        <p:txBody>
-          <a:bodyPr wrap="square" lIns="0" tIns="0" rIns="0" bIns="0" rtlCol="0" anchor="ctr"/>
-          <a:lstStyle/>
-          <a:p>
-            <a:pPr indent="0" marL="0">
-              <a:buNone/>
-            </a:pPr>
-            <a:r>
-              <a:rPr lang="en-US" sz="850" b="1" dirty="0">
+            <a:off x="4709160" y="5870448"/>
+            <a:ext cx="2478024" cy="155448"/>
+          </a:xfrm>
+          <a:prstGeom prst="rect">
+            <a:avLst/>
+          </a:prstGeom>
+          <a:noFill/>
+          <a:ln/>
+        </p:spPr>
+        <p:txBody>
+          <a:bodyPr wrap="square" lIns="0" tIns="0" rIns="0" bIns="0" rtlCol="0" anchor="ctr"/>
+          <a:lstStyle/>
+          <a:p>
+            <a:pPr indent="0" marL="0">
+              <a:buNone/>
+            </a:pPr>
+            <a:r>
+              <a:rPr lang="en-US" sz="800" b="1" dirty="0">
                 <a:solidFill>
                   <a:srgbClr val="0A3D23"/>
                 </a:solidFill>
@@ -5369,7 +5369,7 @@
               </a:rPr>
               <a:t>残置する既存設備（給排水・電気容量）</a:t>
             </a:r>
-            <a:endParaRPr lang="en-US" sz="850" dirty="0"/>
+            <a:endParaRPr lang="en-US" sz="800" dirty="0"/>
           </a:p>
         </p:txBody>
       </p:sp>
@@ -5381,24 +5381,24 @@
         </p:nvSpPr>
         <p:spPr>
           <a:xfrm>
-            <a:off x="4526280" y="6112764"/>
-            <a:ext cx="164592" cy="178308"/>
-          </a:xfrm>
-          <a:prstGeom prst="rect">
-            <a:avLst/>
-          </a:prstGeom>
-          <a:noFill/>
-          <a:ln/>
-        </p:spPr>
-        <p:txBody>
-          <a:bodyPr wrap="square" lIns="0" tIns="0" rIns="0" bIns="0" rtlCol="0" anchor="ctr"/>
-          <a:lstStyle/>
-          <a:p>
-            <a:pPr indent="0" marL="0">
-              <a:buNone/>
-            </a:pPr>
-            <a:r>
-              <a:rPr lang="en-US" sz="750" b="1" dirty="0">
+            <a:off x="4526280" y="6025896"/>
+            <a:ext cx="164592" cy="155448"/>
+          </a:xfrm>
+          <a:prstGeom prst="rect">
+            <a:avLst/>
+          </a:prstGeom>
+          <a:noFill/>
+          <a:ln/>
+        </p:spPr>
+        <p:txBody>
+          <a:bodyPr wrap="square" lIns="0" tIns="0" rIns="0" bIns="0" rtlCol="0" anchor="ctr"/>
+          <a:lstStyle/>
+          <a:p>
+            <a:pPr indent="0" marL="0">
+              <a:buNone/>
+            </a:pPr>
+            <a:r>
+              <a:rPr lang="en-US" sz="700" b="1" dirty="0">
                 <a:solidFill>
                   <a:srgbClr val="A8761F"/>
                 </a:solidFill>
@@ -5408,7 +5408,7 @@
               </a:rPr>
               <a:t>★</a:t>
             </a:r>
-            <a:endParaRPr lang="en-US" sz="750" dirty="0"/>
+            <a:endParaRPr lang="en-US" sz="700" dirty="0"/>
           </a:p>
         </p:txBody>
       </p:sp>
@@ -5420,24 +5420,24 @@
         </p:nvSpPr>
         <p:spPr>
           <a:xfrm>
-            <a:off x="4709160" y="6112764"/>
-            <a:ext cx="2478024" cy="178308"/>
-          </a:xfrm>
-          <a:prstGeom prst="rect">
-            <a:avLst/>
-          </a:prstGeom>
-          <a:noFill/>
-          <a:ln/>
-        </p:spPr>
-        <p:txBody>
-          <a:bodyPr wrap="square" lIns="0" tIns="0" rIns="0" bIns="0" rtlCol="0" anchor="ctr"/>
-          <a:lstStyle/>
-          <a:p>
-            <a:pPr indent="0" marL="0">
-              <a:buNone/>
-            </a:pPr>
-            <a:r>
-              <a:rPr lang="en-US" sz="850" b="1" dirty="0">
+            <a:off x="4709160" y="6025896"/>
+            <a:ext cx="2478024" cy="155448"/>
+          </a:xfrm>
+          <a:prstGeom prst="rect">
+            <a:avLst/>
+          </a:prstGeom>
+          <a:noFill/>
+          <a:ln/>
+        </p:spPr>
+        <p:txBody>
+          <a:bodyPr wrap="square" lIns="0" tIns="0" rIns="0" bIns="0" rtlCol="0" anchor="ctr"/>
+          <a:lstStyle/>
+          <a:p>
+            <a:pPr indent="0" marL="0">
+              <a:buNone/>
+            </a:pPr>
+            <a:r>
+              <a:rPr lang="en-US" sz="800" b="1" dirty="0">
                 <a:solidFill>
                   <a:srgbClr val="0A3D23"/>
                 </a:solidFill>
@@ -5447,7 +5447,7 @@
               </a:rPr>
               <a:t>ネット回線の新規敷設（12月中に申込）</a:t>
             </a:r>
-            <a:endParaRPr lang="en-US" sz="850" dirty="0"/>
+            <a:endParaRPr lang="en-US" sz="800" dirty="0"/>
           </a:p>
         </p:txBody>
       </p:sp>
@@ -5459,24 +5459,24 @@
         </p:nvSpPr>
         <p:spPr>
           <a:xfrm>
-            <a:off x="4526280" y="6291072"/>
-            <a:ext cx="164592" cy="178308"/>
-          </a:xfrm>
-          <a:prstGeom prst="rect">
-            <a:avLst/>
-          </a:prstGeom>
-          <a:noFill/>
-          <a:ln/>
-        </p:spPr>
-        <p:txBody>
-          <a:bodyPr wrap="square" lIns="0" tIns="0" rIns="0" bIns="0" rtlCol="0" anchor="ctr"/>
-          <a:lstStyle/>
-          <a:p>
-            <a:pPr indent="0" marL="0">
-              <a:buNone/>
-            </a:pPr>
-            <a:r>
-              <a:rPr lang="en-US" sz="850" dirty="0">
+            <a:off x="4526280" y="6181344"/>
+            <a:ext cx="164592" cy="155448"/>
+          </a:xfrm>
+          <a:prstGeom prst="rect">
+            <a:avLst/>
+          </a:prstGeom>
+          <a:noFill/>
+          <a:ln/>
+        </p:spPr>
+        <p:txBody>
+          <a:bodyPr wrap="square" lIns="0" tIns="0" rIns="0" bIns="0" rtlCol="0" anchor="ctr"/>
+          <a:lstStyle/>
+          <a:p>
+            <a:pPr indent="0" marL="0">
+              <a:buNone/>
+            </a:pPr>
+            <a:r>
+              <a:rPr lang="en-US" sz="800" dirty="0">
                 <a:solidFill>
                   <a:srgbClr val="7E8882"/>
                 </a:solidFill>
@@ -5486,7 +5486,7 @@
               </a:rPr>
               <a:t>・</a:t>
             </a:r>
-            <a:endParaRPr lang="en-US" sz="850" dirty="0"/>
+            <a:endParaRPr lang="en-US" sz="800" dirty="0"/>
           </a:p>
         </p:txBody>
       </p:sp>
@@ -5498,24 +5498,24 @@
         </p:nvSpPr>
         <p:spPr>
           <a:xfrm>
-            <a:off x="4709160" y="6291072"/>
-            <a:ext cx="2478024" cy="178308"/>
-          </a:xfrm>
-          <a:prstGeom prst="rect">
-            <a:avLst/>
-          </a:prstGeom>
-          <a:noFill/>
-          <a:ln/>
-        </p:spPr>
-        <p:txBody>
-          <a:bodyPr wrap="square" lIns="0" tIns="0" rIns="0" bIns="0" rtlCol="0" anchor="ctr"/>
-          <a:lstStyle/>
-          <a:p>
-            <a:pPr indent="0" marL="0">
-              <a:buNone/>
-            </a:pPr>
-            <a:r>
-              <a:rPr lang="en-US" sz="850" dirty="0">
+            <a:off x="4709160" y="6181344"/>
+            <a:ext cx="2478024" cy="155448"/>
+          </a:xfrm>
+          <a:prstGeom prst="rect">
+            <a:avLst/>
+          </a:prstGeom>
+          <a:noFill/>
+          <a:ln/>
+        </p:spPr>
+        <p:txBody>
+          <a:bodyPr wrap="square" lIns="0" tIns="0" rIns="0" bIns="0" rtlCol="0" anchor="ctr"/>
+          <a:lstStyle/>
+          <a:p>
+            <a:pPr indent="0" marL="0">
+              <a:buNone/>
+            </a:pPr>
+            <a:r>
+              <a:rPr lang="en-US" sz="800" dirty="0">
                 <a:solidFill>
                   <a:srgbClr val="0A3D23"/>
                 </a:solidFill>
@@ -5523,38 +5523,116 @@
                 <a:ea typeface="Yu Gothic" pitchFamily="34" charset="-122"/>
                 <a:cs typeface="Yu Gothic" pitchFamily="34" charset="-120"/>
               </a:rPr>
+              <a:t>開業日の確定（契約期間の起算日）</a:t>
+            </a:r>
+            <a:endParaRPr lang="en-US" sz="800" dirty="0"/>
+          </a:p>
+        </p:txBody>
+      </p:sp>
+      <p:sp>
+        <p:nvSpPr>
+          <p:cNvPr id="62" name="Text 58"/>
+          <p:cNvSpPr/>
+          <p:nvPr/>
+        </p:nvSpPr>
+        <p:spPr>
+          <a:xfrm>
+            <a:off x="4526280" y="6336792"/>
+            <a:ext cx="164592" cy="155448"/>
+          </a:xfrm>
+          <a:prstGeom prst="rect">
+            <a:avLst/>
+          </a:prstGeom>
+          <a:noFill/>
+          <a:ln/>
+        </p:spPr>
+        <p:txBody>
+          <a:bodyPr wrap="square" lIns="0" tIns="0" rIns="0" bIns="0" rtlCol="0" anchor="ctr"/>
+          <a:lstStyle/>
+          <a:p>
+            <a:pPr indent="0" marL="0">
+              <a:buNone/>
+            </a:pPr>
+            <a:r>
+              <a:rPr lang="en-US" sz="800" dirty="0">
+                <a:solidFill>
+                  <a:srgbClr val="7E8882"/>
+                </a:solidFill>
+                <a:latin typeface="Yu Gothic" pitchFamily="34" charset="0"/>
+                <a:ea typeface="Yu Gothic" pitchFamily="34" charset="-122"/>
+                <a:cs typeface="Yu Gothic" pitchFamily="34" charset="-120"/>
+              </a:rPr>
+              <a:t>・</a:t>
+            </a:r>
+            <a:endParaRPr lang="en-US" sz="800" dirty="0"/>
+          </a:p>
+        </p:txBody>
+      </p:sp>
+      <p:sp>
+        <p:nvSpPr>
+          <p:cNvPr id="63" name="Text 59"/>
+          <p:cNvSpPr/>
+          <p:nvPr/>
+        </p:nvSpPr>
+        <p:spPr>
+          <a:xfrm>
+            <a:off x="4709160" y="6336792"/>
+            <a:ext cx="2478024" cy="155448"/>
+          </a:xfrm>
+          <a:prstGeom prst="rect">
+            <a:avLst/>
+          </a:prstGeom>
+          <a:noFill/>
+          <a:ln/>
+        </p:spPr>
+        <p:txBody>
+          <a:bodyPr wrap="square" lIns="0" tIns="0" rIns="0" bIns="0" rtlCol="0" anchor="ctr"/>
+          <a:lstStyle/>
+          <a:p>
+            <a:pPr indent="0" marL="0">
+              <a:buNone/>
+            </a:pPr>
+            <a:r>
+              <a:rPr lang="en-US" sz="800" dirty="0">
+                <a:solidFill>
+                  <a:srgbClr val="0A3D23"/>
+                </a:solidFill>
+                <a:latin typeface="Yu Gothic" pitchFamily="34" charset="0"/>
+                <a:ea typeface="Yu Gothic" pitchFamily="34" charset="-122"/>
+                <a:cs typeface="Yu Gothic" pitchFamily="34" charset="-120"/>
+              </a:rPr>
               <a:t>カメラ映像（個人情報）の取扱いの取決め</a:t>
             </a:r>
-            <a:endParaRPr lang="en-US" sz="850" dirty="0"/>
-          </a:p>
-        </p:txBody>
-      </p:sp>
-      <p:sp>
-        <p:nvSpPr>
-          <p:cNvPr id="62" name="Text 58"/>
-          <p:cNvSpPr/>
-          <p:nvPr/>
-        </p:nvSpPr>
-        <p:spPr>
-          <a:xfrm>
-            <a:off x="4526280" y="6469380"/>
-            <a:ext cx="164592" cy="178308"/>
-          </a:xfrm>
-          <a:prstGeom prst="rect">
-            <a:avLst/>
-          </a:prstGeom>
-          <a:noFill/>
-          <a:ln/>
-        </p:spPr>
-        <p:txBody>
-          <a:bodyPr wrap="square" lIns="0" tIns="0" rIns="0" bIns="0" rtlCol="0" anchor="ctr"/>
-          <a:lstStyle/>
-          <a:p>
-            <a:pPr indent="0" marL="0">
-              <a:buNone/>
-            </a:pPr>
-            <a:r>
-              <a:rPr lang="en-US" sz="850" dirty="0">
+            <a:endParaRPr lang="en-US" sz="800" dirty="0"/>
+          </a:p>
+        </p:txBody>
+      </p:sp>
+      <p:sp>
+        <p:nvSpPr>
+          <p:cNvPr id="64" name="Text 60"/>
+          <p:cNvSpPr/>
+          <p:nvPr/>
+        </p:nvSpPr>
+        <p:spPr>
+          <a:xfrm>
+            <a:off x="4526280" y="6492240"/>
+            <a:ext cx="164592" cy="155448"/>
+          </a:xfrm>
+          <a:prstGeom prst="rect">
+            <a:avLst/>
+          </a:prstGeom>
+          <a:noFill/>
+          <a:ln/>
+        </p:spPr>
+        <p:txBody>
+          <a:bodyPr wrap="square" lIns="0" tIns="0" rIns="0" bIns="0" rtlCol="0" anchor="ctr"/>
+          <a:lstStyle/>
+          <a:p>
+            <a:pPr indent="0" marL="0">
+              <a:buNone/>
+            </a:pPr>
+            <a:r>
+              <a:rPr lang="en-US" sz="800" dirty="0">
                 <a:solidFill>
                   <a:srgbClr val="7E8882"/>
                 </a:solidFill>
@@ -5564,36 +5642,36 @@
               </a:rPr>
               <a:t>・</a:t>
             </a:r>
-            <a:endParaRPr lang="en-US" sz="850" dirty="0"/>
-          </a:p>
-        </p:txBody>
-      </p:sp>
-      <p:sp>
-        <p:nvSpPr>
-          <p:cNvPr id="63" name="Text 59"/>
-          <p:cNvSpPr/>
-          <p:nvPr/>
-        </p:nvSpPr>
-        <p:spPr>
-          <a:xfrm>
-            <a:off x="4709160" y="6469380"/>
-            <a:ext cx="2478024" cy="178308"/>
-          </a:xfrm>
-          <a:prstGeom prst="rect">
-            <a:avLst/>
-          </a:prstGeom>
-          <a:noFill/>
-          <a:ln/>
-        </p:spPr>
-        <p:txBody>
-          <a:bodyPr wrap="square" lIns="0" tIns="0" rIns="0" bIns="0" rtlCol="0" anchor="ctr"/>
-          <a:lstStyle/>
-          <a:p>
-            <a:pPr indent="0" marL="0">
-              <a:buNone/>
-            </a:pPr>
-            <a:r>
-              <a:rPr lang="en-US" sz="850" dirty="0">
+            <a:endParaRPr lang="en-US" sz="800" dirty="0"/>
+          </a:p>
+        </p:txBody>
+      </p:sp>
+      <p:sp>
+        <p:nvSpPr>
+          <p:cNvPr id="65" name="Text 61"/>
+          <p:cNvSpPr/>
+          <p:nvPr/>
+        </p:nvSpPr>
+        <p:spPr>
+          <a:xfrm>
+            <a:off x="4709160" y="6492240"/>
+            <a:ext cx="2478024" cy="155448"/>
+          </a:xfrm>
+          <a:prstGeom prst="rect">
+            <a:avLst/>
+          </a:prstGeom>
+          <a:noFill/>
+          <a:ln/>
+        </p:spPr>
+        <p:txBody>
+          <a:bodyPr wrap="square" lIns="0" tIns="0" rIns="0" bIns="0" rtlCol="0" anchor="ctr"/>
+          <a:lstStyle/>
+          <a:p>
+            <a:pPr indent="0" marL="0">
+              <a:buNone/>
+            </a:pPr>
+            <a:r>
+              <a:rPr lang="en-US" sz="800" dirty="0">
                 <a:solidFill>
                   <a:srgbClr val="0A3D23"/>
                 </a:solidFill>
@@ -5603,36 +5681,36 @@
               </a:rPr>
               <a:t>館への工事申請（様式・期限・搬入ルート）</a:t>
             </a:r>
-            <a:endParaRPr lang="en-US" sz="850" dirty="0"/>
-          </a:p>
-        </p:txBody>
-      </p:sp>
-      <p:sp>
-        <p:nvSpPr>
-          <p:cNvPr id="64" name="Text 60"/>
+            <a:endParaRPr lang="en-US" sz="800" dirty="0"/>
+          </a:p>
+        </p:txBody>
+      </p:sp>
+      <p:sp>
+        <p:nvSpPr>
+          <p:cNvPr id="66" name="Text 62"/>
           <p:cNvSpPr/>
           <p:nvPr/>
         </p:nvSpPr>
         <p:spPr>
           <a:xfrm>
             <a:off x="4526280" y="6647688"/>
-            <a:ext cx="164592" cy="178308"/>
-          </a:xfrm>
-          <a:prstGeom prst="rect">
-            <a:avLst/>
-          </a:prstGeom>
-          <a:noFill/>
-          <a:ln/>
-        </p:spPr>
-        <p:txBody>
-          <a:bodyPr wrap="square" lIns="0" tIns="0" rIns="0" bIns="0" rtlCol="0" anchor="ctr"/>
-          <a:lstStyle/>
-          <a:p>
-            <a:pPr indent="0" marL="0">
-              <a:buNone/>
-            </a:pPr>
-            <a:r>
-              <a:rPr lang="en-US" sz="850" dirty="0">
+            <a:ext cx="164592" cy="155448"/>
+          </a:xfrm>
+          <a:prstGeom prst="rect">
+            <a:avLst/>
+          </a:prstGeom>
+          <a:noFill/>
+          <a:ln/>
+        </p:spPr>
+        <p:txBody>
+          <a:bodyPr wrap="square" lIns="0" tIns="0" rIns="0" bIns="0" rtlCol="0" anchor="ctr"/>
+          <a:lstStyle/>
+          <a:p>
+            <a:pPr indent="0" marL="0">
+              <a:buNone/>
+            </a:pPr>
+            <a:r>
+              <a:rPr lang="en-US" sz="800" dirty="0">
                 <a:solidFill>
                   <a:srgbClr val="7E8882"/>
                 </a:solidFill>
@@ -5642,36 +5720,36 @@
               </a:rPr>
               <a:t>・</a:t>
             </a:r>
-            <a:endParaRPr lang="en-US" sz="850" dirty="0"/>
-          </a:p>
-        </p:txBody>
-      </p:sp>
-      <p:sp>
-        <p:nvSpPr>
-          <p:cNvPr id="65" name="Text 61"/>
+            <a:endParaRPr lang="en-US" sz="800" dirty="0"/>
+          </a:p>
+        </p:txBody>
+      </p:sp>
+      <p:sp>
+        <p:nvSpPr>
+          <p:cNvPr id="67" name="Text 63"/>
           <p:cNvSpPr/>
           <p:nvPr/>
         </p:nvSpPr>
         <p:spPr>
           <a:xfrm>
             <a:off x="4709160" y="6647688"/>
-            <a:ext cx="2478024" cy="178308"/>
-          </a:xfrm>
-          <a:prstGeom prst="rect">
-            <a:avLst/>
-          </a:prstGeom>
-          <a:noFill/>
-          <a:ln/>
-        </p:spPr>
-        <p:txBody>
-          <a:bodyPr wrap="square" lIns="0" tIns="0" rIns="0" bIns="0" rtlCol="0" anchor="ctr"/>
-          <a:lstStyle/>
-          <a:p>
-            <a:pPr indent="0" marL="0">
-              <a:buNone/>
-            </a:pPr>
-            <a:r>
-              <a:rPr lang="en-US" sz="850" dirty="0">
+            <a:ext cx="2478024" cy="155448"/>
+          </a:xfrm>
+          <a:prstGeom prst="rect">
+            <a:avLst/>
+          </a:prstGeom>
+          <a:noFill/>
+          <a:ln/>
+        </p:spPr>
+        <p:txBody>
+          <a:bodyPr wrap="square" lIns="0" tIns="0" rIns="0" bIns="0" rtlCol="0" anchor="ctr"/>
+          <a:lstStyle/>
+          <a:p>
+            <a:pPr indent="0" marL="0">
+              <a:buNone/>
+            </a:pPr>
+            <a:r>
+              <a:rPr lang="en-US" sz="800" dirty="0">
                 <a:solidFill>
                   <a:srgbClr val="0A3D23"/>
                 </a:solidFill>
@@ -5681,36 +5759,36 @@
               </a:rPr>
               <a:t>サイン表記の確定（MIRAIYA Book &amp; Cafe）</a:t>
             </a:r>
-            <a:endParaRPr lang="en-US" sz="850" dirty="0"/>
-          </a:p>
-        </p:txBody>
-      </p:sp>
-      <p:sp>
-        <p:nvSpPr>
-          <p:cNvPr id="66" name="Text 62"/>
-          <p:cNvSpPr/>
-          <p:nvPr/>
-        </p:nvSpPr>
-        <p:spPr>
-          <a:xfrm>
-            <a:off x="4526280" y="6825996"/>
-            <a:ext cx="164592" cy="178308"/>
-          </a:xfrm>
-          <a:prstGeom prst="rect">
-            <a:avLst/>
-          </a:prstGeom>
-          <a:noFill/>
-          <a:ln/>
-        </p:spPr>
-        <p:txBody>
-          <a:bodyPr wrap="square" lIns="0" tIns="0" rIns="0" bIns="0" rtlCol="0" anchor="ctr"/>
-          <a:lstStyle/>
-          <a:p>
-            <a:pPr indent="0" marL="0">
-              <a:buNone/>
-            </a:pPr>
-            <a:r>
-              <a:rPr lang="en-US" sz="850" dirty="0">
+            <a:endParaRPr lang="en-US" sz="800" dirty="0"/>
+          </a:p>
+        </p:txBody>
+      </p:sp>
+      <p:sp>
+        <p:nvSpPr>
+          <p:cNvPr id="68" name="Text 64"/>
+          <p:cNvSpPr/>
+          <p:nvPr/>
+        </p:nvSpPr>
+        <p:spPr>
+          <a:xfrm>
+            <a:off x="4526280" y="6803136"/>
+            <a:ext cx="164592" cy="155448"/>
+          </a:xfrm>
+          <a:prstGeom prst="rect">
+            <a:avLst/>
+          </a:prstGeom>
+          <a:noFill/>
+          <a:ln/>
+        </p:spPr>
+        <p:txBody>
+          <a:bodyPr wrap="square" lIns="0" tIns="0" rIns="0" bIns="0" rtlCol="0" anchor="ctr"/>
+          <a:lstStyle/>
+          <a:p>
+            <a:pPr indent="0" marL="0">
+              <a:buNone/>
+            </a:pPr>
+            <a:r>
+              <a:rPr lang="en-US" sz="800" dirty="0">
                 <a:solidFill>
                   <a:srgbClr val="7E8882"/>
                 </a:solidFill>
@@ -5720,36 +5798,36 @@
               </a:rPr>
               <a:t>・</a:t>
             </a:r>
-            <a:endParaRPr lang="en-US" sz="850" dirty="0"/>
-          </a:p>
-        </p:txBody>
-      </p:sp>
-      <p:sp>
-        <p:nvSpPr>
-          <p:cNvPr id="67" name="Text 63"/>
-          <p:cNvSpPr/>
-          <p:nvPr/>
-        </p:nvSpPr>
-        <p:spPr>
-          <a:xfrm>
-            <a:off x="4709160" y="6825996"/>
-            <a:ext cx="2478024" cy="178308"/>
-          </a:xfrm>
-          <a:prstGeom prst="rect">
-            <a:avLst/>
-          </a:prstGeom>
-          <a:noFill/>
-          <a:ln/>
-        </p:spPr>
-        <p:txBody>
-          <a:bodyPr wrap="square" lIns="0" tIns="0" rIns="0" bIns="0" rtlCol="0" anchor="ctr"/>
-          <a:lstStyle/>
-          <a:p>
-            <a:pPr indent="0" marL="0">
-              <a:buNone/>
-            </a:pPr>
-            <a:r>
-              <a:rPr lang="en-US" sz="850" dirty="0">
+            <a:endParaRPr lang="en-US" sz="800" dirty="0"/>
+          </a:p>
+        </p:txBody>
+      </p:sp>
+      <p:sp>
+        <p:nvSpPr>
+          <p:cNvPr id="69" name="Text 65"/>
+          <p:cNvSpPr/>
+          <p:nvPr/>
+        </p:nvSpPr>
+        <p:spPr>
+          <a:xfrm>
+            <a:off x="4709160" y="6803136"/>
+            <a:ext cx="2478024" cy="155448"/>
+          </a:xfrm>
+          <a:prstGeom prst="rect">
+            <a:avLst/>
+          </a:prstGeom>
+          <a:noFill/>
+          <a:ln/>
+        </p:spPr>
+        <p:txBody>
+          <a:bodyPr wrap="square" lIns="0" tIns="0" rIns="0" bIns="0" rtlCol="0" anchor="ctr"/>
+          <a:lstStyle/>
+          <a:p>
+            <a:pPr indent="0" marL="0">
+              <a:buNone/>
+            </a:pPr>
+            <a:r>
+              <a:rPr lang="en-US" sz="800" dirty="0">
                 <a:solidFill>
                   <a:srgbClr val="0A3D23"/>
                 </a:solidFill>
@@ -5757,93 +5835,93 @@
                 <a:ea typeface="Yu Gothic" pitchFamily="34" charset="-122"/>
                 <a:cs typeface="Yu Gothic" pitchFamily="34" charset="-120"/>
               </a:rPr>
+              <a:t>運営体制（営業時間・清掃補充の担当分け）</a:t>
+            </a:r>
+            <a:endParaRPr lang="en-US" sz="800" dirty="0"/>
+          </a:p>
+        </p:txBody>
+      </p:sp>
+      <p:sp>
+        <p:nvSpPr>
+          <p:cNvPr id="70" name="Text 66"/>
+          <p:cNvSpPr/>
+          <p:nvPr/>
+        </p:nvSpPr>
+        <p:spPr>
+          <a:xfrm>
+            <a:off x="4526280" y="6958584"/>
+            <a:ext cx="164592" cy="155448"/>
+          </a:xfrm>
+          <a:prstGeom prst="rect">
+            <a:avLst/>
+          </a:prstGeom>
+          <a:noFill/>
+          <a:ln/>
+        </p:spPr>
+        <p:txBody>
+          <a:bodyPr wrap="square" lIns="0" tIns="0" rIns="0" bIns="0" rtlCol="0" anchor="ctr"/>
+          <a:lstStyle/>
+          <a:p>
+            <a:pPr indent="0" marL="0">
+              <a:buNone/>
+            </a:pPr>
+            <a:r>
+              <a:rPr lang="en-US" sz="800" dirty="0">
+                <a:solidFill>
+                  <a:srgbClr val="7E8882"/>
+                </a:solidFill>
+                <a:latin typeface="Yu Gothic" pitchFamily="34" charset="0"/>
+                <a:ea typeface="Yu Gothic" pitchFamily="34" charset="-122"/>
+                <a:cs typeface="Yu Gothic" pitchFamily="34" charset="-120"/>
+              </a:rPr>
+              <a:t>・</a:t>
+            </a:r>
+            <a:endParaRPr lang="en-US" sz="800" dirty="0"/>
+          </a:p>
+        </p:txBody>
+      </p:sp>
+      <p:sp>
+        <p:nvSpPr>
+          <p:cNvPr id="71" name="Text 67"/>
+          <p:cNvSpPr/>
+          <p:nvPr/>
+        </p:nvSpPr>
+        <p:spPr>
+          <a:xfrm>
+            <a:off x="4709160" y="6958584"/>
+            <a:ext cx="2478024" cy="155448"/>
+          </a:xfrm>
+          <a:prstGeom prst="rect">
+            <a:avLst/>
+          </a:prstGeom>
+          <a:noFill/>
+          <a:ln/>
+        </p:spPr>
+        <p:txBody>
+          <a:bodyPr wrap="square" lIns="0" tIns="0" rIns="0" bIns="0" rtlCol="0" anchor="ctr"/>
+          <a:lstStyle/>
+          <a:p>
+            <a:pPr indent="0" marL="0">
+              <a:buNone/>
+            </a:pPr>
+            <a:r>
+              <a:rPr lang="en-US" sz="800" dirty="0">
+                <a:solidFill>
+                  <a:srgbClr val="0A3D23"/>
+                </a:solidFill>
+                <a:latin typeface="Yu Gothic" pitchFamily="34" charset="0"/>
+                <a:ea typeface="Yu Gothic" pitchFamily="34" charset="-122"/>
+                <a:cs typeface="Yu Gothic" pitchFamily="34" charset="-120"/>
+              </a:rPr>
               <a:t>社内稟議の進捗・決裁完了の目処</a:t>
             </a:r>
-            <a:endParaRPr lang="en-US" sz="850" dirty="0"/>
-          </a:p>
-        </p:txBody>
-      </p:sp>
-      <p:sp>
-        <p:nvSpPr>
-          <p:cNvPr id="68" name="Text 64"/>
-          <p:cNvSpPr/>
-          <p:nvPr/>
-        </p:nvSpPr>
-        <p:spPr>
-          <a:xfrm>
-            <a:off x="4526280" y="7004304"/>
-            <a:ext cx="164592" cy="178308"/>
-          </a:xfrm>
-          <a:prstGeom prst="rect">
-            <a:avLst/>
-          </a:prstGeom>
-          <a:noFill/>
-          <a:ln/>
-        </p:spPr>
-        <p:txBody>
-          <a:bodyPr wrap="square" lIns="0" tIns="0" rIns="0" bIns="0" rtlCol="0" anchor="ctr"/>
-          <a:lstStyle/>
-          <a:p>
-            <a:pPr indent="0" marL="0">
-              <a:buNone/>
-            </a:pPr>
-            <a:r>
-              <a:rPr lang="en-US" sz="850" dirty="0">
-                <a:solidFill>
-                  <a:srgbClr val="7E8882"/>
-                </a:solidFill>
-                <a:latin typeface="Yu Gothic" pitchFamily="34" charset="0"/>
-                <a:ea typeface="Yu Gothic" pitchFamily="34" charset="-122"/>
-                <a:cs typeface="Yu Gothic" pitchFamily="34" charset="-120"/>
-              </a:rPr>
-              <a:t>・</a:t>
-            </a:r>
-            <a:endParaRPr lang="en-US" sz="850" dirty="0"/>
-          </a:p>
-        </p:txBody>
-      </p:sp>
-      <p:sp>
-        <p:nvSpPr>
-          <p:cNvPr id="69" name="Text 65"/>
-          <p:cNvSpPr/>
-          <p:nvPr/>
-        </p:nvSpPr>
-        <p:spPr>
-          <a:xfrm>
-            <a:off x="4709160" y="7004304"/>
-            <a:ext cx="2478024" cy="178308"/>
-          </a:xfrm>
-          <a:prstGeom prst="rect">
-            <a:avLst/>
-          </a:prstGeom>
-          <a:noFill/>
-          <a:ln/>
-        </p:spPr>
-        <p:txBody>
-          <a:bodyPr wrap="square" lIns="0" tIns="0" rIns="0" bIns="0" rtlCol="0" anchor="ctr"/>
-          <a:lstStyle/>
-          <a:p>
-            <a:pPr indent="0" marL="0">
-              <a:buNone/>
-            </a:pPr>
-            <a:r>
-              <a:rPr lang="en-US" sz="850" dirty="0">
-                <a:solidFill>
-                  <a:srgbClr val="0A3D23"/>
-                </a:solidFill>
-                <a:latin typeface="Yu Gothic" pitchFamily="34" charset="0"/>
-                <a:ea typeface="Yu Gothic" pitchFamily="34" charset="-122"/>
-                <a:cs typeface="Yu Gothic" pitchFamily="34" charset="-120"/>
-              </a:rPr>
-              <a:t>運営体制（営業時間・清掃補充の担当分け）</a:t>
-            </a:r>
-            <a:endParaRPr lang="en-US" sz="850" dirty="0"/>
-          </a:p>
-        </p:txBody>
-      </p:sp>
-      <p:sp>
-        <p:nvSpPr>
-          <p:cNvPr id="70" name="Text 66"/>
+            <a:endParaRPr lang="en-US" sz="800" dirty="0"/>
+          </a:p>
+        </p:txBody>
+      </p:sp>
+      <p:sp>
+        <p:nvSpPr>
+          <p:cNvPr id="72" name="Text 68"/>
           <p:cNvSpPr/>
           <p:nvPr/>
         </p:nvSpPr>
@@ -5882,30 +5960,30 @@
       </p:sp>
       <p:sp>
         <p:nvSpPr>
-          <p:cNvPr id="71" name="Text 67"/>
-          <p:cNvSpPr/>
-          <p:nvPr/>
-        </p:nvSpPr>
-        <p:spPr>
-          <a:xfrm>
-            <a:off x="7461504" y="5577840"/>
-            <a:ext cx="146304" cy="178308"/>
-          </a:xfrm>
-          <a:prstGeom prst="rect">
-            <a:avLst/>
-          </a:prstGeom>
-          <a:noFill/>
-          <a:ln/>
-        </p:spPr>
-        <p:txBody>
-          <a:bodyPr wrap="square" lIns="0" tIns="0" rIns="0" bIns="0" rtlCol="0" anchor="ctr"/>
-          <a:lstStyle/>
-          <a:p>
-            <a:pPr indent="0" marL="0">
-              <a:buNone/>
-            </a:pPr>
-            <a:r>
-              <a:rPr lang="en-US" sz="850" dirty="0">
+          <p:cNvPr id="73" name="Text 69"/>
+          <p:cNvSpPr/>
+          <p:nvPr/>
+        </p:nvSpPr>
+        <p:spPr>
+          <a:xfrm>
+            <a:off x="7461504" y="5559552"/>
+            <a:ext cx="146304" cy="155448"/>
+          </a:xfrm>
+          <a:prstGeom prst="rect">
+            <a:avLst/>
+          </a:prstGeom>
+          <a:noFill/>
+          <a:ln/>
+        </p:spPr>
+        <p:txBody>
+          <a:bodyPr wrap="square" lIns="0" tIns="0" rIns="0" bIns="0" rtlCol="0" anchor="ctr"/>
+          <a:lstStyle/>
+          <a:p>
+            <a:pPr indent="0" marL="0">
+              <a:buNone/>
+            </a:pPr>
+            <a:r>
+              <a:rPr lang="en-US" sz="800" dirty="0">
                 <a:solidFill>
                   <a:srgbClr val="7E8882"/>
                 </a:solidFill>
@@ -5915,36 +5993,36 @@
               </a:rPr>
               <a:t>・</a:t>
             </a:r>
-            <a:endParaRPr lang="en-US" sz="850" dirty="0"/>
-          </a:p>
-        </p:txBody>
-      </p:sp>
-      <p:sp>
-        <p:nvSpPr>
-          <p:cNvPr id="72" name="Text 68"/>
-          <p:cNvSpPr/>
-          <p:nvPr/>
-        </p:nvSpPr>
-        <p:spPr>
-          <a:xfrm>
-            <a:off x="7626096" y="5577840"/>
-            <a:ext cx="2478024" cy="178308"/>
-          </a:xfrm>
-          <a:prstGeom prst="rect">
-            <a:avLst/>
-          </a:prstGeom>
-          <a:noFill/>
-          <a:ln/>
-        </p:spPr>
-        <p:txBody>
-          <a:bodyPr wrap="square" lIns="0" tIns="0" rIns="0" bIns="0" rtlCol="0" anchor="ctr"/>
-          <a:lstStyle/>
-          <a:p>
-            <a:pPr indent="0" marL="0">
-              <a:buNone/>
-            </a:pPr>
-            <a:r>
-              <a:rPr lang="en-US" sz="850" dirty="0">
+            <a:endParaRPr lang="en-US" sz="800" dirty="0"/>
+          </a:p>
+        </p:txBody>
+      </p:sp>
+      <p:sp>
+        <p:nvSpPr>
+          <p:cNvPr id="74" name="Text 70"/>
+          <p:cNvSpPr/>
+          <p:nvPr/>
+        </p:nvSpPr>
+        <p:spPr>
+          <a:xfrm>
+            <a:off x="7626096" y="5559552"/>
+            <a:ext cx="2478024" cy="155448"/>
+          </a:xfrm>
+          <a:prstGeom prst="rect">
+            <a:avLst/>
+          </a:prstGeom>
+          <a:noFill/>
+          <a:ln/>
+        </p:spPr>
+        <p:txBody>
+          <a:bodyPr wrap="square" lIns="0" tIns="0" rIns="0" bIns="0" rtlCol="0" anchor="ctr"/>
+          <a:lstStyle/>
+          <a:p>
+            <a:pPr indent="0" marL="0">
+              <a:buNone/>
+            </a:pPr>
+            <a:r>
+              <a:rPr lang="en-US" sz="800" dirty="0">
                 <a:solidFill>
                   <a:srgbClr val="0A3D23"/>
                 </a:solidFill>
@@ -5954,36 +6032,36 @@
               </a:rPr>
               <a:t>区画図面（平面図・展開図／CADデータ）</a:t>
             </a:r>
-            <a:endParaRPr lang="en-US" sz="850" dirty="0"/>
-          </a:p>
-        </p:txBody>
-      </p:sp>
-      <p:sp>
-        <p:nvSpPr>
-          <p:cNvPr id="73" name="Text 69"/>
-          <p:cNvSpPr/>
-          <p:nvPr/>
-        </p:nvSpPr>
-        <p:spPr>
-          <a:xfrm>
-            <a:off x="7461504" y="5756148"/>
-            <a:ext cx="146304" cy="178308"/>
-          </a:xfrm>
-          <a:prstGeom prst="rect">
-            <a:avLst/>
-          </a:prstGeom>
-          <a:noFill/>
-          <a:ln/>
-        </p:spPr>
-        <p:txBody>
-          <a:bodyPr wrap="square" lIns="0" tIns="0" rIns="0" bIns="0" rtlCol="0" anchor="ctr"/>
-          <a:lstStyle/>
-          <a:p>
-            <a:pPr indent="0" marL="0">
-              <a:buNone/>
-            </a:pPr>
-            <a:r>
-              <a:rPr lang="en-US" sz="850" dirty="0">
+            <a:endParaRPr lang="en-US" sz="800" dirty="0"/>
+          </a:p>
+        </p:txBody>
+      </p:sp>
+      <p:sp>
+        <p:nvSpPr>
+          <p:cNvPr id="75" name="Text 71"/>
+          <p:cNvSpPr/>
+          <p:nvPr/>
+        </p:nvSpPr>
+        <p:spPr>
+          <a:xfrm>
+            <a:off x="7461504" y="5715000"/>
+            <a:ext cx="146304" cy="155448"/>
+          </a:xfrm>
+          <a:prstGeom prst="rect">
+            <a:avLst/>
+          </a:prstGeom>
+          <a:noFill/>
+          <a:ln/>
+        </p:spPr>
+        <p:txBody>
+          <a:bodyPr wrap="square" lIns="0" tIns="0" rIns="0" bIns="0" rtlCol="0" anchor="ctr"/>
+          <a:lstStyle/>
+          <a:p>
+            <a:pPr indent="0" marL="0">
+              <a:buNone/>
+            </a:pPr>
+            <a:r>
+              <a:rPr lang="en-US" sz="800" dirty="0">
                 <a:solidFill>
                   <a:srgbClr val="7E8882"/>
                 </a:solidFill>
@@ -5993,36 +6071,36 @@
               </a:rPr>
               <a:t>・</a:t>
             </a:r>
-            <a:endParaRPr lang="en-US" sz="850" dirty="0"/>
-          </a:p>
-        </p:txBody>
-      </p:sp>
-      <p:sp>
-        <p:nvSpPr>
-          <p:cNvPr id="74" name="Text 70"/>
-          <p:cNvSpPr/>
-          <p:nvPr/>
-        </p:nvSpPr>
-        <p:spPr>
-          <a:xfrm>
-            <a:off x="7626096" y="5756148"/>
-            <a:ext cx="2478024" cy="178308"/>
-          </a:xfrm>
-          <a:prstGeom prst="rect">
-            <a:avLst/>
-          </a:prstGeom>
-          <a:noFill/>
-          <a:ln/>
-        </p:spPr>
-        <p:txBody>
-          <a:bodyPr wrap="square" lIns="0" tIns="0" rIns="0" bIns="0" rtlCol="0" anchor="ctr"/>
-          <a:lstStyle/>
-          <a:p>
-            <a:pPr indent="0" marL="0">
-              <a:buNone/>
-            </a:pPr>
-            <a:r>
-              <a:rPr lang="en-US" sz="850" dirty="0">
+            <a:endParaRPr lang="en-US" sz="800" dirty="0"/>
+          </a:p>
+        </p:txBody>
+      </p:sp>
+      <p:sp>
+        <p:nvSpPr>
+          <p:cNvPr id="76" name="Text 72"/>
+          <p:cNvSpPr/>
+          <p:nvPr/>
+        </p:nvSpPr>
+        <p:spPr>
+          <a:xfrm>
+            <a:off x="7626096" y="5715000"/>
+            <a:ext cx="2478024" cy="155448"/>
+          </a:xfrm>
+          <a:prstGeom prst="rect">
+            <a:avLst/>
+          </a:prstGeom>
+          <a:noFill/>
+          <a:ln/>
+        </p:spPr>
+        <p:txBody>
+          <a:bodyPr wrap="square" lIns="0" tIns="0" rIns="0" bIns="0" rtlCol="0" anchor="ctr"/>
+          <a:lstStyle/>
+          <a:p>
+            <a:pPr indent="0" marL="0">
+              <a:buNone/>
+            </a:pPr>
+            <a:r>
+              <a:rPr lang="en-US" sz="800" dirty="0">
                 <a:solidFill>
                   <a:srgbClr val="0A3D23"/>
                 </a:solidFill>
@@ -6032,36 +6110,36 @@
               </a:rPr>
               <a:t>電気容量・分電盤の位置</a:t>
             </a:r>
-            <a:endParaRPr lang="en-US" sz="850" dirty="0"/>
-          </a:p>
-        </p:txBody>
-      </p:sp>
-      <p:sp>
-        <p:nvSpPr>
-          <p:cNvPr id="75" name="Text 71"/>
-          <p:cNvSpPr/>
-          <p:nvPr/>
-        </p:nvSpPr>
-        <p:spPr>
-          <a:xfrm>
-            <a:off x="7461504" y="5934456"/>
-            <a:ext cx="146304" cy="178308"/>
-          </a:xfrm>
-          <a:prstGeom prst="rect">
-            <a:avLst/>
-          </a:prstGeom>
-          <a:noFill/>
-          <a:ln/>
-        </p:spPr>
-        <p:txBody>
-          <a:bodyPr wrap="square" lIns="0" tIns="0" rIns="0" bIns="0" rtlCol="0" anchor="ctr"/>
-          <a:lstStyle/>
-          <a:p>
-            <a:pPr indent="0" marL="0">
-              <a:buNone/>
-            </a:pPr>
-            <a:r>
-              <a:rPr lang="en-US" sz="850" dirty="0">
+            <a:endParaRPr lang="en-US" sz="800" dirty="0"/>
+          </a:p>
+        </p:txBody>
+      </p:sp>
+      <p:sp>
+        <p:nvSpPr>
+          <p:cNvPr id="77" name="Text 73"/>
+          <p:cNvSpPr/>
+          <p:nvPr/>
+        </p:nvSpPr>
+        <p:spPr>
+          <a:xfrm>
+            <a:off x="7461504" y="5870448"/>
+            <a:ext cx="146304" cy="155448"/>
+          </a:xfrm>
+          <a:prstGeom prst="rect">
+            <a:avLst/>
+          </a:prstGeom>
+          <a:noFill/>
+          <a:ln/>
+        </p:spPr>
+        <p:txBody>
+          <a:bodyPr wrap="square" lIns="0" tIns="0" rIns="0" bIns="0" rtlCol="0" anchor="ctr"/>
+          <a:lstStyle/>
+          <a:p>
+            <a:pPr indent="0" marL="0">
+              <a:buNone/>
+            </a:pPr>
+            <a:r>
+              <a:rPr lang="en-US" sz="800" dirty="0">
                 <a:solidFill>
                   <a:srgbClr val="7E8882"/>
                 </a:solidFill>
@@ -6071,36 +6149,36 @@
               </a:rPr>
               <a:t>・</a:t>
             </a:r>
-            <a:endParaRPr lang="en-US" sz="850" dirty="0"/>
-          </a:p>
-        </p:txBody>
-      </p:sp>
-      <p:sp>
-        <p:nvSpPr>
-          <p:cNvPr id="76" name="Text 72"/>
-          <p:cNvSpPr/>
-          <p:nvPr/>
-        </p:nvSpPr>
-        <p:spPr>
-          <a:xfrm>
-            <a:off x="7626096" y="5934456"/>
-            <a:ext cx="2478024" cy="178308"/>
-          </a:xfrm>
-          <a:prstGeom prst="rect">
-            <a:avLst/>
-          </a:prstGeom>
-          <a:noFill/>
-          <a:ln/>
-        </p:spPr>
-        <p:txBody>
-          <a:bodyPr wrap="square" lIns="0" tIns="0" rIns="0" bIns="0" rtlCol="0" anchor="ctr"/>
-          <a:lstStyle/>
-          <a:p>
-            <a:pPr indent="0" marL="0">
-              <a:buNone/>
-            </a:pPr>
-            <a:r>
-              <a:rPr lang="en-US" sz="850" dirty="0">
+            <a:endParaRPr lang="en-US" sz="800" dirty="0"/>
+          </a:p>
+        </p:txBody>
+      </p:sp>
+      <p:sp>
+        <p:nvSpPr>
+          <p:cNvPr id="78" name="Text 74"/>
+          <p:cNvSpPr/>
+          <p:nvPr/>
+        </p:nvSpPr>
+        <p:spPr>
+          <a:xfrm>
+            <a:off x="7626096" y="5870448"/>
+            <a:ext cx="2478024" cy="155448"/>
+          </a:xfrm>
+          <a:prstGeom prst="rect">
+            <a:avLst/>
+          </a:prstGeom>
+          <a:noFill/>
+          <a:ln/>
+        </p:spPr>
+        <p:txBody>
+          <a:bodyPr wrap="square" lIns="0" tIns="0" rIns="0" bIns="0" rtlCol="0" anchor="ctr"/>
+          <a:lstStyle/>
+          <a:p>
+            <a:pPr indent="0" marL="0">
+              <a:buNone/>
+            </a:pPr>
+            <a:r>
+              <a:rPr lang="en-US" sz="800" dirty="0">
                 <a:solidFill>
                   <a:srgbClr val="0A3D23"/>
                 </a:solidFill>
@@ -6110,36 +6188,36 @@
               </a:rPr>
               <a:t>給排水の位置・系統</a:t>
             </a:r>
-            <a:endParaRPr lang="en-US" sz="850" dirty="0"/>
-          </a:p>
-        </p:txBody>
-      </p:sp>
-      <p:sp>
-        <p:nvSpPr>
-          <p:cNvPr id="77" name="Text 73"/>
-          <p:cNvSpPr/>
-          <p:nvPr/>
-        </p:nvSpPr>
-        <p:spPr>
-          <a:xfrm>
-            <a:off x="7461504" y="6112764"/>
-            <a:ext cx="146304" cy="178308"/>
-          </a:xfrm>
-          <a:prstGeom prst="rect">
-            <a:avLst/>
-          </a:prstGeom>
-          <a:noFill/>
-          <a:ln/>
-        </p:spPr>
-        <p:txBody>
-          <a:bodyPr wrap="square" lIns="0" tIns="0" rIns="0" bIns="0" rtlCol="0" anchor="ctr"/>
-          <a:lstStyle/>
-          <a:p>
-            <a:pPr indent="0" marL="0">
-              <a:buNone/>
-            </a:pPr>
-            <a:r>
-              <a:rPr lang="en-US" sz="850" dirty="0">
+            <a:endParaRPr lang="en-US" sz="800" dirty="0"/>
+          </a:p>
+        </p:txBody>
+      </p:sp>
+      <p:sp>
+        <p:nvSpPr>
+          <p:cNvPr id="79" name="Text 75"/>
+          <p:cNvSpPr/>
+          <p:nvPr/>
+        </p:nvSpPr>
+        <p:spPr>
+          <a:xfrm>
+            <a:off x="7461504" y="6025896"/>
+            <a:ext cx="146304" cy="155448"/>
+          </a:xfrm>
+          <a:prstGeom prst="rect">
+            <a:avLst/>
+          </a:prstGeom>
+          <a:noFill/>
+          <a:ln/>
+        </p:spPr>
+        <p:txBody>
+          <a:bodyPr wrap="square" lIns="0" tIns="0" rIns="0" bIns="0" rtlCol="0" anchor="ctr"/>
+          <a:lstStyle/>
+          <a:p>
+            <a:pPr indent="0" marL="0">
+              <a:buNone/>
+            </a:pPr>
+            <a:r>
+              <a:rPr lang="en-US" sz="800" dirty="0">
                 <a:solidFill>
                   <a:srgbClr val="7E8882"/>
                 </a:solidFill>
@@ -6149,36 +6227,36 @@
               </a:rPr>
               <a:t>・</a:t>
             </a:r>
-            <a:endParaRPr lang="en-US" sz="850" dirty="0"/>
-          </a:p>
-        </p:txBody>
-      </p:sp>
-      <p:sp>
-        <p:nvSpPr>
-          <p:cNvPr id="78" name="Text 74"/>
-          <p:cNvSpPr/>
-          <p:nvPr/>
-        </p:nvSpPr>
-        <p:spPr>
-          <a:xfrm>
-            <a:off x="7626096" y="6112764"/>
-            <a:ext cx="2478024" cy="178308"/>
-          </a:xfrm>
-          <a:prstGeom prst="rect">
-            <a:avLst/>
-          </a:prstGeom>
-          <a:noFill/>
-          <a:ln/>
-        </p:spPr>
-        <p:txBody>
-          <a:bodyPr wrap="square" lIns="0" tIns="0" rIns="0" bIns="0" rtlCol="0" anchor="ctr"/>
-          <a:lstStyle/>
-          <a:p>
-            <a:pPr indent="0" marL="0">
-              <a:buNone/>
-            </a:pPr>
-            <a:r>
-              <a:rPr lang="en-US" sz="850" dirty="0">
+            <a:endParaRPr lang="en-US" sz="800" dirty="0"/>
+          </a:p>
+        </p:txBody>
+      </p:sp>
+      <p:sp>
+        <p:nvSpPr>
+          <p:cNvPr id="80" name="Text 76"/>
+          <p:cNvSpPr/>
+          <p:nvPr/>
+        </p:nvSpPr>
+        <p:spPr>
+          <a:xfrm>
+            <a:off x="7626096" y="6025896"/>
+            <a:ext cx="2478024" cy="155448"/>
+          </a:xfrm>
+          <a:prstGeom prst="rect">
+            <a:avLst/>
+          </a:prstGeom>
+          <a:noFill/>
+          <a:ln/>
+        </p:spPr>
+        <p:txBody>
+          <a:bodyPr wrap="square" lIns="0" tIns="0" rIns="0" bIns="0" rtlCol="0" anchor="ctr"/>
+          <a:lstStyle/>
+          <a:p>
+            <a:pPr indent="0" marL="0">
+              <a:buNone/>
+            </a:pPr>
+            <a:r>
+              <a:rPr lang="en-US" sz="800" dirty="0">
                 <a:solidFill>
                   <a:srgbClr val="0A3D23"/>
                 </a:solidFill>
@@ -6188,36 +6266,36 @@
               </a:rPr>
               <a:t>既存ネット回線の有無・引込経路</a:t>
             </a:r>
-            <a:endParaRPr lang="en-US" sz="850" dirty="0"/>
-          </a:p>
-        </p:txBody>
-      </p:sp>
-      <p:sp>
-        <p:nvSpPr>
-          <p:cNvPr id="79" name="Text 75"/>
-          <p:cNvSpPr/>
-          <p:nvPr/>
-        </p:nvSpPr>
-        <p:spPr>
-          <a:xfrm>
-            <a:off x="7461504" y="6291072"/>
-            <a:ext cx="146304" cy="178308"/>
-          </a:xfrm>
-          <a:prstGeom prst="rect">
-            <a:avLst/>
-          </a:prstGeom>
-          <a:noFill/>
-          <a:ln/>
-        </p:spPr>
-        <p:txBody>
-          <a:bodyPr wrap="square" lIns="0" tIns="0" rIns="0" bIns="0" rtlCol="0" anchor="ctr"/>
-          <a:lstStyle/>
-          <a:p>
-            <a:pPr indent="0" marL="0">
-              <a:buNone/>
-            </a:pPr>
-            <a:r>
-              <a:rPr lang="en-US" sz="850" dirty="0">
+            <a:endParaRPr lang="en-US" sz="800" dirty="0"/>
+          </a:p>
+        </p:txBody>
+      </p:sp>
+      <p:sp>
+        <p:nvSpPr>
+          <p:cNvPr id="81" name="Text 77"/>
+          <p:cNvSpPr/>
+          <p:nvPr/>
+        </p:nvSpPr>
+        <p:spPr>
+          <a:xfrm>
+            <a:off x="7461504" y="6181344"/>
+            <a:ext cx="146304" cy="155448"/>
+          </a:xfrm>
+          <a:prstGeom prst="rect">
+            <a:avLst/>
+          </a:prstGeom>
+          <a:noFill/>
+          <a:ln/>
+        </p:spPr>
+        <p:txBody>
+          <a:bodyPr wrap="square" lIns="0" tIns="0" rIns="0" bIns="0" rtlCol="0" anchor="ctr"/>
+          <a:lstStyle/>
+          <a:p>
+            <a:pPr indent="0" marL="0">
+              <a:buNone/>
+            </a:pPr>
+            <a:r>
+              <a:rPr lang="en-US" sz="800" dirty="0">
                 <a:solidFill>
                   <a:srgbClr val="7E8882"/>
                 </a:solidFill>
@@ -6227,36 +6305,36 @@
               </a:rPr>
               <a:t>・</a:t>
             </a:r>
-            <a:endParaRPr lang="en-US" sz="850" dirty="0"/>
-          </a:p>
-        </p:txBody>
-      </p:sp>
-      <p:sp>
-        <p:nvSpPr>
-          <p:cNvPr id="80" name="Text 76"/>
-          <p:cNvSpPr/>
-          <p:nvPr/>
-        </p:nvSpPr>
-        <p:spPr>
-          <a:xfrm>
-            <a:off x="7626096" y="6291072"/>
-            <a:ext cx="2478024" cy="178308"/>
-          </a:xfrm>
-          <a:prstGeom prst="rect">
-            <a:avLst/>
-          </a:prstGeom>
-          <a:noFill/>
-          <a:ln/>
-        </p:spPr>
-        <p:txBody>
-          <a:bodyPr wrap="square" lIns="0" tIns="0" rIns="0" bIns="0" rtlCol="0" anchor="ctr"/>
-          <a:lstStyle/>
-          <a:p>
-            <a:pPr indent="0" marL="0">
-              <a:buNone/>
-            </a:pPr>
-            <a:r>
-              <a:rPr lang="en-US" sz="850" dirty="0">
+            <a:endParaRPr lang="en-US" sz="800" dirty="0"/>
+          </a:p>
+        </p:txBody>
+      </p:sp>
+      <p:sp>
+        <p:nvSpPr>
+          <p:cNvPr id="82" name="Text 78"/>
+          <p:cNvSpPr/>
+          <p:nvPr/>
+        </p:nvSpPr>
+        <p:spPr>
+          <a:xfrm>
+            <a:off x="7626096" y="6181344"/>
+            <a:ext cx="2478024" cy="155448"/>
+          </a:xfrm>
+          <a:prstGeom prst="rect">
+            <a:avLst/>
+          </a:prstGeom>
+          <a:noFill/>
+          <a:ln/>
+        </p:spPr>
+        <p:txBody>
+          <a:bodyPr wrap="square" lIns="0" tIns="0" rIns="0" bIns="0" rtlCol="0" anchor="ctr"/>
+          <a:lstStyle/>
+          <a:p>
+            <a:pPr indent="0" marL="0">
+              <a:buNone/>
+            </a:pPr>
+            <a:r>
+              <a:rPr lang="en-US" sz="800" dirty="0">
                 <a:solidFill>
                   <a:srgbClr val="0A3D23"/>
                 </a:solidFill>
@@ -6266,36 +6344,36 @@
               </a:rPr>
               <a:t>現況写真（既存設備・厨房まわり）</a:t>
             </a:r>
-            <a:endParaRPr lang="en-US" sz="850" dirty="0"/>
-          </a:p>
-        </p:txBody>
-      </p:sp>
-      <p:sp>
-        <p:nvSpPr>
-          <p:cNvPr id="81" name="Text 77"/>
-          <p:cNvSpPr/>
-          <p:nvPr/>
-        </p:nvSpPr>
-        <p:spPr>
-          <a:xfrm>
-            <a:off x="7461504" y="6469380"/>
-            <a:ext cx="146304" cy="178308"/>
-          </a:xfrm>
-          <a:prstGeom prst="rect">
-            <a:avLst/>
-          </a:prstGeom>
-          <a:noFill/>
-          <a:ln/>
-        </p:spPr>
-        <p:txBody>
-          <a:bodyPr wrap="square" lIns="0" tIns="0" rIns="0" bIns="0" rtlCol="0" anchor="ctr"/>
-          <a:lstStyle/>
-          <a:p>
-            <a:pPr indent="0" marL="0">
-              <a:buNone/>
-            </a:pPr>
-            <a:r>
-              <a:rPr lang="en-US" sz="850" dirty="0">
+            <a:endParaRPr lang="en-US" sz="800" dirty="0"/>
+          </a:p>
+        </p:txBody>
+      </p:sp>
+      <p:sp>
+        <p:nvSpPr>
+          <p:cNvPr id="83" name="Text 79"/>
+          <p:cNvSpPr/>
+          <p:nvPr/>
+        </p:nvSpPr>
+        <p:spPr>
+          <a:xfrm>
+            <a:off x="7461504" y="6336792"/>
+            <a:ext cx="146304" cy="155448"/>
+          </a:xfrm>
+          <a:prstGeom prst="rect">
+            <a:avLst/>
+          </a:prstGeom>
+          <a:noFill/>
+          <a:ln/>
+        </p:spPr>
+        <p:txBody>
+          <a:bodyPr wrap="square" lIns="0" tIns="0" rIns="0" bIns="0" rtlCol="0" anchor="ctr"/>
+          <a:lstStyle/>
+          <a:p>
+            <a:pPr indent="0" marL="0">
+              <a:buNone/>
+            </a:pPr>
+            <a:r>
+              <a:rPr lang="en-US" sz="800" dirty="0">
                 <a:solidFill>
                   <a:srgbClr val="7E8882"/>
                 </a:solidFill>
@@ -6305,36 +6383,36 @@
               </a:rPr>
               <a:t>・</a:t>
             </a:r>
-            <a:endParaRPr lang="en-US" sz="850" dirty="0"/>
-          </a:p>
-        </p:txBody>
-      </p:sp>
-      <p:sp>
-        <p:nvSpPr>
-          <p:cNvPr id="82" name="Text 78"/>
-          <p:cNvSpPr/>
-          <p:nvPr/>
-        </p:nvSpPr>
-        <p:spPr>
-          <a:xfrm>
-            <a:off x="7626096" y="6469380"/>
-            <a:ext cx="2478024" cy="178308"/>
-          </a:xfrm>
-          <a:prstGeom prst="rect">
-            <a:avLst/>
-          </a:prstGeom>
-          <a:noFill/>
-          <a:ln/>
-        </p:spPr>
-        <p:txBody>
-          <a:bodyPr wrap="square" lIns="0" tIns="0" rIns="0" bIns="0" rtlCol="0" anchor="ctr"/>
-          <a:lstStyle/>
-          <a:p>
-            <a:pPr indent="0" marL="0">
-              <a:buNone/>
-            </a:pPr>
-            <a:r>
-              <a:rPr lang="en-US" sz="850" dirty="0">
+            <a:endParaRPr lang="en-US" sz="800" dirty="0"/>
+          </a:p>
+        </p:txBody>
+      </p:sp>
+      <p:sp>
+        <p:nvSpPr>
+          <p:cNvPr id="84" name="Text 80"/>
+          <p:cNvSpPr/>
+          <p:nvPr/>
+        </p:nvSpPr>
+        <p:spPr>
+          <a:xfrm>
+            <a:off x="7626096" y="6336792"/>
+            <a:ext cx="2478024" cy="155448"/>
+          </a:xfrm>
+          <a:prstGeom prst="rect">
+            <a:avLst/>
+          </a:prstGeom>
+          <a:noFill/>
+          <a:ln/>
+        </p:spPr>
+        <p:txBody>
+          <a:bodyPr wrap="square" lIns="0" tIns="0" rIns="0" bIns="0" rtlCol="0" anchor="ctr"/>
+          <a:lstStyle/>
+          <a:p>
+            <a:pPr indent="0" marL="0">
+              <a:buNone/>
+            </a:pPr>
+            <a:r>
+              <a:rPr lang="en-US" sz="800" dirty="0">
                 <a:solidFill>
                   <a:srgbClr val="0A3D23"/>
                 </a:solidFill>
@@ -6344,36 +6422,114 @@
               </a:rPr>
               <a:t>館の工事規定・申請様式</a:t>
             </a:r>
-            <a:endParaRPr lang="en-US" sz="850" dirty="0"/>
-          </a:p>
-        </p:txBody>
-      </p:sp>
-      <p:sp>
-        <p:nvSpPr>
-          <p:cNvPr id="83" name="Text 79"/>
+            <a:endParaRPr lang="en-US" sz="800" dirty="0"/>
+          </a:p>
+        </p:txBody>
+      </p:sp>
+      <p:sp>
+        <p:nvSpPr>
+          <p:cNvPr id="85" name="Text 81"/>
+          <p:cNvSpPr/>
+          <p:nvPr/>
+        </p:nvSpPr>
+        <p:spPr>
+          <a:xfrm>
+            <a:off x="7461504" y="6492240"/>
+            <a:ext cx="146304" cy="155448"/>
+          </a:xfrm>
+          <a:prstGeom prst="rect">
+            <a:avLst/>
+          </a:prstGeom>
+          <a:noFill/>
+          <a:ln/>
+        </p:spPr>
+        <p:txBody>
+          <a:bodyPr wrap="square" lIns="0" tIns="0" rIns="0" bIns="0" rtlCol="0" anchor="ctr"/>
+          <a:lstStyle/>
+          <a:p>
+            <a:pPr indent="0" marL="0">
+              <a:buNone/>
+            </a:pPr>
+            <a:r>
+              <a:rPr lang="en-US" sz="800" dirty="0">
+                <a:solidFill>
+                  <a:srgbClr val="7E8882"/>
+                </a:solidFill>
+                <a:latin typeface="Yu Gothic" pitchFamily="34" charset="0"/>
+                <a:ea typeface="Yu Gothic" pitchFamily="34" charset="-122"/>
+                <a:cs typeface="Yu Gothic" pitchFamily="34" charset="-120"/>
+              </a:rPr>
+              <a:t>・</a:t>
+            </a:r>
+            <a:endParaRPr lang="en-US" sz="800" dirty="0"/>
+          </a:p>
+        </p:txBody>
+      </p:sp>
+      <p:sp>
+        <p:nvSpPr>
+          <p:cNvPr id="86" name="Text 82"/>
+          <p:cNvSpPr/>
+          <p:nvPr/>
+        </p:nvSpPr>
+        <p:spPr>
+          <a:xfrm>
+            <a:off x="7626096" y="6492240"/>
+            <a:ext cx="2478024" cy="155448"/>
+          </a:xfrm>
+          <a:prstGeom prst="rect">
+            <a:avLst/>
+          </a:prstGeom>
+          <a:noFill/>
+          <a:ln/>
+        </p:spPr>
+        <p:txBody>
+          <a:bodyPr wrap="square" lIns="0" tIns="0" rIns="0" bIns="0" rtlCol="0" anchor="ctr"/>
+          <a:lstStyle/>
+          <a:p>
+            <a:pPr indent="0" marL="0">
+              <a:buNone/>
+            </a:pPr>
+            <a:r>
+              <a:rPr lang="en-US" sz="800" dirty="0">
+                <a:solidFill>
+                  <a:srgbClr val="0A3D23"/>
+                </a:solidFill>
+                <a:latin typeface="Yu Gothic" pitchFamily="34" charset="0"/>
+                <a:ea typeface="Yu Gothic" pitchFamily="34" charset="-122"/>
+                <a:cs typeface="Yu Gothic" pitchFamily="34" charset="-120"/>
+              </a:rPr>
+              <a:t>クリエ様の原状回復条件がわかる資料</a:t>
+            </a:r>
+            <a:endParaRPr lang="en-US" sz="800" dirty="0"/>
+          </a:p>
+        </p:txBody>
+      </p:sp>
+      <p:sp>
+        <p:nvSpPr>
+          <p:cNvPr id="87" name="Text 83"/>
           <p:cNvSpPr/>
           <p:nvPr/>
         </p:nvSpPr>
         <p:spPr>
           <a:xfrm>
             <a:off x="7461504" y="6647688"/>
-            <a:ext cx="146304" cy="178308"/>
-          </a:xfrm>
-          <a:prstGeom prst="rect">
-            <a:avLst/>
-          </a:prstGeom>
-          <a:noFill/>
-          <a:ln/>
-        </p:spPr>
-        <p:txBody>
-          <a:bodyPr wrap="square" lIns="0" tIns="0" rIns="0" bIns="0" rtlCol="0" anchor="ctr"/>
-          <a:lstStyle/>
-          <a:p>
-            <a:pPr indent="0" marL="0">
-              <a:buNone/>
-            </a:pPr>
-            <a:r>
-              <a:rPr lang="en-US" sz="850" dirty="0">
+            <a:ext cx="146304" cy="155448"/>
+          </a:xfrm>
+          <a:prstGeom prst="rect">
+            <a:avLst/>
+          </a:prstGeom>
+          <a:noFill/>
+          <a:ln/>
+        </p:spPr>
+        <p:txBody>
+          <a:bodyPr wrap="square" lIns="0" tIns="0" rIns="0" bIns="0" rtlCol="0" anchor="ctr"/>
+          <a:lstStyle/>
+          <a:p>
+            <a:pPr indent="0" marL="0">
+              <a:buNone/>
+            </a:pPr>
+            <a:r>
+              <a:rPr lang="en-US" sz="800" dirty="0">
                 <a:solidFill>
                   <a:srgbClr val="7E8882"/>
                 </a:solidFill>
@@ -6383,36 +6539,36 @@
               </a:rPr>
               <a:t>・</a:t>
             </a:r>
-            <a:endParaRPr lang="en-US" sz="850" dirty="0"/>
-          </a:p>
-        </p:txBody>
-      </p:sp>
-      <p:sp>
-        <p:nvSpPr>
-          <p:cNvPr id="84" name="Text 80"/>
+            <a:endParaRPr lang="en-US" sz="800" dirty="0"/>
+          </a:p>
+        </p:txBody>
+      </p:sp>
+      <p:sp>
+        <p:nvSpPr>
+          <p:cNvPr id="88" name="Text 84"/>
           <p:cNvSpPr/>
           <p:nvPr/>
         </p:nvSpPr>
         <p:spPr>
           <a:xfrm>
             <a:off x="7626096" y="6647688"/>
-            <a:ext cx="2478024" cy="178308"/>
-          </a:xfrm>
-          <a:prstGeom prst="rect">
-            <a:avLst/>
-          </a:prstGeom>
-          <a:noFill/>
-          <a:ln/>
-        </p:spPr>
-        <p:txBody>
-          <a:bodyPr wrap="square" lIns="0" tIns="0" rIns="0" bIns="0" rtlCol="0" anchor="ctr"/>
-          <a:lstStyle/>
-          <a:p>
-            <a:pPr indent="0" marL="0">
-              <a:buNone/>
-            </a:pPr>
-            <a:r>
-              <a:rPr lang="en-US" sz="850" dirty="0">
+            <a:ext cx="2478024" cy="155448"/>
+          </a:xfrm>
+          <a:prstGeom prst="rect">
+            <a:avLst/>
+          </a:prstGeom>
+          <a:noFill/>
+          <a:ln/>
+        </p:spPr>
+        <p:txBody>
+          <a:bodyPr wrap="square" lIns="0" tIns="0" rIns="0" bIns="0" rtlCol="0" anchor="ctr"/>
+          <a:lstStyle/>
+          <a:p>
+            <a:pPr indent="0" marL="0">
+              <a:buNone/>
+            </a:pPr>
+            <a:r>
+              <a:rPr lang="en-US" sz="800" dirty="0">
                 <a:solidFill>
                   <a:srgbClr val="0A3D23"/>
                 </a:solidFill>
@@ -6420,22 +6576,100 @@
                 <a:ea typeface="Yu Gothic" pitchFamily="34" charset="-122"/>
                 <a:cs typeface="Yu Gothic" pitchFamily="34" charset="-120"/>
               </a:rPr>
-              <a:t>クリエ様の原状回復条件がわかる資料</a:t>
-            </a:r>
-            <a:endParaRPr lang="en-US" sz="850" dirty="0"/>
-          </a:p>
-        </p:txBody>
-      </p:sp>
-      <p:sp>
-        <p:nvSpPr>
-          <p:cNvPr id="85" name="Text 81"/>
-          <p:cNvSpPr/>
-          <p:nvPr/>
-        </p:nvSpPr>
-        <p:spPr>
-          <a:xfrm>
-            <a:off x="384048" y="7251192"/>
-            <a:ext cx="9921240" cy="146304"/>
+              <a:t>ご契約者情報（会社名・所在地・代表者名）</a:t>
+            </a:r>
+            <a:endParaRPr lang="en-US" sz="800" dirty="0"/>
+          </a:p>
+        </p:txBody>
+      </p:sp>
+      <p:sp>
+        <p:nvSpPr>
+          <p:cNvPr id="89" name="Text 85"/>
+          <p:cNvSpPr/>
+          <p:nvPr/>
+        </p:nvSpPr>
+        <p:spPr>
+          <a:xfrm>
+            <a:off x="7461504" y="6803136"/>
+            <a:ext cx="146304" cy="155448"/>
+          </a:xfrm>
+          <a:prstGeom prst="rect">
+            <a:avLst/>
+          </a:prstGeom>
+          <a:noFill/>
+          <a:ln/>
+        </p:spPr>
+        <p:txBody>
+          <a:bodyPr wrap="square" lIns="0" tIns="0" rIns="0" bIns="0" rtlCol="0" anchor="ctr"/>
+          <a:lstStyle/>
+          <a:p>
+            <a:pPr indent="0" marL="0">
+              <a:buNone/>
+            </a:pPr>
+            <a:r>
+              <a:rPr lang="en-US" sz="800" dirty="0">
+                <a:solidFill>
+                  <a:srgbClr val="7E8882"/>
+                </a:solidFill>
+                <a:latin typeface="Yu Gothic" pitchFamily="34" charset="0"/>
+                <a:ea typeface="Yu Gothic" pitchFamily="34" charset="-122"/>
+                <a:cs typeface="Yu Gothic" pitchFamily="34" charset="-120"/>
+              </a:rPr>
+              <a:t>・</a:t>
+            </a:r>
+            <a:endParaRPr lang="en-US" sz="800" dirty="0"/>
+          </a:p>
+        </p:txBody>
+      </p:sp>
+      <p:sp>
+        <p:nvSpPr>
+          <p:cNvPr id="90" name="Text 86"/>
+          <p:cNvSpPr/>
+          <p:nvPr/>
+        </p:nvSpPr>
+        <p:spPr>
+          <a:xfrm>
+            <a:off x="7626096" y="6803136"/>
+            <a:ext cx="2478024" cy="155448"/>
+          </a:xfrm>
+          <a:prstGeom prst="rect">
+            <a:avLst/>
+          </a:prstGeom>
+          <a:noFill/>
+          <a:ln/>
+        </p:spPr>
+        <p:txBody>
+          <a:bodyPr wrap="square" lIns="0" tIns="0" rIns="0" bIns="0" rtlCol="0" anchor="ctr"/>
+          <a:lstStyle/>
+          <a:p>
+            <a:pPr indent="0" marL="0">
+              <a:buNone/>
+            </a:pPr>
+            <a:r>
+              <a:rPr lang="en-US" sz="800" dirty="0">
+                <a:solidFill>
+                  <a:srgbClr val="0A3D23"/>
+                </a:solidFill>
+                <a:latin typeface="Yu Gothic" pitchFamily="34" charset="0"/>
+                <a:ea typeface="Yu Gothic" pitchFamily="34" charset="-122"/>
+                <a:cs typeface="Yu Gothic" pitchFamily="34" charset="-120"/>
+              </a:rPr>
+              <a:t>業務委託料のお振込先口座</a:t>
+            </a:r>
+            <a:endParaRPr lang="en-US" sz="800" dirty="0"/>
+          </a:p>
+        </p:txBody>
+      </p:sp>
+      <p:sp>
+        <p:nvSpPr>
+          <p:cNvPr id="91" name="Text 87"/>
+          <p:cNvSpPr/>
+          <p:nvPr/>
+        </p:nvSpPr>
+        <p:spPr>
+          <a:xfrm>
+            <a:off x="384048" y="7260336"/>
+            <a:ext cx="9921240" cy="137160"/>
           </a:xfrm>
           <a:prstGeom prst="rect">
             <a:avLst/>
@@ -6467,14 +6701,14 @@
       </p:sp>
       <p:sp>
         <p:nvSpPr>
-          <p:cNvPr id="86" name="Text 82"/>
+          <p:cNvPr id="92" name="Text 88"/>
           <p:cNvSpPr/>
           <p:nvPr/>
         </p:nvSpPr>
         <p:spPr>
           <a:xfrm>
             <a:off x="384048" y="7388352"/>
-            <a:ext cx="6583680" cy="146304"/>
+            <a:ext cx="6400800" cy="137160"/>
           </a:xfrm>
           <a:prstGeom prst="rect">
             <a:avLst/>
@@ -6498,7 +6732,7 @@
                 <a:ea typeface="Yu Gothic" pitchFamily="34" charset="-122"/>
                 <a:cs typeface="Yu Gothic" pitchFamily="34" charset="-120"/>
               </a:rPr>
-              <a:t>※ 工期・納期は目安です。館（イオンモール様）の工事申請に要する期間は未織り込みのため、判明次第あらためて調整いたします。</a:t>
+              <a:t>※ 業務委託契約書は別途ご送付済みです。別表は仕様確定後に作成いたします。工期・納期は目安で、館の工事申請期間は未織り込みです。</a:t>
             </a:r>
             <a:endParaRPr lang="en-US" sz="750" dirty="0"/>
           </a:p>
@@ -6506,14 +6740,14 @@
       </p:sp>
       <p:sp>
         <p:nvSpPr>
-          <p:cNvPr id="87" name="Text 83"/>
+          <p:cNvPr id="93" name="Text 89"/>
           <p:cNvSpPr/>
           <p:nvPr/>
         </p:nvSpPr>
         <p:spPr>
           <a:xfrm>
             <a:off x="7013448" y="7388352"/>
-            <a:ext cx="3291840" cy="146304"/>
+            <a:ext cx="3291840" cy="137160"/>
           </a:xfrm>
           <a:prstGeom prst="rect">
             <a:avLst/>

--- a/selfcafe-miraiya-kickoff-deck/akita-schedule-sheet.pptx
+++ b/selfcafe-miraiya-kickoff-deck/akita-schedule-sheet.pptx
@@ -857,7 +857,7 @@
     <p:bg>
       <p:bgPr>
         <a:solidFill>
-          <a:srgbClr val="FFFDF7"/>
+          <a:srgbClr val="FFFFFF"/>
         </a:solidFill>
       </p:bgPr>
     </p:bg>
@@ -877,34 +877,14 @@
       </p:grpSpPr>
       <p:sp>
         <p:nvSpPr>
-          <p:cNvPr id="2" name="Shape 0"/>
-          <p:cNvSpPr/>
-          <p:nvPr/>
-        </p:nvSpPr>
-        <p:spPr>
-          <a:xfrm>
-            <a:off x="384048" y="310896"/>
-            <a:ext cx="182880" cy="23774"/>
-          </a:xfrm>
-          <a:prstGeom prst="rect">
-            <a:avLst/>
-          </a:prstGeom>
-          <a:solidFill>
-            <a:srgbClr val="106838"/>
-          </a:solidFill>
-          <a:ln/>
-        </p:spPr>
-      </p:sp>
-      <p:sp>
-        <p:nvSpPr>
-          <p:cNvPr id="3" name="Text 1"/>
-          <p:cNvSpPr/>
-          <p:nvPr/>
-        </p:nvSpPr>
-        <p:spPr>
-          <a:xfrm>
-            <a:off x="658368" y="228600"/>
-            <a:ext cx="6400800" cy="182880"/>
+          <p:cNvPr id="2" name="Text 0"/>
+          <p:cNvSpPr/>
+          <p:nvPr/>
+        </p:nvSpPr>
+        <p:spPr>
+          <a:xfrm>
+            <a:off x="7562088" y="274320"/>
+            <a:ext cx="2743200" cy="164592"/>
           </a:xfrm>
           <a:prstGeom prst="rect">
             <a:avLst/>
@@ -916,34 +896,34 @@
           <a:bodyPr wrap="square" lIns="0" tIns="0" rIns="0" bIns="0" rtlCol="0" anchor="ctr"/>
           <a:lstStyle/>
           <a:p>
-            <a:pPr indent="0" marL="0">
+            <a:pPr algn="r" indent="0" marL="0">
               <a:buNone/>
             </a:pPr>
             <a:r>
-              <a:rPr lang="en-US" sz="950" b="1" dirty="0">
+              <a:rPr lang="en-US" sz="900" dirty="0">
                 <a:solidFill>
-                  <a:srgbClr val="1B8149"/>
+                  <a:srgbClr val="333333"/>
                 </a:solidFill>
                 <a:latin typeface="Yu Gothic" pitchFamily="34" charset="0"/>
                 <a:ea typeface="Yu Gothic" pitchFamily="34" charset="-122"/>
                 <a:cs typeface="Yu Gothic" pitchFamily="34" charset="-120"/>
               </a:rPr>
-              <a:t>未来屋書店 秋田店　カフェ区画 業態転換</a:t>
+              <a:t>2026年10月17日</a:t>
             </a:r>
-            <a:endParaRPr lang="en-US" sz="950" dirty="0"/>
-          </a:p>
-        </p:txBody>
-      </p:sp>
-      <p:sp>
-        <p:nvSpPr>
-          <p:cNvPr id="4" name="Text 2"/>
-          <p:cNvSpPr/>
-          <p:nvPr/>
-        </p:nvSpPr>
-        <p:spPr>
-          <a:xfrm>
-            <a:off x="384048" y="420624"/>
-            <a:ext cx="7315200" cy="402336"/>
+            <a:endParaRPr lang="en-US" sz="900" dirty="0"/>
+          </a:p>
+        </p:txBody>
+      </p:sp>
+      <p:sp>
+        <p:nvSpPr>
+          <p:cNvPr id="3" name="Text 1"/>
+          <p:cNvSpPr/>
+          <p:nvPr/>
+        </p:nvSpPr>
+        <p:spPr>
+          <a:xfrm>
+            <a:off x="384048" y="457200"/>
+            <a:ext cx="4572000" cy="219456"/>
           </a:xfrm>
           <a:prstGeom prst="rect">
             <a:avLst/>
@@ -959,23 +939,23 @@
               <a:buNone/>
             </a:pPr>
             <a:r>
-              <a:rPr lang="en-US" sz="2200" b="1" dirty="0">
+              <a:rPr lang="en-US" sz="1150" dirty="0">
                 <a:solidFill>
-                  <a:srgbClr val="0A3D23"/>
+                  <a:srgbClr val="1A1A1A"/>
                 </a:solidFill>
                 <a:latin typeface="Yu Gothic" pitchFamily="34" charset="0"/>
                 <a:ea typeface="Yu Gothic" pitchFamily="34" charset="-122"/>
                 <a:cs typeface="Yu Gothic" pitchFamily="34" charset="-120"/>
               </a:rPr>
-              <a:t>スケジュールと役割分担</a:t>
+              <a:t>株式会社未来屋書店　御中</a:t>
             </a:r>
-            <a:endParaRPr lang="en-US" sz="2200" dirty="0"/>
+            <a:endParaRPr lang="en-US" sz="1150" dirty="0"/>
           </a:p>
         </p:txBody>
       </p:sp>
       <p:pic>
         <p:nvPicPr>
-          <p:cNvPr id="5" name="Image 0" descr="/home/user/suzuki-ceo/selfcafe-miraiya-kickoff-deck/assets/logo-green.png">    </p:cNvPr>
+          <p:cNvPr id="4" name="Image 0" descr="/home/user/suzuki-ceo/selfcafe-miraiya-kickoff-deck/assets/logo-green.png">    </p:cNvPr>
           <p:cNvPicPr>
             <a:picLocks noChangeAspect="1"/>
           </p:cNvPicPr>
@@ -989,8 +969,8 @@
         </p:blipFill>
         <p:spPr>
           <a:xfrm>
-            <a:off x="8887968" y="274320"/>
-            <a:ext cx="1417320" cy="202082"/>
+            <a:off x="8979408" y="438912"/>
+            <a:ext cx="1325880" cy="189281"/>
           </a:xfrm>
           <a:prstGeom prst="rect">
             <a:avLst/>
@@ -999,14 +979,14 @@
       </p:pic>
       <p:sp>
         <p:nvSpPr>
-          <p:cNvPr id="6" name="Text 3"/>
-          <p:cNvSpPr/>
-          <p:nvPr/>
-        </p:nvSpPr>
-        <p:spPr>
-          <a:xfrm>
-            <a:off x="7013448" y="530352"/>
-            <a:ext cx="3291840" cy="182880"/>
+          <p:cNvPr id="5" name="Text 2"/>
+          <p:cNvSpPr/>
+          <p:nvPr/>
+        </p:nvSpPr>
+        <p:spPr>
+          <a:xfrm>
+            <a:off x="6099048" y="640080"/>
+            <a:ext cx="4206240" cy="164592"/>
           </a:xfrm>
           <a:prstGeom prst="rect">
             <a:avLst/>
@@ -1022,57 +1002,30 @@
               <a:buNone/>
             </a:pPr>
             <a:r>
-              <a:rPr lang="en-US" sz="850" dirty="0">
+              <a:rPr lang="en-US" sz="950" dirty="0">
                 <a:solidFill>
-                  <a:srgbClr val="7E8882"/>
+                  <a:srgbClr val="1A1A1A"/>
                 </a:solidFill>
                 <a:latin typeface="Yu Gothic" pitchFamily="34" charset="0"/>
                 <a:ea typeface="Yu Gothic" pitchFamily="34" charset="-122"/>
                 <a:cs typeface="Yu Gothic" pitchFamily="34" charset="-120"/>
               </a:rPr>
-              <a:t>2026年10月17日　セルフカフェ株式会社</a:t>
+              <a:t>セルフカフェ株式会社</a:t>
             </a:r>
-            <a:endParaRPr lang="en-US" sz="850" dirty="0"/>
-          </a:p>
-        </p:txBody>
-      </p:sp>
-      <p:sp>
-        <p:nvSpPr>
-          <p:cNvPr id="7" name="Shape 4"/>
-          <p:cNvSpPr/>
-          <p:nvPr/>
-        </p:nvSpPr>
-        <p:spPr>
-          <a:xfrm>
-            <a:off x="384048" y="914400"/>
-            <a:ext cx="1881835" cy="384048"/>
-          </a:xfrm>
-          <a:prstGeom prst="roundRect">
-            <a:avLst>
-              <a:gd name="adj" fmla="val 11905"/>
-            </a:avLst>
-          </a:prstGeom>
-          <a:solidFill>
-            <a:srgbClr val="F1F8F3"/>
-          </a:solidFill>
-          <a:ln w="9525">
-            <a:solidFill>
-              <a:srgbClr val="D2E7DA"/>
-            </a:solidFill>
-            <a:prstDash val="solid"/>
-          </a:ln>
-        </p:spPr>
-      </p:sp>
-      <p:sp>
-        <p:nvSpPr>
-          <p:cNvPr id="8" name="Text 5"/>
-          <p:cNvSpPr/>
-          <p:nvPr/>
-        </p:nvSpPr>
-        <p:spPr>
-          <a:xfrm>
-            <a:off x="512064" y="941832"/>
-            <a:ext cx="1625803" cy="155448"/>
+            <a:endParaRPr lang="en-US" sz="950" dirty="0"/>
+          </a:p>
+        </p:txBody>
+      </p:sp>
+      <p:sp>
+        <p:nvSpPr>
+          <p:cNvPr id="6" name="Text 3"/>
+          <p:cNvSpPr/>
+          <p:nvPr/>
+        </p:nvSpPr>
+        <p:spPr>
+          <a:xfrm>
+            <a:off x="5367528" y="795528"/>
+            <a:ext cx="4937760" cy="146304"/>
           </a:xfrm>
           <a:prstGeom prst="rect">
             <a:avLst/>
@@ -1084,34 +1037,54 @@
           <a:bodyPr wrap="square" lIns="0" tIns="0" rIns="0" bIns="0" rtlCol="0" anchor="ctr"/>
           <a:lstStyle/>
           <a:p>
-            <a:pPr indent="0" marL="0">
+            <a:pPr algn="r" indent="0" marL="0">
               <a:buNone/>
             </a:pPr>
             <a:r>
-              <a:rPr lang="en-US" sz="700" dirty="0">
+              <a:rPr lang="en-US" sz="750" dirty="0">
                 <a:solidFill>
-                  <a:srgbClr val="7E8882"/>
+                  <a:srgbClr val="6B6B6B"/>
                 </a:solidFill>
                 <a:latin typeface="Yu Gothic" pitchFamily="34" charset="0"/>
                 <a:ea typeface="Yu Gothic" pitchFamily="34" charset="-122"/>
                 <a:cs typeface="Yu Gothic" pitchFamily="34" charset="-120"/>
               </a:rPr>
-              <a:t>区画</a:t>
+              <a:t>愛知県名古屋市緑区鴻仏目1-102ベルインビルB棟3階　TEL 052-879-3557</a:t>
             </a:r>
-            <a:endParaRPr lang="en-US" sz="700" dirty="0"/>
-          </a:p>
-        </p:txBody>
-      </p:sp>
-      <p:sp>
-        <p:nvSpPr>
-          <p:cNvPr id="9" name="Text 6"/>
-          <p:cNvSpPr/>
-          <p:nvPr/>
-        </p:nvSpPr>
-        <p:spPr>
-          <a:xfrm>
-            <a:off x="512064" y="1088136"/>
-            <a:ext cx="1625803" cy="182880"/>
+            <a:endParaRPr lang="en-US" sz="750" dirty="0"/>
+          </a:p>
+        </p:txBody>
+      </p:sp>
+      <p:sp>
+        <p:nvSpPr>
+          <p:cNvPr id="7" name="Shape 4"/>
+          <p:cNvSpPr/>
+          <p:nvPr/>
+        </p:nvSpPr>
+        <p:spPr>
+          <a:xfrm>
+            <a:off x="384048" y="1005840"/>
+            <a:ext cx="9921240" cy="14630"/>
+          </a:xfrm>
+          <a:prstGeom prst="rect">
+            <a:avLst/>
+          </a:prstGeom>
+          <a:solidFill>
+            <a:srgbClr val="333333"/>
+          </a:solidFill>
+          <a:ln/>
+        </p:spPr>
+      </p:sp>
+      <p:sp>
+        <p:nvSpPr>
+          <p:cNvPr id="8" name="Text 5"/>
+          <p:cNvSpPr/>
+          <p:nvPr/>
+        </p:nvSpPr>
+        <p:spPr>
+          <a:xfrm>
+            <a:off x="384048" y="1051560"/>
+            <a:ext cx="9921240" cy="292608"/>
           </a:xfrm>
           <a:prstGeom prst="rect">
             <a:avLst/>
@@ -1123,61 +1096,54 @@
           <a:bodyPr wrap="square" lIns="0" tIns="0" rIns="0" bIns="0" rtlCol="0" anchor="ctr"/>
           <a:lstStyle/>
           <a:p>
-            <a:pPr indent="0" marL="0">
+            <a:pPr algn="ctr" indent="0" marL="0">
               <a:buNone/>
             </a:pPr>
             <a:r>
-              <a:rPr lang="en-US" sz="1050" b="1" dirty="0">
+              <a:rPr lang="en-US" sz="1500" b="1" dirty="0">
                 <a:solidFill>
-                  <a:srgbClr val="106838"/>
+                  <a:srgbClr val="1A1A1A"/>
                 </a:solidFill>
                 <a:latin typeface="Yu Gothic" pitchFamily="34" charset="0"/>
                 <a:ea typeface="Yu Gothic" pitchFamily="34" charset="-122"/>
                 <a:cs typeface="Yu Gothic" pitchFamily="34" charset="-120"/>
               </a:rPr>
-              <a:t>30坪</a:t>
+              <a:t>秋田店 カフェ区画 業態転換　進行スケジュールおよびご確認事項</a:t>
             </a:r>
-            <a:endParaRPr lang="en-US" sz="1050" dirty="0"/>
-          </a:p>
-        </p:txBody>
-      </p:sp>
-      <p:sp>
-        <p:nvSpPr>
-          <p:cNvPr id="10" name="Shape 7"/>
-          <p:cNvSpPr/>
-          <p:nvPr/>
-        </p:nvSpPr>
-        <p:spPr>
-          <a:xfrm>
-            <a:off x="2393899" y="914400"/>
-            <a:ext cx="1881835" cy="384048"/>
-          </a:xfrm>
-          <a:prstGeom prst="roundRect">
-            <a:avLst>
-              <a:gd name="adj" fmla="val 11905"/>
-            </a:avLst>
+            <a:endParaRPr lang="en-US" sz="1500" dirty="0"/>
+          </a:p>
+        </p:txBody>
+      </p:sp>
+      <p:sp>
+        <p:nvSpPr>
+          <p:cNvPr id="9" name="Shape 6"/>
+          <p:cNvSpPr/>
+          <p:nvPr/>
+        </p:nvSpPr>
+        <p:spPr>
+          <a:xfrm>
+            <a:off x="384048" y="1371600"/>
+            <a:ext cx="9921240" cy="7315"/>
+          </a:xfrm>
+          <a:prstGeom prst="rect">
+            <a:avLst/>
           </a:prstGeom>
           <a:solidFill>
-            <a:srgbClr val="F1F8F3"/>
+            <a:srgbClr val="BFBFBF"/>
           </a:solidFill>
-          <a:ln w="9525">
-            <a:solidFill>
-              <a:srgbClr val="D2E7DA"/>
-            </a:solidFill>
-            <a:prstDash val="solid"/>
-          </a:ln>
-        </p:spPr>
-      </p:sp>
-      <p:sp>
-        <p:nvSpPr>
-          <p:cNvPr id="11" name="Text 8"/>
-          <p:cNvSpPr/>
-          <p:nvPr/>
-        </p:nvSpPr>
-        <p:spPr>
-          <a:xfrm>
-            <a:off x="2521915" y="941832"/>
-            <a:ext cx="1625803" cy="155448"/>
+          <a:ln/>
+        </p:spPr>
+      </p:sp>
+      <p:sp>
+        <p:nvSpPr>
+          <p:cNvPr id="10" name="Text 7"/>
+          <p:cNvSpPr/>
+          <p:nvPr/>
+        </p:nvSpPr>
+        <p:spPr>
+          <a:xfrm>
+            <a:off x="384048" y="1426464"/>
+            <a:ext cx="9921240" cy="164592"/>
           </a:xfrm>
           <a:prstGeom prst="rect">
             <a:avLst/>
@@ -1193,19 +1159,39 @@
               <a:buNone/>
             </a:pPr>
             <a:r>
-              <a:rPr lang="en-US" sz="700" dirty="0">
+              <a:rPr lang="en-US" sz="900" dirty="0">
                 <a:solidFill>
-                  <a:srgbClr val="7E8882"/>
+                  <a:srgbClr val="333333"/>
                 </a:solidFill>
                 <a:latin typeface="Yu Gothic" pitchFamily="34" charset="0"/>
                 <a:ea typeface="Yu Gothic" pitchFamily="34" charset="-122"/>
                 <a:cs typeface="Yu Gothic" pitchFamily="34" charset="-120"/>
               </a:rPr>
-              <a:t>契約形態</a:t>
+              <a:t>平素より格別のお引き立てを賜り、厚く御礼申し上げます。標記の件につきまして、現時点における進行スケジュールおよびご確認事項を下記のとおりご案内申し上げます。</a:t>
             </a:r>
-            <a:endParaRPr lang="en-US" sz="700" dirty="0"/>
-          </a:p>
-        </p:txBody>
+            <a:endParaRPr lang="en-US" sz="900" dirty="0"/>
+          </a:p>
+        </p:txBody>
+      </p:sp>
+      <p:sp>
+        <p:nvSpPr>
+          <p:cNvPr id="11" name="Shape 8"/>
+          <p:cNvSpPr/>
+          <p:nvPr/>
+        </p:nvSpPr>
+        <p:spPr>
+          <a:xfrm>
+            <a:off x="384048" y="1691640"/>
+            <a:ext cx="50292" cy="146304"/>
+          </a:xfrm>
+          <a:prstGeom prst="rect">
+            <a:avLst/>
+          </a:prstGeom>
+          <a:solidFill>
+            <a:srgbClr val="0C5230"/>
+          </a:solidFill>
+          <a:ln/>
+        </p:spPr>
       </p:sp>
       <p:sp>
         <p:nvSpPr>
@@ -1215,8 +1201,8 @@
         </p:nvSpPr>
         <p:spPr>
           <a:xfrm>
-            <a:off x="2521915" y="1088136"/>
-            <a:ext cx="1625803" cy="182880"/>
+            <a:off x="512064" y="1664208"/>
+            <a:ext cx="9793224" cy="201168"/>
           </a:xfrm>
           <a:prstGeom prst="rect">
             <a:avLst/>
@@ -1232,332 +1218,17 @@
               <a:buNone/>
             </a:pPr>
             <a:r>
-              <a:rPr lang="en-US" sz="1050" b="1" dirty="0">
+              <a:rPr lang="en-US" sz="1000" b="1" dirty="0">
                 <a:solidFill>
-                  <a:srgbClr val="106838"/>
+                  <a:srgbClr val="1A1A1A"/>
                 </a:solidFill>
                 <a:latin typeface="Yu Gothic" pitchFamily="34" charset="0"/>
                 <a:ea typeface="Yu Gothic" pitchFamily="34" charset="-122"/>
                 <a:cs typeface="Yu Gothic" pitchFamily="34" charset="-120"/>
               </a:rPr>
-              <a:t>業務委託型・3年</a:t>
+              <a:t>１．前提条件</a:t>
             </a:r>
-            <a:endParaRPr lang="en-US" sz="1050" dirty="0"/>
-          </a:p>
-        </p:txBody>
-      </p:sp>
-      <p:sp>
-        <p:nvSpPr>
-          <p:cNvPr id="13" name="Shape 10"/>
-          <p:cNvSpPr/>
-          <p:nvPr/>
-        </p:nvSpPr>
-        <p:spPr>
-          <a:xfrm>
-            <a:off x="4403750" y="914400"/>
-            <a:ext cx="1881835" cy="384048"/>
-          </a:xfrm>
-          <a:prstGeom prst="roundRect">
-            <a:avLst>
-              <a:gd name="adj" fmla="val 11905"/>
-            </a:avLst>
-          </a:prstGeom>
-          <a:solidFill>
-            <a:srgbClr val="F1F8F3"/>
-          </a:solidFill>
-          <a:ln w="9525">
-            <a:solidFill>
-              <a:srgbClr val="D2E7DA"/>
-            </a:solidFill>
-            <a:prstDash val="solid"/>
-          </a:ln>
-        </p:spPr>
-      </p:sp>
-      <p:sp>
-        <p:nvSpPr>
-          <p:cNvPr id="14" name="Text 11"/>
-          <p:cNvSpPr/>
-          <p:nvPr/>
-        </p:nvSpPr>
-        <p:spPr>
-          <a:xfrm>
-            <a:off x="4531766" y="941832"/>
-            <a:ext cx="1625803" cy="155448"/>
-          </a:xfrm>
-          <a:prstGeom prst="rect">
-            <a:avLst/>
-          </a:prstGeom>
-          <a:noFill/>
-          <a:ln/>
-        </p:spPr>
-        <p:txBody>
-          <a:bodyPr wrap="square" lIns="0" tIns="0" rIns="0" bIns="0" rtlCol="0" anchor="ctr"/>
-          <a:lstStyle/>
-          <a:p>
-            <a:pPr indent="0" marL="0">
-              <a:buNone/>
-            </a:pPr>
-            <a:r>
-              <a:rPr lang="en-US" sz="700" dirty="0">
-                <a:solidFill>
-                  <a:srgbClr val="7E8882"/>
-                </a:solidFill>
-                <a:latin typeface="Yu Gothic" pitchFamily="34" charset="0"/>
-                <a:ea typeface="Yu Gothic" pitchFamily="34" charset="-122"/>
-                <a:cs typeface="Yu Gothic" pitchFamily="34" charset="-120"/>
-              </a:rPr>
-              <a:t>御社の初期費用（設置工事費）</a:t>
-            </a:r>
-            <a:endParaRPr lang="en-US" sz="700" dirty="0"/>
-          </a:p>
-        </p:txBody>
-      </p:sp>
-      <p:sp>
-        <p:nvSpPr>
-          <p:cNvPr id="15" name="Text 12"/>
-          <p:cNvSpPr/>
-          <p:nvPr/>
-        </p:nvSpPr>
-        <p:spPr>
-          <a:xfrm>
-            <a:off x="4531766" y="1088136"/>
-            <a:ext cx="1625803" cy="182880"/>
-          </a:xfrm>
-          <a:prstGeom prst="rect">
-            <a:avLst/>
-          </a:prstGeom>
-          <a:noFill/>
-          <a:ln/>
-        </p:spPr>
-        <p:txBody>
-          <a:bodyPr wrap="square" lIns="0" tIns="0" rIns="0" bIns="0" rtlCol="0" anchor="ctr"/>
-          <a:lstStyle/>
-          <a:p>
-            <a:pPr indent="0" marL="0">
-              <a:buNone/>
-            </a:pPr>
-            <a:r>
-              <a:rPr lang="en-US" sz="1050" b="1" dirty="0">
-                <a:solidFill>
-                  <a:srgbClr val="106838"/>
-                </a:solidFill>
-                <a:latin typeface="Yu Gothic" pitchFamily="34" charset="0"/>
-                <a:ea typeface="Yu Gothic" pitchFamily="34" charset="-122"/>
-                <a:cs typeface="Yu Gothic" pitchFamily="34" charset="-120"/>
-              </a:rPr>
-              <a:t>30〜50万円</a:t>
-            </a:r>
-            <a:endParaRPr lang="en-US" sz="1050" dirty="0"/>
-          </a:p>
-        </p:txBody>
-      </p:sp>
-      <p:sp>
-        <p:nvSpPr>
-          <p:cNvPr id="16" name="Shape 13"/>
-          <p:cNvSpPr/>
-          <p:nvPr/>
-        </p:nvSpPr>
-        <p:spPr>
-          <a:xfrm>
-            <a:off x="6413602" y="914400"/>
-            <a:ext cx="1881835" cy="384048"/>
-          </a:xfrm>
-          <a:prstGeom prst="roundRect">
-            <a:avLst>
-              <a:gd name="adj" fmla="val 11905"/>
-            </a:avLst>
-          </a:prstGeom>
-          <a:solidFill>
-            <a:srgbClr val="F1F8F3"/>
-          </a:solidFill>
-          <a:ln w="9525">
-            <a:solidFill>
-              <a:srgbClr val="D2E7DA"/>
-            </a:solidFill>
-            <a:prstDash val="solid"/>
-          </a:ln>
-        </p:spPr>
-      </p:sp>
-      <p:sp>
-        <p:nvSpPr>
-          <p:cNvPr id="17" name="Text 14"/>
-          <p:cNvSpPr/>
-          <p:nvPr/>
-        </p:nvSpPr>
-        <p:spPr>
-          <a:xfrm>
-            <a:off x="6541618" y="941832"/>
-            <a:ext cx="1625803" cy="155448"/>
-          </a:xfrm>
-          <a:prstGeom prst="rect">
-            <a:avLst/>
-          </a:prstGeom>
-          <a:noFill/>
-          <a:ln/>
-        </p:spPr>
-        <p:txBody>
-          <a:bodyPr wrap="square" lIns="0" tIns="0" rIns="0" bIns="0" rtlCol="0" anchor="ctr"/>
-          <a:lstStyle/>
-          <a:p>
-            <a:pPr indent="0" marL="0">
-              <a:buNone/>
-            </a:pPr>
-            <a:r>
-              <a:rPr lang="en-US" sz="700" dirty="0">
-                <a:solidFill>
-                  <a:srgbClr val="7E8882"/>
-                </a:solidFill>
-                <a:latin typeface="Yu Gothic" pitchFamily="34" charset="0"/>
-                <a:ea typeface="Yu Gothic" pitchFamily="34" charset="-122"/>
-                <a:cs typeface="Yu Gothic" pitchFamily="34" charset="-120"/>
-              </a:rPr>
-              <a:t>オープン目標</a:t>
-            </a:r>
-            <a:endParaRPr lang="en-US" sz="700" dirty="0"/>
-          </a:p>
-        </p:txBody>
-      </p:sp>
-      <p:sp>
-        <p:nvSpPr>
-          <p:cNvPr id="18" name="Text 15"/>
-          <p:cNvSpPr/>
-          <p:nvPr/>
-        </p:nvSpPr>
-        <p:spPr>
-          <a:xfrm>
-            <a:off x="6541618" y="1088136"/>
-            <a:ext cx="1625803" cy="182880"/>
-          </a:xfrm>
-          <a:prstGeom prst="rect">
-            <a:avLst/>
-          </a:prstGeom>
-          <a:noFill/>
-          <a:ln/>
-        </p:spPr>
-        <p:txBody>
-          <a:bodyPr wrap="square" lIns="0" tIns="0" rIns="0" bIns="0" rtlCol="0" anchor="ctr"/>
-          <a:lstStyle/>
-          <a:p>
-            <a:pPr indent="0" marL="0">
-              <a:buNone/>
-            </a:pPr>
-            <a:r>
-              <a:rPr lang="en-US" sz="1050" b="1" dirty="0">
-                <a:solidFill>
-                  <a:srgbClr val="106838"/>
-                </a:solidFill>
-                <a:latin typeface="Yu Gothic" pitchFamily="34" charset="0"/>
-                <a:ea typeface="Yu Gothic" pitchFamily="34" charset="-122"/>
-                <a:cs typeface="Yu Gothic" pitchFamily="34" charset="-120"/>
-              </a:rPr>
-              <a:t>2027年2月末</a:t>
-            </a:r>
-            <a:endParaRPr lang="en-US" sz="1050" dirty="0"/>
-          </a:p>
-        </p:txBody>
-      </p:sp>
-      <p:sp>
-        <p:nvSpPr>
-          <p:cNvPr id="19" name="Shape 16"/>
-          <p:cNvSpPr/>
-          <p:nvPr/>
-        </p:nvSpPr>
-        <p:spPr>
-          <a:xfrm>
-            <a:off x="8423453" y="914400"/>
-            <a:ext cx="1881835" cy="384048"/>
-          </a:xfrm>
-          <a:prstGeom prst="roundRect">
-            <a:avLst>
-              <a:gd name="adj" fmla="val 11905"/>
-            </a:avLst>
-          </a:prstGeom>
-          <a:solidFill>
-            <a:srgbClr val="F1F8F3"/>
-          </a:solidFill>
-          <a:ln w="9525">
-            <a:solidFill>
-              <a:srgbClr val="D2E7DA"/>
-            </a:solidFill>
-            <a:prstDash val="solid"/>
-          </a:ln>
-        </p:spPr>
-      </p:sp>
-      <p:sp>
-        <p:nvSpPr>
-          <p:cNvPr id="20" name="Text 17"/>
-          <p:cNvSpPr/>
-          <p:nvPr/>
-        </p:nvSpPr>
-        <p:spPr>
-          <a:xfrm>
-            <a:off x="8551469" y="941832"/>
-            <a:ext cx="1625803" cy="155448"/>
-          </a:xfrm>
-          <a:prstGeom prst="rect">
-            <a:avLst/>
-          </a:prstGeom>
-          <a:noFill/>
-          <a:ln/>
-        </p:spPr>
-        <p:txBody>
-          <a:bodyPr wrap="square" lIns="0" tIns="0" rIns="0" bIns="0" rtlCol="0" anchor="ctr"/>
-          <a:lstStyle/>
-          <a:p>
-            <a:pPr indent="0" marL="0">
-              <a:buNone/>
-            </a:pPr>
-            <a:r>
-              <a:rPr lang="en-US" sz="700" dirty="0">
-                <a:solidFill>
-                  <a:srgbClr val="7E8882"/>
-                </a:solidFill>
-                <a:latin typeface="Yu Gothic" pitchFamily="34" charset="0"/>
-                <a:ea typeface="Yu Gothic" pitchFamily="34" charset="-122"/>
-                <a:cs typeface="Yu Gothic" pitchFamily="34" charset="-120"/>
-              </a:rPr>
-              <a:t>閉店後の工期</a:t>
-            </a:r>
-            <a:endParaRPr lang="en-US" sz="700" dirty="0"/>
-          </a:p>
-        </p:txBody>
-      </p:sp>
-      <p:sp>
-        <p:nvSpPr>
-          <p:cNvPr id="21" name="Text 18"/>
-          <p:cNvSpPr/>
-          <p:nvPr/>
-        </p:nvSpPr>
-        <p:spPr>
-          <a:xfrm>
-            <a:off x="8551469" y="1088136"/>
-            <a:ext cx="1625803" cy="182880"/>
-          </a:xfrm>
-          <a:prstGeom prst="rect">
-            <a:avLst/>
-          </a:prstGeom>
-          <a:noFill/>
-          <a:ln/>
-        </p:spPr>
-        <p:txBody>
-          <a:bodyPr wrap="square" lIns="0" tIns="0" rIns="0" bIns="0" rtlCol="0" anchor="ctr"/>
-          <a:lstStyle/>
-          <a:p>
-            <a:pPr indent="0" marL="0">
-              <a:buNone/>
-            </a:pPr>
-            <a:r>
-              <a:rPr lang="en-US" sz="1050" b="1" dirty="0">
-                <a:solidFill>
-                  <a:srgbClr val="106838"/>
-                </a:solidFill>
-                <a:latin typeface="Yu Gothic" pitchFamily="34" charset="0"/>
-                <a:ea typeface="Yu Gothic" pitchFamily="34" charset="-122"/>
-                <a:cs typeface="Yu Gothic" pitchFamily="34" charset="-120"/>
-              </a:rPr>
-              <a:t>約1か月</a:t>
-            </a:r>
-            <a:endParaRPr lang="en-US" sz="1050" dirty="0"/>
+            <a:endParaRPr lang="en-US" sz="1000" dirty="0"/>
           </a:p>
         </p:txBody>
       </p:sp>
@@ -1576,7 +1247,7 @@
           </p:nvPr>
         </p:nvGraphicFramePr>
         <p:xfrm>
-          <a:off x="384048" y="1426464"/>
+          <a:off x="384048" y="1865376"/>
           <a:ext cx="9921240" cy="914400"/>
         </p:xfrm>
         <a:graphic>
@@ -1584,11 +1255,787 @@
             <a:tbl>
               <a:tblPr/>
               <a:tblGrid>
-                <a:gridCol w="1371600"/>
-                <a:gridCol w="7077456"/>
-                <a:gridCol w="1472184"/>
+                <a:gridCol w="1554480"/>
+                <a:gridCol w="2103120"/>
+                <a:gridCol w="2514600"/>
+                <a:gridCol w="1920240"/>
+                <a:gridCol w="1828800"/>
               </a:tblGrid>
-              <a:tr h="228600">
+              <a:tr h="201168">
+                <a:tc>
+                  <a:txBody>
+                    <a:bodyPr/>
+                    <a:lstStyle/>
+                    <a:p>
+                      <a:pPr algn="ctr" indent="0" marL="0">
+                        <a:buNone/>
+                      </a:pPr>
+                      <a:r>
+                        <a:rPr lang="en-US" sz="850" b="1" dirty="0">
+                          <a:solidFill>
+                            <a:srgbClr val="1A1A1A"/>
+                          </a:solidFill>
+                          <a:latin typeface="Yu Gothic" pitchFamily="34" charset="0"/>
+                          <a:ea typeface="Yu Gothic" pitchFamily="34" charset="-122"/>
+                          <a:cs typeface="Yu Gothic" pitchFamily="34" charset="-120"/>
+                        </a:rPr>
+                        <a:t>区画</a:t>
+                      </a:r>
+                      <a:endParaRPr lang="en-US" sz="850" dirty="0">
+                        <a:latin typeface="Yu Gothic" charset="0"/>
+                        <a:ea typeface="Yu Gothic" charset="0"/>
+                        <a:cs typeface="Yu Gothic" charset="0"/>
+                      </a:endParaRPr>
+                    </a:p>
+                  </a:txBody>
+                  <a:tcPr marL="91440" marR="91440" marT="18288" marB="18288" anchor="ctr">
+                    <a:lnL w="9525" cap="flat" cmpd="sng" algn="ctr">
+                      <a:solidFill>
+                        <a:srgbClr val="BFBFBF"/>
+                      </a:solidFill>
+                      <a:prstDash val="solid"/>
+                      <a:round/>
+                      <a:headEnd type="none" w="med" len="med"/>
+                      <a:tailEnd type="none" w="med" len="med"/>
+                    </a:lnL>
+                    <a:lnR w="9525" cap="flat" cmpd="sng" algn="ctr">
+                      <a:solidFill>
+                        <a:srgbClr val="BFBFBF"/>
+                      </a:solidFill>
+                      <a:prstDash val="solid"/>
+                      <a:round/>
+                      <a:headEnd type="none" w="med" len="med"/>
+                      <a:tailEnd type="none" w="med" len="med"/>
+                    </a:lnR>
+                    <a:lnT w="9525" cap="flat" cmpd="sng" algn="ctr">
+                      <a:solidFill>
+                        <a:srgbClr val="BFBFBF"/>
+                      </a:solidFill>
+                      <a:prstDash val="solid"/>
+                      <a:round/>
+                      <a:headEnd type="none" w="med" len="med"/>
+                      <a:tailEnd type="none" w="med" len="med"/>
+                    </a:lnT>
+                    <a:lnB w="9525" cap="flat" cmpd="sng" algn="ctr">
+                      <a:solidFill>
+                        <a:srgbClr val="BFBFBF"/>
+                      </a:solidFill>
+                      <a:prstDash val="solid"/>
+                      <a:round/>
+                      <a:headEnd type="none" w="med" len="med"/>
+                      <a:tailEnd type="none" w="med" len="med"/>
+                    </a:lnB>
+                    <a:solidFill>
+                      <a:srgbClr val="EDEDED"/>
+                    </a:solidFill>
+                  </a:tcPr>
+                </a:tc>
+                <a:tc>
+                  <a:txBody>
+                    <a:bodyPr/>
+                    <a:lstStyle/>
+                    <a:p>
+                      <a:pPr algn="ctr" indent="0" marL="0">
+                        <a:buNone/>
+                      </a:pPr>
+                      <a:r>
+                        <a:rPr lang="en-US" sz="850" b="1" dirty="0">
+                          <a:solidFill>
+                            <a:srgbClr val="1A1A1A"/>
+                          </a:solidFill>
+                          <a:latin typeface="Yu Gothic" pitchFamily="34" charset="0"/>
+                          <a:ea typeface="Yu Gothic" pitchFamily="34" charset="-122"/>
+                          <a:cs typeface="Yu Gothic" pitchFamily="34" charset="-120"/>
+                        </a:rPr>
+                        <a:t>契約形態</a:t>
+                      </a:r>
+                      <a:endParaRPr lang="en-US" sz="850" dirty="0">
+                        <a:latin typeface="Yu Gothic" charset="0"/>
+                        <a:ea typeface="Yu Gothic" charset="0"/>
+                        <a:cs typeface="Yu Gothic" charset="0"/>
+                      </a:endParaRPr>
+                    </a:p>
+                  </a:txBody>
+                  <a:tcPr marL="91440" marR="91440" marT="18288" marB="18288" anchor="ctr">
+                    <a:lnL w="9525" cap="flat" cmpd="sng" algn="ctr">
+                      <a:solidFill>
+                        <a:srgbClr val="BFBFBF"/>
+                      </a:solidFill>
+                      <a:prstDash val="solid"/>
+                      <a:round/>
+                      <a:headEnd type="none" w="med" len="med"/>
+                      <a:tailEnd type="none" w="med" len="med"/>
+                    </a:lnL>
+                    <a:lnR w="9525" cap="flat" cmpd="sng" algn="ctr">
+                      <a:solidFill>
+                        <a:srgbClr val="BFBFBF"/>
+                      </a:solidFill>
+                      <a:prstDash val="solid"/>
+                      <a:round/>
+                      <a:headEnd type="none" w="med" len="med"/>
+                      <a:tailEnd type="none" w="med" len="med"/>
+                    </a:lnR>
+                    <a:lnT w="9525" cap="flat" cmpd="sng" algn="ctr">
+                      <a:solidFill>
+                        <a:srgbClr val="BFBFBF"/>
+                      </a:solidFill>
+                      <a:prstDash val="solid"/>
+                      <a:round/>
+                      <a:headEnd type="none" w="med" len="med"/>
+                      <a:tailEnd type="none" w="med" len="med"/>
+                    </a:lnT>
+                    <a:lnB w="9525" cap="flat" cmpd="sng" algn="ctr">
+                      <a:solidFill>
+                        <a:srgbClr val="BFBFBF"/>
+                      </a:solidFill>
+                      <a:prstDash val="solid"/>
+                      <a:round/>
+                      <a:headEnd type="none" w="med" len="med"/>
+                      <a:tailEnd type="none" w="med" len="med"/>
+                    </a:lnB>
+                    <a:solidFill>
+                      <a:srgbClr val="EDEDED"/>
+                    </a:solidFill>
+                  </a:tcPr>
+                </a:tc>
+                <a:tc>
+                  <a:txBody>
+                    <a:bodyPr/>
+                    <a:lstStyle/>
+                    <a:p>
+                      <a:pPr algn="ctr" indent="0" marL="0">
+                        <a:buNone/>
+                      </a:pPr>
+                      <a:r>
+                        <a:rPr lang="en-US" sz="850" b="1" dirty="0">
+                          <a:solidFill>
+                            <a:srgbClr val="1A1A1A"/>
+                          </a:solidFill>
+                          <a:latin typeface="Yu Gothic" pitchFamily="34" charset="0"/>
+                          <a:ea typeface="Yu Gothic" pitchFamily="34" charset="-122"/>
+                          <a:cs typeface="Yu Gothic" pitchFamily="34" charset="-120"/>
+                        </a:rPr>
+                        <a:t>貴社ご負担の初期費用</a:t>
+                      </a:r>
+                      <a:endParaRPr lang="en-US" sz="850" dirty="0">
+                        <a:latin typeface="Yu Gothic" charset="0"/>
+                        <a:ea typeface="Yu Gothic" charset="0"/>
+                        <a:cs typeface="Yu Gothic" charset="0"/>
+                      </a:endParaRPr>
+                    </a:p>
+                  </a:txBody>
+                  <a:tcPr marL="91440" marR="91440" marT="18288" marB="18288" anchor="ctr">
+                    <a:lnL w="9525" cap="flat" cmpd="sng" algn="ctr">
+                      <a:solidFill>
+                        <a:srgbClr val="BFBFBF"/>
+                      </a:solidFill>
+                      <a:prstDash val="solid"/>
+                      <a:round/>
+                      <a:headEnd type="none" w="med" len="med"/>
+                      <a:tailEnd type="none" w="med" len="med"/>
+                    </a:lnL>
+                    <a:lnR w="9525" cap="flat" cmpd="sng" algn="ctr">
+                      <a:solidFill>
+                        <a:srgbClr val="BFBFBF"/>
+                      </a:solidFill>
+                      <a:prstDash val="solid"/>
+                      <a:round/>
+                      <a:headEnd type="none" w="med" len="med"/>
+                      <a:tailEnd type="none" w="med" len="med"/>
+                    </a:lnR>
+                    <a:lnT w="9525" cap="flat" cmpd="sng" algn="ctr">
+                      <a:solidFill>
+                        <a:srgbClr val="BFBFBF"/>
+                      </a:solidFill>
+                      <a:prstDash val="solid"/>
+                      <a:round/>
+                      <a:headEnd type="none" w="med" len="med"/>
+                      <a:tailEnd type="none" w="med" len="med"/>
+                    </a:lnT>
+                    <a:lnB w="9525" cap="flat" cmpd="sng" algn="ctr">
+                      <a:solidFill>
+                        <a:srgbClr val="BFBFBF"/>
+                      </a:solidFill>
+                      <a:prstDash val="solid"/>
+                      <a:round/>
+                      <a:headEnd type="none" w="med" len="med"/>
+                      <a:tailEnd type="none" w="med" len="med"/>
+                    </a:lnB>
+                    <a:solidFill>
+                      <a:srgbClr val="EDEDED"/>
+                    </a:solidFill>
+                  </a:tcPr>
+                </a:tc>
+                <a:tc>
+                  <a:txBody>
+                    <a:bodyPr/>
+                    <a:lstStyle/>
+                    <a:p>
+                      <a:pPr algn="ctr" indent="0" marL="0">
+                        <a:buNone/>
+                      </a:pPr>
+                      <a:r>
+                        <a:rPr lang="en-US" sz="850" b="1" dirty="0">
+                          <a:solidFill>
+                            <a:srgbClr val="1A1A1A"/>
+                          </a:solidFill>
+                          <a:latin typeface="Yu Gothic" pitchFamily="34" charset="0"/>
+                          <a:ea typeface="Yu Gothic" pitchFamily="34" charset="-122"/>
+                          <a:cs typeface="Yu Gothic" pitchFamily="34" charset="-120"/>
+                        </a:rPr>
+                        <a:t>開業予定</a:t>
+                      </a:r>
+                      <a:endParaRPr lang="en-US" sz="850" dirty="0">
+                        <a:latin typeface="Yu Gothic" charset="0"/>
+                        <a:ea typeface="Yu Gothic" charset="0"/>
+                        <a:cs typeface="Yu Gothic" charset="0"/>
+                      </a:endParaRPr>
+                    </a:p>
+                  </a:txBody>
+                  <a:tcPr marL="91440" marR="91440" marT="18288" marB="18288" anchor="ctr">
+                    <a:lnL w="9525" cap="flat" cmpd="sng" algn="ctr">
+                      <a:solidFill>
+                        <a:srgbClr val="BFBFBF"/>
+                      </a:solidFill>
+                      <a:prstDash val="solid"/>
+                      <a:round/>
+                      <a:headEnd type="none" w="med" len="med"/>
+                      <a:tailEnd type="none" w="med" len="med"/>
+                    </a:lnL>
+                    <a:lnR w="9525" cap="flat" cmpd="sng" algn="ctr">
+                      <a:solidFill>
+                        <a:srgbClr val="BFBFBF"/>
+                      </a:solidFill>
+                      <a:prstDash val="solid"/>
+                      <a:round/>
+                      <a:headEnd type="none" w="med" len="med"/>
+                      <a:tailEnd type="none" w="med" len="med"/>
+                    </a:lnR>
+                    <a:lnT w="9525" cap="flat" cmpd="sng" algn="ctr">
+                      <a:solidFill>
+                        <a:srgbClr val="BFBFBF"/>
+                      </a:solidFill>
+                      <a:prstDash val="solid"/>
+                      <a:round/>
+                      <a:headEnd type="none" w="med" len="med"/>
+                      <a:tailEnd type="none" w="med" len="med"/>
+                    </a:lnT>
+                    <a:lnB w="9525" cap="flat" cmpd="sng" algn="ctr">
+                      <a:solidFill>
+                        <a:srgbClr val="BFBFBF"/>
+                      </a:solidFill>
+                      <a:prstDash val="solid"/>
+                      <a:round/>
+                      <a:headEnd type="none" w="med" len="med"/>
+                      <a:tailEnd type="none" w="med" len="med"/>
+                    </a:lnB>
+                    <a:solidFill>
+                      <a:srgbClr val="EDEDED"/>
+                    </a:solidFill>
+                  </a:tcPr>
+                </a:tc>
+                <a:tc>
+                  <a:txBody>
+                    <a:bodyPr/>
+                    <a:lstStyle/>
+                    <a:p>
+                      <a:pPr algn="ctr" indent="0" marL="0">
+                        <a:buNone/>
+                      </a:pPr>
+                      <a:r>
+                        <a:rPr lang="en-US" sz="850" b="1" dirty="0">
+                          <a:solidFill>
+                            <a:srgbClr val="1A1A1A"/>
+                          </a:solidFill>
+                          <a:latin typeface="Yu Gothic" pitchFamily="34" charset="0"/>
+                          <a:ea typeface="Yu Gothic" pitchFamily="34" charset="-122"/>
+                          <a:cs typeface="Yu Gothic" pitchFamily="34" charset="-120"/>
+                        </a:rPr>
+                        <a:t>閉店後の工期</a:t>
+                      </a:r>
+                      <a:endParaRPr lang="en-US" sz="850" dirty="0">
+                        <a:latin typeface="Yu Gothic" charset="0"/>
+                        <a:ea typeface="Yu Gothic" charset="0"/>
+                        <a:cs typeface="Yu Gothic" charset="0"/>
+                      </a:endParaRPr>
+                    </a:p>
+                  </a:txBody>
+                  <a:tcPr marL="91440" marR="91440" marT="18288" marB="18288" anchor="ctr">
+                    <a:lnL w="9525" cap="flat" cmpd="sng" algn="ctr">
+                      <a:solidFill>
+                        <a:srgbClr val="BFBFBF"/>
+                      </a:solidFill>
+                      <a:prstDash val="solid"/>
+                      <a:round/>
+                      <a:headEnd type="none" w="med" len="med"/>
+                      <a:tailEnd type="none" w="med" len="med"/>
+                    </a:lnL>
+                    <a:lnR w="9525" cap="flat" cmpd="sng" algn="ctr">
+                      <a:solidFill>
+                        <a:srgbClr val="BFBFBF"/>
+                      </a:solidFill>
+                      <a:prstDash val="solid"/>
+                      <a:round/>
+                      <a:headEnd type="none" w="med" len="med"/>
+                      <a:tailEnd type="none" w="med" len="med"/>
+                    </a:lnR>
+                    <a:lnT w="9525" cap="flat" cmpd="sng" algn="ctr">
+                      <a:solidFill>
+                        <a:srgbClr val="BFBFBF"/>
+                      </a:solidFill>
+                      <a:prstDash val="solid"/>
+                      <a:round/>
+                      <a:headEnd type="none" w="med" len="med"/>
+                      <a:tailEnd type="none" w="med" len="med"/>
+                    </a:lnT>
+                    <a:lnB w="9525" cap="flat" cmpd="sng" algn="ctr">
+                      <a:solidFill>
+                        <a:srgbClr val="BFBFBF"/>
+                      </a:solidFill>
+                      <a:prstDash val="solid"/>
+                      <a:round/>
+                      <a:headEnd type="none" w="med" len="med"/>
+                      <a:tailEnd type="none" w="med" len="med"/>
+                    </a:lnB>
+                    <a:solidFill>
+                      <a:srgbClr val="EDEDED"/>
+                    </a:solidFill>
+                  </a:tcPr>
+                </a:tc>
+              </a:tr>
+              <a:tr h="256032">
+                <a:tc>
+                  <a:txBody>
+                    <a:bodyPr/>
+                    <a:lstStyle/>
+                    <a:p>
+                      <a:pPr algn="ctr" indent="0" marL="0">
+                        <a:buNone/>
+                      </a:pPr>
+                      <a:r>
+                        <a:rPr lang="en-US" sz="950" b="1" dirty="0">
+                          <a:solidFill>
+                            <a:srgbClr val="1A1A1A"/>
+                          </a:solidFill>
+                          <a:latin typeface="Yu Gothic" pitchFamily="34" charset="0"/>
+                          <a:ea typeface="Yu Gothic" pitchFamily="34" charset="-122"/>
+                          <a:cs typeface="Yu Gothic" pitchFamily="34" charset="-120"/>
+                        </a:rPr>
+                        <a:t>30坪</a:t>
+                      </a:r>
+                      <a:endParaRPr lang="en-US" sz="950" dirty="0">
+                        <a:latin typeface="Yu Gothic" charset="0"/>
+                        <a:ea typeface="Yu Gothic" charset="0"/>
+                        <a:cs typeface="Yu Gothic" charset="0"/>
+                      </a:endParaRPr>
+                    </a:p>
+                  </a:txBody>
+                  <a:tcPr marL="91440" marR="91440" marT="18288" marB="18288" anchor="ctr">
+                    <a:lnL w="9525" cap="flat" cmpd="sng" algn="ctr">
+                      <a:solidFill>
+                        <a:srgbClr val="BFBFBF"/>
+                      </a:solidFill>
+                      <a:prstDash val="solid"/>
+                      <a:round/>
+                      <a:headEnd type="none" w="med" len="med"/>
+                      <a:tailEnd type="none" w="med" len="med"/>
+                    </a:lnL>
+                    <a:lnR w="9525" cap="flat" cmpd="sng" algn="ctr">
+                      <a:solidFill>
+                        <a:srgbClr val="BFBFBF"/>
+                      </a:solidFill>
+                      <a:prstDash val="solid"/>
+                      <a:round/>
+                      <a:headEnd type="none" w="med" len="med"/>
+                      <a:tailEnd type="none" w="med" len="med"/>
+                    </a:lnR>
+                    <a:lnT w="9525" cap="flat" cmpd="sng" algn="ctr">
+                      <a:solidFill>
+                        <a:srgbClr val="BFBFBF"/>
+                      </a:solidFill>
+                      <a:prstDash val="solid"/>
+                      <a:round/>
+                      <a:headEnd type="none" w="med" len="med"/>
+                      <a:tailEnd type="none" w="med" len="med"/>
+                    </a:lnT>
+                    <a:lnB w="9525" cap="flat" cmpd="sng" algn="ctr">
+                      <a:solidFill>
+                        <a:srgbClr val="BFBFBF"/>
+                      </a:solidFill>
+                      <a:prstDash val="solid"/>
+                      <a:round/>
+                      <a:headEnd type="none" w="med" len="med"/>
+                      <a:tailEnd type="none" w="med" len="med"/>
+                    </a:lnB>
+                    <a:solidFill>
+                      <a:srgbClr val="FFFFFF"/>
+                    </a:solidFill>
+                  </a:tcPr>
+                </a:tc>
+                <a:tc>
+                  <a:txBody>
+                    <a:bodyPr/>
+                    <a:lstStyle/>
+                    <a:p>
+                      <a:pPr algn="ctr" indent="0" marL="0">
+                        <a:buNone/>
+                      </a:pPr>
+                      <a:r>
+                        <a:rPr lang="en-US" sz="950" b="1" dirty="0">
+                          <a:solidFill>
+                            <a:srgbClr val="1A1A1A"/>
+                          </a:solidFill>
+                          <a:latin typeface="Yu Gothic" pitchFamily="34" charset="0"/>
+                          <a:ea typeface="Yu Gothic" pitchFamily="34" charset="-122"/>
+                          <a:cs typeface="Yu Gothic" pitchFamily="34" charset="-120"/>
+                        </a:rPr>
+                        <a:t>業務委託型・3年</a:t>
+                      </a:r>
+                      <a:endParaRPr lang="en-US" sz="950" dirty="0">
+                        <a:latin typeface="Yu Gothic" charset="0"/>
+                        <a:ea typeface="Yu Gothic" charset="0"/>
+                        <a:cs typeface="Yu Gothic" charset="0"/>
+                      </a:endParaRPr>
+                    </a:p>
+                  </a:txBody>
+                  <a:tcPr marL="91440" marR="91440" marT="18288" marB="18288" anchor="ctr">
+                    <a:lnL w="9525" cap="flat" cmpd="sng" algn="ctr">
+                      <a:solidFill>
+                        <a:srgbClr val="BFBFBF"/>
+                      </a:solidFill>
+                      <a:prstDash val="solid"/>
+                      <a:round/>
+                      <a:headEnd type="none" w="med" len="med"/>
+                      <a:tailEnd type="none" w="med" len="med"/>
+                    </a:lnL>
+                    <a:lnR w="9525" cap="flat" cmpd="sng" algn="ctr">
+                      <a:solidFill>
+                        <a:srgbClr val="BFBFBF"/>
+                      </a:solidFill>
+                      <a:prstDash val="solid"/>
+                      <a:round/>
+                      <a:headEnd type="none" w="med" len="med"/>
+                      <a:tailEnd type="none" w="med" len="med"/>
+                    </a:lnR>
+                    <a:lnT w="9525" cap="flat" cmpd="sng" algn="ctr">
+                      <a:solidFill>
+                        <a:srgbClr val="BFBFBF"/>
+                      </a:solidFill>
+                      <a:prstDash val="solid"/>
+                      <a:round/>
+                      <a:headEnd type="none" w="med" len="med"/>
+                      <a:tailEnd type="none" w="med" len="med"/>
+                    </a:lnT>
+                    <a:lnB w="9525" cap="flat" cmpd="sng" algn="ctr">
+                      <a:solidFill>
+                        <a:srgbClr val="BFBFBF"/>
+                      </a:solidFill>
+                      <a:prstDash val="solid"/>
+                      <a:round/>
+                      <a:headEnd type="none" w="med" len="med"/>
+                      <a:tailEnd type="none" w="med" len="med"/>
+                    </a:lnB>
+                    <a:solidFill>
+                      <a:srgbClr val="FFFFFF"/>
+                    </a:solidFill>
+                  </a:tcPr>
+                </a:tc>
+                <a:tc>
+                  <a:txBody>
+                    <a:bodyPr/>
+                    <a:lstStyle/>
+                    <a:p>
+                      <a:pPr algn="ctr" indent="0" marL="0">
+                        <a:buNone/>
+                      </a:pPr>
+                      <a:r>
+                        <a:rPr lang="en-US" sz="950" b="1" dirty="0">
+                          <a:solidFill>
+                            <a:srgbClr val="1A1A1A"/>
+                          </a:solidFill>
+                          <a:latin typeface="Yu Gothic" pitchFamily="34" charset="0"/>
+                          <a:ea typeface="Yu Gothic" pitchFamily="34" charset="-122"/>
+                          <a:cs typeface="Yu Gothic" pitchFamily="34" charset="-120"/>
+                        </a:rPr>
+                        <a:t>30〜50万円（税抜・設置工事費）</a:t>
+                      </a:r>
+                      <a:endParaRPr lang="en-US" sz="950" dirty="0">
+                        <a:latin typeface="Yu Gothic" charset="0"/>
+                        <a:ea typeface="Yu Gothic" charset="0"/>
+                        <a:cs typeface="Yu Gothic" charset="0"/>
+                      </a:endParaRPr>
+                    </a:p>
+                  </a:txBody>
+                  <a:tcPr marL="91440" marR="91440" marT="18288" marB="18288" anchor="ctr">
+                    <a:lnL w="9525" cap="flat" cmpd="sng" algn="ctr">
+                      <a:solidFill>
+                        <a:srgbClr val="BFBFBF"/>
+                      </a:solidFill>
+                      <a:prstDash val="solid"/>
+                      <a:round/>
+                      <a:headEnd type="none" w="med" len="med"/>
+                      <a:tailEnd type="none" w="med" len="med"/>
+                    </a:lnL>
+                    <a:lnR w="9525" cap="flat" cmpd="sng" algn="ctr">
+                      <a:solidFill>
+                        <a:srgbClr val="BFBFBF"/>
+                      </a:solidFill>
+                      <a:prstDash val="solid"/>
+                      <a:round/>
+                      <a:headEnd type="none" w="med" len="med"/>
+                      <a:tailEnd type="none" w="med" len="med"/>
+                    </a:lnR>
+                    <a:lnT w="9525" cap="flat" cmpd="sng" algn="ctr">
+                      <a:solidFill>
+                        <a:srgbClr val="BFBFBF"/>
+                      </a:solidFill>
+                      <a:prstDash val="solid"/>
+                      <a:round/>
+                      <a:headEnd type="none" w="med" len="med"/>
+                      <a:tailEnd type="none" w="med" len="med"/>
+                    </a:lnT>
+                    <a:lnB w="9525" cap="flat" cmpd="sng" algn="ctr">
+                      <a:solidFill>
+                        <a:srgbClr val="BFBFBF"/>
+                      </a:solidFill>
+                      <a:prstDash val="solid"/>
+                      <a:round/>
+                      <a:headEnd type="none" w="med" len="med"/>
+                      <a:tailEnd type="none" w="med" len="med"/>
+                    </a:lnB>
+                    <a:solidFill>
+                      <a:srgbClr val="FFFFFF"/>
+                    </a:solidFill>
+                  </a:tcPr>
+                </a:tc>
+                <a:tc>
+                  <a:txBody>
+                    <a:bodyPr/>
+                    <a:lstStyle/>
+                    <a:p>
+                      <a:pPr algn="ctr" indent="0" marL="0">
+                        <a:buNone/>
+                      </a:pPr>
+                      <a:r>
+                        <a:rPr lang="en-US" sz="950" b="1" dirty="0">
+                          <a:solidFill>
+                            <a:srgbClr val="106838"/>
+                          </a:solidFill>
+                          <a:latin typeface="Yu Gothic" pitchFamily="34" charset="0"/>
+                          <a:ea typeface="Yu Gothic" pitchFamily="34" charset="-122"/>
+                          <a:cs typeface="Yu Gothic" pitchFamily="34" charset="-120"/>
+                        </a:rPr>
+                        <a:t>2027年3月上旬</a:t>
+                      </a:r>
+                      <a:endParaRPr lang="en-US" sz="950" dirty="0">
+                        <a:latin typeface="Yu Gothic" charset="0"/>
+                        <a:ea typeface="Yu Gothic" charset="0"/>
+                        <a:cs typeface="Yu Gothic" charset="0"/>
+                      </a:endParaRPr>
+                    </a:p>
+                  </a:txBody>
+                  <a:tcPr marL="91440" marR="91440" marT="18288" marB="18288" anchor="ctr">
+                    <a:lnL w="9525" cap="flat" cmpd="sng" algn="ctr">
+                      <a:solidFill>
+                        <a:srgbClr val="BFBFBF"/>
+                      </a:solidFill>
+                      <a:prstDash val="solid"/>
+                      <a:round/>
+                      <a:headEnd type="none" w="med" len="med"/>
+                      <a:tailEnd type="none" w="med" len="med"/>
+                    </a:lnL>
+                    <a:lnR w="9525" cap="flat" cmpd="sng" algn="ctr">
+                      <a:solidFill>
+                        <a:srgbClr val="BFBFBF"/>
+                      </a:solidFill>
+                      <a:prstDash val="solid"/>
+                      <a:round/>
+                      <a:headEnd type="none" w="med" len="med"/>
+                      <a:tailEnd type="none" w="med" len="med"/>
+                    </a:lnR>
+                    <a:lnT w="9525" cap="flat" cmpd="sng" algn="ctr">
+                      <a:solidFill>
+                        <a:srgbClr val="BFBFBF"/>
+                      </a:solidFill>
+                      <a:prstDash val="solid"/>
+                      <a:round/>
+                      <a:headEnd type="none" w="med" len="med"/>
+                      <a:tailEnd type="none" w="med" len="med"/>
+                    </a:lnT>
+                    <a:lnB w="9525" cap="flat" cmpd="sng" algn="ctr">
+                      <a:solidFill>
+                        <a:srgbClr val="BFBFBF"/>
+                      </a:solidFill>
+                      <a:prstDash val="solid"/>
+                      <a:round/>
+                      <a:headEnd type="none" w="med" len="med"/>
+                      <a:tailEnd type="none" w="med" len="med"/>
+                    </a:lnB>
+                    <a:solidFill>
+                      <a:srgbClr val="FFFFFF"/>
+                    </a:solidFill>
+                  </a:tcPr>
+                </a:tc>
+                <a:tc>
+                  <a:txBody>
+                    <a:bodyPr/>
+                    <a:lstStyle/>
+                    <a:p>
+                      <a:pPr algn="ctr" indent="0" marL="0">
+                        <a:buNone/>
+                      </a:pPr>
+                      <a:r>
+                        <a:rPr lang="en-US" sz="950" b="1" dirty="0">
+                          <a:solidFill>
+                            <a:srgbClr val="1A1A1A"/>
+                          </a:solidFill>
+                          <a:latin typeface="Yu Gothic" pitchFamily="34" charset="0"/>
+                          <a:ea typeface="Yu Gothic" pitchFamily="34" charset="-122"/>
+                          <a:cs typeface="Yu Gothic" pitchFamily="34" charset="-120"/>
+                        </a:rPr>
+                        <a:t>約1か月（残置前提）</a:t>
+                      </a:r>
+                      <a:endParaRPr lang="en-US" sz="950" dirty="0">
+                        <a:latin typeface="Yu Gothic" charset="0"/>
+                        <a:ea typeface="Yu Gothic" charset="0"/>
+                        <a:cs typeface="Yu Gothic" charset="0"/>
+                      </a:endParaRPr>
+                    </a:p>
+                  </a:txBody>
+                  <a:tcPr marL="91440" marR="91440" marT="18288" marB="18288" anchor="ctr">
+                    <a:lnL w="9525" cap="flat" cmpd="sng" algn="ctr">
+                      <a:solidFill>
+                        <a:srgbClr val="BFBFBF"/>
+                      </a:solidFill>
+                      <a:prstDash val="solid"/>
+                      <a:round/>
+                      <a:headEnd type="none" w="med" len="med"/>
+                      <a:tailEnd type="none" w="med" len="med"/>
+                    </a:lnL>
+                    <a:lnR w="9525" cap="flat" cmpd="sng" algn="ctr">
+                      <a:solidFill>
+                        <a:srgbClr val="BFBFBF"/>
+                      </a:solidFill>
+                      <a:prstDash val="solid"/>
+                      <a:round/>
+                      <a:headEnd type="none" w="med" len="med"/>
+                      <a:tailEnd type="none" w="med" len="med"/>
+                    </a:lnR>
+                    <a:lnT w="9525" cap="flat" cmpd="sng" algn="ctr">
+                      <a:solidFill>
+                        <a:srgbClr val="BFBFBF"/>
+                      </a:solidFill>
+                      <a:prstDash val="solid"/>
+                      <a:round/>
+                      <a:headEnd type="none" w="med" len="med"/>
+                      <a:tailEnd type="none" w="med" len="med"/>
+                    </a:lnT>
+                    <a:lnB w="9525" cap="flat" cmpd="sng" algn="ctr">
+                      <a:solidFill>
+                        <a:srgbClr val="BFBFBF"/>
+                      </a:solidFill>
+                      <a:prstDash val="solid"/>
+                      <a:round/>
+                      <a:headEnd type="none" w="med" len="med"/>
+                      <a:tailEnd type="none" w="med" len="med"/>
+                    </a:lnB>
+                    <a:solidFill>
+                      <a:srgbClr val="FFFFFF"/>
+                    </a:solidFill>
+                  </a:tcPr>
+                </a:tc>
+              </a:tr>
+            </a:tbl>
+          </a:graphicData>
+        </a:graphic>
+      </p:graphicFrame>
+      <p:sp>
+        <p:nvSpPr>
+          <p:cNvPr id="14" name="Shape 10"/>
+          <p:cNvSpPr/>
+          <p:nvPr/>
+        </p:nvSpPr>
+        <p:spPr>
+          <a:xfrm>
+            <a:off x="384048" y="2441448"/>
+            <a:ext cx="50292" cy="146304"/>
+          </a:xfrm>
+          <a:prstGeom prst="rect">
+            <a:avLst/>
+          </a:prstGeom>
+          <a:solidFill>
+            <a:srgbClr val="0C5230"/>
+          </a:solidFill>
+          <a:ln/>
+        </p:spPr>
+      </p:sp>
+      <p:sp>
+        <p:nvSpPr>
+          <p:cNvPr id="15" name="Text 11"/>
+          <p:cNvSpPr/>
+          <p:nvPr/>
+        </p:nvSpPr>
+        <p:spPr>
+          <a:xfrm>
+            <a:off x="512064" y="2414016"/>
+            <a:ext cx="9793224" cy="201168"/>
+          </a:xfrm>
+          <a:prstGeom prst="rect">
+            <a:avLst/>
+          </a:prstGeom>
+          <a:noFill/>
+          <a:ln/>
+        </p:spPr>
+        <p:txBody>
+          <a:bodyPr wrap="square" lIns="0" tIns="0" rIns="0" bIns="0" rtlCol="0" anchor="ctr"/>
+          <a:lstStyle/>
+          <a:p>
+            <a:pPr indent="0" marL="0">
+              <a:buNone/>
+            </a:pPr>
+            <a:r>
+              <a:rPr lang="en-US" sz="1000" b="1" dirty="0">
+                <a:solidFill>
+                  <a:srgbClr val="1A1A1A"/>
+                </a:solidFill>
+                <a:latin typeface="Yu Gothic" pitchFamily="34" charset="0"/>
+                <a:ea typeface="Yu Gothic" pitchFamily="34" charset="-122"/>
+                <a:cs typeface="Yu Gothic" pitchFamily="34" charset="-120"/>
+              </a:rPr>
+              <a:t>２．進行スケジュール</a:t>
+            </a:r>
+            <a:endParaRPr lang="en-US" sz="1000" dirty="0"/>
+          </a:p>
+        </p:txBody>
+      </p:sp>
+      <p:graphicFrame>
+        <p:nvGraphicFramePr>
+          <p:cNvPr id="3" name="Table 1"/>
+          <p:cNvGraphicFramePr>
+            <a:graphicFrameLocks noGrp="1"/>
+          </p:cNvGraphicFramePr>
+          <p:nvPr>
+            <p:extLst>
+              <p:ext uri="{D42A27DB-BD31-4B8C-83A1-F6EECF244321}">
+                <p14:modId xmlns:p14="http://schemas.microsoft.com/office/powerpoint/2010/main" val="1579011935"/>
+              </p:ext>
+            </p:extLst>
+          </p:nvPr>
+        </p:nvGraphicFramePr>
+        <p:xfrm>
+          <a:off x="384048" y="2615184"/>
+          <a:ext cx="9921240" cy="914400"/>
+        </p:xfrm>
+        <a:graphic>
+          <a:graphicData uri="http://schemas.openxmlformats.org/drawingml/2006/table">
+            <a:tbl>
+              <a:tblPr/>
+              <a:tblGrid>
+                <a:gridCol w="1325880"/>
+                <a:gridCol w="7132320"/>
+                <a:gridCol w="1463040"/>
+              </a:tblGrid>
+              <a:tr h="192024">
                 <a:tc>
                   <a:txBody>
                     <a:bodyPr/>
@@ -1598,9 +2045,9 @@
                         <a:buNone/>
                       </a:pPr>
                       <a:r>
-                        <a:rPr lang="en-US" sz="900" b="1" dirty="0">
+                        <a:rPr lang="en-US" sz="850" b="1" dirty="0">
                           <a:solidFill>
-                            <a:srgbClr val="FFFFFF"/>
+                            <a:srgbClr val="1A1A1A"/>
                           </a:solidFill>
                           <a:latin typeface="Yu Gothic" pitchFamily="34" charset="0"/>
                           <a:ea typeface="Yu Gothic" pitchFamily="34" charset="-122"/>
@@ -1608,7 +2055,7 @@
                         </a:rPr>
                         <a:t>時期</a:t>
                       </a:r>
-                      <a:endParaRPr lang="en-US" sz="900" dirty="0">
+                      <a:endParaRPr lang="en-US" sz="850" dirty="0">
                         <a:latin typeface="Yu Gothic" charset="0"/>
                         <a:ea typeface="Yu Gothic" charset="0"/>
                         <a:cs typeface="Yu Gothic" charset="0"/>
@@ -1618,7 +2065,7 @@
                   <a:tcPr marL="91440" marR="91440" marT="18288" marB="18288" anchor="ctr">
                     <a:lnL w="9525" cap="flat" cmpd="sng" algn="ctr">
                       <a:solidFill>
-                        <a:srgbClr val="EFEAE0"/>
+                        <a:srgbClr val="BFBFBF"/>
                       </a:solidFill>
                       <a:prstDash val="solid"/>
                       <a:round/>
@@ -1627,7 +2074,7 @@
                     </a:lnL>
                     <a:lnR w="9525" cap="flat" cmpd="sng" algn="ctr">
                       <a:solidFill>
-                        <a:srgbClr val="EFEAE0"/>
+                        <a:srgbClr val="BFBFBF"/>
                       </a:solidFill>
                       <a:prstDash val="solid"/>
                       <a:round/>
@@ -1636,7 +2083,7 @@
                     </a:lnR>
                     <a:lnT w="9525" cap="flat" cmpd="sng" algn="ctr">
                       <a:solidFill>
-                        <a:srgbClr val="EFEAE0"/>
+                        <a:srgbClr val="BFBFBF"/>
                       </a:solidFill>
                       <a:prstDash val="solid"/>
                       <a:round/>
@@ -1645,7 +2092,7 @@
                     </a:lnT>
                     <a:lnB w="9525" cap="flat" cmpd="sng" algn="ctr">
                       <a:solidFill>
-                        <a:srgbClr val="EFEAE0"/>
+                        <a:srgbClr val="BFBFBF"/>
                       </a:solidFill>
                       <a:prstDash val="solid"/>
                       <a:round/>
@@ -1653,7 +2100,7 @@
                       <a:tailEnd type="none" w="med" len="med"/>
                     </a:lnB>
                     <a:solidFill>
-                      <a:srgbClr val="0C5230"/>
+                      <a:srgbClr val="EDEDED"/>
                     </a:solidFill>
                   </a:tcPr>
                 </a:tc>
@@ -1666,9 +2113,9 @@
                         <a:buNone/>
                       </a:pPr>
                       <a:r>
-                        <a:rPr lang="en-US" sz="900" b="1" dirty="0">
+                        <a:rPr lang="en-US" sz="850" b="1" dirty="0">
                           <a:solidFill>
-                            <a:srgbClr val="FFFFFF"/>
+                            <a:srgbClr val="1A1A1A"/>
                           </a:solidFill>
                           <a:latin typeface="Yu Gothic" pitchFamily="34" charset="0"/>
                           <a:ea typeface="Yu Gothic" pitchFamily="34" charset="-122"/>
@@ -1676,7 +2123,7 @@
                         </a:rPr>
                         <a:t>内容</a:t>
                       </a:r>
-                      <a:endParaRPr lang="en-US" sz="900" dirty="0">
+                      <a:endParaRPr lang="en-US" sz="850" dirty="0">
                         <a:latin typeface="Yu Gothic" charset="0"/>
                         <a:ea typeface="Yu Gothic" charset="0"/>
                         <a:cs typeface="Yu Gothic" charset="0"/>
@@ -1686,7 +2133,7 @@
                   <a:tcPr marL="91440" marR="91440" marT="18288" marB="18288" anchor="ctr">
                     <a:lnL w="9525" cap="flat" cmpd="sng" algn="ctr">
                       <a:solidFill>
-                        <a:srgbClr val="EFEAE0"/>
+                        <a:srgbClr val="BFBFBF"/>
                       </a:solidFill>
                       <a:prstDash val="solid"/>
                       <a:round/>
@@ -1695,7 +2142,7 @@
                     </a:lnL>
                     <a:lnR w="9525" cap="flat" cmpd="sng" algn="ctr">
                       <a:solidFill>
-                        <a:srgbClr val="EFEAE0"/>
+                        <a:srgbClr val="BFBFBF"/>
                       </a:solidFill>
                       <a:prstDash val="solid"/>
                       <a:round/>
@@ -1704,7 +2151,7 @@
                     </a:lnR>
                     <a:lnT w="9525" cap="flat" cmpd="sng" algn="ctr">
                       <a:solidFill>
-                        <a:srgbClr val="EFEAE0"/>
+                        <a:srgbClr val="BFBFBF"/>
                       </a:solidFill>
                       <a:prstDash val="solid"/>
                       <a:round/>
@@ -1713,7 +2160,7 @@
                     </a:lnT>
                     <a:lnB w="9525" cap="flat" cmpd="sng" algn="ctr">
                       <a:solidFill>
-                        <a:srgbClr val="EFEAE0"/>
+                        <a:srgbClr val="BFBFBF"/>
                       </a:solidFill>
                       <a:prstDash val="solid"/>
                       <a:round/>
@@ -1721,7 +2168,7 @@
                       <a:tailEnd type="none" w="med" len="med"/>
                     </a:lnB>
                     <a:solidFill>
-                      <a:srgbClr val="0C5230"/>
+                      <a:srgbClr val="EDEDED"/>
                     </a:solidFill>
                   </a:tcPr>
                 </a:tc>
@@ -1734,9 +2181,9 @@
                         <a:buNone/>
                       </a:pPr>
                       <a:r>
-                        <a:rPr lang="en-US" sz="900" b="1" dirty="0">
+                        <a:rPr lang="en-US" sz="850" b="1" dirty="0">
                           <a:solidFill>
-                            <a:srgbClr val="FFFFFF"/>
+                            <a:srgbClr val="1A1A1A"/>
                           </a:solidFill>
                           <a:latin typeface="Yu Gothic" pitchFamily="34" charset="0"/>
                           <a:ea typeface="Yu Gothic" pitchFamily="34" charset="-122"/>
@@ -1744,7 +2191,7 @@
                         </a:rPr>
                         <a:t>担当</a:t>
                       </a:r>
-                      <a:endParaRPr lang="en-US" sz="900" dirty="0">
+                      <a:endParaRPr lang="en-US" sz="850" dirty="0">
                         <a:latin typeface="Yu Gothic" charset="0"/>
                         <a:ea typeface="Yu Gothic" charset="0"/>
                         <a:cs typeface="Yu Gothic" charset="0"/>
@@ -1754,7 +2201,7 @@
                   <a:tcPr marL="91440" marR="91440" marT="18288" marB="18288" anchor="ctr">
                     <a:lnL w="9525" cap="flat" cmpd="sng" algn="ctr">
                       <a:solidFill>
-                        <a:srgbClr val="EFEAE0"/>
+                        <a:srgbClr val="BFBFBF"/>
                       </a:solidFill>
                       <a:prstDash val="solid"/>
                       <a:round/>
@@ -1763,7 +2210,7 @@
                     </a:lnL>
                     <a:lnR w="9525" cap="flat" cmpd="sng" algn="ctr">
                       <a:solidFill>
-                        <a:srgbClr val="EFEAE0"/>
+                        <a:srgbClr val="BFBFBF"/>
                       </a:solidFill>
                       <a:prstDash val="solid"/>
                       <a:round/>
@@ -1772,7 +2219,7 @@
                     </a:lnR>
                     <a:lnT w="9525" cap="flat" cmpd="sng" algn="ctr">
                       <a:solidFill>
-                        <a:srgbClr val="EFEAE0"/>
+                        <a:srgbClr val="BFBFBF"/>
                       </a:solidFill>
                       <a:prstDash val="solid"/>
                       <a:round/>
@@ -1781,7 +2228,7 @@
                     </a:lnT>
                     <a:lnB w="9525" cap="flat" cmpd="sng" algn="ctr">
                       <a:solidFill>
-                        <a:srgbClr val="EFEAE0"/>
+                        <a:srgbClr val="BFBFBF"/>
                       </a:solidFill>
                       <a:prstDash val="solid"/>
                       <a:round/>
@@ -1789,12 +2236,12 @@
                       <a:tailEnd type="none" w="med" len="med"/>
                     </a:lnB>
                     <a:solidFill>
-                      <a:srgbClr val="0C5230"/>
+                      <a:srgbClr val="EDEDED"/>
                     </a:solidFill>
                   </a:tcPr>
                 </a:tc>
               </a:tr>
-              <a:tr h="224028">
+              <a:tr h="196596">
                 <a:tc>
                   <a:txBody>
                     <a:bodyPr/>
@@ -1806,7 +2253,7 @@
                       <a:r>
                         <a:rPr lang="en-US" sz="850" b="1" dirty="0">
                           <a:solidFill>
-                            <a:srgbClr val="0A3D23"/>
+                            <a:srgbClr val="1A1A1A"/>
                           </a:solidFill>
                           <a:latin typeface="Yu Gothic" pitchFamily="34" charset="0"/>
                           <a:ea typeface="Yu Gothic" pitchFamily="34" charset="-122"/>
@@ -1824,7 +2271,7 @@
                   <a:tcPr marL="91440" marR="91440" marT="18288" marB="18288" anchor="ctr">
                     <a:lnL w="9525" cap="flat" cmpd="sng" algn="ctr">
                       <a:solidFill>
-                        <a:srgbClr val="EFEAE0"/>
+                        <a:srgbClr val="BFBFBF"/>
                       </a:solidFill>
                       <a:prstDash val="solid"/>
                       <a:round/>
@@ -1833,7 +2280,7 @@
                     </a:lnL>
                     <a:lnR w="9525" cap="flat" cmpd="sng" algn="ctr">
                       <a:solidFill>
-                        <a:srgbClr val="EFEAE0"/>
+                        <a:srgbClr val="BFBFBF"/>
                       </a:solidFill>
                       <a:prstDash val="solid"/>
                       <a:round/>
@@ -1842,7 +2289,7 @@
                     </a:lnR>
                     <a:lnT w="9525" cap="flat" cmpd="sng" algn="ctr">
                       <a:solidFill>
-                        <a:srgbClr val="EFEAE0"/>
+                        <a:srgbClr val="BFBFBF"/>
                       </a:solidFill>
                       <a:prstDash val="solid"/>
                       <a:round/>
@@ -1851,7 +2298,7 @@
                     </a:lnT>
                     <a:lnB w="9525" cap="flat" cmpd="sng" algn="ctr">
                       <a:solidFill>
-                        <a:srgbClr val="EFEAE0"/>
+                        <a:srgbClr val="BFBFBF"/>
                       </a:solidFill>
                       <a:prstDash val="solid"/>
                       <a:round/>
@@ -1874,13 +2321,13 @@
                       <a:r>
                         <a:rPr lang="en-US" sz="850" dirty="0">
                           <a:solidFill>
-                            <a:srgbClr val="4B5550"/>
+                            <a:srgbClr val="333333"/>
                           </a:solidFill>
                           <a:latin typeface="Yu Gothic" pitchFamily="34" charset="0"/>
                           <a:ea typeface="Yu Gothic" pitchFamily="34" charset="-122"/>
                           <a:cs typeface="Yu Gothic" pitchFamily="34" charset="-120"/>
                         </a:rPr>
-                        <a:t>施工担当による現地内見（実測・電源・給排水・既存ネット回線・残置設備）</a:t>
+                        <a:t>現地内見（実測、電源・給排水、既存回線、残置設備のご確認）</a:t>
                       </a:r>
                       <a:endParaRPr lang="en-US" sz="850" dirty="0">
                         <a:latin typeface="Yu Gothic" charset="0"/>
@@ -1892,7 +2339,7 @@
                   <a:tcPr marL="91440" marR="91440" marT="18288" marB="18288" anchor="ctr">
                     <a:lnL w="9525" cap="flat" cmpd="sng" algn="ctr">
                       <a:solidFill>
-                        <a:srgbClr val="EFEAE0"/>
+                        <a:srgbClr val="BFBFBF"/>
                       </a:solidFill>
                       <a:prstDash val="solid"/>
                       <a:round/>
@@ -1901,7 +2348,7 @@
                     </a:lnL>
                     <a:lnR w="9525" cap="flat" cmpd="sng" algn="ctr">
                       <a:solidFill>
-                        <a:srgbClr val="EFEAE0"/>
+                        <a:srgbClr val="BFBFBF"/>
                       </a:solidFill>
                       <a:prstDash val="solid"/>
                       <a:round/>
@@ -1910,7 +2357,7 @@
                     </a:lnR>
                     <a:lnT w="9525" cap="flat" cmpd="sng" algn="ctr">
                       <a:solidFill>
-                        <a:srgbClr val="EFEAE0"/>
+                        <a:srgbClr val="BFBFBF"/>
                       </a:solidFill>
                       <a:prstDash val="solid"/>
                       <a:round/>
@@ -1919,7 +2366,7 @@
                     </a:lnT>
                     <a:lnB w="9525" cap="flat" cmpd="sng" algn="ctr">
                       <a:solidFill>
-                        <a:srgbClr val="EFEAE0"/>
+                        <a:srgbClr val="BFBFBF"/>
                       </a:solidFill>
                       <a:prstDash val="solid"/>
                       <a:round/>
@@ -1940,9 +2387,9 @@
                         <a:buNone/>
                       </a:pPr>
                       <a:r>
-                        <a:rPr lang="en-US" sz="800" b="1" dirty="0">
+                        <a:rPr lang="en-US" sz="850" b="1" dirty="0">
                           <a:solidFill>
-                            <a:srgbClr val="0A3D23"/>
+                            <a:srgbClr val="6B6B6B"/>
                           </a:solidFill>
                           <a:latin typeface="Yu Gothic" pitchFamily="34" charset="0"/>
                           <a:ea typeface="Yu Gothic" pitchFamily="34" charset="-122"/>
@@ -1950,7 +2397,7 @@
                         </a:rPr>
                         <a:t>両社</a:t>
                       </a:r>
-                      <a:endParaRPr lang="en-US" sz="800" dirty="0">
+                      <a:endParaRPr lang="en-US" sz="850" dirty="0">
                         <a:latin typeface="Yu Gothic" charset="0"/>
                         <a:ea typeface="Yu Gothic" charset="0"/>
                         <a:cs typeface="Yu Gothic" charset="0"/>
@@ -1960,7 +2407,7 @@
                   <a:tcPr marL="91440" marR="91440" marT="18288" marB="18288" anchor="ctr">
                     <a:lnL w="9525" cap="flat" cmpd="sng" algn="ctr">
                       <a:solidFill>
-                        <a:srgbClr val="EFEAE0"/>
+                        <a:srgbClr val="BFBFBF"/>
                       </a:solidFill>
                       <a:prstDash val="solid"/>
                       <a:round/>
@@ -1969,7 +2416,7 @@
                     </a:lnL>
                     <a:lnR w="9525" cap="flat" cmpd="sng" algn="ctr">
                       <a:solidFill>
-                        <a:srgbClr val="EFEAE0"/>
+                        <a:srgbClr val="BFBFBF"/>
                       </a:solidFill>
                       <a:prstDash val="solid"/>
                       <a:round/>
@@ -1978,7 +2425,7 @@
                     </a:lnR>
                     <a:lnT w="9525" cap="flat" cmpd="sng" algn="ctr">
                       <a:solidFill>
-                        <a:srgbClr val="EFEAE0"/>
+                        <a:srgbClr val="BFBFBF"/>
                       </a:solidFill>
                       <a:prstDash val="solid"/>
                       <a:round/>
@@ -1987,7 +2434,7 @@
                     </a:lnT>
                     <a:lnB w="9525" cap="flat" cmpd="sng" algn="ctr">
                       <a:solidFill>
-                        <a:srgbClr val="EFEAE0"/>
+                        <a:srgbClr val="BFBFBF"/>
                       </a:solidFill>
                       <a:prstDash val="solid"/>
                       <a:round/>
@@ -1995,12 +2442,12 @@
                       <a:tailEnd type="none" w="med" len="med"/>
                     </a:lnB>
                     <a:solidFill>
-                      <a:srgbClr val="F4F2EE"/>
+                      <a:srgbClr val="FFFFFF"/>
                     </a:solidFill>
                   </a:tcPr>
                 </a:tc>
               </a:tr>
-              <a:tr h="224028">
+              <a:tr h="196596">
                 <a:tc>
                   <a:txBody>
                     <a:bodyPr/>
@@ -2012,7 +2459,7 @@
                       <a:r>
                         <a:rPr lang="en-US" sz="850" b="1" dirty="0">
                           <a:solidFill>
-                            <a:srgbClr val="0A3D23"/>
+                            <a:srgbClr val="1A1A1A"/>
                           </a:solidFill>
                           <a:latin typeface="Yu Gothic" pitchFamily="34" charset="0"/>
                           <a:ea typeface="Yu Gothic" pitchFamily="34" charset="-122"/>
@@ -2030,7 +2477,7 @@
                   <a:tcPr marL="91440" marR="91440" marT="18288" marB="18288" anchor="ctr">
                     <a:lnL w="9525" cap="flat" cmpd="sng" algn="ctr">
                       <a:solidFill>
-                        <a:srgbClr val="EFEAE0"/>
+                        <a:srgbClr val="BFBFBF"/>
                       </a:solidFill>
                       <a:prstDash val="solid"/>
                       <a:round/>
@@ -2039,7 +2486,7 @@
                     </a:lnL>
                     <a:lnR w="9525" cap="flat" cmpd="sng" algn="ctr">
                       <a:solidFill>
-                        <a:srgbClr val="EFEAE0"/>
+                        <a:srgbClr val="BFBFBF"/>
                       </a:solidFill>
                       <a:prstDash val="solid"/>
                       <a:round/>
@@ -2048,7 +2495,7 @@
                     </a:lnR>
                     <a:lnT w="9525" cap="flat" cmpd="sng" algn="ctr">
                       <a:solidFill>
-                        <a:srgbClr val="EFEAE0"/>
+                        <a:srgbClr val="BFBFBF"/>
                       </a:solidFill>
                       <a:prstDash val="solid"/>
                       <a:round/>
@@ -2057,7 +2504,213 @@
                     </a:lnT>
                     <a:lnB w="9525" cap="flat" cmpd="sng" algn="ctr">
                       <a:solidFill>
-                        <a:srgbClr val="EFEAE0"/>
+                        <a:srgbClr val="BFBFBF"/>
+                      </a:solidFill>
+                      <a:prstDash val="solid"/>
+                      <a:round/>
+                      <a:headEnd type="none" w="med" len="med"/>
+                      <a:tailEnd type="none" w="med" len="med"/>
+                    </a:lnB>
+                    <a:solidFill>
+                      <a:srgbClr val="F7F7F7"/>
+                    </a:solidFill>
+                  </a:tcPr>
+                </a:tc>
+                <a:tc>
+                  <a:txBody>
+                    <a:bodyPr/>
+                    <a:lstStyle/>
+                    <a:p>
+                      <a:pPr algn="l" indent="0" marL="0">
+                        <a:buNone/>
+                      </a:pPr>
+                      <a:r>
+                        <a:rPr lang="en-US" sz="850" dirty="0">
+                          <a:solidFill>
+                            <a:srgbClr val="333333"/>
+                          </a:solidFill>
+                          <a:latin typeface="Yu Gothic" pitchFamily="34" charset="0"/>
+                          <a:ea typeface="Yu Gothic" pitchFamily="34" charset="-122"/>
+                          <a:cs typeface="Yu Gothic" pitchFamily="34" charset="-120"/>
+                        </a:rPr>
+                        <a:t>レイアウト図・什器リストのご提出、設置工事費のご案内</a:t>
+                      </a:r>
+                      <a:endParaRPr lang="en-US" sz="850" dirty="0">
+                        <a:latin typeface="Yu Gothic" charset="0"/>
+                        <a:ea typeface="Yu Gothic" charset="0"/>
+                        <a:cs typeface="Yu Gothic" charset="0"/>
+                      </a:endParaRPr>
+                    </a:p>
+                  </a:txBody>
+                  <a:tcPr marL="91440" marR="91440" marT="18288" marB="18288" anchor="ctr">
+                    <a:lnL w="9525" cap="flat" cmpd="sng" algn="ctr">
+                      <a:solidFill>
+                        <a:srgbClr val="BFBFBF"/>
+                      </a:solidFill>
+                      <a:prstDash val="solid"/>
+                      <a:round/>
+                      <a:headEnd type="none" w="med" len="med"/>
+                      <a:tailEnd type="none" w="med" len="med"/>
+                    </a:lnL>
+                    <a:lnR w="9525" cap="flat" cmpd="sng" algn="ctr">
+                      <a:solidFill>
+                        <a:srgbClr val="BFBFBF"/>
+                      </a:solidFill>
+                      <a:prstDash val="solid"/>
+                      <a:round/>
+                      <a:headEnd type="none" w="med" len="med"/>
+                      <a:tailEnd type="none" w="med" len="med"/>
+                    </a:lnR>
+                    <a:lnT w="9525" cap="flat" cmpd="sng" algn="ctr">
+                      <a:solidFill>
+                        <a:srgbClr val="BFBFBF"/>
+                      </a:solidFill>
+                      <a:prstDash val="solid"/>
+                      <a:round/>
+                      <a:headEnd type="none" w="med" len="med"/>
+                      <a:tailEnd type="none" w="med" len="med"/>
+                    </a:lnT>
+                    <a:lnB w="9525" cap="flat" cmpd="sng" algn="ctr">
+                      <a:solidFill>
+                        <a:srgbClr val="BFBFBF"/>
+                      </a:solidFill>
+                      <a:prstDash val="solid"/>
+                      <a:round/>
+                      <a:headEnd type="none" w="med" len="med"/>
+                      <a:tailEnd type="none" w="med" len="med"/>
+                    </a:lnB>
+                    <a:solidFill>
+                      <a:srgbClr val="F7F7F7"/>
+                    </a:solidFill>
+                  </a:tcPr>
+                </a:tc>
+                <a:tc>
+                  <a:txBody>
+                    <a:bodyPr/>
+                    <a:lstStyle/>
+                    <a:p>
+                      <a:pPr algn="ctr" indent="0" marL="0">
+                        <a:buNone/>
+                      </a:pPr>
+                      <a:r>
+                        <a:rPr lang="en-US" sz="850" b="1" dirty="0">
+                          <a:solidFill>
+                            <a:srgbClr val="106838"/>
+                          </a:solidFill>
+                          <a:latin typeface="Yu Gothic" pitchFamily="34" charset="0"/>
+                          <a:ea typeface="Yu Gothic" pitchFamily="34" charset="-122"/>
+                          <a:cs typeface="Yu Gothic" pitchFamily="34" charset="-120"/>
+                        </a:rPr>
+                        <a:t>弊社</a:t>
+                      </a:r>
+                      <a:endParaRPr lang="en-US" sz="850" dirty="0">
+                        <a:latin typeface="Yu Gothic" charset="0"/>
+                        <a:ea typeface="Yu Gothic" charset="0"/>
+                        <a:cs typeface="Yu Gothic" charset="0"/>
+                      </a:endParaRPr>
+                    </a:p>
+                  </a:txBody>
+                  <a:tcPr marL="91440" marR="91440" marT="18288" marB="18288" anchor="ctr">
+                    <a:lnL w="9525" cap="flat" cmpd="sng" algn="ctr">
+                      <a:solidFill>
+                        <a:srgbClr val="BFBFBF"/>
+                      </a:solidFill>
+                      <a:prstDash val="solid"/>
+                      <a:round/>
+                      <a:headEnd type="none" w="med" len="med"/>
+                      <a:tailEnd type="none" w="med" len="med"/>
+                    </a:lnL>
+                    <a:lnR w="9525" cap="flat" cmpd="sng" algn="ctr">
+                      <a:solidFill>
+                        <a:srgbClr val="BFBFBF"/>
+                      </a:solidFill>
+                      <a:prstDash val="solid"/>
+                      <a:round/>
+                      <a:headEnd type="none" w="med" len="med"/>
+                      <a:tailEnd type="none" w="med" len="med"/>
+                    </a:lnR>
+                    <a:lnT w="9525" cap="flat" cmpd="sng" algn="ctr">
+                      <a:solidFill>
+                        <a:srgbClr val="BFBFBF"/>
+                      </a:solidFill>
+                      <a:prstDash val="solid"/>
+                      <a:round/>
+                      <a:headEnd type="none" w="med" len="med"/>
+                      <a:tailEnd type="none" w="med" len="med"/>
+                    </a:lnT>
+                    <a:lnB w="9525" cap="flat" cmpd="sng" algn="ctr">
+                      <a:solidFill>
+                        <a:srgbClr val="BFBFBF"/>
+                      </a:solidFill>
+                      <a:prstDash val="solid"/>
+                      <a:round/>
+                      <a:headEnd type="none" w="med" len="med"/>
+                      <a:tailEnd type="none" w="med" len="med"/>
+                    </a:lnB>
+                    <a:solidFill>
+                      <a:srgbClr val="FFFFFF"/>
+                    </a:solidFill>
+                  </a:tcPr>
+                </a:tc>
+              </a:tr>
+              <a:tr h="196596">
+                <a:tc>
+                  <a:txBody>
+                    <a:bodyPr/>
+                    <a:lstStyle/>
+                    <a:p>
+                      <a:pPr algn="l" indent="0" marL="0">
+                        <a:buNone/>
+                      </a:pPr>
+                      <a:r>
+                        <a:rPr lang="en-US" sz="850" b="1" dirty="0">
+                          <a:solidFill>
+                            <a:srgbClr val="1A1A1A"/>
+                          </a:solidFill>
+                          <a:latin typeface="Yu Gothic" pitchFamily="34" charset="0"/>
+                          <a:ea typeface="Yu Gothic" pitchFamily="34" charset="-122"/>
+                          <a:cs typeface="Yu Gothic" pitchFamily="34" charset="-120"/>
+                        </a:rPr>
+                        <a:t>11月中旬</a:t>
+                      </a:r>
+                      <a:endParaRPr lang="en-US" sz="850" dirty="0">
+                        <a:latin typeface="Yu Gothic" charset="0"/>
+                        <a:ea typeface="Yu Gothic" charset="0"/>
+                        <a:cs typeface="Yu Gothic" charset="0"/>
+                      </a:endParaRPr>
+                    </a:p>
+                  </a:txBody>
+                  <a:tcPr marL="91440" marR="91440" marT="18288" marB="18288" anchor="ctr">
+                    <a:lnL w="9525" cap="flat" cmpd="sng" algn="ctr">
+                      <a:solidFill>
+                        <a:srgbClr val="BFBFBF"/>
+                      </a:solidFill>
+                      <a:prstDash val="solid"/>
+                      <a:round/>
+                      <a:headEnd type="none" w="med" len="med"/>
+                      <a:tailEnd type="none" w="med" len="med"/>
+                    </a:lnL>
+                    <a:lnR w="9525" cap="flat" cmpd="sng" algn="ctr">
+                      <a:solidFill>
+                        <a:srgbClr val="BFBFBF"/>
+                      </a:solidFill>
+                      <a:prstDash val="solid"/>
+                      <a:round/>
+                      <a:headEnd type="none" w="med" len="med"/>
+                      <a:tailEnd type="none" w="med" len="med"/>
+                    </a:lnR>
+                    <a:lnT w="9525" cap="flat" cmpd="sng" algn="ctr">
+                      <a:solidFill>
+                        <a:srgbClr val="BFBFBF"/>
+                      </a:solidFill>
+                      <a:prstDash val="solid"/>
+                      <a:round/>
+                      <a:headEnd type="none" w="med" len="med"/>
+                      <a:tailEnd type="none" w="med" len="med"/>
+                    </a:lnT>
+                    <a:lnB w="9525" cap="flat" cmpd="sng" algn="ctr">
+                      <a:solidFill>
+                        <a:srgbClr val="BFBFBF"/>
                       </a:solidFill>
                       <a:prstDash val="solid"/>
                       <a:round/>
@@ -2080,13 +2733,13 @@
                       <a:r>
                         <a:rPr lang="en-US" sz="850" dirty="0">
                           <a:solidFill>
-                            <a:srgbClr val="4B5550"/>
+                            <a:srgbClr val="333333"/>
                           </a:solidFill>
                           <a:latin typeface="Yu Gothic" pitchFamily="34" charset="0"/>
                           <a:ea typeface="Yu Gothic" pitchFamily="34" charset="-122"/>
                           <a:cs typeface="Yu Gothic" pitchFamily="34" charset="-120"/>
                         </a:rPr>
-                        <a:t>レイアウト図・什器リストのご提出／設置工事費のご案内（30〜50万円）</a:t>
+                        <a:t>カフェ・ド・クリエ様の解約条件および原状回復範囲の確定</a:t>
                       </a:r>
                       <a:endParaRPr lang="en-US" sz="850" dirty="0">
                         <a:latin typeface="Yu Gothic" charset="0"/>
@@ -2098,7 +2751,7 @@
                   <a:tcPr marL="91440" marR="91440" marT="18288" marB="18288" anchor="ctr">
                     <a:lnL w="9525" cap="flat" cmpd="sng" algn="ctr">
                       <a:solidFill>
-                        <a:srgbClr val="EFEAE0"/>
+                        <a:srgbClr val="BFBFBF"/>
                       </a:solidFill>
                       <a:prstDash val="solid"/>
                       <a:round/>
@@ -2107,7 +2760,7 @@
                     </a:lnL>
                     <a:lnR w="9525" cap="flat" cmpd="sng" algn="ctr">
                       <a:solidFill>
-                        <a:srgbClr val="EFEAE0"/>
+                        <a:srgbClr val="BFBFBF"/>
                       </a:solidFill>
                       <a:prstDash val="solid"/>
                       <a:round/>
@@ -2116,7 +2769,7 @@
                     </a:lnR>
                     <a:lnT w="9525" cap="flat" cmpd="sng" algn="ctr">
                       <a:solidFill>
-                        <a:srgbClr val="EFEAE0"/>
+                        <a:srgbClr val="BFBFBF"/>
                       </a:solidFill>
                       <a:prstDash val="solid"/>
                       <a:round/>
@@ -2125,7 +2778,7 @@
                     </a:lnT>
                     <a:lnB w="9525" cap="flat" cmpd="sng" algn="ctr">
                       <a:solidFill>
-                        <a:srgbClr val="EFEAE0"/>
+                        <a:srgbClr val="BFBFBF"/>
                       </a:solidFill>
                       <a:prstDash val="solid"/>
                       <a:round/>
@@ -2146,17 +2799,17 @@
                         <a:buNone/>
                       </a:pPr>
                       <a:r>
-                        <a:rPr lang="en-US" sz="800" b="1" dirty="0">
+                        <a:rPr lang="en-US" sz="850" b="1" dirty="0">
                           <a:solidFill>
-                            <a:srgbClr val="106838"/>
+                            <a:srgbClr val="8A6316"/>
                           </a:solidFill>
                           <a:latin typeface="Yu Gothic" pitchFamily="34" charset="0"/>
                           <a:ea typeface="Yu Gothic" pitchFamily="34" charset="-122"/>
                           <a:cs typeface="Yu Gothic" pitchFamily="34" charset="-120"/>
                         </a:rPr>
-                        <a:t>セルフカフェ</a:t>
+                        <a:t>貴社</a:t>
                       </a:r>
-                      <a:endParaRPr lang="en-US" sz="800" dirty="0">
+                      <a:endParaRPr lang="en-US" sz="850" dirty="0">
                         <a:latin typeface="Yu Gothic" charset="0"/>
                         <a:ea typeface="Yu Gothic" charset="0"/>
                         <a:cs typeface="Yu Gothic" charset="0"/>
@@ -2166,7 +2819,7 @@
                   <a:tcPr marL="91440" marR="91440" marT="18288" marB="18288" anchor="ctr">
                     <a:lnL w="9525" cap="flat" cmpd="sng" algn="ctr">
                       <a:solidFill>
-                        <a:srgbClr val="EFEAE0"/>
+                        <a:srgbClr val="BFBFBF"/>
                       </a:solidFill>
                       <a:prstDash val="solid"/>
                       <a:round/>
@@ -2175,7 +2828,7 @@
                     </a:lnL>
                     <a:lnR w="9525" cap="flat" cmpd="sng" algn="ctr">
                       <a:solidFill>
-                        <a:srgbClr val="EFEAE0"/>
+                        <a:srgbClr val="BFBFBF"/>
                       </a:solidFill>
                       <a:prstDash val="solid"/>
                       <a:round/>
@@ -2184,7 +2837,7 @@
                     </a:lnR>
                     <a:lnT w="9525" cap="flat" cmpd="sng" algn="ctr">
                       <a:solidFill>
-                        <a:srgbClr val="EFEAE0"/>
+                        <a:srgbClr val="BFBFBF"/>
                       </a:solidFill>
                       <a:prstDash val="solid"/>
                       <a:round/>
@@ -2193,7 +2846,7 @@
                     </a:lnT>
                     <a:lnB w="9525" cap="flat" cmpd="sng" algn="ctr">
                       <a:solidFill>
-                        <a:srgbClr val="EFEAE0"/>
+                        <a:srgbClr val="BFBFBF"/>
                       </a:solidFill>
                       <a:prstDash val="solid"/>
                       <a:round/>
@@ -2201,12 +2854,12 @@
                       <a:tailEnd type="none" w="med" len="med"/>
                     </a:lnB>
                     <a:solidFill>
-                      <a:srgbClr val="F1F8F3"/>
+                      <a:srgbClr val="FFFFFF"/>
                     </a:solidFill>
                   </a:tcPr>
                 </a:tc>
               </a:tr>
-              <a:tr h="224028">
+              <a:tr h="196596">
                 <a:tc>
                   <a:txBody>
                     <a:bodyPr/>
@@ -2218,13 +2871,13 @@
                       <a:r>
                         <a:rPr lang="en-US" sz="850" b="1" dirty="0">
                           <a:solidFill>
-                            <a:srgbClr val="0A3D23"/>
+                            <a:srgbClr val="1A1A1A"/>
                           </a:solidFill>
                           <a:latin typeface="Yu Gothic" pitchFamily="34" charset="0"/>
                           <a:ea typeface="Yu Gothic" pitchFamily="34" charset="-122"/>
                           <a:cs typeface="Yu Gothic" pitchFamily="34" charset="-120"/>
                         </a:rPr>
-                        <a:t>11月中旬</a:t>
+                        <a:t>11月下旬</a:t>
                       </a:r>
                       <a:endParaRPr lang="en-US" sz="850" dirty="0">
                         <a:latin typeface="Yu Gothic" charset="0"/>
@@ -2236,7 +2889,7 @@
                   <a:tcPr marL="91440" marR="91440" marT="18288" marB="18288" anchor="ctr">
                     <a:lnL w="9525" cap="flat" cmpd="sng" algn="ctr">
                       <a:solidFill>
-                        <a:srgbClr val="EFEAE0"/>
+                        <a:srgbClr val="BFBFBF"/>
                       </a:solidFill>
                       <a:prstDash val="solid"/>
                       <a:round/>
@@ -2245,7 +2898,7 @@
                     </a:lnL>
                     <a:lnR w="9525" cap="flat" cmpd="sng" algn="ctr">
                       <a:solidFill>
-                        <a:srgbClr val="EFEAE0"/>
+                        <a:srgbClr val="BFBFBF"/>
                       </a:solidFill>
                       <a:prstDash val="solid"/>
                       <a:round/>
@@ -2254,7 +2907,7 @@
                     </a:lnR>
                     <a:lnT w="9525" cap="flat" cmpd="sng" algn="ctr">
                       <a:solidFill>
-                        <a:srgbClr val="EFEAE0"/>
+                        <a:srgbClr val="BFBFBF"/>
                       </a:solidFill>
                       <a:prstDash val="solid"/>
                       <a:round/>
@@ -2263,7 +2916,213 @@
                     </a:lnT>
                     <a:lnB w="9525" cap="flat" cmpd="sng" algn="ctr">
                       <a:solidFill>
-                        <a:srgbClr val="EFEAE0"/>
+                        <a:srgbClr val="BFBFBF"/>
+                      </a:solidFill>
+                      <a:prstDash val="solid"/>
+                      <a:round/>
+                      <a:headEnd type="none" w="med" len="med"/>
+                      <a:tailEnd type="none" w="med" len="med"/>
+                    </a:lnB>
+                    <a:solidFill>
+                      <a:srgbClr val="F7F7F7"/>
+                    </a:solidFill>
+                  </a:tcPr>
+                </a:tc>
+                <a:tc>
+                  <a:txBody>
+                    <a:bodyPr/>
+                    <a:lstStyle/>
+                    <a:p>
+                      <a:pPr algn="l" indent="0" marL="0">
+                        <a:buNone/>
+                      </a:pPr>
+                      <a:r>
+                        <a:rPr lang="en-US" sz="850" dirty="0">
+                          <a:solidFill>
+                            <a:srgbClr val="333333"/>
+                          </a:solidFill>
+                          <a:latin typeface="Yu Gothic" pitchFamily="34" charset="0"/>
+                          <a:ea typeface="Yu Gothic" pitchFamily="34" charset="-122"/>
+                          <a:cs typeface="Yu Gothic" pitchFamily="34" charset="-120"/>
+                        </a:rPr>
+                        <a:t>仕様の確定および業務委託契約の締結（カメラ映像の取扱いを含む）</a:t>
+                      </a:r>
+                      <a:endParaRPr lang="en-US" sz="850" dirty="0">
+                        <a:latin typeface="Yu Gothic" charset="0"/>
+                        <a:ea typeface="Yu Gothic" charset="0"/>
+                        <a:cs typeface="Yu Gothic" charset="0"/>
+                      </a:endParaRPr>
+                    </a:p>
+                  </a:txBody>
+                  <a:tcPr marL="91440" marR="91440" marT="18288" marB="18288" anchor="ctr">
+                    <a:lnL w="9525" cap="flat" cmpd="sng" algn="ctr">
+                      <a:solidFill>
+                        <a:srgbClr val="BFBFBF"/>
+                      </a:solidFill>
+                      <a:prstDash val="solid"/>
+                      <a:round/>
+                      <a:headEnd type="none" w="med" len="med"/>
+                      <a:tailEnd type="none" w="med" len="med"/>
+                    </a:lnL>
+                    <a:lnR w="9525" cap="flat" cmpd="sng" algn="ctr">
+                      <a:solidFill>
+                        <a:srgbClr val="BFBFBF"/>
+                      </a:solidFill>
+                      <a:prstDash val="solid"/>
+                      <a:round/>
+                      <a:headEnd type="none" w="med" len="med"/>
+                      <a:tailEnd type="none" w="med" len="med"/>
+                    </a:lnR>
+                    <a:lnT w="9525" cap="flat" cmpd="sng" algn="ctr">
+                      <a:solidFill>
+                        <a:srgbClr val="BFBFBF"/>
+                      </a:solidFill>
+                      <a:prstDash val="solid"/>
+                      <a:round/>
+                      <a:headEnd type="none" w="med" len="med"/>
+                      <a:tailEnd type="none" w="med" len="med"/>
+                    </a:lnT>
+                    <a:lnB w="9525" cap="flat" cmpd="sng" algn="ctr">
+                      <a:solidFill>
+                        <a:srgbClr val="BFBFBF"/>
+                      </a:solidFill>
+                      <a:prstDash val="solid"/>
+                      <a:round/>
+                      <a:headEnd type="none" w="med" len="med"/>
+                      <a:tailEnd type="none" w="med" len="med"/>
+                    </a:lnB>
+                    <a:solidFill>
+                      <a:srgbClr val="F7F7F7"/>
+                    </a:solidFill>
+                  </a:tcPr>
+                </a:tc>
+                <a:tc>
+                  <a:txBody>
+                    <a:bodyPr/>
+                    <a:lstStyle/>
+                    <a:p>
+                      <a:pPr algn="ctr" indent="0" marL="0">
+                        <a:buNone/>
+                      </a:pPr>
+                      <a:r>
+                        <a:rPr lang="en-US" sz="850" b="1" dirty="0">
+                          <a:solidFill>
+                            <a:srgbClr val="6B6B6B"/>
+                          </a:solidFill>
+                          <a:latin typeface="Yu Gothic" pitchFamily="34" charset="0"/>
+                          <a:ea typeface="Yu Gothic" pitchFamily="34" charset="-122"/>
+                          <a:cs typeface="Yu Gothic" pitchFamily="34" charset="-120"/>
+                        </a:rPr>
+                        <a:t>両社</a:t>
+                      </a:r>
+                      <a:endParaRPr lang="en-US" sz="850" dirty="0">
+                        <a:latin typeface="Yu Gothic" charset="0"/>
+                        <a:ea typeface="Yu Gothic" charset="0"/>
+                        <a:cs typeface="Yu Gothic" charset="0"/>
+                      </a:endParaRPr>
+                    </a:p>
+                  </a:txBody>
+                  <a:tcPr marL="91440" marR="91440" marT="18288" marB="18288" anchor="ctr">
+                    <a:lnL w="9525" cap="flat" cmpd="sng" algn="ctr">
+                      <a:solidFill>
+                        <a:srgbClr val="BFBFBF"/>
+                      </a:solidFill>
+                      <a:prstDash val="solid"/>
+                      <a:round/>
+                      <a:headEnd type="none" w="med" len="med"/>
+                      <a:tailEnd type="none" w="med" len="med"/>
+                    </a:lnL>
+                    <a:lnR w="9525" cap="flat" cmpd="sng" algn="ctr">
+                      <a:solidFill>
+                        <a:srgbClr val="BFBFBF"/>
+                      </a:solidFill>
+                      <a:prstDash val="solid"/>
+                      <a:round/>
+                      <a:headEnd type="none" w="med" len="med"/>
+                      <a:tailEnd type="none" w="med" len="med"/>
+                    </a:lnR>
+                    <a:lnT w="9525" cap="flat" cmpd="sng" algn="ctr">
+                      <a:solidFill>
+                        <a:srgbClr val="BFBFBF"/>
+                      </a:solidFill>
+                      <a:prstDash val="solid"/>
+                      <a:round/>
+                      <a:headEnd type="none" w="med" len="med"/>
+                      <a:tailEnd type="none" w="med" len="med"/>
+                    </a:lnT>
+                    <a:lnB w="9525" cap="flat" cmpd="sng" algn="ctr">
+                      <a:solidFill>
+                        <a:srgbClr val="BFBFBF"/>
+                      </a:solidFill>
+                      <a:prstDash val="solid"/>
+                      <a:round/>
+                      <a:headEnd type="none" w="med" len="med"/>
+                      <a:tailEnd type="none" w="med" len="med"/>
+                    </a:lnB>
+                    <a:solidFill>
+                      <a:srgbClr val="FFFFFF"/>
+                    </a:solidFill>
+                  </a:tcPr>
+                </a:tc>
+              </a:tr>
+              <a:tr h="196596">
+                <a:tc>
+                  <a:txBody>
+                    <a:bodyPr/>
+                    <a:lstStyle/>
+                    <a:p>
+                      <a:pPr algn="l" indent="0" marL="0">
+                        <a:buNone/>
+                      </a:pPr>
+                      <a:r>
+                        <a:rPr lang="en-US" sz="850" b="1" dirty="0">
+                          <a:solidFill>
+                            <a:srgbClr val="1A1A1A"/>
+                          </a:solidFill>
+                          <a:latin typeface="Yu Gothic" pitchFamily="34" charset="0"/>
+                          <a:ea typeface="Yu Gothic" pitchFamily="34" charset="-122"/>
+                          <a:cs typeface="Yu Gothic" pitchFamily="34" charset="-120"/>
+                        </a:rPr>
+                        <a:t>11月下旬〜12月</a:t>
+                      </a:r>
+                      <a:endParaRPr lang="en-US" sz="850" dirty="0">
+                        <a:latin typeface="Yu Gothic" charset="0"/>
+                        <a:ea typeface="Yu Gothic" charset="0"/>
+                        <a:cs typeface="Yu Gothic" charset="0"/>
+                      </a:endParaRPr>
+                    </a:p>
+                  </a:txBody>
+                  <a:tcPr marL="91440" marR="91440" marT="18288" marB="18288" anchor="ctr">
+                    <a:lnL w="9525" cap="flat" cmpd="sng" algn="ctr">
+                      <a:solidFill>
+                        <a:srgbClr val="BFBFBF"/>
+                      </a:solidFill>
+                      <a:prstDash val="solid"/>
+                      <a:round/>
+                      <a:headEnd type="none" w="med" len="med"/>
+                      <a:tailEnd type="none" w="med" len="med"/>
+                    </a:lnL>
+                    <a:lnR w="9525" cap="flat" cmpd="sng" algn="ctr">
+                      <a:solidFill>
+                        <a:srgbClr val="BFBFBF"/>
+                      </a:solidFill>
+                      <a:prstDash val="solid"/>
+                      <a:round/>
+                      <a:headEnd type="none" w="med" len="med"/>
+                      <a:tailEnd type="none" w="med" len="med"/>
+                    </a:lnR>
+                    <a:lnT w="9525" cap="flat" cmpd="sng" algn="ctr">
+                      <a:solidFill>
+                        <a:srgbClr val="BFBFBF"/>
+                      </a:solidFill>
+                      <a:prstDash val="solid"/>
+                      <a:round/>
+                      <a:headEnd type="none" w="med" len="med"/>
+                      <a:tailEnd type="none" w="med" len="med"/>
+                    </a:lnT>
+                    <a:lnB w="9525" cap="flat" cmpd="sng" algn="ctr">
+                      <a:solidFill>
+                        <a:srgbClr val="BFBFBF"/>
                       </a:solidFill>
                       <a:prstDash val="solid"/>
                       <a:round/>
@@ -2286,13 +3145,13 @@
                       <a:r>
                         <a:rPr lang="en-US" sz="850" dirty="0">
                           <a:solidFill>
-                            <a:srgbClr val="4B5550"/>
+                            <a:srgbClr val="333333"/>
                           </a:solidFill>
                           <a:latin typeface="Yu Gothic" pitchFamily="34" charset="0"/>
                           <a:ea typeface="Yu Gothic" pitchFamily="34" charset="-122"/>
                           <a:cs typeface="Yu Gothic" pitchFamily="34" charset="-120"/>
                         </a:rPr>
-                        <a:t>クリエ様の解約条件・原状回復範囲の確定（残置の範囲を確定）</a:t>
+                        <a:t>館（イオンモール様）への工事申請</a:t>
                       </a:r>
                       <a:endParaRPr lang="en-US" sz="850" dirty="0">
                         <a:latin typeface="Yu Gothic" charset="0"/>
@@ -2304,7 +3163,7 @@
                   <a:tcPr marL="91440" marR="91440" marT="18288" marB="18288" anchor="ctr">
                     <a:lnL w="9525" cap="flat" cmpd="sng" algn="ctr">
                       <a:solidFill>
-                        <a:srgbClr val="EFEAE0"/>
+                        <a:srgbClr val="BFBFBF"/>
                       </a:solidFill>
                       <a:prstDash val="solid"/>
                       <a:round/>
@@ -2313,7 +3172,7 @@
                     </a:lnL>
                     <a:lnR w="9525" cap="flat" cmpd="sng" algn="ctr">
                       <a:solidFill>
-                        <a:srgbClr val="EFEAE0"/>
+                        <a:srgbClr val="BFBFBF"/>
                       </a:solidFill>
                       <a:prstDash val="solid"/>
                       <a:round/>
@@ -2322,7 +3181,7 @@
                     </a:lnR>
                     <a:lnT w="9525" cap="flat" cmpd="sng" algn="ctr">
                       <a:solidFill>
-                        <a:srgbClr val="EFEAE0"/>
+                        <a:srgbClr val="BFBFBF"/>
                       </a:solidFill>
                       <a:prstDash val="solid"/>
                       <a:round/>
@@ -2331,7 +3190,7 @@
                     </a:lnT>
                     <a:lnB w="9525" cap="flat" cmpd="sng" algn="ctr">
                       <a:solidFill>
-                        <a:srgbClr val="EFEAE0"/>
+                        <a:srgbClr val="BFBFBF"/>
                       </a:solidFill>
                       <a:prstDash val="solid"/>
                       <a:round/>
@@ -2352,17 +3211,17 @@
                         <a:buNone/>
                       </a:pPr>
                       <a:r>
-                        <a:rPr lang="en-US" sz="800" b="1" dirty="0">
+                        <a:rPr lang="en-US" sz="850" b="1" dirty="0">
                           <a:solidFill>
-                            <a:srgbClr val="A8761F"/>
+                            <a:srgbClr val="6B6B6B"/>
                           </a:solidFill>
                           <a:latin typeface="Yu Gothic" pitchFamily="34" charset="0"/>
                           <a:ea typeface="Yu Gothic" pitchFamily="34" charset="-122"/>
                           <a:cs typeface="Yu Gothic" pitchFamily="34" charset="-120"/>
                         </a:rPr>
-                        <a:t>未来屋書店様</a:t>
+                        <a:t>両社</a:t>
                       </a:r>
-                      <a:endParaRPr lang="en-US" sz="800" dirty="0">
+                      <a:endParaRPr lang="en-US" sz="850" dirty="0">
                         <a:latin typeface="Yu Gothic" charset="0"/>
                         <a:ea typeface="Yu Gothic" charset="0"/>
                         <a:cs typeface="Yu Gothic" charset="0"/>
@@ -2372,7 +3231,7 @@
                   <a:tcPr marL="91440" marR="91440" marT="18288" marB="18288" anchor="ctr">
                     <a:lnL w="9525" cap="flat" cmpd="sng" algn="ctr">
                       <a:solidFill>
-                        <a:srgbClr val="EFEAE0"/>
+                        <a:srgbClr val="BFBFBF"/>
                       </a:solidFill>
                       <a:prstDash val="solid"/>
                       <a:round/>
@@ -2381,7 +3240,7 @@
                     </a:lnL>
                     <a:lnR w="9525" cap="flat" cmpd="sng" algn="ctr">
                       <a:solidFill>
-                        <a:srgbClr val="EFEAE0"/>
+                        <a:srgbClr val="BFBFBF"/>
                       </a:solidFill>
                       <a:prstDash val="solid"/>
                       <a:round/>
@@ -2390,7 +3249,7 @@
                     </a:lnR>
                     <a:lnT w="9525" cap="flat" cmpd="sng" algn="ctr">
                       <a:solidFill>
-                        <a:srgbClr val="EFEAE0"/>
+                        <a:srgbClr val="BFBFBF"/>
                       </a:solidFill>
                       <a:prstDash val="solid"/>
                       <a:round/>
@@ -2399,7 +3258,7 @@
                     </a:lnT>
                     <a:lnB w="9525" cap="flat" cmpd="sng" algn="ctr">
                       <a:solidFill>
-                        <a:srgbClr val="EFEAE0"/>
+                        <a:srgbClr val="BFBFBF"/>
                       </a:solidFill>
                       <a:prstDash val="solid"/>
                       <a:round/>
@@ -2407,12 +3266,12 @@
                       <a:tailEnd type="none" w="med" len="med"/>
                     </a:lnB>
                     <a:solidFill>
-                      <a:srgbClr val="FBF4E4"/>
+                      <a:srgbClr val="FFFFFF"/>
                     </a:solidFill>
                   </a:tcPr>
                 </a:tc>
               </a:tr>
-              <a:tr h="224028">
+              <a:tr h="196596">
                 <a:tc>
                   <a:txBody>
                     <a:bodyPr/>
@@ -2424,13 +3283,13 @@
                       <a:r>
                         <a:rPr lang="en-US" sz="850" b="1" dirty="0">
                           <a:solidFill>
-                            <a:srgbClr val="0A3D23"/>
+                            <a:srgbClr val="1A1A1A"/>
                           </a:solidFill>
                           <a:latin typeface="Yu Gothic" pitchFamily="34" charset="0"/>
                           <a:ea typeface="Yu Gothic" pitchFamily="34" charset="-122"/>
                           <a:cs typeface="Yu Gothic" pitchFamily="34" charset="-120"/>
                         </a:rPr>
-                        <a:t>11月下旬</a:t>
+                        <a:t>12月上旬</a:t>
                       </a:r>
                       <a:endParaRPr lang="en-US" sz="850" dirty="0">
                         <a:latin typeface="Yu Gothic" charset="0"/>
@@ -2442,7 +3301,7 @@
                   <a:tcPr marL="91440" marR="91440" marT="18288" marB="18288" anchor="ctr">
                     <a:lnL w="9525" cap="flat" cmpd="sng" algn="ctr">
                       <a:solidFill>
-                        <a:srgbClr val="EFEAE0"/>
+                        <a:srgbClr val="BFBFBF"/>
                       </a:solidFill>
                       <a:prstDash val="solid"/>
                       <a:round/>
@@ -2451,7 +3310,7 @@
                     </a:lnL>
                     <a:lnR w="9525" cap="flat" cmpd="sng" algn="ctr">
                       <a:solidFill>
-                        <a:srgbClr val="EFEAE0"/>
+                        <a:srgbClr val="BFBFBF"/>
                       </a:solidFill>
                       <a:prstDash val="solid"/>
                       <a:round/>
@@ -2460,7 +3319,7 @@
                     </a:lnR>
                     <a:lnT w="9525" cap="flat" cmpd="sng" algn="ctr">
                       <a:solidFill>
-                        <a:srgbClr val="EFEAE0"/>
+                        <a:srgbClr val="BFBFBF"/>
                       </a:solidFill>
                       <a:prstDash val="solid"/>
                       <a:round/>
@@ -2469,7 +3328,213 @@
                     </a:lnT>
                     <a:lnB w="9525" cap="flat" cmpd="sng" algn="ctr">
                       <a:solidFill>
-                        <a:srgbClr val="EFEAE0"/>
+                        <a:srgbClr val="BFBFBF"/>
+                      </a:solidFill>
+                      <a:prstDash val="solid"/>
+                      <a:round/>
+                      <a:headEnd type="none" w="med" len="med"/>
+                      <a:tailEnd type="none" w="med" len="med"/>
+                    </a:lnB>
+                    <a:solidFill>
+                      <a:srgbClr val="F7F7F7"/>
+                    </a:solidFill>
+                  </a:tcPr>
+                </a:tc>
+                <a:tc>
+                  <a:txBody>
+                    <a:bodyPr/>
+                    <a:lstStyle/>
+                    <a:p>
+                      <a:pPr algn="l" indent="0" marL="0">
+                        <a:buNone/>
+                      </a:pPr>
+                      <a:r>
+                        <a:rPr lang="en-US" sz="850" dirty="0">
+                          <a:solidFill>
+                            <a:srgbClr val="333333"/>
+                          </a:solidFill>
+                          <a:latin typeface="Yu Gothic" pitchFamily="34" charset="0"/>
+                          <a:ea typeface="Yu Gothic" pitchFamily="34" charset="-122"/>
+                          <a:cs typeface="Yu Gothic" pitchFamily="34" charset="-120"/>
+                        </a:rPr>
+                        <a:t>インターネット回線の新規お申込み（開通まで1〜2か月）</a:t>
+                      </a:r>
+                      <a:endParaRPr lang="en-US" sz="850" dirty="0">
+                        <a:latin typeface="Yu Gothic" charset="0"/>
+                        <a:ea typeface="Yu Gothic" charset="0"/>
+                        <a:cs typeface="Yu Gothic" charset="0"/>
+                      </a:endParaRPr>
+                    </a:p>
+                  </a:txBody>
+                  <a:tcPr marL="91440" marR="91440" marT="18288" marB="18288" anchor="ctr">
+                    <a:lnL w="9525" cap="flat" cmpd="sng" algn="ctr">
+                      <a:solidFill>
+                        <a:srgbClr val="BFBFBF"/>
+                      </a:solidFill>
+                      <a:prstDash val="solid"/>
+                      <a:round/>
+                      <a:headEnd type="none" w="med" len="med"/>
+                      <a:tailEnd type="none" w="med" len="med"/>
+                    </a:lnL>
+                    <a:lnR w="9525" cap="flat" cmpd="sng" algn="ctr">
+                      <a:solidFill>
+                        <a:srgbClr val="BFBFBF"/>
+                      </a:solidFill>
+                      <a:prstDash val="solid"/>
+                      <a:round/>
+                      <a:headEnd type="none" w="med" len="med"/>
+                      <a:tailEnd type="none" w="med" len="med"/>
+                    </a:lnR>
+                    <a:lnT w="9525" cap="flat" cmpd="sng" algn="ctr">
+                      <a:solidFill>
+                        <a:srgbClr val="BFBFBF"/>
+                      </a:solidFill>
+                      <a:prstDash val="solid"/>
+                      <a:round/>
+                      <a:headEnd type="none" w="med" len="med"/>
+                      <a:tailEnd type="none" w="med" len="med"/>
+                    </a:lnT>
+                    <a:lnB w="9525" cap="flat" cmpd="sng" algn="ctr">
+                      <a:solidFill>
+                        <a:srgbClr val="BFBFBF"/>
+                      </a:solidFill>
+                      <a:prstDash val="solid"/>
+                      <a:round/>
+                      <a:headEnd type="none" w="med" len="med"/>
+                      <a:tailEnd type="none" w="med" len="med"/>
+                    </a:lnB>
+                    <a:solidFill>
+                      <a:srgbClr val="F7F7F7"/>
+                    </a:solidFill>
+                  </a:tcPr>
+                </a:tc>
+                <a:tc>
+                  <a:txBody>
+                    <a:bodyPr/>
+                    <a:lstStyle/>
+                    <a:p>
+                      <a:pPr algn="ctr" indent="0" marL="0">
+                        <a:buNone/>
+                      </a:pPr>
+                      <a:r>
+                        <a:rPr lang="en-US" sz="850" b="1" dirty="0">
+                          <a:solidFill>
+                            <a:srgbClr val="8A6316"/>
+                          </a:solidFill>
+                          <a:latin typeface="Yu Gothic" pitchFamily="34" charset="0"/>
+                          <a:ea typeface="Yu Gothic" pitchFamily="34" charset="-122"/>
+                          <a:cs typeface="Yu Gothic" pitchFamily="34" charset="-120"/>
+                        </a:rPr>
+                        <a:t>貴社</a:t>
+                      </a:r>
+                      <a:endParaRPr lang="en-US" sz="850" dirty="0">
+                        <a:latin typeface="Yu Gothic" charset="0"/>
+                        <a:ea typeface="Yu Gothic" charset="0"/>
+                        <a:cs typeface="Yu Gothic" charset="0"/>
+                      </a:endParaRPr>
+                    </a:p>
+                  </a:txBody>
+                  <a:tcPr marL="91440" marR="91440" marT="18288" marB="18288" anchor="ctr">
+                    <a:lnL w="9525" cap="flat" cmpd="sng" algn="ctr">
+                      <a:solidFill>
+                        <a:srgbClr val="BFBFBF"/>
+                      </a:solidFill>
+                      <a:prstDash val="solid"/>
+                      <a:round/>
+                      <a:headEnd type="none" w="med" len="med"/>
+                      <a:tailEnd type="none" w="med" len="med"/>
+                    </a:lnL>
+                    <a:lnR w="9525" cap="flat" cmpd="sng" algn="ctr">
+                      <a:solidFill>
+                        <a:srgbClr val="BFBFBF"/>
+                      </a:solidFill>
+                      <a:prstDash val="solid"/>
+                      <a:round/>
+                      <a:headEnd type="none" w="med" len="med"/>
+                      <a:tailEnd type="none" w="med" len="med"/>
+                    </a:lnR>
+                    <a:lnT w="9525" cap="flat" cmpd="sng" algn="ctr">
+                      <a:solidFill>
+                        <a:srgbClr val="BFBFBF"/>
+                      </a:solidFill>
+                      <a:prstDash val="solid"/>
+                      <a:round/>
+                      <a:headEnd type="none" w="med" len="med"/>
+                      <a:tailEnd type="none" w="med" len="med"/>
+                    </a:lnT>
+                    <a:lnB w="9525" cap="flat" cmpd="sng" algn="ctr">
+                      <a:solidFill>
+                        <a:srgbClr val="BFBFBF"/>
+                      </a:solidFill>
+                      <a:prstDash val="solid"/>
+                      <a:round/>
+                      <a:headEnd type="none" w="med" len="med"/>
+                      <a:tailEnd type="none" w="med" len="med"/>
+                    </a:lnB>
+                    <a:solidFill>
+                      <a:srgbClr val="FFFFFF"/>
+                    </a:solidFill>
+                  </a:tcPr>
+                </a:tc>
+              </a:tr>
+              <a:tr h="196596">
+                <a:tc>
+                  <a:txBody>
+                    <a:bodyPr/>
+                    <a:lstStyle/>
+                    <a:p>
+                      <a:pPr algn="l" indent="0" marL="0">
+                        <a:buNone/>
+                      </a:pPr>
+                      <a:r>
+                        <a:rPr lang="en-US" sz="850" b="1" dirty="0">
+                          <a:solidFill>
+                            <a:srgbClr val="1A1A1A"/>
+                          </a:solidFill>
+                          <a:latin typeface="Yu Gothic" pitchFamily="34" charset="0"/>
+                          <a:ea typeface="Yu Gothic" pitchFamily="34" charset="-122"/>
+                          <a:cs typeface="Yu Gothic" pitchFamily="34" charset="-120"/>
+                        </a:rPr>
+                        <a:t>12月上旬</a:t>
+                      </a:r>
+                      <a:endParaRPr lang="en-US" sz="850" dirty="0">
+                        <a:latin typeface="Yu Gothic" charset="0"/>
+                        <a:ea typeface="Yu Gothic" charset="0"/>
+                        <a:cs typeface="Yu Gothic" charset="0"/>
+                      </a:endParaRPr>
+                    </a:p>
+                  </a:txBody>
+                  <a:tcPr marL="91440" marR="91440" marT="18288" marB="18288" anchor="ctr">
+                    <a:lnL w="9525" cap="flat" cmpd="sng" algn="ctr">
+                      <a:solidFill>
+                        <a:srgbClr val="BFBFBF"/>
+                      </a:solidFill>
+                      <a:prstDash val="solid"/>
+                      <a:round/>
+                      <a:headEnd type="none" w="med" len="med"/>
+                      <a:tailEnd type="none" w="med" len="med"/>
+                    </a:lnL>
+                    <a:lnR w="9525" cap="flat" cmpd="sng" algn="ctr">
+                      <a:solidFill>
+                        <a:srgbClr val="BFBFBF"/>
+                      </a:solidFill>
+                      <a:prstDash val="solid"/>
+                      <a:round/>
+                      <a:headEnd type="none" w="med" len="med"/>
+                      <a:tailEnd type="none" w="med" len="med"/>
+                    </a:lnR>
+                    <a:lnT w="9525" cap="flat" cmpd="sng" algn="ctr">
+                      <a:solidFill>
+                        <a:srgbClr val="BFBFBF"/>
+                      </a:solidFill>
+                      <a:prstDash val="solid"/>
+                      <a:round/>
+                      <a:headEnd type="none" w="med" len="med"/>
+                      <a:tailEnd type="none" w="med" len="med"/>
+                    </a:lnT>
+                    <a:lnB w="9525" cap="flat" cmpd="sng" algn="ctr">
+                      <a:solidFill>
+                        <a:srgbClr val="BFBFBF"/>
                       </a:solidFill>
                       <a:prstDash val="solid"/>
                       <a:round/>
@@ -2492,13 +3557,13 @@
                       <a:r>
                         <a:rPr lang="en-US" sz="850" dirty="0">
                           <a:solidFill>
-                            <a:srgbClr val="4B5550"/>
+                            <a:srgbClr val="333333"/>
                           </a:solidFill>
                           <a:latin typeface="Yu Gothic" pitchFamily="34" charset="0"/>
                           <a:ea typeface="Yu Gothic" pitchFamily="34" charset="-122"/>
                           <a:cs typeface="Yu Gothic" pitchFamily="34" charset="-120"/>
                         </a:rPr>
-                        <a:t>仕様の確定／業務委託契約の締結（カメラ映像の取扱いを含む）</a:t>
+                        <a:t>什器・機器の発注（リードタイム4〜6週間）</a:t>
                       </a:r>
                       <a:endParaRPr lang="en-US" sz="850" dirty="0">
                         <a:latin typeface="Yu Gothic" charset="0"/>
@@ -2510,7 +3575,7 @@
                   <a:tcPr marL="91440" marR="91440" marT="18288" marB="18288" anchor="ctr">
                     <a:lnL w="9525" cap="flat" cmpd="sng" algn="ctr">
                       <a:solidFill>
-                        <a:srgbClr val="EFEAE0"/>
+                        <a:srgbClr val="BFBFBF"/>
                       </a:solidFill>
                       <a:prstDash val="solid"/>
                       <a:round/>
@@ -2519,7 +3584,7 @@
                     </a:lnL>
                     <a:lnR w="9525" cap="flat" cmpd="sng" algn="ctr">
                       <a:solidFill>
-                        <a:srgbClr val="EFEAE0"/>
+                        <a:srgbClr val="BFBFBF"/>
                       </a:solidFill>
                       <a:prstDash val="solid"/>
                       <a:round/>
@@ -2528,7 +3593,7 @@
                     </a:lnR>
                     <a:lnT w="9525" cap="flat" cmpd="sng" algn="ctr">
                       <a:solidFill>
-                        <a:srgbClr val="EFEAE0"/>
+                        <a:srgbClr val="BFBFBF"/>
                       </a:solidFill>
                       <a:prstDash val="solid"/>
                       <a:round/>
@@ -2537,7 +3602,7 @@
                     </a:lnT>
                     <a:lnB w="9525" cap="flat" cmpd="sng" algn="ctr">
                       <a:solidFill>
-                        <a:srgbClr val="EFEAE0"/>
+                        <a:srgbClr val="BFBFBF"/>
                       </a:solidFill>
                       <a:prstDash val="solid"/>
                       <a:round/>
@@ -2558,17 +3623,17 @@
                         <a:buNone/>
                       </a:pPr>
                       <a:r>
-                        <a:rPr lang="en-US" sz="800" b="1" dirty="0">
+                        <a:rPr lang="en-US" sz="850" b="1" dirty="0">
                           <a:solidFill>
-                            <a:srgbClr val="0A3D23"/>
+                            <a:srgbClr val="106838"/>
                           </a:solidFill>
                           <a:latin typeface="Yu Gothic" pitchFamily="34" charset="0"/>
                           <a:ea typeface="Yu Gothic" pitchFamily="34" charset="-122"/>
                           <a:cs typeface="Yu Gothic" pitchFamily="34" charset="-120"/>
                         </a:rPr>
-                        <a:t>両社</a:t>
+                        <a:t>弊社</a:t>
                       </a:r>
-                      <a:endParaRPr lang="en-US" sz="800" dirty="0">
+                      <a:endParaRPr lang="en-US" sz="850" dirty="0">
                         <a:latin typeface="Yu Gothic" charset="0"/>
                         <a:ea typeface="Yu Gothic" charset="0"/>
                         <a:cs typeface="Yu Gothic" charset="0"/>
@@ -2578,7 +3643,7 @@
                   <a:tcPr marL="91440" marR="91440" marT="18288" marB="18288" anchor="ctr">
                     <a:lnL w="9525" cap="flat" cmpd="sng" algn="ctr">
                       <a:solidFill>
-                        <a:srgbClr val="EFEAE0"/>
+                        <a:srgbClr val="BFBFBF"/>
                       </a:solidFill>
                       <a:prstDash val="solid"/>
                       <a:round/>
@@ -2587,7 +3652,7 @@
                     </a:lnL>
                     <a:lnR w="9525" cap="flat" cmpd="sng" algn="ctr">
                       <a:solidFill>
-                        <a:srgbClr val="EFEAE0"/>
+                        <a:srgbClr val="BFBFBF"/>
                       </a:solidFill>
                       <a:prstDash val="solid"/>
                       <a:round/>
@@ -2596,7 +3661,7 @@
                     </a:lnR>
                     <a:lnT w="9525" cap="flat" cmpd="sng" algn="ctr">
                       <a:solidFill>
-                        <a:srgbClr val="EFEAE0"/>
+                        <a:srgbClr val="BFBFBF"/>
                       </a:solidFill>
                       <a:prstDash val="solid"/>
                       <a:round/>
@@ -2605,7 +3670,7 @@
                     </a:lnT>
                     <a:lnB w="9525" cap="flat" cmpd="sng" algn="ctr">
                       <a:solidFill>
-                        <a:srgbClr val="EFEAE0"/>
+                        <a:srgbClr val="BFBFBF"/>
                       </a:solidFill>
                       <a:prstDash val="solid"/>
                       <a:round/>
@@ -2613,12 +3678,12 @@
                       <a:tailEnd type="none" w="med" len="med"/>
                     </a:lnB>
                     <a:solidFill>
-                      <a:srgbClr val="F4F2EE"/>
+                      <a:srgbClr val="FFFFFF"/>
                     </a:solidFill>
                   </a:tcPr>
                 </a:tc>
               </a:tr>
-              <a:tr h="224028">
+              <a:tr h="196596">
                 <a:tc>
                   <a:txBody>
                     <a:bodyPr/>
@@ -2630,13 +3695,13 @@
                       <a:r>
                         <a:rPr lang="en-US" sz="850" b="1" dirty="0">
                           <a:solidFill>
-                            <a:srgbClr val="0A3D23"/>
+                            <a:srgbClr val="1A1A1A"/>
                           </a:solidFill>
                           <a:latin typeface="Yu Gothic" pitchFamily="34" charset="0"/>
                           <a:ea typeface="Yu Gothic" pitchFamily="34" charset="-122"/>
                           <a:cs typeface="Yu Gothic" pitchFamily="34" charset="-120"/>
                         </a:rPr>
-                        <a:t>11月下旬〜12月</a:t>
+                        <a:t>1月末</a:t>
                       </a:r>
                       <a:endParaRPr lang="en-US" sz="850" dirty="0">
                         <a:latin typeface="Yu Gothic" charset="0"/>
@@ -2648,7 +3713,7 @@
                   <a:tcPr marL="91440" marR="91440" marT="18288" marB="18288" anchor="ctr">
                     <a:lnL w="9525" cap="flat" cmpd="sng" algn="ctr">
                       <a:solidFill>
-                        <a:srgbClr val="EFEAE0"/>
+                        <a:srgbClr val="BFBFBF"/>
                       </a:solidFill>
                       <a:prstDash val="solid"/>
                       <a:round/>
@@ -2657,7 +3722,7 @@
                     </a:lnL>
                     <a:lnR w="9525" cap="flat" cmpd="sng" algn="ctr">
                       <a:solidFill>
-                        <a:srgbClr val="EFEAE0"/>
+                        <a:srgbClr val="BFBFBF"/>
                       </a:solidFill>
                       <a:prstDash val="solid"/>
                       <a:round/>
@@ -2666,7 +3731,7 @@
                     </a:lnR>
                     <a:lnT w="9525" cap="flat" cmpd="sng" algn="ctr">
                       <a:solidFill>
-                        <a:srgbClr val="EFEAE0"/>
+                        <a:srgbClr val="BFBFBF"/>
                       </a:solidFill>
                       <a:prstDash val="solid"/>
                       <a:round/>
@@ -2675,7 +3740,213 @@
                     </a:lnT>
                     <a:lnB w="9525" cap="flat" cmpd="sng" algn="ctr">
                       <a:solidFill>
-                        <a:srgbClr val="EFEAE0"/>
+                        <a:srgbClr val="BFBFBF"/>
+                      </a:solidFill>
+                      <a:prstDash val="solid"/>
+                      <a:round/>
+                      <a:headEnd type="none" w="med" len="med"/>
+                      <a:tailEnd type="none" w="med" len="med"/>
+                    </a:lnB>
+                    <a:solidFill>
+                      <a:srgbClr val="F7F7F7"/>
+                    </a:solidFill>
+                  </a:tcPr>
+                </a:tc>
+                <a:tc>
+                  <a:txBody>
+                    <a:bodyPr/>
+                    <a:lstStyle/>
+                    <a:p>
+                      <a:pPr algn="l" indent="0" marL="0">
+                        <a:buNone/>
+                      </a:pPr>
+                      <a:r>
+                        <a:rPr lang="en-US" sz="850" dirty="0">
+                          <a:solidFill>
+                            <a:srgbClr val="333333"/>
+                          </a:solidFill>
+                          <a:latin typeface="Yu Gothic" pitchFamily="34" charset="0"/>
+                          <a:ea typeface="Yu Gothic" pitchFamily="34" charset="-122"/>
+                          <a:cs typeface="Yu Gothic" pitchFamily="34" charset="-120"/>
+                        </a:rPr>
+                        <a:t>カフェ・ド・クリエ様 閉店・退去（造作・床・設備は残置）</a:t>
+                      </a:r>
+                      <a:endParaRPr lang="en-US" sz="850" dirty="0">
+                        <a:latin typeface="Yu Gothic" charset="0"/>
+                        <a:ea typeface="Yu Gothic" charset="0"/>
+                        <a:cs typeface="Yu Gothic" charset="0"/>
+                      </a:endParaRPr>
+                    </a:p>
+                  </a:txBody>
+                  <a:tcPr marL="91440" marR="91440" marT="18288" marB="18288" anchor="ctr">
+                    <a:lnL w="9525" cap="flat" cmpd="sng" algn="ctr">
+                      <a:solidFill>
+                        <a:srgbClr val="BFBFBF"/>
+                      </a:solidFill>
+                      <a:prstDash val="solid"/>
+                      <a:round/>
+                      <a:headEnd type="none" w="med" len="med"/>
+                      <a:tailEnd type="none" w="med" len="med"/>
+                    </a:lnL>
+                    <a:lnR w="9525" cap="flat" cmpd="sng" algn="ctr">
+                      <a:solidFill>
+                        <a:srgbClr val="BFBFBF"/>
+                      </a:solidFill>
+                      <a:prstDash val="solid"/>
+                      <a:round/>
+                      <a:headEnd type="none" w="med" len="med"/>
+                      <a:tailEnd type="none" w="med" len="med"/>
+                    </a:lnR>
+                    <a:lnT w="9525" cap="flat" cmpd="sng" algn="ctr">
+                      <a:solidFill>
+                        <a:srgbClr val="BFBFBF"/>
+                      </a:solidFill>
+                      <a:prstDash val="solid"/>
+                      <a:round/>
+                      <a:headEnd type="none" w="med" len="med"/>
+                      <a:tailEnd type="none" w="med" len="med"/>
+                    </a:lnT>
+                    <a:lnB w="9525" cap="flat" cmpd="sng" algn="ctr">
+                      <a:solidFill>
+                        <a:srgbClr val="BFBFBF"/>
+                      </a:solidFill>
+                      <a:prstDash val="solid"/>
+                      <a:round/>
+                      <a:headEnd type="none" w="med" len="med"/>
+                      <a:tailEnd type="none" w="med" len="med"/>
+                    </a:lnB>
+                    <a:solidFill>
+                      <a:srgbClr val="F7F7F7"/>
+                    </a:solidFill>
+                  </a:tcPr>
+                </a:tc>
+                <a:tc>
+                  <a:txBody>
+                    <a:bodyPr/>
+                    <a:lstStyle/>
+                    <a:p>
+                      <a:pPr algn="ctr" indent="0" marL="0">
+                        <a:buNone/>
+                      </a:pPr>
+                      <a:r>
+                        <a:rPr lang="en-US" sz="850" b="1" dirty="0">
+                          <a:solidFill>
+                            <a:srgbClr val="8A6316"/>
+                          </a:solidFill>
+                          <a:latin typeface="Yu Gothic" pitchFamily="34" charset="0"/>
+                          <a:ea typeface="Yu Gothic" pitchFamily="34" charset="-122"/>
+                          <a:cs typeface="Yu Gothic" pitchFamily="34" charset="-120"/>
+                        </a:rPr>
+                        <a:t>貴社</a:t>
+                      </a:r>
+                      <a:endParaRPr lang="en-US" sz="850" dirty="0">
+                        <a:latin typeface="Yu Gothic" charset="0"/>
+                        <a:ea typeface="Yu Gothic" charset="0"/>
+                        <a:cs typeface="Yu Gothic" charset="0"/>
+                      </a:endParaRPr>
+                    </a:p>
+                  </a:txBody>
+                  <a:tcPr marL="91440" marR="91440" marT="18288" marB="18288" anchor="ctr">
+                    <a:lnL w="9525" cap="flat" cmpd="sng" algn="ctr">
+                      <a:solidFill>
+                        <a:srgbClr val="BFBFBF"/>
+                      </a:solidFill>
+                      <a:prstDash val="solid"/>
+                      <a:round/>
+                      <a:headEnd type="none" w="med" len="med"/>
+                      <a:tailEnd type="none" w="med" len="med"/>
+                    </a:lnL>
+                    <a:lnR w="9525" cap="flat" cmpd="sng" algn="ctr">
+                      <a:solidFill>
+                        <a:srgbClr val="BFBFBF"/>
+                      </a:solidFill>
+                      <a:prstDash val="solid"/>
+                      <a:round/>
+                      <a:headEnd type="none" w="med" len="med"/>
+                      <a:tailEnd type="none" w="med" len="med"/>
+                    </a:lnR>
+                    <a:lnT w="9525" cap="flat" cmpd="sng" algn="ctr">
+                      <a:solidFill>
+                        <a:srgbClr val="BFBFBF"/>
+                      </a:solidFill>
+                      <a:prstDash val="solid"/>
+                      <a:round/>
+                      <a:headEnd type="none" w="med" len="med"/>
+                      <a:tailEnd type="none" w="med" len="med"/>
+                    </a:lnT>
+                    <a:lnB w="9525" cap="flat" cmpd="sng" algn="ctr">
+                      <a:solidFill>
+                        <a:srgbClr val="BFBFBF"/>
+                      </a:solidFill>
+                      <a:prstDash val="solid"/>
+                      <a:round/>
+                      <a:headEnd type="none" w="med" len="med"/>
+                      <a:tailEnd type="none" w="med" len="med"/>
+                    </a:lnB>
+                    <a:solidFill>
+                      <a:srgbClr val="FFFFFF"/>
+                    </a:solidFill>
+                  </a:tcPr>
+                </a:tc>
+              </a:tr>
+              <a:tr h="196596">
+                <a:tc>
+                  <a:txBody>
+                    <a:bodyPr/>
+                    <a:lstStyle/>
+                    <a:p>
+                      <a:pPr algn="l" indent="0" marL="0">
+                        <a:buNone/>
+                      </a:pPr>
+                      <a:r>
+                        <a:rPr lang="en-US" sz="850" b="1" dirty="0">
+                          <a:solidFill>
+                            <a:srgbClr val="1A1A1A"/>
+                          </a:solidFill>
+                          <a:latin typeface="Yu Gothic" pitchFamily="34" charset="0"/>
+                          <a:ea typeface="Yu Gothic" pitchFamily="34" charset="-122"/>
+                          <a:cs typeface="Yu Gothic" pitchFamily="34" charset="-120"/>
+                        </a:rPr>
+                        <a:t>2月（約1か月）</a:t>
+                      </a:r>
+                      <a:endParaRPr lang="en-US" sz="850" dirty="0">
+                        <a:latin typeface="Yu Gothic" charset="0"/>
+                        <a:ea typeface="Yu Gothic" charset="0"/>
+                        <a:cs typeface="Yu Gothic" charset="0"/>
+                      </a:endParaRPr>
+                    </a:p>
+                  </a:txBody>
+                  <a:tcPr marL="91440" marR="91440" marT="18288" marB="18288" anchor="ctr">
+                    <a:lnL w="9525" cap="flat" cmpd="sng" algn="ctr">
+                      <a:solidFill>
+                        <a:srgbClr val="BFBFBF"/>
+                      </a:solidFill>
+                      <a:prstDash val="solid"/>
+                      <a:round/>
+                      <a:headEnd type="none" w="med" len="med"/>
+                      <a:tailEnd type="none" w="med" len="med"/>
+                    </a:lnL>
+                    <a:lnR w="9525" cap="flat" cmpd="sng" algn="ctr">
+                      <a:solidFill>
+                        <a:srgbClr val="BFBFBF"/>
+                      </a:solidFill>
+                      <a:prstDash val="solid"/>
+                      <a:round/>
+                      <a:headEnd type="none" w="med" len="med"/>
+                      <a:tailEnd type="none" w="med" len="med"/>
+                    </a:lnR>
+                    <a:lnT w="9525" cap="flat" cmpd="sng" algn="ctr">
+                      <a:solidFill>
+                        <a:srgbClr val="BFBFBF"/>
+                      </a:solidFill>
+                      <a:prstDash val="solid"/>
+                      <a:round/>
+                      <a:headEnd type="none" w="med" len="med"/>
+                      <a:tailEnd type="none" w="med" len="med"/>
+                    </a:lnT>
+                    <a:lnB w="9525" cap="flat" cmpd="sng" algn="ctr">
+                      <a:solidFill>
+                        <a:srgbClr val="BFBFBF"/>
                       </a:solidFill>
                       <a:prstDash val="solid"/>
                       <a:round/>
@@ -2698,13 +3969,13 @@
                       <a:r>
                         <a:rPr lang="en-US" sz="850" dirty="0">
                           <a:solidFill>
-                            <a:srgbClr val="4B5550"/>
+                            <a:srgbClr val="333333"/>
                           </a:solidFill>
                           <a:latin typeface="Yu Gothic" pitchFamily="34" charset="0"/>
                           <a:ea typeface="Yu Gothic" pitchFamily="34" charset="-122"/>
                           <a:cs typeface="Yu Gothic" pitchFamily="34" charset="-120"/>
                         </a:rPr>
-                        <a:t>館（イオンモール様）への工事申請</a:t>
+                        <a:t>内装工事、機器設置・試運転、什器搬入、回線開通の確認</a:t>
                       </a:r>
                       <a:endParaRPr lang="en-US" sz="850" dirty="0">
                         <a:latin typeface="Yu Gothic" charset="0"/>
@@ -2716,7 +3987,7 @@
                   <a:tcPr marL="91440" marR="91440" marT="18288" marB="18288" anchor="ctr">
                     <a:lnL w="9525" cap="flat" cmpd="sng" algn="ctr">
                       <a:solidFill>
-                        <a:srgbClr val="EFEAE0"/>
+                        <a:srgbClr val="BFBFBF"/>
                       </a:solidFill>
                       <a:prstDash val="solid"/>
                       <a:round/>
@@ -2725,7 +3996,7 @@
                     </a:lnL>
                     <a:lnR w="9525" cap="flat" cmpd="sng" algn="ctr">
                       <a:solidFill>
-                        <a:srgbClr val="EFEAE0"/>
+                        <a:srgbClr val="BFBFBF"/>
                       </a:solidFill>
                       <a:prstDash val="solid"/>
                       <a:round/>
@@ -2734,7 +4005,7 @@
                     </a:lnR>
                     <a:lnT w="9525" cap="flat" cmpd="sng" algn="ctr">
                       <a:solidFill>
-                        <a:srgbClr val="EFEAE0"/>
+                        <a:srgbClr val="BFBFBF"/>
                       </a:solidFill>
                       <a:prstDash val="solid"/>
                       <a:round/>
@@ -2743,7 +4014,7 @@
                     </a:lnT>
                     <a:lnB w="9525" cap="flat" cmpd="sng" algn="ctr">
                       <a:solidFill>
-                        <a:srgbClr val="EFEAE0"/>
+                        <a:srgbClr val="BFBFBF"/>
                       </a:solidFill>
                       <a:prstDash val="solid"/>
                       <a:round/>
@@ -2764,17 +4035,17 @@
                         <a:buNone/>
                       </a:pPr>
                       <a:r>
-                        <a:rPr lang="en-US" sz="800" b="1" dirty="0">
+                        <a:rPr lang="en-US" sz="850" b="1" dirty="0">
                           <a:solidFill>
-                            <a:srgbClr val="0A3D23"/>
+                            <a:srgbClr val="106838"/>
                           </a:solidFill>
                           <a:latin typeface="Yu Gothic" pitchFamily="34" charset="0"/>
                           <a:ea typeface="Yu Gothic" pitchFamily="34" charset="-122"/>
                           <a:cs typeface="Yu Gothic" pitchFamily="34" charset="-120"/>
                         </a:rPr>
-                        <a:t>両社</a:t>
+                        <a:t>弊社</a:t>
                       </a:r>
-                      <a:endParaRPr lang="en-US" sz="800" dirty="0">
+                      <a:endParaRPr lang="en-US" sz="850" dirty="0">
                         <a:latin typeface="Yu Gothic" charset="0"/>
                         <a:ea typeface="Yu Gothic" charset="0"/>
                         <a:cs typeface="Yu Gothic" charset="0"/>
@@ -2784,7 +4055,7 @@
                   <a:tcPr marL="91440" marR="91440" marT="18288" marB="18288" anchor="ctr">
                     <a:lnL w="9525" cap="flat" cmpd="sng" algn="ctr">
                       <a:solidFill>
-                        <a:srgbClr val="EFEAE0"/>
+                        <a:srgbClr val="BFBFBF"/>
                       </a:solidFill>
                       <a:prstDash val="solid"/>
                       <a:round/>
@@ -2793,7 +4064,7 @@
                     </a:lnL>
                     <a:lnR w="9525" cap="flat" cmpd="sng" algn="ctr">
                       <a:solidFill>
-                        <a:srgbClr val="EFEAE0"/>
+                        <a:srgbClr val="BFBFBF"/>
                       </a:solidFill>
                       <a:prstDash val="solid"/>
                       <a:round/>
@@ -2802,7 +4073,7 @@
                     </a:lnR>
                     <a:lnT w="9525" cap="flat" cmpd="sng" algn="ctr">
                       <a:solidFill>
-                        <a:srgbClr val="EFEAE0"/>
+                        <a:srgbClr val="BFBFBF"/>
                       </a:solidFill>
                       <a:prstDash val="solid"/>
                       <a:round/>
@@ -2811,7 +4082,7 @@
                     </a:lnT>
                     <a:lnB w="9525" cap="flat" cmpd="sng" algn="ctr">
                       <a:solidFill>
-                        <a:srgbClr val="EFEAE0"/>
+                        <a:srgbClr val="BFBFBF"/>
                       </a:solidFill>
                       <a:prstDash val="solid"/>
                       <a:round/>
@@ -2819,12 +4090,12 @@
                       <a:tailEnd type="none" w="med" len="med"/>
                     </a:lnB>
                     <a:solidFill>
-                      <a:srgbClr val="F4F2EE"/>
+                      <a:srgbClr val="FFFFFF"/>
                     </a:solidFill>
                   </a:tcPr>
                 </a:tc>
               </a:tr>
-              <a:tr h="224028">
+              <a:tr h="196596">
                 <a:tc>
                   <a:txBody>
                     <a:bodyPr/>
@@ -2836,831 +4107,7 @@
                       <a:r>
                         <a:rPr lang="en-US" sz="850" b="1" dirty="0">
                           <a:solidFill>
-                            <a:srgbClr val="A8761F"/>
-                          </a:solidFill>
-                          <a:latin typeface="Yu Gothic" pitchFamily="34" charset="0"/>
-                          <a:ea typeface="Yu Gothic" pitchFamily="34" charset="-122"/>
-                          <a:cs typeface="Yu Gothic" pitchFamily="34" charset="-120"/>
-                        </a:rPr>
-                        <a:t>12月上旬</a:t>
-                      </a:r>
-                      <a:endParaRPr lang="en-US" sz="850" dirty="0">
-                        <a:latin typeface="Yu Gothic" charset="0"/>
-                        <a:ea typeface="Yu Gothic" charset="0"/>
-                        <a:cs typeface="Yu Gothic" charset="0"/>
-                      </a:endParaRPr>
-                    </a:p>
-                  </a:txBody>
-                  <a:tcPr marL="91440" marR="91440" marT="18288" marB="18288" anchor="ctr">
-                    <a:lnL w="9525" cap="flat" cmpd="sng" algn="ctr">
-                      <a:solidFill>
-                        <a:srgbClr val="EFEAE0"/>
-                      </a:solidFill>
-                      <a:prstDash val="solid"/>
-                      <a:round/>
-                      <a:headEnd type="none" w="med" len="med"/>
-                      <a:tailEnd type="none" w="med" len="med"/>
-                    </a:lnL>
-                    <a:lnR w="9525" cap="flat" cmpd="sng" algn="ctr">
-                      <a:solidFill>
-                        <a:srgbClr val="EFEAE0"/>
-                      </a:solidFill>
-                      <a:prstDash val="solid"/>
-                      <a:round/>
-                      <a:headEnd type="none" w="med" len="med"/>
-                      <a:tailEnd type="none" w="med" len="med"/>
-                    </a:lnR>
-                    <a:lnT w="9525" cap="flat" cmpd="sng" algn="ctr">
-                      <a:solidFill>
-                        <a:srgbClr val="EFEAE0"/>
-                      </a:solidFill>
-                      <a:prstDash val="solid"/>
-                      <a:round/>
-                      <a:headEnd type="none" w="med" len="med"/>
-                      <a:tailEnd type="none" w="med" len="med"/>
-                    </a:lnT>
-                    <a:lnB w="9525" cap="flat" cmpd="sng" algn="ctr">
-                      <a:solidFill>
-                        <a:srgbClr val="EFEAE0"/>
-                      </a:solidFill>
-                      <a:prstDash val="solid"/>
-                      <a:round/>
-                      <a:headEnd type="none" w="med" len="med"/>
-                      <a:tailEnd type="none" w="med" len="med"/>
-                    </a:lnB>
-                    <a:solidFill>
-                      <a:srgbClr val="FFFFFF"/>
-                    </a:solidFill>
-                  </a:tcPr>
-                </a:tc>
-                <a:tc>
-                  <a:txBody>
-                    <a:bodyPr/>
-                    <a:lstStyle/>
-                    <a:p>
-                      <a:pPr algn="l" indent="0" marL="0">
-                        <a:buNone/>
-                      </a:pPr>
-                      <a:r>
-                        <a:rPr lang="en-US" sz="850" b="1" dirty="0">
-                          <a:solidFill>
-                            <a:srgbClr val="0A3D23"/>
-                          </a:solidFill>
-                          <a:latin typeface="Yu Gothic" pitchFamily="34" charset="0"/>
-                          <a:ea typeface="Yu Gothic" pitchFamily="34" charset="-122"/>
-                          <a:cs typeface="Yu Gothic" pitchFamily="34" charset="-120"/>
-                        </a:rPr>
-                        <a:t>ネット回線の新規お申込み（開通まで1〜2か月）</a:t>
-                      </a:r>
-                      <a:endParaRPr lang="en-US" sz="850" dirty="0">
-                        <a:latin typeface="Yu Gothic" charset="0"/>
-                        <a:ea typeface="Yu Gothic" charset="0"/>
-                        <a:cs typeface="Yu Gothic" charset="0"/>
-                      </a:endParaRPr>
-                    </a:p>
-                  </a:txBody>
-                  <a:tcPr marL="91440" marR="91440" marT="18288" marB="18288" anchor="ctr">
-                    <a:lnL w="9525" cap="flat" cmpd="sng" algn="ctr">
-                      <a:solidFill>
-                        <a:srgbClr val="EFEAE0"/>
-                      </a:solidFill>
-                      <a:prstDash val="solid"/>
-                      <a:round/>
-                      <a:headEnd type="none" w="med" len="med"/>
-                      <a:tailEnd type="none" w="med" len="med"/>
-                    </a:lnL>
-                    <a:lnR w="9525" cap="flat" cmpd="sng" algn="ctr">
-                      <a:solidFill>
-                        <a:srgbClr val="EFEAE0"/>
-                      </a:solidFill>
-                      <a:prstDash val="solid"/>
-                      <a:round/>
-                      <a:headEnd type="none" w="med" len="med"/>
-                      <a:tailEnd type="none" w="med" len="med"/>
-                    </a:lnR>
-                    <a:lnT w="9525" cap="flat" cmpd="sng" algn="ctr">
-                      <a:solidFill>
-                        <a:srgbClr val="EFEAE0"/>
-                      </a:solidFill>
-                      <a:prstDash val="solid"/>
-                      <a:round/>
-                      <a:headEnd type="none" w="med" len="med"/>
-                      <a:tailEnd type="none" w="med" len="med"/>
-                    </a:lnT>
-                    <a:lnB w="9525" cap="flat" cmpd="sng" algn="ctr">
-                      <a:solidFill>
-                        <a:srgbClr val="EFEAE0"/>
-                      </a:solidFill>
-                      <a:prstDash val="solid"/>
-                      <a:round/>
-                      <a:headEnd type="none" w="med" len="med"/>
-                      <a:tailEnd type="none" w="med" len="med"/>
-                    </a:lnB>
-                    <a:solidFill>
-                      <a:srgbClr val="FBF4E4"/>
-                    </a:solidFill>
-                  </a:tcPr>
-                </a:tc>
-                <a:tc>
-                  <a:txBody>
-                    <a:bodyPr/>
-                    <a:lstStyle/>
-                    <a:p>
-                      <a:pPr algn="ctr" indent="0" marL="0">
-                        <a:buNone/>
-                      </a:pPr>
-                      <a:r>
-                        <a:rPr lang="en-US" sz="800" b="1" dirty="0">
-                          <a:solidFill>
-                            <a:srgbClr val="A8761F"/>
-                          </a:solidFill>
-                          <a:latin typeface="Yu Gothic" pitchFamily="34" charset="0"/>
-                          <a:ea typeface="Yu Gothic" pitchFamily="34" charset="-122"/>
-                          <a:cs typeface="Yu Gothic" pitchFamily="34" charset="-120"/>
-                        </a:rPr>
-                        <a:t>未来屋書店様</a:t>
-                      </a:r>
-                      <a:endParaRPr lang="en-US" sz="800" dirty="0">
-                        <a:latin typeface="Yu Gothic" charset="0"/>
-                        <a:ea typeface="Yu Gothic" charset="0"/>
-                        <a:cs typeface="Yu Gothic" charset="0"/>
-                      </a:endParaRPr>
-                    </a:p>
-                  </a:txBody>
-                  <a:tcPr marL="91440" marR="91440" marT="18288" marB="18288" anchor="ctr">
-                    <a:lnL w="9525" cap="flat" cmpd="sng" algn="ctr">
-                      <a:solidFill>
-                        <a:srgbClr val="EFEAE0"/>
-                      </a:solidFill>
-                      <a:prstDash val="solid"/>
-                      <a:round/>
-                      <a:headEnd type="none" w="med" len="med"/>
-                      <a:tailEnd type="none" w="med" len="med"/>
-                    </a:lnL>
-                    <a:lnR w="9525" cap="flat" cmpd="sng" algn="ctr">
-                      <a:solidFill>
-                        <a:srgbClr val="EFEAE0"/>
-                      </a:solidFill>
-                      <a:prstDash val="solid"/>
-                      <a:round/>
-                      <a:headEnd type="none" w="med" len="med"/>
-                      <a:tailEnd type="none" w="med" len="med"/>
-                    </a:lnR>
-                    <a:lnT w="9525" cap="flat" cmpd="sng" algn="ctr">
-                      <a:solidFill>
-                        <a:srgbClr val="EFEAE0"/>
-                      </a:solidFill>
-                      <a:prstDash val="solid"/>
-                      <a:round/>
-                      <a:headEnd type="none" w="med" len="med"/>
-                      <a:tailEnd type="none" w="med" len="med"/>
-                    </a:lnT>
-                    <a:lnB w="9525" cap="flat" cmpd="sng" algn="ctr">
-                      <a:solidFill>
-                        <a:srgbClr val="EFEAE0"/>
-                      </a:solidFill>
-                      <a:prstDash val="solid"/>
-                      <a:round/>
-                      <a:headEnd type="none" w="med" len="med"/>
-                      <a:tailEnd type="none" w="med" len="med"/>
-                    </a:lnB>
-                    <a:solidFill>
-                      <a:srgbClr val="FBF4E4"/>
-                    </a:solidFill>
-                  </a:tcPr>
-                </a:tc>
-              </a:tr>
-              <a:tr h="224028">
-                <a:tc>
-                  <a:txBody>
-                    <a:bodyPr/>
-                    <a:lstStyle/>
-                    <a:p>
-                      <a:pPr algn="l" indent="0" marL="0">
-                        <a:buNone/>
-                      </a:pPr>
-                      <a:r>
-                        <a:rPr lang="en-US" sz="850" b="1" dirty="0">
-                          <a:solidFill>
-                            <a:srgbClr val="A8761F"/>
-                          </a:solidFill>
-                          <a:latin typeface="Yu Gothic" pitchFamily="34" charset="0"/>
-                          <a:ea typeface="Yu Gothic" pitchFamily="34" charset="-122"/>
-                          <a:cs typeface="Yu Gothic" pitchFamily="34" charset="-120"/>
-                        </a:rPr>
-                        <a:t>12月上旬</a:t>
-                      </a:r>
-                      <a:endParaRPr lang="en-US" sz="850" dirty="0">
-                        <a:latin typeface="Yu Gothic" charset="0"/>
-                        <a:ea typeface="Yu Gothic" charset="0"/>
-                        <a:cs typeface="Yu Gothic" charset="0"/>
-                      </a:endParaRPr>
-                    </a:p>
-                  </a:txBody>
-                  <a:tcPr marL="91440" marR="91440" marT="18288" marB="18288" anchor="ctr">
-                    <a:lnL w="9525" cap="flat" cmpd="sng" algn="ctr">
-                      <a:solidFill>
-                        <a:srgbClr val="EFEAE0"/>
-                      </a:solidFill>
-                      <a:prstDash val="solid"/>
-                      <a:round/>
-                      <a:headEnd type="none" w="med" len="med"/>
-                      <a:tailEnd type="none" w="med" len="med"/>
-                    </a:lnL>
-                    <a:lnR w="9525" cap="flat" cmpd="sng" algn="ctr">
-                      <a:solidFill>
-                        <a:srgbClr val="EFEAE0"/>
-                      </a:solidFill>
-                      <a:prstDash val="solid"/>
-                      <a:round/>
-                      <a:headEnd type="none" w="med" len="med"/>
-                      <a:tailEnd type="none" w="med" len="med"/>
-                    </a:lnR>
-                    <a:lnT w="9525" cap="flat" cmpd="sng" algn="ctr">
-                      <a:solidFill>
-                        <a:srgbClr val="EFEAE0"/>
-                      </a:solidFill>
-                      <a:prstDash val="solid"/>
-                      <a:round/>
-                      <a:headEnd type="none" w="med" len="med"/>
-                      <a:tailEnd type="none" w="med" len="med"/>
-                    </a:lnT>
-                    <a:lnB w="9525" cap="flat" cmpd="sng" algn="ctr">
-                      <a:solidFill>
-                        <a:srgbClr val="EFEAE0"/>
-                      </a:solidFill>
-                      <a:prstDash val="solid"/>
-                      <a:round/>
-                      <a:headEnd type="none" w="med" len="med"/>
-                      <a:tailEnd type="none" w="med" len="med"/>
-                    </a:lnB>
-                    <a:solidFill>
-                      <a:srgbClr val="FFFFFF"/>
-                    </a:solidFill>
-                  </a:tcPr>
-                </a:tc>
-                <a:tc>
-                  <a:txBody>
-                    <a:bodyPr/>
-                    <a:lstStyle/>
-                    <a:p>
-                      <a:pPr algn="l" indent="0" marL="0">
-                        <a:buNone/>
-                      </a:pPr>
-                      <a:r>
-                        <a:rPr lang="en-US" sz="850" b="1" dirty="0">
-                          <a:solidFill>
-                            <a:srgbClr val="0A3D23"/>
-                          </a:solidFill>
-                          <a:latin typeface="Yu Gothic" pitchFamily="34" charset="0"/>
-                          <a:ea typeface="Yu Gothic" pitchFamily="34" charset="-122"/>
-                          <a:cs typeface="Yu Gothic" pitchFamily="34" charset="-120"/>
-                        </a:rPr>
-                        <a:t>什器・機器の発注（リードタイム4〜6週間）</a:t>
-                      </a:r>
-                      <a:endParaRPr lang="en-US" sz="850" dirty="0">
-                        <a:latin typeface="Yu Gothic" charset="0"/>
-                        <a:ea typeface="Yu Gothic" charset="0"/>
-                        <a:cs typeface="Yu Gothic" charset="0"/>
-                      </a:endParaRPr>
-                    </a:p>
-                  </a:txBody>
-                  <a:tcPr marL="91440" marR="91440" marT="18288" marB="18288" anchor="ctr">
-                    <a:lnL w="9525" cap="flat" cmpd="sng" algn="ctr">
-                      <a:solidFill>
-                        <a:srgbClr val="EFEAE0"/>
-                      </a:solidFill>
-                      <a:prstDash val="solid"/>
-                      <a:round/>
-                      <a:headEnd type="none" w="med" len="med"/>
-                      <a:tailEnd type="none" w="med" len="med"/>
-                    </a:lnL>
-                    <a:lnR w="9525" cap="flat" cmpd="sng" algn="ctr">
-                      <a:solidFill>
-                        <a:srgbClr val="EFEAE0"/>
-                      </a:solidFill>
-                      <a:prstDash val="solid"/>
-                      <a:round/>
-                      <a:headEnd type="none" w="med" len="med"/>
-                      <a:tailEnd type="none" w="med" len="med"/>
-                    </a:lnR>
-                    <a:lnT w="9525" cap="flat" cmpd="sng" algn="ctr">
-                      <a:solidFill>
-                        <a:srgbClr val="EFEAE0"/>
-                      </a:solidFill>
-                      <a:prstDash val="solid"/>
-                      <a:round/>
-                      <a:headEnd type="none" w="med" len="med"/>
-                      <a:tailEnd type="none" w="med" len="med"/>
-                    </a:lnT>
-                    <a:lnB w="9525" cap="flat" cmpd="sng" algn="ctr">
-                      <a:solidFill>
-                        <a:srgbClr val="EFEAE0"/>
-                      </a:solidFill>
-                      <a:prstDash val="solid"/>
-                      <a:round/>
-                      <a:headEnd type="none" w="med" len="med"/>
-                      <a:tailEnd type="none" w="med" len="med"/>
-                    </a:lnB>
-                    <a:solidFill>
-                      <a:srgbClr val="FBF4E4"/>
-                    </a:solidFill>
-                  </a:tcPr>
-                </a:tc>
-                <a:tc>
-                  <a:txBody>
-                    <a:bodyPr/>
-                    <a:lstStyle/>
-                    <a:p>
-                      <a:pPr algn="ctr" indent="0" marL="0">
-                        <a:buNone/>
-                      </a:pPr>
-                      <a:r>
-                        <a:rPr lang="en-US" sz="800" b="1" dirty="0">
-                          <a:solidFill>
-                            <a:srgbClr val="106838"/>
-                          </a:solidFill>
-                          <a:latin typeface="Yu Gothic" pitchFamily="34" charset="0"/>
-                          <a:ea typeface="Yu Gothic" pitchFamily="34" charset="-122"/>
-                          <a:cs typeface="Yu Gothic" pitchFamily="34" charset="-120"/>
-                        </a:rPr>
-                        <a:t>セルフカフェ</a:t>
-                      </a:r>
-                      <a:endParaRPr lang="en-US" sz="800" dirty="0">
-                        <a:latin typeface="Yu Gothic" charset="0"/>
-                        <a:ea typeface="Yu Gothic" charset="0"/>
-                        <a:cs typeface="Yu Gothic" charset="0"/>
-                      </a:endParaRPr>
-                    </a:p>
-                  </a:txBody>
-                  <a:tcPr marL="91440" marR="91440" marT="18288" marB="18288" anchor="ctr">
-                    <a:lnL w="9525" cap="flat" cmpd="sng" algn="ctr">
-                      <a:solidFill>
-                        <a:srgbClr val="EFEAE0"/>
-                      </a:solidFill>
-                      <a:prstDash val="solid"/>
-                      <a:round/>
-                      <a:headEnd type="none" w="med" len="med"/>
-                      <a:tailEnd type="none" w="med" len="med"/>
-                    </a:lnL>
-                    <a:lnR w="9525" cap="flat" cmpd="sng" algn="ctr">
-                      <a:solidFill>
-                        <a:srgbClr val="EFEAE0"/>
-                      </a:solidFill>
-                      <a:prstDash val="solid"/>
-                      <a:round/>
-                      <a:headEnd type="none" w="med" len="med"/>
-                      <a:tailEnd type="none" w="med" len="med"/>
-                    </a:lnR>
-                    <a:lnT w="9525" cap="flat" cmpd="sng" algn="ctr">
-                      <a:solidFill>
-                        <a:srgbClr val="EFEAE0"/>
-                      </a:solidFill>
-                      <a:prstDash val="solid"/>
-                      <a:round/>
-                      <a:headEnd type="none" w="med" len="med"/>
-                      <a:tailEnd type="none" w="med" len="med"/>
-                    </a:lnT>
-                    <a:lnB w="9525" cap="flat" cmpd="sng" algn="ctr">
-                      <a:solidFill>
-                        <a:srgbClr val="EFEAE0"/>
-                      </a:solidFill>
-                      <a:prstDash val="solid"/>
-                      <a:round/>
-                      <a:headEnd type="none" w="med" len="med"/>
-                      <a:tailEnd type="none" w="med" len="med"/>
-                    </a:lnB>
-                    <a:solidFill>
-                      <a:srgbClr val="F1F8F3"/>
-                    </a:solidFill>
-                  </a:tcPr>
-                </a:tc>
-              </a:tr>
-              <a:tr h="224028">
-                <a:tc>
-                  <a:txBody>
-                    <a:bodyPr/>
-                    <a:lstStyle/>
-                    <a:p>
-                      <a:pPr algn="l" indent="0" marL="0">
-                        <a:buNone/>
-                      </a:pPr>
-                      <a:r>
-                        <a:rPr lang="en-US" sz="850" b="1" dirty="0">
-                          <a:solidFill>
-                            <a:srgbClr val="0A3D23"/>
-                          </a:solidFill>
-                          <a:latin typeface="Yu Gothic" pitchFamily="34" charset="0"/>
-                          <a:ea typeface="Yu Gothic" pitchFamily="34" charset="-122"/>
-                          <a:cs typeface="Yu Gothic" pitchFamily="34" charset="-120"/>
-                        </a:rPr>
-                        <a:t>1月末</a:t>
-                      </a:r>
-                      <a:endParaRPr lang="en-US" sz="850" dirty="0">
-                        <a:latin typeface="Yu Gothic" charset="0"/>
-                        <a:ea typeface="Yu Gothic" charset="0"/>
-                        <a:cs typeface="Yu Gothic" charset="0"/>
-                      </a:endParaRPr>
-                    </a:p>
-                  </a:txBody>
-                  <a:tcPr marL="91440" marR="91440" marT="18288" marB="18288" anchor="ctr">
-                    <a:lnL w="9525" cap="flat" cmpd="sng" algn="ctr">
-                      <a:solidFill>
-                        <a:srgbClr val="EFEAE0"/>
-                      </a:solidFill>
-                      <a:prstDash val="solid"/>
-                      <a:round/>
-                      <a:headEnd type="none" w="med" len="med"/>
-                      <a:tailEnd type="none" w="med" len="med"/>
-                    </a:lnL>
-                    <a:lnR w="9525" cap="flat" cmpd="sng" algn="ctr">
-                      <a:solidFill>
-                        <a:srgbClr val="EFEAE0"/>
-                      </a:solidFill>
-                      <a:prstDash val="solid"/>
-                      <a:round/>
-                      <a:headEnd type="none" w="med" len="med"/>
-                      <a:tailEnd type="none" w="med" len="med"/>
-                    </a:lnR>
-                    <a:lnT w="9525" cap="flat" cmpd="sng" algn="ctr">
-                      <a:solidFill>
-                        <a:srgbClr val="EFEAE0"/>
-                      </a:solidFill>
-                      <a:prstDash val="solid"/>
-                      <a:round/>
-                      <a:headEnd type="none" w="med" len="med"/>
-                      <a:tailEnd type="none" w="med" len="med"/>
-                    </a:lnT>
-                    <a:lnB w="9525" cap="flat" cmpd="sng" algn="ctr">
-                      <a:solidFill>
-                        <a:srgbClr val="EFEAE0"/>
-                      </a:solidFill>
-                      <a:prstDash val="solid"/>
-                      <a:round/>
-                      <a:headEnd type="none" w="med" len="med"/>
-                      <a:tailEnd type="none" w="med" len="med"/>
-                    </a:lnB>
-                    <a:solidFill>
-                      <a:srgbClr val="FFFFFF"/>
-                    </a:solidFill>
-                  </a:tcPr>
-                </a:tc>
-                <a:tc>
-                  <a:txBody>
-                    <a:bodyPr/>
-                    <a:lstStyle/>
-                    <a:p>
-                      <a:pPr algn="l" indent="0" marL="0">
-                        <a:buNone/>
-                      </a:pPr>
-                      <a:r>
-                        <a:rPr lang="en-US" sz="850" dirty="0">
-                          <a:solidFill>
-                            <a:srgbClr val="4B5550"/>
-                          </a:solidFill>
-                          <a:latin typeface="Yu Gothic" pitchFamily="34" charset="0"/>
-                          <a:ea typeface="Yu Gothic" pitchFamily="34" charset="-122"/>
-                          <a:cs typeface="Yu Gothic" pitchFamily="34" charset="-120"/>
-                        </a:rPr>
-                        <a:t>カフェ・ド・クリエ 閉店・退去（造作・床・設備は残置）</a:t>
-                      </a:r>
-                      <a:endParaRPr lang="en-US" sz="850" dirty="0">
-                        <a:latin typeface="Yu Gothic" charset="0"/>
-                        <a:ea typeface="Yu Gothic" charset="0"/>
-                        <a:cs typeface="Yu Gothic" charset="0"/>
-                      </a:endParaRPr>
-                    </a:p>
-                  </a:txBody>
-                  <a:tcPr marL="91440" marR="91440" marT="18288" marB="18288" anchor="ctr">
-                    <a:lnL w="9525" cap="flat" cmpd="sng" algn="ctr">
-                      <a:solidFill>
-                        <a:srgbClr val="EFEAE0"/>
-                      </a:solidFill>
-                      <a:prstDash val="solid"/>
-                      <a:round/>
-                      <a:headEnd type="none" w="med" len="med"/>
-                      <a:tailEnd type="none" w="med" len="med"/>
-                    </a:lnL>
-                    <a:lnR w="9525" cap="flat" cmpd="sng" algn="ctr">
-                      <a:solidFill>
-                        <a:srgbClr val="EFEAE0"/>
-                      </a:solidFill>
-                      <a:prstDash val="solid"/>
-                      <a:round/>
-                      <a:headEnd type="none" w="med" len="med"/>
-                      <a:tailEnd type="none" w="med" len="med"/>
-                    </a:lnR>
-                    <a:lnT w="9525" cap="flat" cmpd="sng" algn="ctr">
-                      <a:solidFill>
-                        <a:srgbClr val="EFEAE0"/>
-                      </a:solidFill>
-                      <a:prstDash val="solid"/>
-                      <a:round/>
-                      <a:headEnd type="none" w="med" len="med"/>
-                      <a:tailEnd type="none" w="med" len="med"/>
-                    </a:lnT>
-                    <a:lnB w="9525" cap="flat" cmpd="sng" algn="ctr">
-                      <a:solidFill>
-                        <a:srgbClr val="EFEAE0"/>
-                      </a:solidFill>
-                      <a:prstDash val="solid"/>
-                      <a:round/>
-                      <a:headEnd type="none" w="med" len="med"/>
-                      <a:tailEnd type="none" w="med" len="med"/>
-                    </a:lnB>
-                    <a:solidFill>
-                      <a:srgbClr val="FFFFFF"/>
-                    </a:solidFill>
-                  </a:tcPr>
-                </a:tc>
-                <a:tc>
-                  <a:txBody>
-                    <a:bodyPr/>
-                    <a:lstStyle/>
-                    <a:p>
-                      <a:pPr algn="ctr" indent="0" marL="0">
-                        <a:buNone/>
-                      </a:pPr>
-                      <a:r>
-                        <a:rPr lang="en-US" sz="800" b="1" dirty="0">
-                          <a:solidFill>
-                            <a:srgbClr val="A8761F"/>
-                          </a:solidFill>
-                          <a:latin typeface="Yu Gothic" pitchFamily="34" charset="0"/>
-                          <a:ea typeface="Yu Gothic" pitchFamily="34" charset="-122"/>
-                          <a:cs typeface="Yu Gothic" pitchFamily="34" charset="-120"/>
-                        </a:rPr>
-                        <a:t>未来屋書店様</a:t>
-                      </a:r>
-                      <a:endParaRPr lang="en-US" sz="800" dirty="0">
-                        <a:latin typeface="Yu Gothic" charset="0"/>
-                        <a:ea typeface="Yu Gothic" charset="0"/>
-                        <a:cs typeface="Yu Gothic" charset="0"/>
-                      </a:endParaRPr>
-                    </a:p>
-                  </a:txBody>
-                  <a:tcPr marL="91440" marR="91440" marT="18288" marB="18288" anchor="ctr">
-                    <a:lnL w="9525" cap="flat" cmpd="sng" algn="ctr">
-                      <a:solidFill>
-                        <a:srgbClr val="EFEAE0"/>
-                      </a:solidFill>
-                      <a:prstDash val="solid"/>
-                      <a:round/>
-                      <a:headEnd type="none" w="med" len="med"/>
-                      <a:tailEnd type="none" w="med" len="med"/>
-                    </a:lnL>
-                    <a:lnR w="9525" cap="flat" cmpd="sng" algn="ctr">
-                      <a:solidFill>
-                        <a:srgbClr val="EFEAE0"/>
-                      </a:solidFill>
-                      <a:prstDash val="solid"/>
-                      <a:round/>
-                      <a:headEnd type="none" w="med" len="med"/>
-                      <a:tailEnd type="none" w="med" len="med"/>
-                    </a:lnR>
-                    <a:lnT w="9525" cap="flat" cmpd="sng" algn="ctr">
-                      <a:solidFill>
-                        <a:srgbClr val="EFEAE0"/>
-                      </a:solidFill>
-                      <a:prstDash val="solid"/>
-                      <a:round/>
-                      <a:headEnd type="none" w="med" len="med"/>
-                      <a:tailEnd type="none" w="med" len="med"/>
-                    </a:lnT>
-                    <a:lnB w="9525" cap="flat" cmpd="sng" algn="ctr">
-                      <a:solidFill>
-                        <a:srgbClr val="EFEAE0"/>
-                      </a:solidFill>
-                      <a:prstDash val="solid"/>
-                      <a:round/>
-                      <a:headEnd type="none" w="med" len="med"/>
-                      <a:tailEnd type="none" w="med" len="med"/>
-                    </a:lnB>
-                    <a:solidFill>
-                      <a:srgbClr val="FBF4E4"/>
-                    </a:solidFill>
-                  </a:tcPr>
-                </a:tc>
-              </a:tr>
-              <a:tr h="224028">
-                <a:tc>
-                  <a:txBody>
-                    <a:bodyPr/>
-                    <a:lstStyle/>
-                    <a:p>
-                      <a:pPr algn="l" indent="0" marL="0">
-                        <a:buNone/>
-                      </a:pPr>
-                      <a:r>
-                        <a:rPr lang="en-US" sz="850" b="1" dirty="0">
-                          <a:solidFill>
-                            <a:srgbClr val="A8761F"/>
-                          </a:solidFill>
-                          <a:latin typeface="Yu Gothic" pitchFamily="34" charset="0"/>
-                          <a:ea typeface="Yu Gothic" pitchFamily="34" charset="-122"/>
-                          <a:cs typeface="Yu Gothic" pitchFamily="34" charset="-120"/>
-                        </a:rPr>
-                        <a:t>2月（約1か月）</a:t>
-                      </a:r>
-                      <a:endParaRPr lang="en-US" sz="850" dirty="0">
-                        <a:latin typeface="Yu Gothic" charset="0"/>
-                        <a:ea typeface="Yu Gothic" charset="0"/>
-                        <a:cs typeface="Yu Gothic" charset="0"/>
-                      </a:endParaRPr>
-                    </a:p>
-                  </a:txBody>
-                  <a:tcPr marL="91440" marR="91440" marT="18288" marB="18288" anchor="ctr">
-                    <a:lnL w="9525" cap="flat" cmpd="sng" algn="ctr">
-                      <a:solidFill>
-                        <a:srgbClr val="EFEAE0"/>
-                      </a:solidFill>
-                      <a:prstDash val="solid"/>
-                      <a:round/>
-                      <a:headEnd type="none" w="med" len="med"/>
-                      <a:tailEnd type="none" w="med" len="med"/>
-                    </a:lnL>
-                    <a:lnR w="9525" cap="flat" cmpd="sng" algn="ctr">
-                      <a:solidFill>
-                        <a:srgbClr val="EFEAE0"/>
-                      </a:solidFill>
-                      <a:prstDash val="solid"/>
-                      <a:round/>
-                      <a:headEnd type="none" w="med" len="med"/>
-                      <a:tailEnd type="none" w="med" len="med"/>
-                    </a:lnR>
-                    <a:lnT w="9525" cap="flat" cmpd="sng" algn="ctr">
-                      <a:solidFill>
-                        <a:srgbClr val="EFEAE0"/>
-                      </a:solidFill>
-                      <a:prstDash val="solid"/>
-                      <a:round/>
-                      <a:headEnd type="none" w="med" len="med"/>
-                      <a:tailEnd type="none" w="med" len="med"/>
-                    </a:lnT>
-                    <a:lnB w="9525" cap="flat" cmpd="sng" algn="ctr">
-                      <a:solidFill>
-                        <a:srgbClr val="EFEAE0"/>
-                      </a:solidFill>
-                      <a:prstDash val="solid"/>
-                      <a:round/>
-                      <a:headEnd type="none" w="med" len="med"/>
-                      <a:tailEnd type="none" w="med" len="med"/>
-                    </a:lnB>
-                    <a:solidFill>
-                      <a:srgbClr val="FFFFFF"/>
-                    </a:solidFill>
-                  </a:tcPr>
-                </a:tc>
-                <a:tc>
-                  <a:txBody>
-                    <a:bodyPr/>
-                    <a:lstStyle/>
-                    <a:p>
-                      <a:pPr algn="l" indent="0" marL="0">
-                        <a:buNone/>
-                      </a:pPr>
-                      <a:r>
-                        <a:rPr lang="en-US" sz="850" b="1" dirty="0">
-                          <a:solidFill>
-                            <a:srgbClr val="0A3D23"/>
-                          </a:solidFill>
-                          <a:latin typeface="Yu Gothic" pitchFamily="34" charset="0"/>
-                          <a:ea typeface="Yu Gothic" pitchFamily="34" charset="-122"/>
-                          <a:cs typeface="Yu Gothic" pitchFamily="34" charset="-120"/>
-                        </a:rPr>
-                        <a:t>内装工事 → 機器設置・試運転 → 什器搬入／回線開通の確認</a:t>
-                      </a:r>
-                      <a:endParaRPr lang="en-US" sz="850" dirty="0">
-                        <a:latin typeface="Yu Gothic" charset="0"/>
-                        <a:ea typeface="Yu Gothic" charset="0"/>
-                        <a:cs typeface="Yu Gothic" charset="0"/>
-                      </a:endParaRPr>
-                    </a:p>
-                  </a:txBody>
-                  <a:tcPr marL="91440" marR="91440" marT="18288" marB="18288" anchor="ctr">
-                    <a:lnL w="9525" cap="flat" cmpd="sng" algn="ctr">
-                      <a:solidFill>
-                        <a:srgbClr val="EFEAE0"/>
-                      </a:solidFill>
-                      <a:prstDash val="solid"/>
-                      <a:round/>
-                      <a:headEnd type="none" w="med" len="med"/>
-                      <a:tailEnd type="none" w="med" len="med"/>
-                    </a:lnL>
-                    <a:lnR w="9525" cap="flat" cmpd="sng" algn="ctr">
-                      <a:solidFill>
-                        <a:srgbClr val="EFEAE0"/>
-                      </a:solidFill>
-                      <a:prstDash val="solid"/>
-                      <a:round/>
-                      <a:headEnd type="none" w="med" len="med"/>
-                      <a:tailEnd type="none" w="med" len="med"/>
-                    </a:lnR>
-                    <a:lnT w="9525" cap="flat" cmpd="sng" algn="ctr">
-                      <a:solidFill>
-                        <a:srgbClr val="EFEAE0"/>
-                      </a:solidFill>
-                      <a:prstDash val="solid"/>
-                      <a:round/>
-                      <a:headEnd type="none" w="med" len="med"/>
-                      <a:tailEnd type="none" w="med" len="med"/>
-                    </a:lnT>
-                    <a:lnB w="9525" cap="flat" cmpd="sng" algn="ctr">
-                      <a:solidFill>
-                        <a:srgbClr val="EFEAE0"/>
-                      </a:solidFill>
-                      <a:prstDash val="solid"/>
-                      <a:round/>
-                      <a:headEnd type="none" w="med" len="med"/>
-                      <a:tailEnd type="none" w="med" len="med"/>
-                    </a:lnB>
-                    <a:solidFill>
-                      <a:srgbClr val="FBF4E4"/>
-                    </a:solidFill>
-                  </a:tcPr>
-                </a:tc>
-                <a:tc>
-                  <a:txBody>
-                    <a:bodyPr/>
-                    <a:lstStyle/>
-                    <a:p>
-                      <a:pPr algn="ctr" indent="0" marL="0">
-                        <a:buNone/>
-                      </a:pPr>
-                      <a:r>
-                        <a:rPr lang="en-US" sz="800" b="1" dirty="0">
-                          <a:solidFill>
-                            <a:srgbClr val="106838"/>
-                          </a:solidFill>
-                          <a:latin typeface="Yu Gothic" pitchFamily="34" charset="0"/>
-                          <a:ea typeface="Yu Gothic" pitchFamily="34" charset="-122"/>
-                          <a:cs typeface="Yu Gothic" pitchFamily="34" charset="-120"/>
-                        </a:rPr>
-                        <a:t>セルフカフェ</a:t>
-                      </a:r>
-                      <a:endParaRPr lang="en-US" sz="800" dirty="0">
-                        <a:latin typeface="Yu Gothic" charset="0"/>
-                        <a:ea typeface="Yu Gothic" charset="0"/>
-                        <a:cs typeface="Yu Gothic" charset="0"/>
-                      </a:endParaRPr>
-                    </a:p>
-                  </a:txBody>
-                  <a:tcPr marL="91440" marR="91440" marT="18288" marB="18288" anchor="ctr">
-                    <a:lnL w="9525" cap="flat" cmpd="sng" algn="ctr">
-                      <a:solidFill>
-                        <a:srgbClr val="EFEAE0"/>
-                      </a:solidFill>
-                      <a:prstDash val="solid"/>
-                      <a:round/>
-                      <a:headEnd type="none" w="med" len="med"/>
-                      <a:tailEnd type="none" w="med" len="med"/>
-                    </a:lnL>
-                    <a:lnR w="9525" cap="flat" cmpd="sng" algn="ctr">
-                      <a:solidFill>
-                        <a:srgbClr val="EFEAE0"/>
-                      </a:solidFill>
-                      <a:prstDash val="solid"/>
-                      <a:round/>
-                      <a:headEnd type="none" w="med" len="med"/>
-                      <a:tailEnd type="none" w="med" len="med"/>
-                    </a:lnR>
-                    <a:lnT w="9525" cap="flat" cmpd="sng" algn="ctr">
-                      <a:solidFill>
-                        <a:srgbClr val="EFEAE0"/>
-                      </a:solidFill>
-                      <a:prstDash val="solid"/>
-                      <a:round/>
-                      <a:headEnd type="none" w="med" len="med"/>
-                      <a:tailEnd type="none" w="med" len="med"/>
-                    </a:lnT>
-                    <a:lnB w="9525" cap="flat" cmpd="sng" algn="ctr">
-                      <a:solidFill>
-                        <a:srgbClr val="EFEAE0"/>
-                      </a:solidFill>
-                      <a:prstDash val="solid"/>
-                      <a:round/>
-                      <a:headEnd type="none" w="med" len="med"/>
-                      <a:tailEnd type="none" w="med" len="med"/>
-                    </a:lnB>
-                    <a:solidFill>
-                      <a:srgbClr val="F1F8F3"/>
-                    </a:solidFill>
-                  </a:tcPr>
-                </a:tc>
-              </a:tr>
-              <a:tr h="224028">
-                <a:tc>
-                  <a:txBody>
-                    <a:bodyPr/>
-                    <a:lstStyle/>
-                    <a:p>
-                      <a:pPr algn="l" indent="0" marL="0">
-                        <a:buNone/>
-                      </a:pPr>
-                      <a:r>
-                        <a:rPr lang="en-US" sz="850" b="1" dirty="0">
-                          <a:solidFill>
-                            <a:srgbClr val="0A3D23"/>
+                            <a:srgbClr val="1A1A1A"/>
                           </a:solidFill>
                           <a:latin typeface="Yu Gothic" pitchFamily="34" charset="0"/>
                           <a:ea typeface="Yu Gothic" pitchFamily="34" charset="-122"/>
@@ -3678,7 +4125,7 @@
                   <a:tcPr marL="91440" marR="91440" marT="18288" marB="18288" anchor="ctr">
                     <a:lnL w="9525" cap="flat" cmpd="sng" algn="ctr">
                       <a:solidFill>
-                        <a:srgbClr val="EFEAE0"/>
+                        <a:srgbClr val="BFBFBF"/>
                       </a:solidFill>
                       <a:prstDash val="solid"/>
                       <a:round/>
@@ -3687,7 +4134,7 @@
                     </a:lnL>
                     <a:lnR w="9525" cap="flat" cmpd="sng" algn="ctr">
                       <a:solidFill>
-                        <a:srgbClr val="EFEAE0"/>
+                        <a:srgbClr val="BFBFBF"/>
                       </a:solidFill>
                       <a:prstDash val="solid"/>
                       <a:round/>
@@ -3696,7 +4143,7 @@
                     </a:lnR>
                     <a:lnT w="9525" cap="flat" cmpd="sng" algn="ctr">
                       <a:solidFill>
-                        <a:srgbClr val="EFEAE0"/>
+                        <a:srgbClr val="BFBFBF"/>
                       </a:solidFill>
                       <a:prstDash val="solid"/>
                       <a:round/>
@@ -3705,7 +4152,7 @@
                     </a:lnT>
                     <a:lnB w="9525" cap="flat" cmpd="sng" algn="ctr">
                       <a:solidFill>
-                        <a:srgbClr val="EFEAE0"/>
+                        <a:srgbClr val="BFBFBF"/>
                       </a:solidFill>
                       <a:prstDash val="solid"/>
                       <a:round/>
@@ -3713,7 +4160,7 @@
                       <a:tailEnd type="none" w="med" len="med"/>
                     </a:lnB>
                     <a:solidFill>
-                      <a:srgbClr val="FFFFFF"/>
+                      <a:srgbClr val="F7F7F7"/>
                     </a:solidFill>
                   </a:tcPr>
                 </a:tc>
@@ -3728,13 +4175,13 @@
                       <a:r>
                         <a:rPr lang="en-US" sz="850" dirty="0">
                           <a:solidFill>
-                            <a:srgbClr val="4B5550"/>
+                            <a:srgbClr val="333333"/>
                           </a:solidFill>
                           <a:latin typeface="Yu Gothic" pitchFamily="34" charset="0"/>
                           <a:ea typeface="Yu Gothic" pitchFamily="34" charset="-122"/>
                           <a:cs typeface="Yu Gothic" pitchFamily="34" charset="-120"/>
                         </a:rPr>
-                        <a:t>オープン準備・研修</a:t>
+                        <a:t>開業準備・研修</a:t>
                       </a:r>
                       <a:endParaRPr lang="en-US" sz="850" dirty="0">
                         <a:latin typeface="Yu Gothic" charset="0"/>
@@ -3746,7 +4193,7 @@
                   <a:tcPr marL="91440" marR="91440" marT="18288" marB="18288" anchor="ctr">
                     <a:lnL w="9525" cap="flat" cmpd="sng" algn="ctr">
                       <a:solidFill>
-                        <a:srgbClr val="EFEAE0"/>
+                        <a:srgbClr val="BFBFBF"/>
                       </a:solidFill>
                       <a:prstDash val="solid"/>
                       <a:round/>
@@ -3755,7 +4202,7 @@
                     </a:lnL>
                     <a:lnR w="9525" cap="flat" cmpd="sng" algn="ctr">
                       <a:solidFill>
-                        <a:srgbClr val="EFEAE0"/>
+                        <a:srgbClr val="BFBFBF"/>
                       </a:solidFill>
                       <a:prstDash val="solid"/>
                       <a:round/>
@@ -3764,7 +4211,7 @@
                     </a:lnR>
                     <a:lnT w="9525" cap="flat" cmpd="sng" algn="ctr">
                       <a:solidFill>
-                        <a:srgbClr val="EFEAE0"/>
+                        <a:srgbClr val="BFBFBF"/>
                       </a:solidFill>
                       <a:prstDash val="solid"/>
                       <a:round/>
@@ -3773,7 +4220,7 @@
                     </a:lnT>
                     <a:lnB w="9525" cap="flat" cmpd="sng" algn="ctr">
                       <a:solidFill>
-                        <a:srgbClr val="EFEAE0"/>
+                        <a:srgbClr val="BFBFBF"/>
                       </a:solidFill>
                       <a:prstDash val="solid"/>
                       <a:round/>
@@ -3781,7 +4228,7 @@
                       <a:tailEnd type="none" w="med" len="med"/>
                     </a:lnB>
                     <a:solidFill>
-                      <a:srgbClr val="FFFFFF"/>
+                      <a:srgbClr val="F7F7F7"/>
                     </a:solidFill>
                   </a:tcPr>
                 </a:tc>
@@ -3794,85 +4241,15 @@
                         <a:buNone/>
                       </a:pPr>
                       <a:r>
-                        <a:rPr lang="en-US" sz="800" b="1" dirty="0">
+                        <a:rPr lang="en-US" sz="850" b="1" dirty="0">
                           <a:solidFill>
-                            <a:srgbClr val="0A3D23"/>
+                            <a:srgbClr val="6B6B6B"/>
                           </a:solidFill>
                           <a:latin typeface="Yu Gothic" pitchFamily="34" charset="0"/>
                           <a:ea typeface="Yu Gothic" pitchFamily="34" charset="-122"/>
                           <a:cs typeface="Yu Gothic" pitchFamily="34" charset="-120"/>
                         </a:rPr>
                         <a:t>両社</a:t>
-                      </a:r>
-                      <a:endParaRPr lang="en-US" sz="800" dirty="0">
-                        <a:latin typeface="Yu Gothic" charset="0"/>
-                        <a:ea typeface="Yu Gothic" charset="0"/>
-                        <a:cs typeface="Yu Gothic" charset="0"/>
-                      </a:endParaRPr>
-                    </a:p>
-                  </a:txBody>
-                  <a:tcPr marL="91440" marR="91440" marT="18288" marB="18288" anchor="ctr">
-                    <a:lnL w="9525" cap="flat" cmpd="sng" algn="ctr">
-                      <a:solidFill>
-                        <a:srgbClr val="EFEAE0"/>
-                      </a:solidFill>
-                      <a:prstDash val="solid"/>
-                      <a:round/>
-                      <a:headEnd type="none" w="med" len="med"/>
-                      <a:tailEnd type="none" w="med" len="med"/>
-                    </a:lnL>
-                    <a:lnR w="9525" cap="flat" cmpd="sng" algn="ctr">
-                      <a:solidFill>
-                        <a:srgbClr val="EFEAE0"/>
-                      </a:solidFill>
-                      <a:prstDash val="solid"/>
-                      <a:round/>
-                      <a:headEnd type="none" w="med" len="med"/>
-                      <a:tailEnd type="none" w="med" len="med"/>
-                    </a:lnR>
-                    <a:lnT w="9525" cap="flat" cmpd="sng" algn="ctr">
-                      <a:solidFill>
-                        <a:srgbClr val="EFEAE0"/>
-                      </a:solidFill>
-                      <a:prstDash val="solid"/>
-                      <a:round/>
-                      <a:headEnd type="none" w="med" len="med"/>
-                      <a:tailEnd type="none" w="med" len="med"/>
-                    </a:lnT>
-                    <a:lnB w="9525" cap="flat" cmpd="sng" algn="ctr">
-                      <a:solidFill>
-                        <a:srgbClr val="EFEAE0"/>
-                      </a:solidFill>
-                      <a:prstDash val="solid"/>
-                      <a:round/>
-                      <a:headEnd type="none" w="med" len="med"/>
-                      <a:tailEnd type="none" w="med" len="med"/>
-                    </a:lnB>
-                    <a:solidFill>
-                      <a:srgbClr val="F4F2EE"/>
-                    </a:solidFill>
-                  </a:tcPr>
-                </a:tc>
-              </a:tr>
-              <a:tr h="265176">
-                <a:tc>
-                  <a:txBody>
-                    <a:bodyPr/>
-                    <a:lstStyle/>
-                    <a:p>
-                      <a:pPr algn="l" indent="0" marL="0">
-                        <a:buNone/>
-                      </a:pPr>
-                      <a:r>
-                        <a:rPr lang="en-US" sz="850" b="1" dirty="0">
-                          <a:solidFill>
-                            <a:srgbClr val="A8761F"/>
-                          </a:solidFill>
-                          <a:latin typeface="Yu Gothic" pitchFamily="34" charset="0"/>
-                          <a:ea typeface="Yu Gothic" pitchFamily="34" charset="-122"/>
-                          <a:cs typeface="Yu Gothic" pitchFamily="34" charset="-120"/>
-                        </a:rPr>
-                        <a:t>2月末</a:t>
                       </a:r>
                       <a:endParaRPr lang="en-US" sz="850" dirty="0">
                         <a:latin typeface="Yu Gothic" charset="0"/>
@@ -3884,7 +4261,7 @@
                   <a:tcPr marL="91440" marR="91440" marT="18288" marB="18288" anchor="ctr">
                     <a:lnL w="9525" cap="flat" cmpd="sng" algn="ctr">
                       <a:solidFill>
-                        <a:srgbClr val="EFEAE0"/>
+                        <a:srgbClr val="BFBFBF"/>
                       </a:solidFill>
                       <a:prstDash val="solid"/>
                       <a:round/>
@@ -3893,7 +4270,7 @@
                     </a:lnL>
                     <a:lnR w="9525" cap="flat" cmpd="sng" algn="ctr">
                       <a:solidFill>
-                        <a:srgbClr val="EFEAE0"/>
+                        <a:srgbClr val="BFBFBF"/>
                       </a:solidFill>
                       <a:prstDash val="solid"/>
                       <a:round/>
@@ -3902,7 +4279,7 @@
                     </a:lnR>
                     <a:lnT w="9525" cap="flat" cmpd="sng" algn="ctr">
                       <a:solidFill>
-                        <a:srgbClr val="EFEAE0"/>
+                        <a:srgbClr val="BFBFBF"/>
                       </a:solidFill>
                       <a:prstDash val="solid"/>
                       <a:round/>
@@ -3911,7 +4288,7 @@
                     </a:lnT>
                     <a:lnB w="9525" cap="flat" cmpd="sng" algn="ctr">
                       <a:solidFill>
-                        <a:srgbClr val="EFEAE0"/>
+                        <a:srgbClr val="BFBFBF"/>
                       </a:solidFill>
                       <a:prstDash val="solid"/>
                       <a:round/>
@@ -3919,7 +4296,77 @@
                       <a:tailEnd type="none" w="med" len="med"/>
                     </a:lnB>
                     <a:solidFill>
-                      <a:srgbClr val="FBF4E4"/>
+                      <a:srgbClr val="FFFFFF"/>
+                    </a:solidFill>
+                  </a:tcPr>
+                </a:tc>
+              </a:tr>
+              <a:tr h="228600">
+                <a:tc>
+                  <a:txBody>
+                    <a:bodyPr/>
+                    <a:lstStyle/>
+                    <a:p>
+                      <a:pPr algn="l" indent="0" marL="0">
+                        <a:buNone/>
+                      </a:pPr>
+                      <a:r>
+                        <a:rPr lang="en-US" sz="950" b="1" dirty="0">
+                          <a:solidFill>
+                            <a:srgbClr val="106838"/>
+                          </a:solidFill>
+                          <a:latin typeface="Yu Gothic" pitchFamily="34" charset="0"/>
+                          <a:ea typeface="Yu Gothic" pitchFamily="34" charset="-122"/>
+                          <a:cs typeface="Yu Gothic" pitchFamily="34" charset="-120"/>
+                        </a:rPr>
+                        <a:t>3月上旬</a:t>
+                      </a:r>
+                      <a:endParaRPr lang="en-US" sz="950" dirty="0">
+                        <a:latin typeface="Yu Gothic" charset="0"/>
+                        <a:ea typeface="Yu Gothic" charset="0"/>
+                        <a:cs typeface="Yu Gothic" charset="0"/>
+                      </a:endParaRPr>
+                    </a:p>
+                  </a:txBody>
+                  <a:tcPr marL="91440" marR="91440" marT="18288" marB="18288" anchor="ctr">
+                    <a:lnL w="9525" cap="flat" cmpd="sng" algn="ctr">
+                      <a:solidFill>
+                        <a:srgbClr val="BFBFBF"/>
+                      </a:solidFill>
+                      <a:prstDash val="solid"/>
+                      <a:round/>
+                      <a:headEnd type="none" w="med" len="med"/>
+                      <a:tailEnd type="none" w="med" len="med"/>
+                    </a:lnL>
+                    <a:lnR w="9525" cap="flat" cmpd="sng" algn="ctr">
+                      <a:solidFill>
+                        <a:srgbClr val="BFBFBF"/>
+                      </a:solidFill>
+                      <a:prstDash val="solid"/>
+                      <a:round/>
+                      <a:headEnd type="none" w="med" len="med"/>
+                      <a:tailEnd type="none" w="med" len="med"/>
+                    </a:lnR>
+                    <a:lnT w="9525" cap="flat" cmpd="sng" algn="ctr">
+                      <a:solidFill>
+                        <a:srgbClr val="BFBFBF"/>
+                      </a:solidFill>
+                      <a:prstDash val="solid"/>
+                      <a:round/>
+                      <a:headEnd type="none" w="med" len="med"/>
+                      <a:tailEnd type="none" w="med" len="med"/>
+                    </a:lnT>
+                    <a:lnB w="9525" cap="flat" cmpd="sng" algn="ctr">
+                      <a:solidFill>
+                        <a:srgbClr val="BFBFBF"/>
+                      </a:solidFill>
+                      <a:prstDash val="solid"/>
+                      <a:round/>
+                      <a:headEnd type="none" w="med" len="med"/>
+                      <a:tailEnd type="none" w="med" len="med"/>
+                    </a:lnB>
+                    <a:solidFill>
+                      <a:srgbClr val="EFF5F1"/>
                     </a:solidFill>
                   </a:tcPr>
                 </a:tc>
@@ -3932,17 +4379,17 @@
                         <a:buNone/>
                       </a:pPr>
                       <a:r>
-                        <a:rPr lang="en-US" sz="1000" b="1" dirty="0">
+                        <a:rPr lang="en-US" sz="950" b="1" dirty="0">
                           <a:solidFill>
-                            <a:srgbClr val="A8761F"/>
+                            <a:srgbClr val="106838"/>
                           </a:solidFill>
                           <a:latin typeface="Yu Gothic" pitchFamily="34" charset="0"/>
                           <a:ea typeface="Yu Gothic" pitchFamily="34" charset="-122"/>
                           <a:cs typeface="Yu Gothic" pitchFamily="34" charset="-120"/>
                         </a:rPr>
-                        <a:t>オープン</a:t>
+                        <a:t>開業</a:t>
                       </a:r>
-                      <a:endParaRPr lang="en-US" sz="1000" dirty="0">
+                      <a:endParaRPr lang="en-US" sz="950" dirty="0">
                         <a:latin typeface="Yu Gothic" charset="0"/>
                         <a:ea typeface="Yu Gothic" charset="0"/>
                         <a:cs typeface="Yu Gothic" charset="0"/>
@@ -3952,7 +4399,7 @@
                   <a:tcPr marL="91440" marR="91440" marT="18288" marB="18288" anchor="ctr">
                     <a:lnL w="9525" cap="flat" cmpd="sng" algn="ctr">
                       <a:solidFill>
-                        <a:srgbClr val="EFEAE0"/>
+                        <a:srgbClr val="BFBFBF"/>
                       </a:solidFill>
                       <a:prstDash val="solid"/>
                       <a:round/>
@@ -3961,7 +4408,7 @@
                     </a:lnL>
                     <a:lnR w="9525" cap="flat" cmpd="sng" algn="ctr">
                       <a:solidFill>
-                        <a:srgbClr val="EFEAE0"/>
+                        <a:srgbClr val="BFBFBF"/>
                       </a:solidFill>
                       <a:prstDash val="solid"/>
                       <a:round/>
@@ -3970,7 +4417,7 @@
                     </a:lnR>
                     <a:lnT w="9525" cap="flat" cmpd="sng" algn="ctr">
                       <a:solidFill>
-                        <a:srgbClr val="EFEAE0"/>
+                        <a:srgbClr val="BFBFBF"/>
                       </a:solidFill>
                       <a:prstDash val="solid"/>
                       <a:round/>
@@ -3979,7 +4426,7 @@
                     </a:lnT>
                     <a:lnB w="9525" cap="flat" cmpd="sng" algn="ctr">
                       <a:solidFill>
-                        <a:srgbClr val="EFEAE0"/>
+                        <a:srgbClr val="BFBFBF"/>
                       </a:solidFill>
                       <a:prstDash val="solid"/>
                       <a:round/>
@@ -3987,7 +4434,7 @@
                       <a:tailEnd type="none" w="med" len="med"/>
                     </a:lnB>
                     <a:solidFill>
-                      <a:srgbClr val="FBF4E4"/>
+                      <a:srgbClr val="EFF5F1"/>
                     </a:solidFill>
                   </a:tcPr>
                 </a:tc>
@@ -4002,25 +4449,25 @@
                       <a:r>
                         <a:rPr lang="en-US" sz="850" dirty="0">
                           <a:solidFill>
-                            <a:srgbClr val="4B5550"/>
+                            <a:srgbClr val="6B6B6B"/>
                           </a:solidFill>
-                          <a:latin typeface="Yu Gothic" pitchFamily="34" charset="0"/>
-                          <a:ea typeface="Yu Gothic" pitchFamily="34" charset="-122"/>
-                          <a:cs typeface="Yu Gothic" pitchFamily="34" charset="-120"/>
+                          <a:latin typeface="Arial" pitchFamily="34" charset="0"/>
+                          <a:ea typeface="Arial" pitchFamily="34" charset="-122"/>
+                          <a:cs typeface="Arial" pitchFamily="34" charset="-120"/>
                         </a:rPr>
                         <a:t>—</a:t>
                       </a:r>
                       <a:endParaRPr lang="en-US" sz="850" dirty="0">
-                        <a:latin typeface="Yu Gothic" charset="0"/>
-                        <a:ea typeface="Yu Gothic" charset="0"/>
-                        <a:cs typeface="Yu Gothic" charset="0"/>
+                        <a:latin typeface="Arial" charset="0"/>
+                        <a:ea typeface="Arial" charset="0"/>
+                        <a:cs typeface="Arial" charset="0"/>
                       </a:endParaRPr>
                     </a:p>
                   </a:txBody>
                   <a:tcPr marL="91440" marR="91440" marT="18288" marB="18288" anchor="ctr">
                     <a:lnL w="9525" cap="flat" cmpd="sng" algn="ctr">
                       <a:solidFill>
-                        <a:srgbClr val="EFEAE0"/>
+                        <a:srgbClr val="BFBFBF"/>
                       </a:solidFill>
                       <a:prstDash val="solid"/>
                       <a:round/>
@@ -4029,7 +4476,7 @@
                     </a:lnL>
                     <a:lnR w="9525" cap="flat" cmpd="sng" algn="ctr">
                       <a:solidFill>
-                        <a:srgbClr val="EFEAE0"/>
+                        <a:srgbClr val="BFBFBF"/>
                       </a:solidFill>
                       <a:prstDash val="solid"/>
                       <a:round/>
@@ -4038,7 +4485,7 @@
                     </a:lnR>
                     <a:lnT w="9525" cap="flat" cmpd="sng" algn="ctr">
                       <a:solidFill>
-                        <a:srgbClr val="EFEAE0"/>
+                        <a:srgbClr val="BFBFBF"/>
                       </a:solidFill>
                       <a:prstDash val="solid"/>
                       <a:round/>
@@ -4047,7 +4494,7 @@
                     </a:lnT>
                     <a:lnB w="9525" cap="flat" cmpd="sng" algn="ctr">
                       <a:solidFill>
-                        <a:srgbClr val="EFEAE0"/>
+                        <a:srgbClr val="BFBFBF"/>
                       </a:solidFill>
                       <a:prstDash val="solid"/>
                       <a:round/>
@@ -4055,7 +4502,7 @@
                       <a:tailEnd type="none" w="med" len="med"/>
                     </a:lnB>
                     <a:solidFill>
-                      <a:srgbClr val="FBF4E4"/>
+                      <a:srgbClr val="EFF5F1"/>
                     </a:solidFill>
                   </a:tcPr>
                 </a:tc>
@@ -4066,19 +4513,17 @@
       </p:graphicFrame>
       <p:sp>
         <p:nvSpPr>
-          <p:cNvPr id="23" name="Shape 19"/>
-          <p:cNvSpPr/>
-          <p:nvPr/>
-        </p:nvSpPr>
-        <p:spPr>
-          <a:xfrm>
-            <a:off x="384048" y="4261104"/>
-            <a:ext cx="9921240" cy="640080"/>
-          </a:xfrm>
-          <a:prstGeom prst="roundRect">
-            <a:avLst>
-              <a:gd name="adj" fmla="val 7143"/>
-            </a:avLst>
+          <p:cNvPr id="17" name="Shape 12"/>
+          <p:cNvSpPr/>
+          <p:nvPr/>
+        </p:nvSpPr>
+        <p:spPr>
+          <a:xfrm>
+            <a:off x="384048" y="5129784"/>
+            <a:ext cx="50292" cy="146304"/>
+          </a:xfrm>
+          <a:prstGeom prst="rect">
+            <a:avLst/>
           </a:prstGeom>
           <a:solidFill>
             <a:srgbClr val="0C5230"/>
@@ -4088,14 +4533,14 @@
       </p:sp>
       <p:sp>
         <p:nvSpPr>
-          <p:cNvPr id="24" name="Text 20"/>
-          <p:cNvSpPr/>
-          <p:nvPr/>
-        </p:nvSpPr>
-        <p:spPr>
-          <a:xfrm>
-            <a:off x="621792" y="4261104"/>
-            <a:ext cx="9445752" cy="640080"/>
+          <p:cNvPr id="18" name="Text 13"/>
+          <p:cNvSpPr/>
+          <p:nvPr/>
+        </p:nvSpPr>
+        <p:spPr>
+          <a:xfrm>
+            <a:off x="512064" y="5102352"/>
+            <a:ext cx="2996184" cy="201168"/>
           </a:xfrm>
           <a:prstGeom prst="rect">
             <a:avLst/>
@@ -4108,1359 +4553,53 @@
           <a:lstStyle/>
           <a:p>
             <a:pPr indent="0" marL="0">
-              <a:lnSpc>
-                <a:spcPct val="120000"/>
-              </a:lnSpc>
               <a:buNone/>
             </a:pPr>
             <a:r>
               <a:rPr lang="en-US" sz="950" b="1" dirty="0">
                 <a:solidFill>
-                  <a:srgbClr val="FFFFFF"/>
+                  <a:srgbClr val="1A1A1A"/>
                 </a:solidFill>
                 <a:latin typeface="Yu Gothic" pitchFamily="34" charset="0"/>
                 <a:ea typeface="Yu Gothic" pitchFamily="34" charset="-122"/>
                 <a:cs typeface="Yu Gothic" pitchFamily="34" charset="-120"/>
               </a:rPr>
-              <a:t>工期約1か月は造作・床・給排水・電気が残置される前提です。ネット回線は12月中のお申込みが必要です。</a:t>
+              <a:t>３．弊社にて対応いたします事項</a:t>
             </a:r>
             <a:endParaRPr lang="en-US" sz="950" dirty="0"/>
           </a:p>
-          <a:p>
-            <a:pPr indent="0" marL="0">
-              <a:lnSpc>
-                <a:spcPct val="120000"/>
-              </a:lnSpc>
-              <a:buNone/>
-            </a:pPr>
-            <a:r>
-              <a:rPr lang="en-US" sz="850" dirty="0">
-                <a:solidFill>
-                  <a:srgbClr val="AFC2B8"/>
-                </a:solidFill>
-                <a:latin typeface="Yu Gothic" pitchFamily="34" charset="0"/>
-                <a:ea typeface="Yu Gothic" pitchFamily="34" charset="-122"/>
-                <a:cs typeface="Yu Gothic" pitchFamily="34" charset="-120"/>
-              </a:rPr>
-              <a:t>スケルトン戻しとなる場合は工期が延び、2月末オープンが厳しくなります。回線は申込から開通まで1〜2か月かかります。また1/31閉店→2/28オープンは正味28日のためバッファがありません。閉店を1月中旬〜下旬に前倒しできると安全です。</a:t>
-            </a:r>
-            <a:endParaRPr lang="en-US" sz="950" dirty="0"/>
-          </a:p>
-        </p:txBody>
-      </p:sp>
-      <p:sp>
-        <p:nvSpPr>
-          <p:cNvPr id="25" name="Shape 21"/>
-          <p:cNvSpPr/>
-          <p:nvPr/>
-        </p:nvSpPr>
-        <p:spPr>
-          <a:xfrm>
-            <a:off x="384048" y="4992624"/>
-            <a:ext cx="3703320" cy="2212848"/>
-          </a:xfrm>
-          <a:prstGeom prst="roundRect">
-            <a:avLst>
-              <a:gd name="adj" fmla="val 2479"/>
-            </a:avLst>
+        </p:txBody>
+      </p:sp>
+      <p:sp>
+        <p:nvSpPr>
+          <p:cNvPr id="19" name="Shape 14"/>
+          <p:cNvSpPr/>
+          <p:nvPr/>
+        </p:nvSpPr>
+        <p:spPr>
+          <a:xfrm>
+            <a:off x="384048" y="5321808"/>
+            <a:ext cx="3124200" cy="7315"/>
+          </a:xfrm>
+          <a:prstGeom prst="rect">
+            <a:avLst/>
           </a:prstGeom>
           <a:solidFill>
-            <a:srgbClr val="F1F8F3"/>
+            <a:srgbClr val="DCDCDC"/>
           </a:solidFill>
-          <a:ln w="9525">
-            <a:solidFill>
-              <a:srgbClr val="D2E7DA"/>
-            </a:solidFill>
-            <a:prstDash val="solid"/>
-          </a:ln>
-        </p:spPr>
-      </p:sp>
-      <p:sp>
-        <p:nvSpPr>
-          <p:cNvPr id="26" name="Text 22"/>
-          <p:cNvSpPr/>
-          <p:nvPr/>
-        </p:nvSpPr>
-        <p:spPr>
-          <a:xfrm>
-            <a:off x="585216" y="5102352"/>
-            <a:ext cx="3300984" cy="219456"/>
-          </a:xfrm>
-          <a:prstGeom prst="rect">
-            <a:avLst/>
-          </a:prstGeom>
-          <a:noFill/>
-          <a:ln/>
-        </p:spPr>
-        <p:txBody>
-          <a:bodyPr wrap="square" lIns="0" tIns="0" rIns="0" bIns="0" rtlCol="0" anchor="ctr"/>
-          <a:lstStyle/>
-          <a:p>
-            <a:pPr indent="0" marL="0">
-              <a:buNone/>
-            </a:pPr>
-            <a:r>
-              <a:rPr lang="en-US" sz="1000" b="1" dirty="0">
-                <a:solidFill>
-                  <a:srgbClr val="106838"/>
-                </a:solidFill>
-                <a:latin typeface="Yu Gothic" pitchFamily="34" charset="0"/>
-                <a:ea typeface="Yu Gothic" pitchFamily="34" charset="-122"/>
-                <a:cs typeface="Yu Gothic" pitchFamily="34" charset="-120"/>
-              </a:rPr>
-              <a:t>セルフカフェ（弊社）で進めること</a:t>
-            </a:r>
-            <a:endParaRPr lang="en-US" sz="1000" dirty="0"/>
-          </a:p>
-        </p:txBody>
-      </p:sp>
-      <p:sp>
-        <p:nvSpPr>
-          <p:cNvPr id="27" name="Shape 23"/>
-          <p:cNvSpPr/>
-          <p:nvPr/>
-        </p:nvSpPr>
-        <p:spPr>
-          <a:xfrm>
-            <a:off x="585216" y="5340096"/>
-            <a:ext cx="3300984" cy="9144"/>
-          </a:xfrm>
-          <a:prstGeom prst="rect">
-            <a:avLst/>
-          </a:prstGeom>
-          <a:solidFill>
-            <a:srgbClr val="D2E7DA"/>
-          </a:solidFill>
-          <a:ln/>
-        </p:spPr>
-      </p:sp>
-      <p:sp>
-        <p:nvSpPr>
-          <p:cNvPr id="28" name="Text 24"/>
-          <p:cNvSpPr/>
-          <p:nvPr/>
-        </p:nvSpPr>
-        <p:spPr>
-          <a:xfrm>
-            <a:off x="603504" y="5449824"/>
-            <a:ext cx="146304" cy="169164"/>
-          </a:xfrm>
-          <a:prstGeom prst="rect">
-            <a:avLst/>
-          </a:prstGeom>
-          <a:noFill/>
-          <a:ln/>
-        </p:spPr>
-        <p:txBody>
-          <a:bodyPr wrap="square" lIns="0" tIns="0" rIns="0" bIns="0" rtlCol="0" anchor="ctr"/>
-          <a:lstStyle/>
-          <a:p>
-            <a:pPr indent="0" marL="0">
-              <a:buNone/>
-            </a:pPr>
-            <a:r>
-              <a:rPr lang="en-US" sz="850" dirty="0">
-                <a:solidFill>
-                  <a:srgbClr val="106838"/>
-                </a:solidFill>
-                <a:latin typeface="Yu Gothic" pitchFamily="34" charset="0"/>
-                <a:ea typeface="Yu Gothic" pitchFamily="34" charset="-122"/>
-                <a:cs typeface="Yu Gothic" pitchFamily="34" charset="-120"/>
-              </a:rPr>
-              <a:t>・</a:t>
-            </a:r>
-            <a:endParaRPr lang="en-US" sz="850" dirty="0"/>
-          </a:p>
-        </p:txBody>
-      </p:sp>
-      <p:sp>
-        <p:nvSpPr>
-          <p:cNvPr id="29" name="Text 25"/>
-          <p:cNvSpPr/>
-          <p:nvPr/>
-        </p:nvSpPr>
-        <p:spPr>
-          <a:xfrm>
-            <a:off x="768096" y="5449824"/>
-            <a:ext cx="3118104" cy="169164"/>
-          </a:xfrm>
-          <a:prstGeom prst="rect">
-            <a:avLst/>
-          </a:prstGeom>
-          <a:noFill/>
-          <a:ln/>
-        </p:spPr>
-        <p:txBody>
-          <a:bodyPr wrap="square" lIns="0" tIns="0" rIns="0" bIns="0" rtlCol="0" anchor="ctr"/>
-          <a:lstStyle/>
-          <a:p>
-            <a:pPr indent="0" marL="0">
-              <a:buNone/>
-            </a:pPr>
-            <a:r>
-              <a:rPr lang="en-US" sz="850" dirty="0">
-                <a:solidFill>
-                  <a:srgbClr val="0A3D23"/>
-                </a:solidFill>
-                <a:latin typeface="Yu Gothic" pitchFamily="34" charset="0"/>
-                <a:ea typeface="Yu Gothic" pitchFamily="34" charset="-122"/>
-                <a:cs typeface="Yu Gothic" pitchFamily="34" charset="-120"/>
-              </a:rPr>
-              <a:t>施工担当の内見日程の調整（11月上旬）</a:t>
-            </a:r>
-            <a:endParaRPr lang="en-US" sz="850" dirty="0"/>
-          </a:p>
-        </p:txBody>
-      </p:sp>
-      <p:sp>
-        <p:nvSpPr>
-          <p:cNvPr id="30" name="Text 26"/>
-          <p:cNvSpPr/>
-          <p:nvPr/>
-        </p:nvSpPr>
-        <p:spPr>
-          <a:xfrm>
-            <a:off x="603504" y="5618988"/>
-            <a:ext cx="146304" cy="169164"/>
-          </a:xfrm>
-          <a:prstGeom prst="rect">
-            <a:avLst/>
-          </a:prstGeom>
-          <a:noFill/>
-          <a:ln/>
-        </p:spPr>
-        <p:txBody>
-          <a:bodyPr wrap="square" lIns="0" tIns="0" rIns="0" bIns="0" rtlCol="0" anchor="ctr"/>
-          <a:lstStyle/>
-          <a:p>
-            <a:pPr indent="0" marL="0">
-              <a:buNone/>
-            </a:pPr>
-            <a:r>
-              <a:rPr lang="en-US" sz="850" dirty="0">
-                <a:solidFill>
-                  <a:srgbClr val="106838"/>
-                </a:solidFill>
-                <a:latin typeface="Yu Gothic" pitchFamily="34" charset="0"/>
-                <a:ea typeface="Yu Gothic" pitchFamily="34" charset="-122"/>
-                <a:cs typeface="Yu Gothic" pitchFamily="34" charset="-120"/>
-              </a:rPr>
-              <a:t>・</a:t>
-            </a:r>
-            <a:endParaRPr lang="en-US" sz="850" dirty="0"/>
-          </a:p>
-        </p:txBody>
-      </p:sp>
-      <p:sp>
-        <p:nvSpPr>
-          <p:cNvPr id="31" name="Text 27"/>
-          <p:cNvSpPr/>
-          <p:nvPr/>
-        </p:nvSpPr>
-        <p:spPr>
-          <a:xfrm>
-            <a:off x="768096" y="5618988"/>
-            <a:ext cx="3118104" cy="169164"/>
-          </a:xfrm>
-          <a:prstGeom prst="rect">
-            <a:avLst/>
-          </a:prstGeom>
-          <a:noFill/>
-          <a:ln/>
-        </p:spPr>
-        <p:txBody>
-          <a:bodyPr wrap="square" lIns="0" tIns="0" rIns="0" bIns="0" rtlCol="0" anchor="ctr"/>
-          <a:lstStyle/>
-          <a:p>
-            <a:pPr indent="0" marL="0">
-              <a:buNone/>
-            </a:pPr>
-            <a:r>
-              <a:rPr lang="en-US" sz="850" dirty="0">
-                <a:solidFill>
-                  <a:srgbClr val="0A3D23"/>
-                </a:solidFill>
-                <a:latin typeface="Yu Gothic" pitchFamily="34" charset="0"/>
-                <a:ea typeface="Yu Gothic" pitchFamily="34" charset="-122"/>
-                <a:cs typeface="Yu Gothic" pitchFamily="34" charset="-120"/>
-              </a:rPr>
-              <a:t>レイアウト図・什器リストの作成（30坪）</a:t>
-            </a:r>
-            <a:endParaRPr lang="en-US" sz="850" dirty="0"/>
-          </a:p>
-        </p:txBody>
-      </p:sp>
-      <p:sp>
-        <p:nvSpPr>
-          <p:cNvPr id="32" name="Text 28"/>
-          <p:cNvSpPr/>
-          <p:nvPr/>
-        </p:nvSpPr>
-        <p:spPr>
-          <a:xfrm>
-            <a:off x="603504" y="5788152"/>
-            <a:ext cx="146304" cy="169164"/>
-          </a:xfrm>
-          <a:prstGeom prst="rect">
-            <a:avLst/>
-          </a:prstGeom>
-          <a:noFill/>
-          <a:ln/>
-        </p:spPr>
-        <p:txBody>
-          <a:bodyPr wrap="square" lIns="0" tIns="0" rIns="0" bIns="0" rtlCol="0" anchor="ctr"/>
-          <a:lstStyle/>
-          <a:p>
-            <a:pPr indent="0" marL="0">
-              <a:buNone/>
-            </a:pPr>
-            <a:r>
-              <a:rPr lang="en-US" sz="850" dirty="0">
-                <a:solidFill>
-                  <a:srgbClr val="106838"/>
-                </a:solidFill>
-                <a:latin typeface="Yu Gothic" pitchFamily="34" charset="0"/>
-                <a:ea typeface="Yu Gothic" pitchFamily="34" charset="-122"/>
-                <a:cs typeface="Yu Gothic" pitchFamily="34" charset="-120"/>
-              </a:rPr>
-              <a:t>・</a:t>
-            </a:r>
-            <a:endParaRPr lang="en-US" sz="850" dirty="0"/>
-          </a:p>
-        </p:txBody>
-      </p:sp>
-      <p:sp>
-        <p:nvSpPr>
-          <p:cNvPr id="33" name="Text 29"/>
-          <p:cNvSpPr/>
-          <p:nvPr/>
-        </p:nvSpPr>
-        <p:spPr>
-          <a:xfrm>
-            <a:off x="768096" y="5788152"/>
-            <a:ext cx="3118104" cy="169164"/>
-          </a:xfrm>
-          <a:prstGeom prst="rect">
-            <a:avLst/>
-          </a:prstGeom>
-          <a:noFill/>
-          <a:ln/>
-        </p:spPr>
-        <p:txBody>
-          <a:bodyPr wrap="square" lIns="0" tIns="0" rIns="0" bIns="0" rtlCol="0" anchor="ctr"/>
-          <a:lstStyle/>
-          <a:p>
-            <a:pPr indent="0" marL="0">
-              <a:buNone/>
-            </a:pPr>
-            <a:r>
-              <a:rPr lang="en-US" sz="850" dirty="0">
-                <a:solidFill>
-                  <a:srgbClr val="0A3D23"/>
-                </a:solidFill>
-                <a:latin typeface="Yu Gothic" pitchFamily="34" charset="0"/>
-                <a:ea typeface="Yu Gothic" pitchFamily="34" charset="-122"/>
-                <a:cs typeface="Yu Gothic" pitchFamily="34" charset="-120"/>
-              </a:rPr>
-              <a:t>設置工事費のご案内（30〜50万円）</a:t>
-            </a:r>
-            <a:endParaRPr lang="en-US" sz="850" dirty="0"/>
-          </a:p>
-        </p:txBody>
-      </p:sp>
-      <p:sp>
-        <p:nvSpPr>
-          <p:cNvPr id="34" name="Text 30"/>
-          <p:cNvSpPr/>
-          <p:nvPr/>
-        </p:nvSpPr>
-        <p:spPr>
-          <a:xfrm>
-            <a:off x="603504" y="5957316"/>
-            <a:ext cx="146304" cy="169164"/>
-          </a:xfrm>
-          <a:prstGeom prst="rect">
-            <a:avLst/>
-          </a:prstGeom>
-          <a:noFill/>
-          <a:ln/>
-        </p:spPr>
-        <p:txBody>
-          <a:bodyPr wrap="square" lIns="0" tIns="0" rIns="0" bIns="0" rtlCol="0" anchor="ctr"/>
-          <a:lstStyle/>
-          <a:p>
-            <a:pPr indent="0" marL="0">
-              <a:buNone/>
-            </a:pPr>
-            <a:r>
-              <a:rPr lang="en-US" sz="850" dirty="0">
-                <a:solidFill>
-                  <a:srgbClr val="106838"/>
-                </a:solidFill>
-                <a:latin typeface="Yu Gothic" pitchFamily="34" charset="0"/>
-                <a:ea typeface="Yu Gothic" pitchFamily="34" charset="-122"/>
-                <a:cs typeface="Yu Gothic" pitchFamily="34" charset="-120"/>
-              </a:rPr>
-              <a:t>・</a:t>
-            </a:r>
-            <a:endParaRPr lang="en-US" sz="850" dirty="0"/>
-          </a:p>
-        </p:txBody>
-      </p:sp>
-      <p:sp>
-        <p:nvSpPr>
-          <p:cNvPr id="35" name="Text 31"/>
-          <p:cNvSpPr/>
-          <p:nvPr/>
-        </p:nvSpPr>
-        <p:spPr>
-          <a:xfrm>
-            <a:off x="768096" y="5957316"/>
-            <a:ext cx="3118104" cy="169164"/>
-          </a:xfrm>
-          <a:prstGeom prst="rect">
-            <a:avLst/>
-          </a:prstGeom>
-          <a:noFill/>
-          <a:ln/>
-        </p:spPr>
-        <p:txBody>
-          <a:bodyPr wrap="square" lIns="0" tIns="0" rIns="0" bIns="0" rtlCol="0" anchor="ctr"/>
-          <a:lstStyle/>
-          <a:p>
-            <a:pPr indent="0" marL="0">
-              <a:buNone/>
-            </a:pPr>
-            <a:r>
-              <a:rPr lang="en-US" sz="850" dirty="0">
-                <a:solidFill>
-                  <a:srgbClr val="0A3D23"/>
-                </a:solidFill>
-                <a:latin typeface="Yu Gothic" pitchFamily="34" charset="0"/>
-                <a:ea typeface="Yu Gothic" pitchFamily="34" charset="-122"/>
-                <a:cs typeface="Yu Gothic" pitchFamily="34" charset="-120"/>
-              </a:rPr>
-              <a:t>業務委託契約書のドラフト送付</a:t>
-            </a:r>
-            <a:endParaRPr lang="en-US" sz="850" dirty="0"/>
-          </a:p>
-        </p:txBody>
-      </p:sp>
-      <p:sp>
-        <p:nvSpPr>
-          <p:cNvPr id="36" name="Text 32"/>
-          <p:cNvSpPr/>
-          <p:nvPr/>
-        </p:nvSpPr>
-        <p:spPr>
-          <a:xfrm>
-            <a:off x="603504" y="6126480"/>
-            <a:ext cx="146304" cy="169164"/>
-          </a:xfrm>
-          <a:prstGeom prst="rect">
-            <a:avLst/>
-          </a:prstGeom>
-          <a:noFill/>
-          <a:ln/>
-        </p:spPr>
-        <p:txBody>
-          <a:bodyPr wrap="square" lIns="0" tIns="0" rIns="0" bIns="0" rtlCol="0" anchor="ctr"/>
-          <a:lstStyle/>
-          <a:p>
-            <a:pPr indent="0" marL="0">
-              <a:buNone/>
-            </a:pPr>
-            <a:r>
-              <a:rPr lang="en-US" sz="850" dirty="0">
-                <a:solidFill>
-                  <a:srgbClr val="106838"/>
-                </a:solidFill>
-                <a:latin typeface="Yu Gothic" pitchFamily="34" charset="0"/>
-                <a:ea typeface="Yu Gothic" pitchFamily="34" charset="-122"/>
-                <a:cs typeface="Yu Gothic" pitchFamily="34" charset="-120"/>
-              </a:rPr>
-              <a:t>・</a:t>
-            </a:r>
-            <a:endParaRPr lang="en-US" sz="850" dirty="0"/>
-          </a:p>
-        </p:txBody>
-      </p:sp>
-      <p:sp>
-        <p:nvSpPr>
-          <p:cNvPr id="37" name="Text 33"/>
-          <p:cNvSpPr/>
-          <p:nvPr/>
-        </p:nvSpPr>
-        <p:spPr>
-          <a:xfrm>
-            <a:off x="768096" y="6126480"/>
-            <a:ext cx="3118104" cy="169164"/>
-          </a:xfrm>
-          <a:prstGeom prst="rect">
-            <a:avLst/>
-          </a:prstGeom>
-          <a:noFill/>
-          <a:ln/>
-        </p:spPr>
-        <p:txBody>
-          <a:bodyPr wrap="square" lIns="0" tIns="0" rIns="0" bIns="0" rtlCol="0" anchor="ctr"/>
-          <a:lstStyle/>
-          <a:p>
-            <a:pPr indent="0" marL="0">
-              <a:buNone/>
-            </a:pPr>
-            <a:r>
-              <a:rPr lang="en-US" sz="850" dirty="0">
-                <a:solidFill>
-                  <a:srgbClr val="0A3D23"/>
-                </a:solidFill>
-                <a:latin typeface="Yu Gothic" pitchFamily="34" charset="0"/>
-                <a:ea typeface="Yu Gothic" pitchFamily="34" charset="-122"/>
-                <a:cs typeface="Yu Gothic" pitchFamily="34" charset="-120"/>
-              </a:rPr>
-              <a:t>カメラ映像の取扱いに関する取り決めのご提示</a:t>
-            </a:r>
-            <a:endParaRPr lang="en-US" sz="850" dirty="0"/>
-          </a:p>
-        </p:txBody>
-      </p:sp>
-      <p:sp>
-        <p:nvSpPr>
-          <p:cNvPr id="38" name="Text 34"/>
-          <p:cNvSpPr/>
-          <p:nvPr/>
-        </p:nvSpPr>
-        <p:spPr>
-          <a:xfrm>
-            <a:off x="603504" y="6295644"/>
-            <a:ext cx="146304" cy="169164"/>
-          </a:xfrm>
-          <a:prstGeom prst="rect">
-            <a:avLst/>
-          </a:prstGeom>
-          <a:noFill/>
-          <a:ln/>
-        </p:spPr>
-        <p:txBody>
-          <a:bodyPr wrap="square" lIns="0" tIns="0" rIns="0" bIns="0" rtlCol="0" anchor="ctr"/>
-          <a:lstStyle/>
-          <a:p>
-            <a:pPr indent="0" marL="0">
-              <a:buNone/>
-            </a:pPr>
-            <a:r>
-              <a:rPr lang="en-US" sz="850" dirty="0">
-                <a:solidFill>
-                  <a:srgbClr val="106838"/>
-                </a:solidFill>
-                <a:latin typeface="Yu Gothic" pitchFamily="34" charset="0"/>
-                <a:ea typeface="Yu Gothic" pitchFamily="34" charset="-122"/>
-                <a:cs typeface="Yu Gothic" pitchFamily="34" charset="-120"/>
-              </a:rPr>
-              <a:t>・</a:t>
-            </a:r>
-            <a:endParaRPr lang="en-US" sz="850" dirty="0"/>
-          </a:p>
-        </p:txBody>
-      </p:sp>
-      <p:sp>
-        <p:nvSpPr>
-          <p:cNvPr id="39" name="Text 35"/>
-          <p:cNvSpPr/>
-          <p:nvPr/>
-        </p:nvSpPr>
-        <p:spPr>
-          <a:xfrm>
-            <a:off x="768096" y="6295644"/>
-            <a:ext cx="3118104" cy="169164"/>
-          </a:xfrm>
-          <a:prstGeom prst="rect">
-            <a:avLst/>
-          </a:prstGeom>
-          <a:noFill/>
-          <a:ln/>
-        </p:spPr>
-        <p:txBody>
-          <a:bodyPr wrap="square" lIns="0" tIns="0" rIns="0" bIns="0" rtlCol="0" anchor="ctr"/>
-          <a:lstStyle/>
-          <a:p>
-            <a:pPr indent="0" marL="0">
-              <a:buNone/>
-            </a:pPr>
-            <a:r>
-              <a:rPr lang="en-US" sz="850" dirty="0">
-                <a:solidFill>
-                  <a:srgbClr val="0A3D23"/>
-                </a:solidFill>
-                <a:latin typeface="Yu Gothic" pitchFamily="34" charset="0"/>
-                <a:ea typeface="Yu Gothic" pitchFamily="34" charset="-122"/>
-                <a:cs typeface="Yu Gothic" pitchFamily="34" charset="-120"/>
-              </a:rPr>
-              <a:t>館への工事申請用 図面・仕様書の作成</a:t>
-            </a:r>
-            <a:endParaRPr lang="en-US" sz="850" dirty="0"/>
-          </a:p>
-        </p:txBody>
-      </p:sp>
-      <p:sp>
-        <p:nvSpPr>
-          <p:cNvPr id="40" name="Text 36"/>
-          <p:cNvSpPr/>
-          <p:nvPr/>
-        </p:nvSpPr>
-        <p:spPr>
-          <a:xfrm>
-            <a:off x="603504" y="6464808"/>
-            <a:ext cx="146304" cy="169164"/>
-          </a:xfrm>
-          <a:prstGeom prst="rect">
-            <a:avLst/>
-          </a:prstGeom>
-          <a:noFill/>
-          <a:ln/>
-        </p:spPr>
-        <p:txBody>
-          <a:bodyPr wrap="square" lIns="0" tIns="0" rIns="0" bIns="0" rtlCol="0" anchor="ctr"/>
-          <a:lstStyle/>
-          <a:p>
-            <a:pPr indent="0" marL="0">
-              <a:buNone/>
-            </a:pPr>
-            <a:r>
-              <a:rPr lang="en-US" sz="850" dirty="0">
-                <a:solidFill>
-                  <a:srgbClr val="106838"/>
-                </a:solidFill>
-                <a:latin typeface="Yu Gothic" pitchFamily="34" charset="0"/>
-                <a:ea typeface="Yu Gothic" pitchFamily="34" charset="-122"/>
-                <a:cs typeface="Yu Gothic" pitchFamily="34" charset="-120"/>
-              </a:rPr>
-              <a:t>・</a:t>
-            </a:r>
-            <a:endParaRPr lang="en-US" sz="850" dirty="0"/>
-          </a:p>
-        </p:txBody>
-      </p:sp>
-      <p:sp>
-        <p:nvSpPr>
-          <p:cNvPr id="41" name="Text 37"/>
-          <p:cNvSpPr/>
-          <p:nvPr/>
-        </p:nvSpPr>
-        <p:spPr>
-          <a:xfrm>
-            <a:off x="768096" y="6464808"/>
-            <a:ext cx="3118104" cy="169164"/>
-          </a:xfrm>
-          <a:prstGeom prst="rect">
-            <a:avLst/>
-          </a:prstGeom>
-          <a:noFill/>
-          <a:ln/>
-        </p:spPr>
-        <p:txBody>
-          <a:bodyPr wrap="square" lIns="0" tIns="0" rIns="0" bIns="0" rtlCol="0" anchor="ctr"/>
-          <a:lstStyle/>
-          <a:p>
-            <a:pPr indent="0" marL="0">
-              <a:buNone/>
-            </a:pPr>
-            <a:r>
-              <a:rPr lang="en-US" sz="850" dirty="0">
-                <a:solidFill>
-                  <a:srgbClr val="0A3D23"/>
-                </a:solidFill>
-                <a:latin typeface="Yu Gothic" pitchFamily="34" charset="0"/>
-                <a:ea typeface="Yu Gothic" pitchFamily="34" charset="-122"/>
-                <a:cs typeface="Yu Gothic" pitchFamily="34" charset="-120"/>
-              </a:rPr>
-              <a:t>什器・機器の発注（12月上旬）</a:t>
-            </a:r>
-            <a:endParaRPr lang="en-US" sz="850" dirty="0"/>
-          </a:p>
-        </p:txBody>
-      </p:sp>
-      <p:sp>
-        <p:nvSpPr>
-          <p:cNvPr id="42" name="Text 38"/>
-          <p:cNvSpPr/>
-          <p:nvPr/>
-        </p:nvSpPr>
-        <p:spPr>
-          <a:xfrm>
-            <a:off x="603504" y="6633972"/>
-            <a:ext cx="146304" cy="169164"/>
-          </a:xfrm>
-          <a:prstGeom prst="rect">
-            <a:avLst/>
-          </a:prstGeom>
-          <a:noFill/>
-          <a:ln/>
-        </p:spPr>
-        <p:txBody>
-          <a:bodyPr wrap="square" lIns="0" tIns="0" rIns="0" bIns="0" rtlCol="0" anchor="ctr"/>
-          <a:lstStyle/>
-          <a:p>
-            <a:pPr indent="0" marL="0">
-              <a:buNone/>
-            </a:pPr>
-            <a:r>
-              <a:rPr lang="en-US" sz="850" dirty="0">
-                <a:solidFill>
-                  <a:srgbClr val="106838"/>
-                </a:solidFill>
-                <a:latin typeface="Yu Gothic" pitchFamily="34" charset="0"/>
-                <a:ea typeface="Yu Gothic" pitchFamily="34" charset="-122"/>
-                <a:cs typeface="Yu Gothic" pitchFamily="34" charset="-120"/>
-              </a:rPr>
-              <a:t>・</a:t>
-            </a:r>
-            <a:endParaRPr lang="en-US" sz="850" dirty="0"/>
-          </a:p>
-        </p:txBody>
-      </p:sp>
-      <p:sp>
-        <p:nvSpPr>
-          <p:cNvPr id="43" name="Text 39"/>
-          <p:cNvSpPr/>
-          <p:nvPr/>
-        </p:nvSpPr>
-        <p:spPr>
-          <a:xfrm>
-            <a:off x="768096" y="6633972"/>
-            <a:ext cx="3118104" cy="169164"/>
-          </a:xfrm>
-          <a:prstGeom prst="rect">
-            <a:avLst/>
-          </a:prstGeom>
-          <a:noFill/>
-          <a:ln/>
-        </p:spPr>
-        <p:txBody>
-          <a:bodyPr wrap="square" lIns="0" tIns="0" rIns="0" bIns="0" rtlCol="0" anchor="ctr"/>
-          <a:lstStyle/>
-          <a:p>
-            <a:pPr indent="0" marL="0">
-              <a:buNone/>
-            </a:pPr>
-            <a:r>
-              <a:rPr lang="en-US" sz="850" dirty="0">
-                <a:solidFill>
-                  <a:srgbClr val="0A3D23"/>
-                </a:solidFill>
-                <a:latin typeface="Yu Gothic" pitchFamily="34" charset="0"/>
-                <a:ea typeface="Yu Gothic" pitchFamily="34" charset="-122"/>
-                <a:cs typeface="Yu Gothic" pitchFamily="34" charset="-120"/>
-              </a:rPr>
-              <a:t>内装工事・機器設置・試運転</a:t>
-            </a:r>
-            <a:endParaRPr lang="en-US" sz="850" dirty="0"/>
-          </a:p>
-        </p:txBody>
-      </p:sp>
-      <p:sp>
-        <p:nvSpPr>
-          <p:cNvPr id="44" name="Text 40"/>
-          <p:cNvSpPr/>
-          <p:nvPr/>
-        </p:nvSpPr>
-        <p:spPr>
-          <a:xfrm>
-            <a:off x="603504" y="6803136"/>
-            <a:ext cx="146304" cy="169164"/>
-          </a:xfrm>
-          <a:prstGeom prst="rect">
-            <a:avLst/>
-          </a:prstGeom>
-          <a:noFill/>
-          <a:ln/>
-        </p:spPr>
-        <p:txBody>
-          <a:bodyPr wrap="square" lIns="0" tIns="0" rIns="0" bIns="0" rtlCol="0" anchor="ctr"/>
-          <a:lstStyle/>
-          <a:p>
-            <a:pPr indent="0" marL="0">
-              <a:buNone/>
-            </a:pPr>
-            <a:r>
-              <a:rPr lang="en-US" sz="850" dirty="0">
-                <a:solidFill>
-                  <a:srgbClr val="106838"/>
-                </a:solidFill>
-                <a:latin typeface="Yu Gothic" pitchFamily="34" charset="0"/>
-                <a:ea typeface="Yu Gothic" pitchFamily="34" charset="-122"/>
-                <a:cs typeface="Yu Gothic" pitchFamily="34" charset="-120"/>
-              </a:rPr>
-              <a:t>・</a:t>
-            </a:r>
-            <a:endParaRPr lang="en-US" sz="850" dirty="0"/>
-          </a:p>
-        </p:txBody>
-      </p:sp>
-      <p:sp>
-        <p:nvSpPr>
-          <p:cNvPr id="45" name="Text 41"/>
-          <p:cNvSpPr/>
-          <p:nvPr/>
-        </p:nvSpPr>
-        <p:spPr>
-          <a:xfrm>
-            <a:off x="768096" y="6803136"/>
-            <a:ext cx="3118104" cy="169164"/>
-          </a:xfrm>
-          <a:prstGeom prst="rect">
-            <a:avLst/>
-          </a:prstGeom>
-          <a:noFill/>
-          <a:ln/>
-        </p:spPr>
-        <p:txBody>
-          <a:bodyPr wrap="square" lIns="0" tIns="0" rIns="0" bIns="0" rtlCol="0" anchor="ctr"/>
-          <a:lstStyle/>
-          <a:p>
-            <a:pPr indent="0" marL="0">
-              <a:buNone/>
-            </a:pPr>
-            <a:r>
-              <a:rPr lang="en-US" sz="850" dirty="0">
-                <a:solidFill>
-                  <a:srgbClr val="0A3D23"/>
-                </a:solidFill>
-                <a:latin typeface="Yu Gothic" pitchFamily="34" charset="0"/>
-                <a:ea typeface="Yu Gothic" pitchFamily="34" charset="-122"/>
-                <a:cs typeface="Yu Gothic" pitchFamily="34" charset="-120"/>
-              </a:rPr>
-              <a:t>開業スケジュール確定版の提示（内見後）</a:t>
-            </a:r>
-            <a:endParaRPr lang="en-US" sz="850" dirty="0"/>
-          </a:p>
-        </p:txBody>
-      </p:sp>
-      <p:sp>
-        <p:nvSpPr>
-          <p:cNvPr id="46" name="Text 42"/>
-          <p:cNvSpPr/>
-          <p:nvPr/>
-        </p:nvSpPr>
-        <p:spPr>
-          <a:xfrm>
-            <a:off x="603504" y="6972300"/>
-            <a:ext cx="146304" cy="169164"/>
-          </a:xfrm>
-          <a:prstGeom prst="rect">
-            <a:avLst/>
-          </a:prstGeom>
-          <a:noFill/>
-          <a:ln/>
-        </p:spPr>
-        <p:txBody>
-          <a:bodyPr wrap="square" lIns="0" tIns="0" rIns="0" bIns="0" rtlCol="0" anchor="ctr"/>
-          <a:lstStyle/>
-          <a:p>
-            <a:pPr indent="0" marL="0">
-              <a:buNone/>
-            </a:pPr>
-            <a:r>
-              <a:rPr lang="en-US" sz="850" dirty="0">
-                <a:solidFill>
-                  <a:srgbClr val="106838"/>
-                </a:solidFill>
-                <a:latin typeface="Yu Gothic" pitchFamily="34" charset="0"/>
-                <a:ea typeface="Yu Gothic" pitchFamily="34" charset="-122"/>
-                <a:cs typeface="Yu Gothic" pitchFamily="34" charset="-120"/>
-              </a:rPr>
-              <a:t>・</a:t>
-            </a:r>
-            <a:endParaRPr lang="en-US" sz="850" dirty="0"/>
-          </a:p>
-        </p:txBody>
-      </p:sp>
-      <p:sp>
-        <p:nvSpPr>
-          <p:cNvPr id="47" name="Text 43"/>
-          <p:cNvSpPr/>
-          <p:nvPr/>
-        </p:nvSpPr>
-        <p:spPr>
-          <a:xfrm>
-            <a:off x="768096" y="6972300"/>
-            <a:ext cx="3118104" cy="169164"/>
-          </a:xfrm>
-          <a:prstGeom prst="rect">
-            <a:avLst/>
-          </a:prstGeom>
-          <a:noFill/>
-          <a:ln/>
-        </p:spPr>
-        <p:txBody>
-          <a:bodyPr wrap="square" lIns="0" tIns="0" rIns="0" bIns="0" rtlCol="0" anchor="ctr"/>
-          <a:lstStyle/>
-          <a:p>
-            <a:pPr indent="0" marL="0">
-              <a:buNone/>
-            </a:pPr>
-            <a:r>
-              <a:rPr lang="en-US" sz="850" dirty="0">
-                <a:solidFill>
-                  <a:srgbClr val="0A3D23"/>
-                </a:solidFill>
-                <a:latin typeface="Yu Gothic" pitchFamily="34" charset="0"/>
-                <a:ea typeface="Yu Gothic" pitchFamily="34" charset="-122"/>
-                <a:cs typeface="Yu Gothic" pitchFamily="34" charset="-120"/>
-              </a:rPr>
-              <a:t>オープン後の集客・お客様対応</a:t>
-            </a:r>
-            <a:endParaRPr lang="en-US" sz="850" dirty="0"/>
-          </a:p>
-        </p:txBody>
-      </p:sp>
-      <p:sp>
-        <p:nvSpPr>
-          <p:cNvPr id="48" name="Shape 44"/>
-          <p:cNvSpPr/>
-          <p:nvPr/>
-        </p:nvSpPr>
-        <p:spPr>
-          <a:xfrm>
-            <a:off x="4306824" y="4992624"/>
-            <a:ext cx="5998464" cy="2212848"/>
-          </a:xfrm>
-          <a:prstGeom prst="roundRect">
-            <a:avLst>
-              <a:gd name="adj" fmla="val 2479"/>
-            </a:avLst>
-          </a:prstGeom>
-          <a:solidFill>
-            <a:srgbClr val="FFFFFF"/>
-          </a:solidFill>
-          <a:ln w="9525">
-            <a:solidFill>
-              <a:srgbClr val="C79A44"/>
-            </a:solidFill>
-            <a:prstDash val="solid"/>
-          </a:ln>
-        </p:spPr>
-      </p:sp>
-      <p:sp>
-        <p:nvSpPr>
-          <p:cNvPr id="49" name="Text 45"/>
-          <p:cNvSpPr/>
-          <p:nvPr/>
-        </p:nvSpPr>
-        <p:spPr>
-          <a:xfrm>
-            <a:off x="4507992" y="5102352"/>
-            <a:ext cx="5596128" cy="219456"/>
-          </a:xfrm>
-          <a:prstGeom prst="rect">
-            <a:avLst/>
-          </a:prstGeom>
-          <a:noFill/>
-          <a:ln/>
-        </p:spPr>
-        <p:txBody>
-          <a:bodyPr wrap="square" lIns="0" tIns="0" rIns="0" bIns="0" rtlCol="0" anchor="ctr"/>
-          <a:lstStyle/>
-          <a:p>
-            <a:pPr indent="0" marL="0">
-              <a:buNone/>
-            </a:pPr>
-            <a:r>
-              <a:rPr lang="en-US" sz="1000" b="1" dirty="0">
-                <a:solidFill>
-                  <a:srgbClr val="A8761F"/>
-                </a:solidFill>
-                <a:latin typeface="Yu Gothic" pitchFamily="34" charset="0"/>
-                <a:ea typeface="Yu Gothic" pitchFamily="34" charset="-122"/>
-                <a:cs typeface="Yu Gothic" pitchFamily="34" charset="-120"/>
-              </a:rPr>
-              <a:t>未来屋書店様にご確認・ご準備いただきたいこと</a:t>
-            </a:r>
-            <a:endParaRPr lang="en-US" sz="1000" dirty="0"/>
-          </a:p>
-        </p:txBody>
-      </p:sp>
-      <p:sp>
-        <p:nvSpPr>
-          <p:cNvPr id="50" name="Shape 46"/>
-          <p:cNvSpPr/>
-          <p:nvPr/>
-        </p:nvSpPr>
-        <p:spPr>
-          <a:xfrm>
-            <a:off x="4507992" y="5340096"/>
-            <a:ext cx="5596128" cy="9144"/>
-          </a:xfrm>
-          <a:prstGeom prst="rect">
-            <a:avLst/>
-          </a:prstGeom>
-          <a:solidFill>
-            <a:srgbClr val="EFEAE0"/>
-          </a:solidFill>
-          <a:ln/>
-        </p:spPr>
-      </p:sp>
-      <p:sp>
-        <p:nvSpPr>
-          <p:cNvPr id="51" name="Text 47"/>
-          <p:cNvSpPr/>
-          <p:nvPr/>
-        </p:nvSpPr>
-        <p:spPr>
-          <a:xfrm>
-            <a:off x="4507992" y="5394960"/>
-            <a:ext cx="2660904" cy="164592"/>
-          </a:xfrm>
-          <a:prstGeom prst="rect">
-            <a:avLst/>
-          </a:prstGeom>
-          <a:noFill/>
-          <a:ln/>
-        </p:spPr>
-        <p:txBody>
-          <a:bodyPr wrap="square" lIns="0" tIns="0" rIns="0" bIns="0" rtlCol="0" anchor="ctr"/>
-          <a:lstStyle/>
-          <a:p>
-            <a:pPr indent="0" marL="0">
-              <a:buNone/>
-            </a:pPr>
-            <a:r>
-              <a:rPr lang="en-US" sz="800" b="1" dirty="0">
-                <a:solidFill>
-                  <a:srgbClr val="7E8882"/>
-                </a:solidFill>
-                <a:latin typeface="Yu Gothic" pitchFamily="34" charset="0"/>
-                <a:ea typeface="Yu Gothic" pitchFamily="34" charset="-122"/>
-                <a:cs typeface="Yu Gothic" pitchFamily="34" charset="-120"/>
-              </a:rPr>
-              <a:t>ご確認事項（★＝工期・コストに直結）</a:t>
-            </a:r>
-            <a:endParaRPr lang="en-US" sz="800" dirty="0"/>
-          </a:p>
-        </p:txBody>
-      </p:sp>
-      <p:sp>
-        <p:nvSpPr>
-          <p:cNvPr id="52" name="Text 48"/>
-          <p:cNvSpPr/>
-          <p:nvPr/>
-        </p:nvSpPr>
-        <p:spPr>
-          <a:xfrm>
-            <a:off x="4526280" y="5559552"/>
-            <a:ext cx="164592" cy="155448"/>
-          </a:xfrm>
-          <a:prstGeom prst="rect">
-            <a:avLst/>
-          </a:prstGeom>
-          <a:noFill/>
-          <a:ln/>
-        </p:spPr>
-        <p:txBody>
-          <a:bodyPr wrap="square" lIns="0" tIns="0" rIns="0" bIns="0" rtlCol="0" anchor="ctr"/>
-          <a:lstStyle/>
-          <a:p>
-            <a:pPr indent="0" marL="0">
-              <a:buNone/>
-            </a:pPr>
-            <a:r>
-              <a:rPr lang="en-US" sz="700" b="1" dirty="0">
-                <a:solidFill>
-                  <a:srgbClr val="A8761F"/>
-                </a:solidFill>
-                <a:latin typeface="Yu Gothic" pitchFamily="34" charset="0"/>
-                <a:ea typeface="Yu Gothic" pitchFamily="34" charset="-122"/>
-                <a:cs typeface="Yu Gothic" pitchFamily="34" charset="-120"/>
-              </a:rPr>
-              <a:t>★</a:t>
-            </a:r>
-            <a:endParaRPr lang="en-US" sz="700" dirty="0"/>
-          </a:p>
-        </p:txBody>
-      </p:sp>
-      <p:sp>
-        <p:nvSpPr>
-          <p:cNvPr id="53" name="Text 49"/>
-          <p:cNvSpPr/>
-          <p:nvPr/>
-        </p:nvSpPr>
-        <p:spPr>
-          <a:xfrm>
-            <a:off x="4709160" y="5559552"/>
-            <a:ext cx="2478024" cy="155448"/>
-          </a:xfrm>
-          <a:prstGeom prst="rect">
-            <a:avLst/>
-          </a:prstGeom>
-          <a:noFill/>
-          <a:ln/>
-        </p:spPr>
-        <p:txBody>
-          <a:bodyPr wrap="square" lIns="0" tIns="0" rIns="0" bIns="0" rtlCol="0" anchor="ctr"/>
-          <a:lstStyle/>
-          <a:p>
-            <a:pPr indent="0" marL="0">
-              <a:buNone/>
-            </a:pPr>
-            <a:r>
-              <a:rPr lang="en-US" sz="800" b="1" dirty="0">
-                <a:solidFill>
-                  <a:srgbClr val="0A3D23"/>
-                </a:solidFill>
-                <a:latin typeface="Yu Gothic" pitchFamily="34" charset="0"/>
-                <a:ea typeface="Yu Gothic" pitchFamily="34" charset="-122"/>
-                <a:cs typeface="Yu Gothic" pitchFamily="34" charset="-120"/>
-              </a:rPr>
-              <a:t>クリエ様の解約条件・閉店日の確定</a:t>
-            </a:r>
-            <a:endParaRPr lang="en-US" sz="800" dirty="0"/>
-          </a:p>
-        </p:txBody>
-      </p:sp>
-      <p:sp>
-        <p:nvSpPr>
-          <p:cNvPr id="54" name="Text 50"/>
-          <p:cNvSpPr/>
-          <p:nvPr/>
-        </p:nvSpPr>
-        <p:spPr>
-          <a:xfrm>
-            <a:off x="4526280" y="5715000"/>
-            <a:ext cx="164592" cy="155448"/>
-          </a:xfrm>
-          <a:prstGeom prst="rect">
-            <a:avLst/>
-          </a:prstGeom>
-          <a:noFill/>
-          <a:ln/>
-        </p:spPr>
-        <p:txBody>
-          <a:bodyPr wrap="square" lIns="0" tIns="0" rIns="0" bIns="0" rtlCol="0" anchor="ctr"/>
-          <a:lstStyle/>
-          <a:p>
-            <a:pPr indent="0" marL="0">
-              <a:buNone/>
-            </a:pPr>
-            <a:r>
-              <a:rPr lang="en-US" sz="700" b="1" dirty="0">
-                <a:solidFill>
-                  <a:srgbClr val="A8761F"/>
-                </a:solidFill>
-                <a:latin typeface="Yu Gothic" pitchFamily="34" charset="0"/>
-                <a:ea typeface="Yu Gothic" pitchFamily="34" charset="-122"/>
-                <a:cs typeface="Yu Gothic" pitchFamily="34" charset="-120"/>
-              </a:rPr>
-              <a:t>★</a:t>
-            </a:r>
-            <a:endParaRPr lang="en-US" sz="700" dirty="0"/>
-          </a:p>
-        </p:txBody>
-      </p:sp>
-      <p:sp>
-        <p:nvSpPr>
-          <p:cNvPr id="55" name="Text 51"/>
-          <p:cNvSpPr/>
-          <p:nvPr/>
-        </p:nvSpPr>
-        <p:spPr>
-          <a:xfrm>
-            <a:off x="4709160" y="5715000"/>
-            <a:ext cx="2478024" cy="155448"/>
-          </a:xfrm>
-          <a:prstGeom prst="rect">
-            <a:avLst/>
-          </a:prstGeom>
-          <a:noFill/>
-          <a:ln/>
-        </p:spPr>
-        <p:txBody>
-          <a:bodyPr wrap="square" lIns="0" tIns="0" rIns="0" bIns="0" rtlCol="0" anchor="ctr"/>
-          <a:lstStyle/>
-          <a:p>
-            <a:pPr indent="0" marL="0">
-              <a:buNone/>
-            </a:pPr>
-            <a:r>
-              <a:rPr lang="en-US" sz="800" b="1" dirty="0">
-                <a:solidFill>
-                  <a:srgbClr val="0A3D23"/>
-                </a:solidFill>
-                <a:latin typeface="Yu Gothic" pitchFamily="34" charset="0"/>
-                <a:ea typeface="Yu Gothic" pitchFamily="34" charset="-122"/>
-                <a:cs typeface="Yu Gothic" pitchFamily="34" charset="-120"/>
-              </a:rPr>
-              <a:t>原状回復の範囲（造作・床・設備の残置）</a:t>
-            </a:r>
-            <a:endParaRPr lang="en-US" sz="800" dirty="0"/>
-          </a:p>
-        </p:txBody>
-      </p:sp>
-      <p:sp>
-        <p:nvSpPr>
-          <p:cNvPr id="56" name="Text 52"/>
-          <p:cNvSpPr/>
-          <p:nvPr/>
-        </p:nvSpPr>
-        <p:spPr>
-          <a:xfrm>
-            <a:off x="4526280" y="5870448"/>
-            <a:ext cx="164592" cy="155448"/>
-          </a:xfrm>
-          <a:prstGeom prst="rect">
-            <a:avLst/>
-          </a:prstGeom>
-          <a:noFill/>
-          <a:ln/>
-        </p:spPr>
-        <p:txBody>
-          <a:bodyPr wrap="square" lIns="0" tIns="0" rIns="0" bIns="0" rtlCol="0" anchor="ctr"/>
-          <a:lstStyle/>
-          <a:p>
-            <a:pPr indent="0" marL="0">
-              <a:buNone/>
-            </a:pPr>
-            <a:r>
-              <a:rPr lang="en-US" sz="700" b="1" dirty="0">
-                <a:solidFill>
-                  <a:srgbClr val="A8761F"/>
-                </a:solidFill>
-                <a:latin typeface="Yu Gothic" pitchFamily="34" charset="0"/>
-                <a:ea typeface="Yu Gothic" pitchFamily="34" charset="-122"/>
-                <a:cs typeface="Yu Gothic" pitchFamily="34" charset="-120"/>
-              </a:rPr>
-              <a:t>★</a:t>
-            </a:r>
-            <a:endParaRPr lang="en-US" sz="700" dirty="0"/>
-          </a:p>
-        </p:txBody>
-      </p:sp>
-      <p:sp>
-        <p:nvSpPr>
-          <p:cNvPr id="57" name="Text 53"/>
-          <p:cNvSpPr/>
-          <p:nvPr/>
-        </p:nvSpPr>
-        <p:spPr>
-          <a:xfrm>
-            <a:off x="4709160" y="5870448"/>
-            <a:ext cx="2478024" cy="155448"/>
-          </a:xfrm>
-          <a:prstGeom prst="rect">
-            <a:avLst/>
-          </a:prstGeom>
-          <a:noFill/>
-          <a:ln/>
-        </p:spPr>
-        <p:txBody>
-          <a:bodyPr wrap="square" lIns="0" tIns="0" rIns="0" bIns="0" rtlCol="0" anchor="ctr"/>
-          <a:lstStyle/>
-          <a:p>
-            <a:pPr indent="0" marL="0">
-              <a:buNone/>
-            </a:pPr>
-            <a:r>
-              <a:rPr lang="en-US" sz="800" b="1" dirty="0">
-                <a:solidFill>
-                  <a:srgbClr val="0A3D23"/>
-                </a:solidFill>
-                <a:latin typeface="Yu Gothic" pitchFamily="34" charset="0"/>
-                <a:ea typeface="Yu Gothic" pitchFamily="34" charset="-122"/>
-                <a:cs typeface="Yu Gothic" pitchFamily="34" charset="-120"/>
-              </a:rPr>
-              <a:t>残置する既存設備（給排水・電気容量）</a:t>
-            </a:r>
-            <a:endParaRPr lang="en-US" sz="800" dirty="0"/>
-          </a:p>
-        </p:txBody>
-      </p:sp>
-      <p:sp>
-        <p:nvSpPr>
-          <p:cNvPr id="58" name="Text 54"/>
-          <p:cNvSpPr/>
-          <p:nvPr/>
-        </p:nvSpPr>
-        <p:spPr>
-          <a:xfrm>
-            <a:off x="4526280" y="6025896"/>
-            <a:ext cx="164592" cy="155448"/>
-          </a:xfrm>
-          <a:prstGeom prst="rect">
-            <a:avLst/>
-          </a:prstGeom>
-          <a:noFill/>
-          <a:ln/>
-        </p:spPr>
-        <p:txBody>
-          <a:bodyPr wrap="square" lIns="0" tIns="0" rIns="0" bIns="0" rtlCol="0" anchor="ctr"/>
-          <a:lstStyle/>
-          <a:p>
-            <a:pPr indent="0" marL="0">
-              <a:buNone/>
-            </a:pPr>
-            <a:r>
-              <a:rPr lang="en-US" sz="700" b="1" dirty="0">
-                <a:solidFill>
-                  <a:srgbClr val="A8761F"/>
-                </a:solidFill>
-                <a:latin typeface="Yu Gothic" pitchFamily="34" charset="0"/>
-                <a:ea typeface="Yu Gothic" pitchFamily="34" charset="-122"/>
-                <a:cs typeface="Yu Gothic" pitchFamily="34" charset="-120"/>
-              </a:rPr>
-              <a:t>★</a:t>
-            </a:r>
-            <a:endParaRPr lang="en-US" sz="700" dirty="0"/>
-          </a:p>
-        </p:txBody>
-      </p:sp>
-      <p:sp>
-        <p:nvSpPr>
-          <p:cNvPr id="59" name="Text 55"/>
-          <p:cNvSpPr/>
-          <p:nvPr/>
-        </p:nvSpPr>
-        <p:spPr>
-          <a:xfrm>
-            <a:off x="4709160" y="6025896"/>
-            <a:ext cx="2478024" cy="155448"/>
-          </a:xfrm>
-          <a:prstGeom prst="rect">
-            <a:avLst/>
-          </a:prstGeom>
-          <a:noFill/>
-          <a:ln/>
-        </p:spPr>
-        <p:txBody>
-          <a:bodyPr wrap="square" lIns="0" tIns="0" rIns="0" bIns="0" rtlCol="0" anchor="ctr"/>
-          <a:lstStyle/>
-          <a:p>
-            <a:pPr indent="0" marL="0">
-              <a:buNone/>
-            </a:pPr>
-            <a:r>
-              <a:rPr lang="en-US" sz="800" b="1" dirty="0">
-                <a:solidFill>
-                  <a:srgbClr val="0A3D23"/>
-                </a:solidFill>
-                <a:latin typeface="Yu Gothic" pitchFamily="34" charset="0"/>
-                <a:ea typeface="Yu Gothic" pitchFamily="34" charset="-122"/>
-                <a:cs typeface="Yu Gothic" pitchFamily="34" charset="-120"/>
-              </a:rPr>
-              <a:t>ネット回線の新規敷設（12月中に申込）</a:t>
-            </a:r>
-            <a:endParaRPr lang="en-US" sz="800" dirty="0"/>
-          </a:p>
-        </p:txBody>
-      </p:sp>
-      <p:sp>
-        <p:nvSpPr>
-          <p:cNvPr id="60" name="Text 56"/>
-          <p:cNvSpPr/>
-          <p:nvPr/>
-        </p:nvSpPr>
-        <p:spPr>
-          <a:xfrm>
-            <a:off x="4526280" y="6181344"/>
-            <a:ext cx="164592" cy="155448"/>
+          <a:ln/>
+        </p:spPr>
+      </p:sp>
+      <p:sp>
+        <p:nvSpPr>
+          <p:cNvPr id="20" name="Text 15"/>
+          <p:cNvSpPr/>
+          <p:nvPr/>
+        </p:nvSpPr>
+        <p:spPr>
+          <a:xfrm>
+            <a:off x="402336" y="5504688"/>
+            <a:ext cx="128016" cy="141732"/>
           </a:xfrm>
           <a:prstGeom prst="rect">
             <a:avLst/>
@@ -5478,7 +4617,7 @@
             <a:r>
               <a:rPr lang="en-US" sz="800" dirty="0">
                 <a:solidFill>
-                  <a:srgbClr val="7E8882"/>
+                  <a:srgbClr val="6B6B6B"/>
                 </a:solidFill>
                 <a:latin typeface="Yu Gothic" pitchFamily="34" charset="0"/>
                 <a:ea typeface="Yu Gothic" pitchFamily="34" charset="-122"/>
@@ -5492,14 +4631,14 @@
       </p:sp>
       <p:sp>
         <p:nvSpPr>
-          <p:cNvPr id="61" name="Text 57"/>
-          <p:cNvSpPr/>
-          <p:nvPr/>
-        </p:nvSpPr>
-        <p:spPr>
-          <a:xfrm>
-            <a:off x="4709160" y="6181344"/>
-            <a:ext cx="2478024" cy="155448"/>
+          <p:cNvPr id="21" name="Text 16"/>
+          <p:cNvSpPr/>
+          <p:nvPr/>
+        </p:nvSpPr>
+        <p:spPr>
+          <a:xfrm>
+            <a:off x="530352" y="5504688"/>
+            <a:ext cx="2977896" cy="141732"/>
           </a:xfrm>
           <a:prstGeom prst="rect">
             <a:avLst/>
@@ -5517,13 +4656,13 @@
             <a:r>
               <a:rPr lang="en-US" sz="800" dirty="0">
                 <a:solidFill>
-                  <a:srgbClr val="0A3D23"/>
+                  <a:srgbClr val="333333"/>
                 </a:solidFill>
                 <a:latin typeface="Yu Gothic" pitchFamily="34" charset="0"/>
                 <a:ea typeface="Yu Gothic" pitchFamily="34" charset="-122"/>
                 <a:cs typeface="Yu Gothic" pitchFamily="34" charset="-120"/>
               </a:rPr>
-              <a:t>開業日の確定（契約期間の起算日）</a:t>
+              <a:t>現地内見の日程調整（11月上旬）</a:t>
             </a:r>
             <a:endParaRPr lang="en-US" sz="800" dirty="0"/>
           </a:p>
@@ -5531,14 +4670,14 @@
       </p:sp>
       <p:sp>
         <p:nvSpPr>
-          <p:cNvPr id="62" name="Text 58"/>
-          <p:cNvSpPr/>
-          <p:nvPr/>
-        </p:nvSpPr>
-        <p:spPr>
-          <a:xfrm>
-            <a:off x="4526280" y="6336792"/>
-            <a:ext cx="164592" cy="155448"/>
+          <p:cNvPr id="22" name="Text 17"/>
+          <p:cNvSpPr/>
+          <p:nvPr/>
+        </p:nvSpPr>
+        <p:spPr>
+          <a:xfrm>
+            <a:off x="402336" y="5646420"/>
+            <a:ext cx="128016" cy="141732"/>
           </a:xfrm>
           <a:prstGeom prst="rect">
             <a:avLst/>
@@ -5556,7 +4695,7 @@
             <a:r>
               <a:rPr lang="en-US" sz="800" dirty="0">
                 <a:solidFill>
-                  <a:srgbClr val="7E8882"/>
+                  <a:srgbClr val="6B6B6B"/>
                 </a:solidFill>
                 <a:latin typeface="Yu Gothic" pitchFamily="34" charset="0"/>
                 <a:ea typeface="Yu Gothic" pitchFamily="34" charset="-122"/>
@@ -5570,14 +4709,14 @@
       </p:sp>
       <p:sp>
         <p:nvSpPr>
-          <p:cNvPr id="63" name="Text 59"/>
-          <p:cNvSpPr/>
-          <p:nvPr/>
-        </p:nvSpPr>
-        <p:spPr>
-          <a:xfrm>
-            <a:off x="4709160" y="6336792"/>
-            <a:ext cx="2478024" cy="155448"/>
+          <p:cNvPr id="23" name="Text 18"/>
+          <p:cNvSpPr/>
+          <p:nvPr/>
+        </p:nvSpPr>
+        <p:spPr>
+          <a:xfrm>
+            <a:off x="530352" y="5646420"/>
+            <a:ext cx="2977896" cy="141732"/>
           </a:xfrm>
           <a:prstGeom prst="rect">
             <a:avLst/>
@@ -5595,13 +4734,13 @@
             <a:r>
               <a:rPr lang="en-US" sz="800" dirty="0">
                 <a:solidFill>
-                  <a:srgbClr val="0A3D23"/>
+                  <a:srgbClr val="333333"/>
                 </a:solidFill>
                 <a:latin typeface="Yu Gothic" pitchFamily="34" charset="0"/>
                 <a:ea typeface="Yu Gothic" pitchFamily="34" charset="-122"/>
                 <a:cs typeface="Yu Gothic" pitchFamily="34" charset="-120"/>
               </a:rPr>
-              <a:t>カメラ映像（個人情報）の取扱いの取決め</a:t>
+              <a:t>レイアウト図および什器リストの作成（30坪）</a:t>
             </a:r>
             <a:endParaRPr lang="en-US" sz="800" dirty="0"/>
           </a:p>
@@ -5609,14 +4748,14 @@
       </p:sp>
       <p:sp>
         <p:nvSpPr>
-          <p:cNvPr id="64" name="Text 60"/>
-          <p:cNvSpPr/>
-          <p:nvPr/>
-        </p:nvSpPr>
-        <p:spPr>
-          <a:xfrm>
-            <a:off x="4526280" y="6492240"/>
-            <a:ext cx="164592" cy="155448"/>
+          <p:cNvPr id="24" name="Text 19"/>
+          <p:cNvSpPr/>
+          <p:nvPr/>
+        </p:nvSpPr>
+        <p:spPr>
+          <a:xfrm>
+            <a:off x="402336" y="5788152"/>
+            <a:ext cx="128016" cy="141732"/>
           </a:xfrm>
           <a:prstGeom prst="rect">
             <a:avLst/>
@@ -5634,7 +4773,7 @@
             <a:r>
               <a:rPr lang="en-US" sz="800" dirty="0">
                 <a:solidFill>
-                  <a:srgbClr val="7E8882"/>
+                  <a:srgbClr val="6B6B6B"/>
                 </a:solidFill>
                 <a:latin typeface="Yu Gothic" pitchFamily="34" charset="0"/>
                 <a:ea typeface="Yu Gothic" pitchFamily="34" charset="-122"/>
@@ -5648,14 +4787,14 @@
       </p:sp>
       <p:sp>
         <p:nvSpPr>
-          <p:cNvPr id="65" name="Text 61"/>
-          <p:cNvSpPr/>
-          <p:nvPr/>
-        </p:nvSpPr>
-        <p:spPr>
-          <a:xfrm>
-            <a:off x="4709160" y="6492240"/>
-            <a:ext cx="2478024" cy="155448"/>
+          <p:cNvPr id="25" name="Text 20"/>
+          <p:cNvSpPr/>
+          <p:nvPr/>
+        </p:nvSpPr>
+        <p:spPr>
+          <a:xfrm>
+            <a:off x="530352" y="5788152"/>
+            <a:ext cx="2977896" cy="141732"/>
           </a:xfrm>
           <a:prstGeom prst="rect">
             <a:avLst/>
@@ -5673,7 +4812,1173 @@
             <a:r>
               <a:rPr lang="en-US" sz="800" dirty="0">
                 <a:solidFill>
-                  <a:srgbClr val="0A3D23"/>
+                  <a:srgbClr val="333333"/>
+                </a:solidFill>
+                <a:latin typeface="Yu Gothic" pitchFamily="34" charset="0"/>
+                <a:ea typeface="Yu Gothic" pitchFamily="34" charset="-122"/>
+                <a:cs typeface="Yu Gothic" pitchFamily="34" charset="-120"/>
+              </a:rPr>
+              <a:t>設置工事費のご案内（30〜50万円・税抜）</a:t>
+            </a:r>
+            <a:endParaRPr lang="en-US" sz="800" dirty="0"/>
+          </a:p>
+        </p:txBody>
+      </p:sp>
+      <p:sp>
+        <p:nvSpPr>
+          <p:cNvPr id="26" name="Text 21"/>
+          <p:cNvSpPr/>
+          <p:nvPr/>
+        </p:nvSpPr>
+        <p:spPr>
+          <a:xfrm>
+            <a:off x="402336" y="5929884"/>
+            <a:ext cx="128016" cy="141732"/>
+          </a:xfrm>
+          <a:prstGeom prst="rect">
+            <a:avLst/>
+          </a:prstGeom>
+          <a:noFill/>
+          <a:ln/>
+        </p:spPr>
+        <p:txBody>
+          <a:bodyPr wrap="square" lIns="0" tIns="0" rIns="0" bIns="0" rtlCol="0" anchor="ctr"/>
+          <a:lstStyle/>
+          <a:p>
+            <a:pPr indent="0" marL="0">
+              <a:buNone/>
+            </a:pPr>
+            <a:r>
+              <a:rPr lang="en-US" sz="800" dirty="0">
+                <a:solidFill>
+                  <a:srgbClr val="6B6B6B"/>
+                </a:solidFill>
+                <a:latin typeface="Yu Gothic" pitchFamily="34" charset="0"/>
+                <a:ea typeface="Yu Gothic" pitchFamily="34" charset="-122"/>
+                <a:cs typeface="Yu Gothic" pitchFamily="34" charset="-120"/>
+              </a:rPr>
+              <a:t>・</a:t>
+            </a:r>
+            <a:endParaRPr lang="en-US" sz="800" dirty="0"/>
+          </a:p>
+        </p:txBody>
+      </p:sp>
+      <p:sp>
+        <p:nvSpPr>
+          <p:cNvPr id="27" name="Text 22"/>
+          <p:cNvSpPr/>
+          <p:nvPr/>
+        </p:nvSpPr>
+        <p:spPr>
+          <a:xfrm>
+            <a:off x="530352" y="5929884"/>
+            <a:ext cx="2977896" cy="141732"/>
+          </a:xfrm>
+          <a:prstGeom prst="rect">
+            <a:avLst/>
+          </a:prstGeom>
+          <a:noFill/>
+          <a:ln/>
+        </p:spPr>
+        <p:txBody>
+          <a:bodyPr wrap="square" lIns="0" tIns="0" rIns="0" bIns="0" rtlCol="0" anchor="ctr"/>
+          <a:lstStyle/>
+          <a:p>
+            <a:pPr indent="0" marL="0">
+              <a:buNone/>
+            </a:pPr>
+            <a:r>
+              <a:rPr lang="en-US" sz="800" dirty="0">
+                <a:solidFill>
+                  <a:srgbClr val="333333"/>
+                </a:solidFill>
+                <a:latin typeface="Yu Gothic" pitchFamily="34" charset="0"/>
+                <a:ea typeface="Yu Gothic" pitchFamily="34" charset="-122"/>
+                <a:cs typeface="Yu Gothic" pitchFamily="34" charset="-120"/>
+              </a:rPr>
+              <a:t>業務委託契約書のドラフト送付</a:t>
+            </a:r>
+            <a:endParaRPr lang="en-US" sz="800" dirty="0"/>
+          </a:p>
+        </p:txBody>
+      </p:sp>
+      <p:sp>
+        <p:nvSpPr>
+          <p:cNvPr id="28" name="Text 23"/>
+          <p:cNvSpPr/>
+          <p:nvPr/>
+        </p:nvSpPr>
+        <p:spPr>
+          <a:xfrm>
+            <a:off x="402336" y="6071616"/>
+            <a:ext cx="128016" cy="141732"/>
+          </a:xfrm>
+          <a:prstGeom prst="rect">
+            <a:avLst/>
+          </a:prstGeom>
+          <a:noFill/>
+          <a:ln/>
+        </p:spPr>
+        <p:txBody>
+          <a:bodyPr wrap="square" lIns="0" tIns="0" rIns="0" bIns="0" rtlCol="0" anchor="ctr"/>
+          <a:lstStyle/>
+          <a:p>
+            <a:pPr indent="0" marL="0">
+              <a:buNone/>
+            </a:pPr>
+            <a:r>
+              <a:rPr lang="en-US" sz="800" dirty="0">
+                <a:solidFill>
+                  <a:srgbClr val="6B6B6B"/>
+                </a:solidFill>
+                <a:latin typeface="Yu Gothic" pitchFamily="34" charset="0"/>
+                <a:ea typeface="Yu Gothic" pitchFamily="34" charset="-122"/>
+                <a:cs typeface="Yu Gothic" pitchFamily="34" charset="-120"/>
+              </a:rPr>
+              <a:t>・</a:t>
+            </a:r>
+            <a:endParaRPr lang="en-US" sz="800" dirty="0"/>
+          </a:p>
+        </p:txBody>
+      </p:sp>
+      <p:sp>
+        <p:nvSpPr>
+          <p:cNvPr id="29" name="Text 24"/>
+          <p:cNvSpPr/>
+          <p:nvPr/>
+        </p:nvSpPr>
+        <p:spPr>
+          <a:xfrm>
+            <a:off x="530352" y="6071616"/>
+            <a:ext cx="2977896" cy="141732"/>
+          </a:xfrm>
+          <a:prstGeom prst="rect">
+            <a:avLst/>
+          </a:prstGeom>
+          <a:noFill/>
+          <a:ln/>
+        </p:spPr>
+        <p:txBody>
+          <a:bodyPr wrap="square" lIns="0" tIns="0" rIns="0" bIns="0" rtlCol="0" anchor="ctr"/>
+          <a:lstStyle/>
+          <a:p>
+            <a:pPr indent="0" marL="0">
+              <a:buNone/>
+            </a:pPr>
+            <a:r>
+              <a:rPr lang="en-US" sz="800" dirty="0">
+                <a:solidFill>
+                  <a:srgbClr val="333333"/>
+                </a:solidFill>
+                <a:latin typeface="Yu Gothic" pitchFamily="34" charset="0"/>
+                <a:ea typeface="Yu Gothic" pitchFamily="34" charset="-122"/>
+                <a:cs typeface="Yu Gothic" pitchFamily="34" charset="-120"/>
+              </a:rPr>
+              <a:t>カメラ映像の取扱いに関する取り決めのご提示</a:t>
+            </a:r>
+            <a:endParaRPr lang="en-US" sz="800" dirty="0"/>
+          </a:p>
+        </p:txBody>
+      </p:sp>
+      <p:sp>
+        <p:nvSpPr>
+          <p:cNvPr id="30" name="Text 25"/>
+          <p:cNvSpPr/>
+          <p:nvPr/>
+        </p:nvSpPr>
+        <p:spPr>
+          <a:xfrm>
+            <a:off x="402336" y="6213348"/>
+            <a:ext cx="128016" cy="141732"/>
+          </a:xfrm>
+          <a:prstGeom prst="rect">
+            <a:avLst/>
+          </a:prstGeom>
+          <a:noFill/>
+          <a:ln/>
+        </p:spPr>
+        <p:txBody>
+          <a:bodyPr wrap="square" lIns="0" tIns="0" rIns="0" bIns="0" rtlCol="0" anchor="ctr"/>
+          <a:lstStyle/>
+          <a:p>
+            <a:pPr indent="0" marL="0">
+              <a:buNone/>
+            </a:pPr>
+            <a:r>
+              <a:rPr lang="en-US" sz="800" dirty="0">
+                <a:solidFill>
+                  <a:srgbClr val="6B6B6B"/>
+                </a:solidFill>
+                <a:latin typeface="Yu Gothic" pitchFamily="34" charset="0"/>
+                <a:ea typeface="Yu Gothic" pitchFamily="34" charset="-122"/>
+                <a:cs typeface="Yu Gothic" pitchFamily="34" charset="-120"/>
+              </a:rPr>
+              <a:t>・</a:t>
+            </a:r>
+            <a:endParaRPr lang="en-US" sz="800" dirty="0"/>
+          </a:p>
+        </p:txBody>
+      </p:sp>
+      <p:sp>
+        <p:nvSpPr>
+          <p:cNvPr id="31" name="Text 26"/>
+          <p:cNvSpPr/>
+          <p:nvPr/>
+        </p:nvSpPr>
+        <p:spPr>
+          <a:xfrm>
+            <a:off x="530352" y="6213348"/>
+            <a:ext cx="2977896" cy="141732"/>
+          </a:xfrm>
+          <a:prstGeom prst="rect">
+            <a:avLst/>
+          </a:prstGeom>
+          <a:noFill/>
+          <a:ln/>
+        </p:spPr>
+        <p:txBody>
+          <a:bodyPr wrap="square" lIns="0" tIns="0" rIns="0" bIns="0" rtlCol="0" anchor="ctr"/>
+          <a:lstStyle/>
+          <a:p>
+            <a:pPr indent="0" marL="0">
+              <a:buNone/>
+            </a:pPr>
+            <a:r>
+              <a:rPr lang="en-US" sz="800" dirty="0">
+                <a:solidFill>
+                  <a:srgbClr val="333333"/>
+                </a:solidFill>
+                <a:latin typeface="Yu Gothic" pitchFamily="34" charset="0"/>
+                <a:ea typeface="Yu Gothic" pitchFamily="34" charset="-122"/>
+                <a:cs typeface="Yu Gothic" pitchFamily="34" charset="-120"/>
+              </a:rPr>
+              <a:t>館への工事申請用 図面・仕様書の作成</a:t>
+            </a:r>
+            <a:endParaRPr lang="en-US" sz="800" dirty="0"/>
+          </a:p>
+        </p:txBody>
+      </p:sp>
+      <p:sp>
+        <p:nvSpPr>
+          <p:cNvPr id="32" name="Text 27"/>
+          <p:cNvSpPr/>
+          <p:nvPr/>
+        </p:nvSpPr>
+        <p:spPr>
+          <a:xfrm>
+            <a:off x="402336" y="6355080"/>
+            <a:ext cx="128016" cy="141732"/>
+          </a:xfrm>
+          <a:prstGeom prst="rect">
+            <a:avLst/>
+          </a:prstGeom>
+          <a:noFill/>
+          <a:ln/>
+        </p:spPr>
+        <p:txBody>
+          <a:bodyPr wrap="square" lIns="0" tIns="0" rIns="0" bIns="0" rtlCol="0" anchor="ctr"/>
+          <a:lstStyle/>
+          <a:p>
+            <a:pPr indent="0" marL="0">
+              <a:buNone/>
+            </a:pPr>
+            <a:r>
+              <a:rPr lang="en-US" sz="800" dirty="0">
+                <a:solidFill>
+                  <a:srgbClr val="6B6B6B"/>
+                </a:solidFill>
+                <a:latin typeface="Yu Gothic" pitchFamily="34" charset="0"/>
+                <a:ea typeface="Yu Gothic" pitchFamily="34" charset="-122"/>
+                <a:cs typeface="Yu Gothic" pitchFamily="34" charset="-120"/>
+              </a:rPr>
+              <a:t>・</a:t>
+            </a:r>
+            <a:endParaRPr lang="en-US" sz="800" dirty="0"/>
+          </a:p>
+        </p:txBody>
+      </p:sp>
+      <p:sp>
+        <p:nvSpPr>
+          <p:cNvPr id="33" name="Text 28"/>
+          <p:cNvSpPr/>
+          <p:nvPr/>
+        </p:nvSpPr>
+        <p:spPr>
+          <a:xfrm>
+            <a:off x="530352" y="6355080"/>
+            <a:ext cx="2977896" cy="141732"/>
+          </a:xfrm>
+          <a:prstGeom prst="rect">
+            <a:avLst/>
+          </a:prstGeom>
+          <a:noFill/>
+          <a:ln/>
+        </p:spPr>
+        <p:txBody>
+          <a:bodyPr wrap="square" lIns="0" tIns="0" rIns="0" bIns="0" rtlCol="0" anchor="ctr"/>
+          <a:lstStyle/>
+          <a:p>
+            <a:pPr indent="0" marL="0">
+              <a:buNone/>
+            </a:pPr>
+            <a:r>
+              <a:rPr lang="en-US" sz="800" dirty="0">
+                <a:solidFill>
+                  <a:srgbClr val="333333"/>
+                </a:solidFill>
+                <a:latin typeface="Yu Gothic" pitchFamily="34" charset="0"/>
+                <a:ea typeface="Yu Gothic" pitchFamily="34" charset="-122"/>
+                <a:cs typeface="Yu Gothic" pitchFamily="34" charset="-120"/>
+              </a:rPr>
+              <a:t>什器・機器の発注（12月上旬）</a:t>
+            </a:r>
+            <a:endParaRPr lang="en-US" sz="800" dirty="0"/>
+          </a:p>
+        </p:txBody>
+      </p:sp>
+      <p:sp>
+        <p:nvSpPr>
+          <p:cNvPr id="34" name="Text 29"/>
+          <p:cNvSpPr/>
+          <p:nvPr/>
+        </p:nvSpPr>
+        <p:spPr>
+          <a:xfrm>
+            <a:off x="402336" y="6496812"/>
+            <a:ext cx="128016" cy="141732"/>
+          </a:xfrm>
+          <a:prstGeom prst="rect">
+            <a:avLst/>
+          </a:prstGeom>
+          <a:noFill/>
+          <a:ln/>
+        </p:spPr>
+        <p:txBody>
+          <a:bodyPr wrap="square" lIns="0" tIns="0" rIns="0" bIns="0" rtlCol="0" anchor="ctr"/>
+          <a:lstStyle/>
+          <a:p>
+            <a:pPr indent="0" marL="0">
+              <a:buNone/>
+            </a:pPr>
+            <a:r>
+              <a:rPr lang="en-US" sz="800" dirty="0">
+                <a:solidFill>
+                  <a:srgbClr val="6B6B6B"/>
+                </a:solidFill>
+                <a:latin typeface="Yu Gothic" pitchFamily="34" charset="0"/>
+                <a:ea typeface="Yu Gothic" pitchFamily="34" charset="-122"/>
+                <a:cs typeface="Yu Gothic" pitchFamily="34" charset="-120"/>
+              </a:rPr>
+              <a:t>・</a:t>
+            </a:r>
+            <a:endParaRPr lang="en-US" sz="800" dirty="0"/>
+          </a:p>
+        </p:txBody>
+      </p:sp>
+      <p:sp>
+        <p:nvSpPr>
+          <p:cNvPr id="35" name="Text 30"/>
+          <p:cNvSpPr/>
+          <p:nvPr/>
+        </p:nvSpPr>
+        <p:spPr>
+          <a:xfrm>
+            <a:off x="530352" y="6496812"/>
+            <a:ext cx="2977896" cy="141732"/>
+          </a:xfrm>
+          <a:prstGeom prst="rect">
+            <a:avLst/>
+          </a:prstGeom>
+          <a:noFill/>
+          <a:ln/>
+        </p:spPr>
+        <p:txBody>
+          <a:bodyPr wrap="square" lIns="0" tIns="0" rIns="0" bIns="0" rtlCol="0" anchor="ctr"/>
+          <a:lstStyle/>
+          <a:p>
+            <a:pPr indent="0" marL="0">
+              <a:buNone/>
+            </a:pPr>
+            <a:r>
+              <a:rPr lang="en-US" sz="800" dirty="0">
+                <a:solidFill>
+                  <a:srgbClr val="333333"/>
+                </a:solidFill>
+                <a:latin typeface="Yu Gothic" pitchFamily="34" charset="0"/>
+                <a:ea typeface="Yu Gothic" pitchFamily="34" charset="-122"/>
+                <a:cs typeface="Yu Gothic" pitchFamily="34" charset="-120"/>
+              </a:rPr>
+              <a:t>内装工事、機器設置および試運転</a:t>
+            </a:r>
+            <a:endParaRPr lang="en-US" sz="800" dirty="0"/>
+          </a:p>
+        </p:txBody>
+      </p:sp>
+      <p:sp>
+        <p:nvSpPr>
+          <p:cNvPr id="36" name="Text 31"/>
+          <p:cNvSpPr/>
+          <p:nvPr/>
+        </p:nvSpPr>
+        <p:spPr>
+          <a:xfrm>
+            <a:off x="402336" y="6638544"/>
+            <a:ext cx="128016" cy="141732"/>
+          </a:xfrm>
+          <a:prstGeom prst="rect">
+            <a:avLst/>
+          </a:prstGeom>
+          <a:noFill/>
+          <a:ln/>
+        </p:spPr>
+        <p:txBody>
+          <a:bodyPr wrap="square" lIns="0" tIns="0" rIns="0" bIns="0" rtlCol="0" anchor="ctr"/>
+          <a:lstStyle/>
+          <a:p>
+            <a:pPr indent="0" marL="0">
+              <a:buNone/>
+            </a:pPr>
+            <a:r>
+              <a:rPr lang="en-US" sz="800" dirty="0">
+                <a:solidFill>
+                  <a:srgbClr val="6B6B6B"/>
+                </a:solidFill>
+                <a:latin typeface="Yu Gothic" pitchFamily="34" charset="0"/>
+                <a:ea typeface="Yu Gothic" pitchFamily="34" charset="-122"/>
+                <a:cs typeface="Yu Gothic" pitchFamily="34" charset="-120"/>
+              </a:rPr>
+              <a:t>・</a:t>
+            </a:r>
+            <a:endParaRPr lang="en-US" sz="800" dirty="0"/>
+          </a:p>
+        </p:txBody>
+      </p:sp>
+      <p:sp>
+        <p:nvSpPr>
+          <p:cNvPr id="37" name="Text 32"/>
+          <p:cNvSpPr/>
+          <p:nvPr/>
+        </p:nvSpPr>
+        <p:spPr>
+          <a:xfrm>
+            <a:off x="530352" y="6638544"/>
+            <a:ext cx="2977896" cy="141732"/>
+          </a:xfrm>
+          <a:prstGeom prst="rect">
+            <a:avLst/>
+          </a:prstGeom>
+          <a:noFill/>
+          <a:ln/>
+        </p:spPr>
+        <p:txBody>
+          <a:bodyPr wrap="square" lIns="0" tIns="0" rIns="0" bIns="0" rtlCol="0" anchor="ctr"/>
+          <a:lstStyle/>
+          <a:p>
+            <a:pPr indent="0" marL="0">
+              <a:buNone/>
+            </a:pPr>
+            <a:r>
+              <a:rPr lang="en-US" sz="800" dirty="0">
+                <a:solidFill>
+                  <a:srgbClr val="333333"/>
+                </a:solidFill>
+                <a:latin typeface="Yu Gothic" pitchFamily="34" charset="0"/>
+                <a:ea typeface="Yu Gothic" pitchFamily="34" charset="-122"/>
+                <a:cs typeface="Yu Gothic" pitchFamily="34" charset="-120"/>
+              </a:rPr>
+              <a:t>開業スケジュール確定版のご提示（内見後）</a:t>
+            </a:r>
+            <a:endParaRPr lang="en-US" sz="800" dirty="0"/>
+          </a:p>
+        </p:txBody>
+      </p:sp>
+      <p:sp>
+        <p:nvSpPr>
+          <p:cNvPr id="38" name="Text 33"/>
+          <p:cNvSpPr/>
+          <p:nvPr/>
+        </p:nvSpPr>
+        <p:spPr>
+          <a:xfrm>
+            <a:off x="402336" y="6780276"/>
+            <a:ext cx="128016" cy="141732"/>
+          </a:xfrm>
+          <a:prstGeom prst="rect">
+            <a:avLst/>
+          </a:prstGeom>
+          <a:noFill/>
+          <a:ln/>
+        </p:spPr>
+        <p:txBody>
+          <a:bodyPr wrap="square" lIns="0" tIns="0" rIns="0" bIns="0" rtlCol="0" anchor="ctr"/>
+          <a:lstStyle/>
+          <a:p>
+            <a:pPr indent="0" marL="0">
+              <a:buNone/>
+            </a:pPr>
+            <a:r>
+              <a:rPr lang="en-US" sz="800" dirty="0">
+                <a:solidFill>
+                  <a:srgbClr val="6B6B6B"/>
+                </a:solidFill>
+                <a:latin typeface="Yu Gothic" pitchFamily="34" charset="0"/>
+                <a:ea typeface="Yu Gothic" pitchFamily="34" charset="-122"/>
+                <a:cs typeface="Yu Gothic" pitchFamily="34" charset="-120"/>
+              </a:rPr>
+              <a:t>・</a:t>
+            </a:r>
+            <a:endParaRPr lang="en-US" sz="800" dirty="0"/>
+          </a:p>
+        </p:txBody>
+      </p:sp>
+      <p:sp>
+        <p:nvSpPr>
+          <p:cNvPr id="39" name="Text 34"/>
+          <p:cNvSpPr/>
+          <p:nvPr/>
+        </p:nvSpPr>
+        <p:spPr>
+          <a:xfrm>
+            <a:off x="530352" y="6780276"/>
+            <a:ext cx="2977896" cy="141732"/>
+          </a:xfrm>
+          <a:prstGeom prst="rect">
+            <a:avLst/>
+          </a:prstGeom>
+          <a:noFill/>
+          <a:ln/>
+        </p:spPr>
+        <p:txBody>
+          <a:bodyPr wrap="square" lIns="0" tIns="0" rIns="0" bIns="0" rtlCol="0" anchor="ctr"/>
+          <a:lstStyle/>
+          <a:p>
+            <a:pPr indent="0" marL="0">
+              <a:buNone/>
+            </a:pPr>
+            <a:r>
+              <a:rPr lang="en-US" sz="800" dirty="0">
+                <a:solidFill>
+                  <a:srgbClr val="333333"/>
+                </a:solidFill>
+                <a:latin typeface="Yu Gothic" pitchFamily="34" charset="0"/>
+                <a:ea typeface="Yu Gothic" pitchFamily="34" charset="-122"/>
+                <a:cs typeface="Yu Gothic" pitchFamily="34" charset="-120"/>
+              </a:rPr>
+              <a:t>開業後の集客およびお客様対応</a:t>
+            </a:r>
+            <a:endParaRPr lang="en-US" sz="800" dirty="0"/>
+          </a:p>
+        </p:txBody>
+      </p:sp>
+      <p:sp>
+        <p:nvSpPr>
+          <p:cNvPr id="40" name="Shape 35"/>
+          <p:cNvSpPr/>
+          <p:nvPr/>
+        </p:nvSpPr>
+        <p:spPr>
+          <a:xfrm>
+            <a:off x="3782568" y="5129784"/>
+            <a:ext cx="50292" cy="146304"/>
+          </a:xfrm>
+          <a:prstGeom prst="rect">
+            <a:avLst/>
+          </a:prstGeom>
+          <a:solidFill>
+            <a:srgbClr val="0C5230"/>
+          </a:solidFill>
+          <a:ln/>
+        </p:spPr>
+      </p:sp>
+      <p:sp>
+        <p:nvSpPr>
+          <p:cNvPr id="41" name="Text 36"/>
+          <p:cNvSpPr/>
+          <p:nvPr/>
+        </p:nvSpPr>
+        <p:spPr>
+          <a:xfrm>
+            <a:off x="3910584" y="5102352"/>
+            <a:ext cx="2996184" cy="201168"/>
+          </a:xfrm>
+          <a:prstGeom prst="rect">
+            <a:avLst/>
+          </a:prstGeom>
+          <a:noFill/>
+          <a:ln/>
+        </p:spPr>
+        <p:txBody>
+          <a:bodyPr wrap="square" lIns="0" tIns="0" rIns="0" bIns="0" rtlCol="0" anchor="ctr"/>
+          <a:lstStyle/>
+          <a:p>
+            <a:pPr indent="0" marL="0">
+              <a:buNone/>
+            </a:pPr>
+            <a:r>
+              <a:rPr lang="en-US" sz="950" b="1" dirty="0">
+                <a:solidFill>
+                  <a:srgbClr val="1A1A1A"/>
+                </a:solidFill>
+                <a:latin typeface="Yu Gothic" pitchFamily="34" charset="0"/>
+                <a:ea typeface="Yu Gothic" pitchFamily="34" charset="-122"/>
+                <a:cs typeface="Yu Gothic" pitchFamily="34" charset="-120"/>
+              </a:rPr>
+              <a:t>４．貴社にてご確認・ご決定をお願いする事項</a:t>
+            </a:r>
+            <a:endParaRPr lang="en-US" sz="950" dirty="0"/>
+          </a:p>
+        </p:txBody>
+      </p:sp>
+      <p:sp>
+        <p:nvSpPr>
+          <p:cNvPr id="42" name="Shape 37"/>
+          <p:cNvSpPr/>
+          <p:nvPr/>
+        </p:nvSpPr>
+        <p:spPr>
+          <a:xfrm>
+            <a:off x="3782568" y="5321808"/>
+            <a:ext cx="3124200" cy="7315"/>
+          </a:xfrm>
+          <a:prstGeom prst="rect">
+            <a:avLst/>
+          </a:prstGeom>
+          <a:solidFill>
+            <a:srgbClr val="DCDCDC"/>
+          </a:solidFill>
+          <a:ln/>
+        </p:spPr>
+      </p:sp>
+      <p:sp>
+        <p:nvSpPr>
+          <p:cNvPr id="43" name="Text 38"/>
+          <p:cNvSpPr/>
+          <p:nvPr/>
+        </p:nvSpPr>
+        <p:spPr>
+          <a:xfrm>
+            <a:off x="3782568" y="5358384"/>
+            <a:ext cx="3124200" cy="128016"/>
+          </a:xfrm>
+          <a:prstGeom prst="rect">
+            <a:avLst/>
+          </a:prstGeom>
+          <a:noFill/>
+          <a:ln/>
+        </p:spPr>
+        <p:txBody>
+          <a:bodyPr wrap="square" lIns="0" tIns="0" rIns="0" bIns="0" rtlCol="0" anchor="ctr"/>
+          <a:lstStyle/>
+          <a:p>
+            <a:pPr indent="0" marL="0">
+              <a:buNone/>
+            </a:pPr>
+            <a:r>
+              <a:rPr lang="en-US" sz="700" dirty="0">
+                <a:solidFill>
+                  <a:srgbClr val="8A6316"/>
+                </a:solidFill>
+                <a:latin typeface="Yu Gothic" pitchFamily="34" charset="0"/>
+                <a:ea typeface="Yu Gothic" pitchFamily="34" charset="-122"/>
+                <a:cs typeface="Yu Gothic" pitchFamily="34" charset="-120"/>
+              </a:rPr>
+              <a:t>※印は工期に直結いたします</a:t>
+            </a:r>
+            <a:endParaRPr lang="en-US" sz="700" dirty="0"/>
+          </a:p>
+        </p:txBody>
+      </p:sp>
+      <p:sp>
+        <p:nvSpPr>
+          <p:cNvPr id="44" name="Text 39"/>
+          <p:cNvSpPr/>
+          <p:nvPr/>
+        </p:nvSpPr>
+        <p:spPr>
+          <a:xfrm>
+            <a:off x="3800856" y="5504688"/>
+            <a:ext cx="128016" cy="141732"/>
+          </a:xfrm>
+          <a:prstGeom prst="rect">
+            <a:avLst/>
+          </a:prstGeom>
+          <a:noFill/>
+          <a:ln/>
+        </p:spPr>
+        <p:txBody>
+          <a:bodyPr wrap="square" lIns="0" tIns="0" rIns="0" bIns="0" rtlCol="0" anchor="ctr"/>
+          <a:lstStyle/>
+          <a:p>
+            <a:pPr indent="0" marL="0">
+              <a:buNone/>
+            </a:pPr>
+            <a:endParaRPr lang="en-US" sz="800" dirty="0"/>
+          </a:p>
+        </p:txBody>
+      </p:sp>
+      <p:sp>
+        <p:nvSpPr>
+          <p:cNvPr id="45" name="Text 40"/>
+          <p:cNvSpPr/>
+          <p:nvPr/>
+        </p:nvSpPr>
+        <p:spPr>
+          <a:xfrm>
+            <a:off x="3800856" y="5504688"/>
+            <a:ext cx="3105912" cy="141732"/>
+          </a:xfrm>
+          <a:prstGeom prst="rect">
+            <a:avLst/>
+          </a:prstGeom>
+          <a:noFill/>
+          <a:ln/>
+        </p:spPr>
+        <p:txBody>
+          <a:bodyPr wrap="square" lIns="0" tIns="0" rIns="0" bIns="0" rtlCol="0" anchor="ctr"/>
+          <a:lstStyle/>
+          <a:p>
+            <a:pPr indent="0" marL="0">
+              <a:buNone/>
+            </a:pPr>
+            <a:r>
+              <a:rPr lang="en-US" sz="800" b="1" dirty="0">
+                <a:solidFill>
+                  <a:srgbClr val="8A6316"/>
+                </a:solidFill>
+                <a:latin typeface="Yu Gothic" pitchFamily="34" charset="0"/>
+                <a:ea typeface="Yu Gothic" pitchFamily="34" charset="-122"/>
+                <a:cs typeface="Yu Gothic" pitchFamily="34" charset="-120"/>
+              </a:rPr>
+              <a:t>※ カフェ・ド・クリエ様の解約条件・閉店日</a:t>
+            </a:r>
+            <a:endParaRPr lang="en-US" sz="800" dirty="0"/>
+          </a:p>
+        </p:txBody>
+      </p:sp>
+      <p:sp>
+        <p:nvSpPr>
+          <p:cNvPr id="46" name="Text 41"/>
+          <p:cNvSpPr/>
+          <p:nvPr/>
+        </p:nvSpPr>
+        <p:spPr>
+          <a:xfrm>
+            <a:off x="3800856" y="5646420"/>
+            <a:ext cx="128016" cy="141732"/>
+          </a:xfrm>
+          <a:prstGeom prst="rect">
+            <a:avLst/>
+          </a:prstGeom>
+          <a:noFill/>
+          <a:ln/>
+        </p:spPr>
+        <p:txBody>
+          <a:bodyPr wrap="square" lIns="0" tIns="0" rIns="0" bIns="0" rtlCol="0" anchor="ctr"/>
+          <a:lstStyle/>
+          <a:p>
+            <a:pPr indent="0" marL="0">
+              <a:buNone/>
+            </a:pPr>
+            <a:endParaRPr lang="en-US" sz="800" dirty="0"/>
+          </a:p>
+        </p:txBody>
+      </p:sp>
+      <p:sp>
+        <p:nvSpPr>
+          <p:cNvPr id="47" name="Text 42"/>
+          <p:cNvSpPr/>
+          <p:nvPr/>
+        </p:nvSpPr>
+        <p:spPr>
+          <a:xfrm>
+            <a:off x="3800856" y="5646420"/>
+            <a:ext cx="3105912" cy="141732"/>
+          </a:xfrm>
+          <a:prstGeom prst="rect">
+            <a:avLst/>
+          </a:prstGeom>
+          <a:noFill/>
+          <a:ln/>
+        </p:spPr>
+        <p:txBody>
+          <a:bodyPr wrap="square" lIns="0" tIns="0" rIns="0" bIns="0" rtlCol="0" anchor="ctr"/>
+          <a:lstStyle/>
+          <a:p>
+            <a:pPr indent="0" marL="0">
+              <a:buNone/>
+            </a:pPr>
+            <a:r>
+              <a:rPr lang="en-US" sz="800" b="1" dirty="0">
+                <a:solidFill>
+                  <a:srgbClr val="8A6316"/>
+                </a:solidFill>
+                <a:latin typeface="Yu Gothic" pitchFamily="34" charset="0"/>
+                <a:ea typeface="Yu Gothic" pitchFamily="34" charset="-122"/>
+                <a:cs typeface="Yu Gothic" pitchFamily="34" charset="-120"/>
+              </a:rPr>
+              <a:t>※ 原状回復の範囲（造作・床・設備の残置）</a:t>
+            </a:r>
+            <a:endParaRPr lang="en-US" sz="800" dirty="0"/>
+          </a:p>
+        </p:txBody>
+      </p:sp>
+      <p:sp>
+        <p:nvSpPr>
+          <p:cNvPr id="48" name="Text 43"/>
+          <p:cNvSpPr/>
+          <p:nvPr/>
+        </p:nvSpPr>
+        <p:spPr>
+          <a:xfrm>
+            <a:off x="3800856" y="5788152"/>
+            <a:ext cx="128016" cy="141732"/>
+          </a:xfrm>
+          <a:prstGeom prst="rect">
+            <a:avLst/>
+          </a:prstGeom>
+          <a:noFill/>
+          <a:ln/>
+        </p:spPr>
+        <p:txBody>
+          <a:bodyPr wrap="square" lIns="0" tIns="0" rIns="0" bIns="0" rtlCol="0" anchor="ctr"/>
+          <a:lstStyle/>
+          <a:p>
+            <a:pPr indent="0" marL="0">
+              <a:buNone/>
+            </a:pPr>
+            <a:endParaRPr lang="en-US" sz="800" dirty="0"/>
+          </a:p>
+        </p:txBody>
+      </p:sp>
+      <p:sp>
+        <p:nvSpPr>
+          <p:cNvPr id="49" name="Text 44"/>
+          <p:cNvSpPr/>
+          <p:nvPr/>
+        </p:nvSpPr>
+        <p:spPr>
+          <a:xfrm>
+            <a:off x="3800856" y="5788152"/>
+            <a:ext cx="3105912" cy="141732"/>
+          </a:xfrm>
+          <a:prstGeom prst="rect">
+            <a:avLst/>
+          </a:prstGeom>
+          <a:noFill/>
+          <a:ln/>
+        </p:spPr>
+        <p:txBody>
+          <a:bodyPr wrap="square" lIns="0" tIns="0" rIns="0" bIns="0" rtlCol="0" anchor="ctr"/>
+          <a:lstStyle/>
+          <a:p>
+            <a:pPr indent="0" marL="0">
+              <a:buNone/>
+            </a:pPr>
+            <a:r>
+              <a:rPr lang="en-US" sz="800" b="1" dirty="0">
+                <a:solidFill>
+                  <a:srgbClr val="8A6316"/>
+                </a:solidFill>
+                <a:latin typeface="Yu Gothic" pitchFamily="34" charset="0"/>
+                <a:ea typeface="Yu Gothic" pitchFamily="34" charset="-122"/>
+                <a:cs typeface="Yu Gothic" pitchFamily="34" charset="-120"/>
+              </a:rPr>
+              <a:t>※ 残置いただく既存設備（給排水・電気容量）</a:t>
+            </a:r>
+            <a:endParaRPr lang="en-US" sz="800" dirty="0"/>
+          </a:p>
+        </p:txBody>
+      </p:sp>
+      <p:sp>
+        <p:nvSpPr>
+          <p:cNvPr id="50" name="Text 45"/>
+          <p:cNvSpPr/>
+          <p:nvPr/>
+        </p:nvSpPr>
+        <p:spPr>
+          <a:xfrm>
+            <a:off x="3800856" y="5929884"/>
+            <a:ext cx="128016" cy="141732"/>
+          </a:xfrm>
+          <a:prstGeom prst="rect">
+            <a:avLst/>
+          </a:prstGeom>
+          <a:noFill/>
+          <a:ln/>
+        </p:spPr>
+        <p:txBody>
+          <a:bodyPr wrap="square" lIns="0" tIns="0" rIns="0" bIns="0" rtlCol="0" anchor="ctr"/>
+          <a:lstStyle/>
+          <a:p>
+            <a:pPr indent="0" marL="0">
+              <a:buNone/>
+            </a:pPr>
+            <a:endParaRPr lang="en-US" sz="800" dirty="0"/>
+          </a:p>
+        </p:txBody>
+      </p:sp>
+      <p:sp>
+        <p:nvSpPr>
+          <p:cNvPr id="51" name="Text 46"/>
+          <p:cNvSpPr/>
+          <p:nvPr/>
+        </p:nvSpPr>
+        <p:spPr>
+          <a:xfrm>
+            <a:off x="3800856" y="5929884"/>
+            <a:ext cx="3105912" cy="141732"/>
+          </a:xfrm>
+          <a:prstGeom prst="rect">
+            <a:avLst/>
+          </a:prstGeom>
+          <a:noFill/>
+          <a:ln/>
+        </p:spPr>
+        <p:txBody>
+          <a:bodyPr wrap="square" lIns="0" tIns="0" rIns="0" bIns="0" rtlCol="0" anchor="ctr"/>
+          <a:lstStyle/>
+          <a:p>
+            <a:pPr indent="0" marL="0">
+              <a:buNone/>
+            </a:pPr>
+            <a:r>
+              <a:rPr lang="en-US" sz="800" b="1" dirty="0">
+                <a:solidFill>
+                  <a:srgbClr val="8A6316"/>
+                </a:solidFill>
+                <a:latin typeface="Yu Gothic" pitchFamily="34" charset="0"/>
+                <a:ea typeface="Yu Gothic" pitchFamily="34" charset="-122"/>
+                <a:cs typeface="Yu Gothic" pitchFamily="34" charset="-120"/>
+              </a:rPr>
+              <a:t>※ インターネット回線の新規敷設（12月中）</a:t>
+            </a:r>
+            <a:endParaRPr lang="en-US" sz="800" dirty="0"/>
+          </a:p>
+        </p:txBody>
+      </p:sp>
+      <p:sp>
+        <p:nvSpPr>
+          <p:cNvPr id="52" name="Text 47"/>
+          <p:cNvSpPr/>
+          <p:nvPr/>
+        </p:nvSpPr>
+        <p:spPr>
+          <a:xfrm>
+            <a:off x="3800856" y="6071616"/>
+            <a:ext cx="128016" cy="141732"/>
+          </a:xfrm>
+          <a:prstGeom prst="rect">
+            <a:avLst/>
+          </a:prstGeom>
+          <a:noFill/>
+          <a:ln/>
+        </p:spPr>
+        <p:txBody>
+          <a:bodyPr wrap="square" lIns="0" tIns="0" rIns="0" bIns="0" rtlCol="0" anchor="ctr"/>
+          <a:lstStyle/>
+          <a:p>
+            <a:pPr indent="0" marL="0">
+              <a:buNone/>
+            </a:pPr>
+            <a:r>
+              <a:rPr lang="en-US" sz="800" dirty="0">
+                <a:solidFill>
+                  <a:srgbClr val="6B6B6B"/>
+                </a:solidFill>
+                <a:latin typeface="Yu Gothic" pitchFamily="34" charset="0"/>
+                <a:ea typeface="Yu Gothic" pitchFamily="34" charset="-122"/>
+                <a:cs typeface="Yu Gothic" pitchFamily="34" charset="-120"/>
+              </a:rPr>
+              <a:t>・</a:t>
+            </a:r>
+            <a:endParaRPr lang="en-US" sz="800" dirty="0"/>
+          </a:p>
+        </p:txBody>
+      </p:sp>
+      <p:sp>
+        <p:nvSpPr>
+          <p:cNvPr id="53" name="Text 48"/>
+          <p:cNvSpPr/>
+          <p:nvPr/>
+        </p:nvSpPr>
+        <p:spPr>
+          <a:xfrm>
+            <a:off x="3928872" y="6071616"/>
+            <a:ext cx="2977896" cy="141732"/>
+          </a:xfrm>
+          <a:prstGeom prst="rect">
+            <a:avLst/>
+          </a:prstGeom>
+          <a:noFill/>
+          <a:ln/>
+        </p:spPr>
+        <p:txBody>
+          <a:bodyPr wrap="square" lIns="0" tIns="0" rIns="0" bIns="0" rtlCol="0" anchor="ctr"/>
+          <a:lstStyle/>
+          <a:p>
+            <a:pPr indent="0" marL="0">
+              <a:buNone/>
+            </a:pPr>
+            <a:r>
+              <a:rPr lang="en-US" sz="800" dirty="0">
+                <a:solidFill>
+                  <a:srgbClr val="333333"/>
+                </a:solidFill>
+                <a:latin typeface="Yu Gothic" pitchFamily="34" charset="0"/>
+                <a:ea typeface="Yu Gothic" pitchFamily="34" charset="-122"/>
+                <a:cs typeface="Yu Gothic" pitchFamily="34" charset="-120"/>
+              </a:rPr>
+              <a:t>開業日の確定（契約期間の起算日となります）</a:t>
+            </a:r>
+            <a:endParaRPr lang="en-US" sz="800" dirty="0"/>
+          </a:p>
+        </p:txBody>
+      </p:sp>
+      <p:sp>
+        <p:nvSpPr>
+          <p:cNvPr id="54" name="Text 49"/>
+          <p:cNvSpPr/>
+          <p:nvPr/>
+        </p:nvSpPr>
+        <p:spPr>
+          <a:xfrm>
+            <a:off x="3800856" y="6213348"/>
+            <a:ext cx="128016" cy="141732"/>
+          </a:xfrm>
+          <a:prstGeom prst="rect">
+            <a:avLst/>
+          </a:prstGeom>
+          <a:noFill/>
+          <a:ln/>
+        </p:spPr>
+        <p:txBody>
+          <a:bodyPr wrap="square" lIns="0" tIns="0" rIns="0" bIns="0" rtlCol="0" anchor="ctr"/>
+          <a:lstStyle/>
+          <a:p>
+            <a:pPr indent="0" marL="0">
+              <a:buNone/>
+            </a:pPr>
+            <a:r>
+              <a:rPr lang="en-US" sz="800" dirty="0">
+                <a:solidFill>
+                  <a:srgbClr val="6B6B6B"/>
+                </a:solidFill>
+                <a:latin typeface="Yu Gothic" pitchFamily="34" charset="0"/>
+                <a:ea typeface="Yu Gothic" pitchFamily="34" charset="-122"/>
+                <a:cs typeface="Yu Gothic" pitchFamily="34" charset="-120"/>
+              </a:rPr>
+              <a:t>・</a:t>
+            </a:r>
+            <a:endParaRPr lang="en-US" sz="800" dirty="0"/>
+          </a:p>
+        </p:txBody>
+      </p:sp>
+      <p:sp>
+        <p:nvSpPr>
+          <p:cNvPr id="55" name="Text 50"/>
+          <p:cNvSpPr/>
+          <p:nvPr/>
+        </p:nvSpPr>
+        <p:spPr>
+          <a:xfrm>
+            <a:off x="3928872" y="6213348"/>
+            <a:ext cx="2977896" cy="141732"/>
+          </a:xfrm>
+          <a:prstGeom prst="rect">
+            <a:avLst/>
+          </a:prstGeom>
+          <a:noFill/>
+          <a:ln/>
+        </p:spPr>
+        <p:txBody>
+          <a:bodyPr wrap="square" lIns="0" tIns="0" rIns="0" bIns="0" rtlCol="0" anchor="ctr"/>
+          <a:lstStyle/>
+          <a:p>
+            <a:pPr indent="0" marL="0">
+              <a:buNone/>
+            </a:pPr>
+            <a:r>
+              <a:rPr lang="en-US" sz="800" dirty="0">
+                <a:solidFill>
+                  <a:srgbClr val="333333"/>
+                </a:solidFill>
+                <a:latin typeface="Yu Gothic" pitchFamily="34" charset="0"/>
+                <a:ea typeface="Yu Gothic" pitchFamily="34" charset="-122"/>
+                <a:cs typeface="Yu Gothic" pitchFamily="34" charset="-120"/>
+              </a:rPr>
+              <a:t>カメラ映像（個人情報）の取扱いの取り決め</a:t>
+            </a:r>
+            <a:endParaRPr lang="en-US" sz="800" dirty="0"/>
+          </a:p>
+        </p:txBody>
+      </p:sp>
+      <p:sp>
+        <p:nvSpPr>
+          <p:cNvPr id="56" name="Text 51"/>
+          <p:cNvSpPr/>
+          <p:nvPr/>
+        </p:nvSpPr>
+        <p:spPr>
+          <a:xfrm>
+            <a:off x="3800856" y="6355080"/>
+            <a:ext cx="128016" cy="141732"/>
+          </a:xfrm>
+          <a:prstGeom prst="rect">
+            <a:avLst/>
+          </a:prstGeom>
+          <a:noFill/>
+          <a:ln/>
+        </p:spPr>
+        <p:txBody>
+          <a:bodyPr wrap="square" lIns="0" tIns="0" rIns="0" bIns="0" rtlCol="0" anchor="ctr"/>
+          <a:lstStyle/>
+          <a:p>
+            <a:pPr indent="0" marL="0">
+              <a:buNone/>
+            </a:pPr>
+            <a:r>
+              <a:rPr lang="en-US" sz="800" dirty="0">
+                <a:solidFill>
+                  <a:srgbClr val="6B6B6B"/>
+                </a:solidFill>
+                <a:latin typeface="Yu Gothic" pitchFamily="34" charset="0"/>
+                <a:ea typeface="Yu Gothic" pitchFamily="34" charset="-122"/>
+                <a:cs typeface="Yu Gothic" pitchFamily="34" charset="-120"/>
+              </a:rPr>
+              <a:t>・</a:t>
+            </a:r>
+            <a:endParaRPr lang="en-US" sz="800" dirty="0"/>
+          </a:p>
+        </p:txBody>
+      </p:sp>
+      <p:sp>
+        <p:nvSpPr>
+          <p:cNvPr id="57" name="Text 52"/>
+          <p:cNvSpPr/>
+          <p:nvPr/>
+        </p:nvSpPr>
+        <p:spPr>
+          <a:xfrm>
+            <a:off x="3928872" y="6355080"/>
+            <a:ext cx="2977896" cy="141732"/>
+          </a:xfrm>
+          <a:prstGeom prst="rect">
+            <a:avLst/>
+          </a:prstGeom>
+          <a:noFill/>
+          <a:ln/>
+        </p:spPr>
+        <p:txBody>
+          <a:bodyPr wrap="square" lIns="0" tIns="0" rIns="0" bIns="0" rtlCol="0" anchor="ctr"/>
+          <a:lstStyle/>
+          <a:p>
+            <a:pPr indent="0" marL="0">
+              <a:buNone/>
+            </a:pPr>
+            <a:r>
+              <a:rPr lang="en-US" sz="800" dirty="0">
+                <a:solidFill>
+                  <a:srgbClr val="333333"/>
                 </a:solidFill>
                 <a:latin typeface="Yu Gothic" pitchFamily="34" charset="0"/>
                 <a:ea typeface="Yu Gothic" pitchFamily="34" charset="-122"/>
@@ -5687,14 +5992,14 @@
       </p:sp>
       <p:sp>
         <p:nvSpPr>
-          <p:cNvPr id="66" name="Text 62"/>
-          <p:cNvSpPr/>
-          <p:nvPr/>
-        </p:nvSpPr>
-        <p:spPr>
-          <a:xfrm>
-            <a:off x="4526280" y="6647688"/>
-            <a:ext cx="164592" cy="155448"/>
+          <p:cNvPr id="58" name="Text 53"/>
+          <p:cNvSpPr/>
+          <p:nvPr/>
+        </p:nvSpPr>
+        <p:spPr>
+          <a:xfrm>
+            <a:off x="3800856" y="6496812"/>
+            <a:ext cx="128016" cy="141732"/>
           </a:xfrm>
           <a:prstGeom prst="rect">
             <a:avLst/>
@@ -5712,7 +6017,7 @@
             <a:r>
               <a:rPr lang="en-US" sz="800" dirty="0">
                 <a:solidFill>
-                  <a:srgbClr val="7E8882"/>
+                  <a:srgbClr val="6B6B6B"/>
                 </a:solidFill>
                 <a:latin typeface="Yu Gothic" pitchFamily="34" charset="0"/>
                 <a:ea typeface="Yu Gothic" pitchFamily="34" charset="-122"/>
@@ -5726,14 +6031,14 @@
       </p:sp>
       <p:sp>
         <p:nvSpPr>
-          <p:cNvPr id="67" name="Text 63"/>
-          <p:cNvSpPr/>
-          <p:nvPr/>
-        </p:nvSpPr>
-        <p:spPr>
-          <a:xfrm>
-            <a:off x="4709160" y="6647688"/>
-            <a:ext cx="2478024" cy="155448"/>
+          <p:cNvPr id="59" name="Text 54"/>
+          <p:cNvSpPr/>
+          <p:nvPr/>
+        </p:nvSpPr>
+        <p:spPr>
+          <a:xfrm>
+            <a:off x="3928872" y="6496812"/>
+            <a:ext cx="2977896" cy="141732"/>
           </a:xfrm>
           <a:prstGeom prst="rect">
             <a:avLst/>
@@ -5751,7 +6056,7 @@
             <a:r>
               <a:rPr lang="en-US" sz="800" dirty="0">
                 <a:solidFill>
-                  <a:srgbClr val="0A3D23"/>
+                  <a:srgbClr val="333333"/>
                 </a:solidFill>
                 <a:latin typeface="Yu Gothic" pitchFamily="34" charset="0"/>
                 <a:ea typeface="Yu Gothic" pitchFamily="34" charset="-122"/>
@@ -5765,14 +6070,14 @@
       </p:sp>
       <p:sp>
         <p:nvSpPr>
-          <p:cNvPr id="68" name="Text 64"/>
-          <p:cNvSpPr/>
-          <p:nvPr/>
-        </p:nvSpPr>
-        <p:spPr>
-          <a:xfrm>
-            <a:off x="4526280" y="6803136"/>
-            <a:ext cx="164592" cy="155448"/>
+          <p:cNvPr id="60" name="Text 55"/>
+          <p:cNvSpPr/>
+          <p:nvPr/>
+        </p:nvSpPr>
+        <p:spPr>
+          <a:xfrm>
+            <a:off x="3800856" y="6638544"/>
+            <a:ext cx="128016" cy="141732"/>
           </a:xfrm>
           <a:prstGeom prst="rect">
             <a:avLst/>
@@ -5790,7 +6095,7 @@
             <a:r>
               <a:rPr lang="en-US" sz="800" dirty="0">
                 <a:solidFill>
-                  <a:srgbClr val="7E8882"/>
+                  <a:srgbClr val="6B6B6B"/>
                 </a:solidFill>
                 <a:latin typeface="Yu Gothic" pitchFamily="34" charset="0"/>
                 <a:ea typeface="Yu Gothic" pitchFamily="34" charset="-122"/>
@@ -5804,14 +6109,14 @@
       </p:sp>
       <p:sp>
         <p:nvSpPr>
-          <p:cNvPr id="69" name="Text 65"/>
-          <p:cNvSpPr/>
-          <p:nvPr/>
-        </p:nvSpPr>
-        <p:spPr>
-          <a:xfrm>
-            <a:off x="4709160" y="6803136"/>
-            <a:ext cx="2478024" cy="155448"/>
+          <p:cNvPr id="61" name="Text 56"/>
+          <p:cNvSpPr/>
+          <p:nvPr/>
+        </p:nvSpPr>
+        <p:spPr>
+          <a:xfrm>
+            <a:off x="3928872" y="6638544"/>
+            <a:ext cx="2977896" cy="141732"/>
           </a:xfrm>
           <a:prstGeom prst="rect">
             <a:avLst/>
@@ -5829,13 +6134,13 @@
             <a:r>
               <a:rPr lang="en-US" sz="800" dirty="0">
                 <a:solidFill>
-                  <a:srgbClr val="0A3D23"/>
+                  <a:srgbClr val="333333"/>
                 </a:solidFill>
                 <a:latin typeface="Yu Gothic" pitchFamily="34" charset="0"/>
                 <a:ea typeface="Yu Gothic" pitchFamily="34" charset="-122"/>
                 <a:cs typeface="Yu Gothic" pitchFamily="34" charset="-120"/>
               </a:rPr>
-              <a:t>運営体制（営業時間・清掃補充の担当分け）</a:t>
+              <a:t>運営体制（営業時間、清掃・補充のご担当）</a:t>
             </a:r>
             <a:endParaRPr lang="en-US" sz="800" dirty="0"/>
           </a:p>
@@ -5843,14 +6148,14 @@
       </p:sp>
       <p:sp>
         <p:nvSpPr>
-          <p:cNvPr id="70" name="Text 66"/>
-          <p:cNvSpPr/>
-          <p:nvPr/>
-        </p:nvSpPr>
-        <p:spPr>
-          <a:xfrm>
-            <a:off x="4526280" y="6958584"/>
-            <a:ext cx="164592" cy="155448"/>
+          <p:cNvPr id="62" name="Text 57"/>
+          <p:cNvSpPr/>
+          <p:nvPr/>
+        </p:nvSpPr>
+        <p:spPr>
+          <a:xfrm>
+            <a:off x="3800856" y="6780276"/>
+            <a:ext cx="128016" cy="141732"/>
           </a:xfrm>
           <a:prstGeom prst="rect">
             <a:avLst/>
@@ -5868,7 +6173,7 @@
             <a:r>
               <a:rPr lang="en-US" sz="800" dirty="0">
                 <a:solidFill>
-                  <a:srgbClr val="7E8882"/>
+                  <a:srgbClr val="6B6B6B"/>
                 </a:solidFill>
                 <a:latin typeface="Yu Gothic" pitchFamily="34" charset="0"/>
                 <a:ea typeface="Yu Gothic" pitchFamily="34" charset="-122"/>
@@ -5882,14 +6187,14 @@
       </p:sp>
       <p:sp>
         <p:nvSpPr>
-          <p:cNvPr id="71" name="Text 67"/>
-          <p:cNvSpPr/>
-          <p:nvPr/>
-        </p:nvSpPr>
-        <p:spPr>
-          <a:xfrm>
-            <a:off x="4709160" y="6958584"/>
-            <a:ext cx="2478024" cy="155448"/>
+          <p:cNvPr id="63" name="Text 58"/>
+          <p:cNvSpPr/>
+          <p:nvPr/>
+        </p:nvSpPr>
+        <p:spPr>
+          <a:xfrm>
+            <a:off x="3928872" y="6780276"/>
+            <a:ext cx="2977896" cy="141732"/>
           </a:xfrm>
           <a:prstGeom prst="rect">
             <a:avLst/>
@@ -5907,13 +6212,13 @@
             <a:r>
               <a:rPr lang="en-US" sz="800" dirty="0">
                 <a:solidFill>
-                  <a:srgbClr val="0A3D23"/>
+                  <a:srgbClr val="333333"/>
                 </a:solidFill>
                 <a:latin typeface="Yu Gothic" pitchFamily="34" charset="0"/>
                 <a:ea typeface="Yu Gothic" pitchFamily="34" charset="-122"/>
                 <a:cs typeface="Yu Gothic" pitchFamily="34" charset="-120"/>
               </a:rPr>
-              <a:t>社内稟議の進捗・決裁完了の目処</a:t>
+              <a:t>社内稟議の進捗および決裁完了の目処</a:t>
             </a:r>
             <a:endParaRPr lang="en-US" sz="800" dirty="0"/>
           </a:p>
@@ -5921,14 +6226,34 @@
       </p:sp>
       <p:sp>
         <p:nvSpPr>
-          <p:cNvPr id="72" name="Text 68"/>
-          <p:cNvSpPr/>
-          <p:nvPr/>
-        </p:nvSpPr>
-        <p:spPr>
-          <a:xfrm>
-            <a:off x="7443216" y="5394960"/>
-            <a:ext cx="2660904" cy="164592"/>
+          <p:cNvPr id="64" name="Shape 59"/>
+          <p:cNvSpPr/>
+          <p:nvPr/>
+        </p:nvSpPr>
+        <p:spPr>
+          <a:xfrm>
+            <a:off x="7181088" y="5129784"/>
+            <a:ext cx="50292" cy="146304"/>
+          </a:xfrm>
+          <a:prstGeom prst="rect">
+            <a:avLst/>
+          </a:prstGeom>
+          <a:solidFill>
+            <a:srgbClr val="0C5230"/>
+          </a:solidFill>
+          <a:ln/>
+        </p:spPr>
+      </p:sp>
+      <p:sp>
+        <p:nvSpPr>
+          <p:cNvPr id="65" name="Text 60"/>
+          <p:cNvSpPr/>
+          <p:nvPr/>
+        </p:nvSpPr>
+        <p:spPr>
+          <a:xfrm>
+            <a:off x="7309104" y="5102352"/>
+            <a:ext cx="2996184" cy="201168"/>
           </a:xfrm>
           <a:prstGeom prst="rect">
             <a:avLst/>
@@ -5944,30 +6269,50 @@
               <a:buNone/>
             </a:pPr>
             <a:r>
-              <a:rPr lang="en-US" sz="800" b="1" dirty="0">
+              <a:rPr lang="en-US" sz="950" b="1" dirty="0">
                 <a:solidFill>
-                  <a:srgbClr val="7E8882"/>
+                  <a:srgbClr val="1A1A1A"/>
                 </a:solidFill>
                 <a:latin typeface="Yu Gothic" pitchFamily="34" charset="0"/>
                 <a:ea typeface="Yu Gothic" pitchFamily="34" charset="-122"/>
                 <a:cs typeface="Yu Gothic" pitchFamily="34" charset="-120"/>
               </a:rPr>
-              <a:t>ご提供いただきたい資料</a:t>
+              <a:t>５．ご提供をお願いする資料・情報</a:t>
             </a:r>
-            <a:endParaRPr lang="en-US" sz="800" dirty="0"/>
-          </a:p>
-        </p:txBody>
-      </p:sp>
-      <p:sp>
-        <p:nvSpPr>
-          <p:cNvPr id="73" name="Text 69"/>
-          <p:cNvSpPr/>
-          <p:nvPr/>
-        </p:nvSpPr>
-        <p:spPr>
-          <a:xfrm>
-            <a:off x="7461504" y="5559552"/>
-            <a:ext cx="146304" cy="155448"/>
+            <a:endParaRPr lang="en-US" sz="950" dirty="0"/>
+          </a:p>
+        </p:txBody>
+      </p:sp>
+      <p:sp>
+        <p:nvSpPr>
+          <p:cNvPr id="66" name="Shape 61"/>
+          <p:cNvSpPr/>
+          <p:nvPr/>
+        </p:nvSpPr>
+        <p:spPr>
+          <a:xfrm>
+            <a:off x="7181088" y="5321808"/>
+            <a:ext cx="3124200" cy="7315"/>
+          </a:xfrm>
+          <a:prstGeom prst="rect">
+            <a:avLst/>
+          </a:prstGeom>
+          <a:solidFill>
+            <a:srgbClr val="DCDCDC"/>
+          </a:solidFill>
+          <a:ln/>
+        </p:spPr>
+      </p:sp>
+      <p:sp>
+        <p:nvSpPr>
+          <p:cNvPr id="67" name="Text 62"/>
+          <p:cNvSpPr/>
+          <p:nvPr/>
+        </p:nvSpPr>
+        <p:spPr>
+          <a:xfrm>
+            <a:off x="7199376" y="5504688"/>
+            <a:ext cx="128016" cy="141732"/>
           </a:xfrm>
           <a:prstGeom prst="rect">
             <a:avLst/>
@@ -5985,7 +6330,7 @@
             <a:r>
               <a:rPr lang="en-US" sz="800" dirty="0">
                 <a:solidFill>
-                  <a:srgbClr val="7E8882"/>
+                  <a:srgbClr val="6B6B6B"/>
                 </a:solidFill>
                 <a:latin typeface="Yu Gothic" pitchFamily="34" charset="0"/>
                 <a:ea typeface="Yu Gothic" pitchFamily="34" charset="-122"/>
@@ -5999,14 +6344,14 @@
       </p:sp>
       <p:sp>
         <p:nvSpPr>
-          <p:cNvPr id="74" name="Text 70"/>
-          <p:cNvSpPr/>
-          <p:nvPr/>
-        </p:nvSpPr>
-        <p:spPr>
-          <a:xfrm>
-            <a:off x="7626096" y="5559552"/>
-            <a:ext cx="2478024" cy="155448"/>
+          <p:cNvPr id="68" name="Text 63"/>
+          <p:cNvSpPr/>
+          <p:nvPr/>
+        </p:nvSpPr>
+        <p:spPr>
+          <a:xfrm>
+            <a:off x="7327392" y="5504688"/>
+            <a:ext cx="2977896" cy="141732"/>
           </a:xfrm>
           <a:prstGeom prst="rect">
             <a:avLst/>
@@ -6024,7 +6369,7 @@
             <a:r>
               <a:rPr lang="en-US" sz="800" dirty="0">
                 <a:solidFill>
-                  <a:srgbClr val="0A3D23"/>
+                  <a:srgbClr val="333333"/>
                 </a:solidFill>
                 <a:latin typeface="Yu Gothic" pitchFamily="34" charset="0"/>
                 <a:ea typeface="Yu Gothic" pitchFamily="34" charset="-122"/>
@@ -6038,14 +6383,14 @@
       </p:sp>
       <p:sp>
         <p:nvSpPr>
-          <p:cNvPr id="75" name="Text 71"/>
-          <p:cNvSpPr/>
-          <p:nvPr/>
-        </p:nvSpPr>
-        <p:spPr>
-          <a:xfrm>
-            <a:off x="7461504" y="5715000"/>
-            <a:ext cx="146304" cy="155448"/>
+          <p:cNvPr id="69" name="Text 64"/>
+          <p:cNvSpPr/>
+          <p:nvPr/>
+        </p:nvSpPr>
+        <p:spPr>
+          <a:xfrm>
+            <a:off x="7199376" y="5646420"/>
+            <a:ext cx="128016" cy="141732"/>
           </a:xfrm>
           <a:prstGeom prst="rect">
             <a:avLst/>
@@ -6063,7 +6408,7 @@
             <a:r>
               <a:rPr lang="en-US" sz="800" dirty="0">
                 <a:solidFill>
-                  <a:srgbClr val="7E8882"/>
+                  <a:srgbClr val="6B6B6B"/>
                 </a:solidFill>
                 <a:latin typeface="Yu Gothic" pitchFamily="34" charset="0"/>
                 <a:ea typeface="Yu Gothic" pitchFamily="34" charset="-122"/>
@@ -6077,14 +6422,14 @@
       </p:sp>
       <p:sp>
         <p:nvSpPr>
-          <p:cNvPr id="76" name="Text 72"/>
-          <p:cNvSpPr/>
-          <p:nvPr/>
-        </p:nvSpPr>
-        <p:spPr>
-          <a:xfrm>
-            <a:off x="7626096" y="5715000"/>
-            <a:ext cx="2478024" cy="155448"/>
+          <p:cNvPr id="70" name="Text 65"/>
+          <p:cNvSpPr/>
+          <p:nvPr/>
+        </p:nvSpPr>
+        <p:spPr>
+          <a:xfrm>
+            <a:off x="7327392" y="5646420"/>
+            <a:ext cx="2977896" cy="141732"/>
           </a:xfrm>
           <a:prstGeom prst="rect">
             <a:avLst/>
@@ -6102,13 +6447,13 @@
             <a:r>
               <a:rPr lang="en-US" sz="800" dirty="0">
                 <a:solidFill>
-                  <a:srgbClr val="0A3D23"/>
+                  <a:srgbClr val="333333"/>
                 </a:solidFill>
                 <a:latin typeface="Yu Gothic" pitchFamily="34" charset="0"/>
                 <a:ea typeface="Yu Gothic" pitchFamily="34" charset="-122"/>
                 <a:cs typeface="Yu Gothic" pitchFamily="34" charset="-120"/>
               </a:rPr>
-              <a:t>電気容量・分電盤の位置</a:t>
+              <a:t>電気容量および分電盤の位置</a:t>
             </a:r>
             <a:endParaRPr lang="en-US" sz="800" dirty="0"/>
           </a:p>
@@ -6116,14 +6461,14 @@
       </p:sp>
       <p:sp>
         <p:nvSpPr>
-          <p:cNvPr id="77" name="Text 73"/>
-          <p:cNvSpPr/>
-          <p:nvPr/>
-        </p:nvSpPr>
-        <p:spPr>
-          <a:xfrm>
-            <a:off x="7461504" y="5870448"/>
-            <a:ext cx="146304" cy="155448"/>
+          <p:cNvPr id="71" name="Text 66"/>
+          <p:cNvSpPr/>
+          <p:nvPr/>
+        </p:nvSpPr>
+        <p:spPr>
+          <a:xfrm>
+            <a:off x="7199376" y="5788152"/>
+            <a:ext cx="128016" cy="141732"/>
           </a:xfrm>
           <a:prstGeom prst="rect">
             <a:avLst/>
@@ -6141,7 +6486,7 @@
             <a:r>
               <a:rPr lang="en-US" sz="800" dirty="0">
                 <a:solidFill>
-                  <a:srgbClr val="7E8882"/>
+                  <a:srgbClr val="6B6B6B"/>
                 </a:solidFill>
                 <a:latin typeface="Yu Gothic" pitchFamily="34" charset="0"/>
                 <a:ea typeface="Yu Gothic" pitchFamily="34" charset="-122"/>
@@ -6155,14 +6500,14 @@
       </p:sp>
       <p:sp>
         <p:nvSpPr>
-          <p:cNvPr id="78" name="Text 74"/>
-          <p:cNvSpPr/>
-          <p:nvPr/>
-        </p:nvSpPr>
-        <p:spPr>
-          <a:xfrm>
-            <a:off x="7626096" y="5870448"/>
-            <a:ext cx="2478024" cy="155448"/>
+          <p:cNvPr id="72" name="Text 67"/>
+          <p:cNvSpPr/>
+          <p:nvPr/>
+        </p:nvSpPr>
+        <p:spPr>
+          <a:xfrm>
+            <a:off x="7327392" y="5788152"/>
+            <a:ext cx="2977896" cy="141732"/>
           </a:xfrm>
           <a:prstGeom prst="rect">
             <a:avLst/>
@@ -6180,7 +6525,7 @@
             <a:r>
               <a:rPr lang="en-US" sz="800" dirty="0">
                 <a:solidFill>
-                  <a:srgbClr val="0A3D23"/>
+                  <a:srgbClr val="333333"/>
                 </a:solidFill>
                 <a:latin typeface="Yu Gothic" pitchFamily="34" charset="0"/>
                 <a:ea typeface="Yu Gothic" pitchFamily="34" charset="-122"/>
@@ -6194,14 +6539,14 @@
       </p:sp>
       <p:sp>
         <p:nvSpPr>
-          <p:cNvPr id="79" name="Text 75"/>
-          <p:cNvSpPr/>
-          <p:nvPr/>
-        </p:nvSpPr>
-        <p:spPr>
-          <a:xfrm>
-            <a:off x="7461504" y="6025896"/>
-            <a:ext cx="146304" cy="155448"/>
+          <p:cNvPr id="73" name="Text 68"/>
+          <p:cNvSpPr/>
+          <p:nvPr/>
+        </p:nvSpPr>
+        <p:spPr>
+          <a:xfrm>
+            <a:off x="7199376" y="5929884"/>
+            <a:ext cx="128016" cy="141732"/>
           </a:xfrm>
           <a:prstGeom prst="rect">
             <a:avLst/>
@@ -6219,7 +6564,7 @@
             <a:r>
               <a:rPr lang="en-US" sz="800" dirty="0">
                 <a:solidFill>
-                  <a:srgbClr val="7E8882"/>
+                  <a:srgbClr val="6B6B6B"/>
                 </a:solidFill>
                 <a:latin typeface="Yu Gothic" pitchFamily="34" charset="0"/>
                 <a:ea typeface="Yu Gothic" pitchFamily="34" charset="-122"/>
@@ -6233,14 +6578,14 @@
       </p:sp>
       <p:sp>
         <p:nvSpPr>
-          <p:cNvPr id="80" name="Text 76"/>
-          <p:cNvSpPr/>
-          <p:nvPr/>
-        </p:nvSpPr>
-        <p:spPr>
-          <a:xfrm>
-            <a:off x="7626096" y="6025896"/>
-            <a:ext cx="2478024" cy="155448"/>
+          <p:cNvPr id="74" name="Text 69"/>
+          <p:cNvSpPr/>
+          <p:nvPr/>
+        </p:nvSpPr>
+        <p:spPr>
+          <a:xfrm>
+            <a:off x="7327392" y="5929884"/>
+            <a:ext cx="2977896" cy="141732"/>
           </a:xfrm>
           <a:prstGeom prst="rect">
             <a:avLst/>
@@ -6258,13 +6603,13 @@
             <a:r>
               <a:rPr lang="en-US" sz="800" dirty="0">
                 <a:solidFill>
-                  <a:srgbClr val="0A3D23"/>
+                  <a:srgbClr val="333333"/>
                 </a:solidFill>
                 <a:latin typeface="Yu Gothic" pitchFamily="34" charset="0"/>
                 <a:ea typeface="Yu Gothic" pitchFamily="34" charset="-122"/>
                 <a:cs typeface="Yu Gothic" pitchFamily="34" charset="-120"/>
               </a:rPr>
-              <a:t>既存ネット回線の有無・引込経路</a:t>
+              <a:t>既存インターネット回線の有無・引込経路</a:t>
             </a:r>
             <a:endParaRPr lang="en-US" sz="800" dirty="0"/>
           </a:p>
@@ -6272,14 +6617,14 @@
       </p:sp>
       <p:sp>
         <p:nvSpPr>
-          <p:cNvPr id="81" name="Text 77"/>
-          <p:cNvSpPr/>
-          <p:nvPr/>
-        </p:nvSpPr>
-        <p:spPr>
-          <a:xfrm>
-            <a:off x="7461504" y="6181344"/>
-            <a:ext cx="146304" cy="155448"/>
+          <p:cNvPr id="75" name="Text 70"/>
+          <p:cNvSpPr/>
+          <p:nvPr/>
+        </p:nvSpPr>
+        <p:spPr>
+          <a:xfrm>
+            <a:off x="7199376" y="6071616"/>
+            <a:ext cx="128016" cy="141732"/>
           </a:xfrm>
           <a:prstGeom prst="rect">
             <a:avLst/>
@@ -6297,7 +6642,7 @@
             <a:r>
               <a:rPr lang="en-US" sz="800" dirty="0">
                 <a:solidFill>
-                  <a:srgbClr val="7E8882"/>
+                  <a:srgbClr val="6B6B6B"/>
                 </a:solidFill>
                 <a:latin typeface="Yu Gothic" pitchFamily="34" charset="0"/>
                 <a:ea typeface="Yu Gothic" pitchFamily="34" charset="-122"/>
@@ -6311,14 +6656,14 @@
       </p:sp>
       <p:sp>
         <p:nvSpPr>
-          <p:cNvPr id="82" name="Text 78"/>
-          <p:cNvSpPr/>
-          <p:nvPr/>
-        </p:nvSpPr>
-        <p:spPr>
-          <a:xfrm>
-            <a:off x="7626096" y="6181344"/>
-            <a:ext cx="2478024" cy="155448"/>
+          <p:cNvPr id="76" name="Text 71"/>
+          <p:cNvSpPr/>
+          <p:nvPr/>
+        </p:nvSpPr>
+        <p:spPr>
+          <a:xfrm>
+            <a:off x="7327392" y="6071616"/>
+            <a:ext cx="2977896" cy="141732"/>
           </a:xfrm>
           <a:prstGeom prst="rect">
             <a:avLst/>
@@ -6336,13 +6681,13 @@
             <a:r>
               <a:rPr lang="en-US" sz="800" dirty="0">
                 <a:solidFill>
-                  <a:srgbClr val="0A3D23"/>
+                  <a:srgbClr val="333333"/>
                 </a:solidFill>
                 <a:latin typeface="Yu Gothic" pitchFamily="34" charset="0"/>
                 <a:ea typeface="Yu Gothic" pitchFamily="34" charset="-122"/>
                 <a:cs typeface="Yu Gothic" pitchFamily="34" charset="-120"/>
               </a:rPr>
-              <a:t>現況写真（既存設備・厨房まわり）</a:t>
+              <a:t>現況写真（既存設備、厨房まわり）</a:t>
             </a:r>
             <a:endParaRPr lang="en-US" sz="800" dirty="0"/>
           </a:p>
@@ -6350,14 +6695,14 @@
       </p:sp>
       <p:sp>
         <p:nvSpPr>
-          <p:cNvPr id="83" name="Text 79"/>
-          <p:cNvSpPr/>
-          <p:nvPr/>
-        </p:nvSpPr>
-        <p:spPr>
-          <a:xfrm>
-            <a:off x="7461504" y="6336792"/>
-            <a:ext cx="146304" cy="155448"/>
+          <p:cNvPr id="77" name="Text 72"/>
+          <p:cNvSpPr/>
+          <p:nvPr/>
+        </p:nvSpPr>
+        <p:spPr>
+          <a:xfrm>
+            <a:off x="7199376" y="6213348"/>
+            <a:ext cx="128016" cy="141732"/>
           </a:xfrm>
           <a:prstGeom prst="rect">
             <a:avLst/>
@@ -6375,7 +6720,7 @@
             <a:r>
               <a:rPr lang="en-US" sz="800" dirty="0">
                 <a:solidFill>
-                  <a:srgbClr val="7E8882"/>
+                  <a:srgbClr val="6B6B6B"/>
                 </a:solidFill>
                 <a:latin typeface="Yu Gothic" pitchFamily="34" charset="0"/>
                 <a:ea typeface="Yu Gothic" pitchFamily="34" charset="-122"/>
@@ -6389,14 +6734,14 @@
       </p:sp>
       <p:sp>
         <p:nvSpPr>
-          <p:cNvPr id="84" name="Text 80"/>
-          <p:cNvSpPr/>
-          <p:nvPr/>
-        </p:nvSpPr>
-        <p:spPr>
-          <a:xfrm>
-            <a:off x="7626096" y="6336792"/>
-            <a:ext cx="2478024" cy="155448"/>
+          <p:cNvPr id="78" name="Text 73"/>
+          <p:cNvSpPr/>
+          <p:nvPr/>
+        </p:nvSpPr>
+        <p:spPr>
+          <a:xfrm>
+            <a:off x="7327392" y="6213348"/>
+            <a:ext cx="2977896" cy="141732"/>
           </a:xfrm>
           <a:prstGeom prst="rect">
             <a:avLst/>
@@ -6414,13 +6759,13 @@
             <a:r>
               <a:rPr lang="en-US" sz="800" dirty="0">
                 <a:solidFill>
-                  <a:srgbClr val="0A3D23"/>
+                  <a:srgbClr val="333333"/>
                 </a:solidFill>
                 <a:latin typeface="Yu Gothic" pitchFamily="34" charset="0"/>
                 <a:ea typeface="Yu Gothic" pitchFamily="34" charset="-122"/>
                 <a:cs typeface="Yu Gothic" pitchFamily="34" charset="-120"/>
               </a:rPr>
-              <a:t>館の工事規定・申請様式</a:t>
+              <a:t>館の工事規定および申請様式</a:t>
             </a:r>
             <a:endParaRPr lang="en-US" sz="800" dirty="0"/>
           </a:p>
@@ -6428,14 +6773,14 @@
       </p:sp>
       <p:sp>
         <p:nvSpPr>
-          <p:cNvPr id="85" name="Text 81"/>
-          <p:cNvSpPr/>
-          <p:nvPr/>
-        </p:nvSpPr>
-        <p:spPr>
-          <a:xfrm>
-            <a:off x="7461504" y="6492240"/>
-            <a:ext cx="146304" cy="155448"/>
+          <p:cNvPr id="79" name="Text 74"/>
+          <p:cNvSpPr/>
+          <p:nvPr/>
+        </p:nvSpPr>
+        <p:spPr>
+          <a:xfrm>
+            <a:off x="7199376" y="6355080"/>
+            <a:ext cx="128016" cy="141732"/>
           </a:xfrm>
           <a:prstGeom prst="rect">
             <a:avLst/>
@@ -6453,7 +6798,7 @@
             <a:r>
               <a:rPr lang="en-US" sz="800" dirty="0">
                 <a:solidFill>
-                  <a:srgbClr val="7E8882"/>
+                  <a:srgbClr val="6B6B6B"/>
                 </a:solidFill>
                 <a:latin typeface="Yu Gothic" pitchFamily="34" charset="0"/>
                 <a:ea typeface="Yu Gothic" pitchFamily="34" charset="-122"/>
@@ -6467,14 +6812,14 @@
       </p:sp>
       <p:sp>
         <p:nvSpPr>
-          <p:cNvPr id="86" name="Text 82"/>
-          <p:cNvSpPr/>
-          <p:nvPr/>
-        </p:nvSpPr>
-        <p:spPr>
-          <a:xfrm>
-            <a:off x="7626096" y="6492240"/>
-            <a:ext cx="2478024" cy="155448"/>
+          <p:cNvPr id="80" name="Text 75"/>
+          <p:cNvSpPr/>
+          <p:nvPr/>
+        </p:nvSpPr>
+        <p:spPr>
+          <a:xfrm>
+            <a:off x="7327392" y="6355080"/>
+            <a:ext cx="2977896" cy="141732"/>
           </a:xfrm>
           <a:prstGeom prst="rect">
             <a:avLst/>
@@ -6492,13 +6837,13 @@
             <a:r>
               <a:rPr lang="en-US" sz="800" dirty="0">
                 <a:solidFill>
-                  <a:srgbClr val="0A3D23"/>
+                  <a:srgbClr val="333333"/>
                 </a:solidFill>
                 <a:latin typeface="Yu Gothic" pitchFamily="34" charset="0"/>
                 <a:ea typeface="Yu Gothic" pitchFamily="34" charset="-122"/>
                 <a:cs typeface="Yu Gothic" pitchFamily="34" charset="-120"/>
               </a:rPr>
-              <a:t>クリエ様の原状回復条件がわかる資料</a:t>
+              <a:t>カフェ・ド・クリエ様の原状回復条件がわかる資料</a:t>
             </a:r>
             <a:endParaRPr lang="en-US" sz="800" dirty="0"/>
           </a:p>
@@ -6506,14 +6851,14 @@
       </p:sp>
       <p:sp>
         <p:nvSpPr>
-          <p:cNvPr id="87" name="Text 83"/>
-          <p:cNvSpPr/>
-          <p:nvPr/>
-        </p:nvSpPr>
-        <p:spPr>
-          <a:xfrm>
-            <a:off x="7461504" y="6647688"/>
-            <a:ext cx="146304" cy="155448"/>
+          <p:cNvPr id="81" name="Text 76"/>
+          <p:cNvSpPr/>
+          <p:nvPr/>
+        </p:nvSpPr>
+        <p:spPr>
+          <a:xfrm>
+            <a:off x="7199376" y="6496812"/>
+            <a:ext cx="128016" cy="141732"/>
           </a:xfrm>
           <a:prstGeom prst="rect">
             <a:avLst/>
@@ -6531,7 +6876,7 @@
             <a:r>
               <a:rPr lang="en-US" sz="800" dirty="0">
                 <a:solidFill>
-                  <a:srgbClr val="7E8882"/>
+                  <a:srgbClr val="6B6B6B"/>
                 </a:solidFill>
                 <a:latin typeface="Yu Gothic" pitchFamily="34" charset="0"/>
                 <a:ea typeface="Yu Gothic" pitchFamily="34" charset="-122"/>
@@ -6545,14 +6890,14 @@
       </p:sp>
       <p:sp>
         <p:nvSpPr>
-          <p:cNvPr id="88" name="Text 84"/>
-          <p:cNvSpPr/>
-          <p:nvPr/>
-        </p:nvSpPr>
-        <p:spPr>
-          <a:xfrm>
-            <a:off x="7626096" y="6647688"/>
-            <a:ext cx="2478024" cy="155448"/>
+          <p:cNvPr id="82" name="Text 77"/>
+          <p:cNvSpPr/>
+          <p:nvPr/>
+        </p:nvSpPr>
+        <p:spPr>
+          <a:xfrm>
+            <a:off x="7327392" y="6496812"/>
+            <a:ext cx="2977896" cy="141732"/>
           </a:xfrm>
           <a:prstGeom prst="rect">
             <a:avLst/>
@@ -6570,7 +6915,7 @@
             <a:r>
               <a:rPr lang="en-US" sz="800" dirty="0">
                 <a:solidFill>
-                  <a:srgbClr val="0A3D23"/>
+                  <a:srgbClr val="333333"/>
                 </a:solidFill>
                 <a:latin typeface="Yu Gothic" pitchFamily="34" charset="0"/>
                 <a:ea typeface="Yu Gothic" pitchFamily="34" charset="-122"/>
@@ -6584,14 +6929,14 @@
       </p:sp>
       <p:sp>
         <p:nvSpPr>
-          <p:cNvPr id="89" name="Text 85"/>
-          <p:cNvSpPr/>
-          <p:nvPr/>
-        </p:nvSpPr>
-        <p:spPr>
-          <a:xfrm>
-            <a:off x="7461504" y="6803136"/>
-            <a:ext cx="146304" cy="155448"/>
+          <p:cNvPr id="83" name="Text 78"/>
+          <p:cNvSpPr/>
+          <p:nvPr/>
+        </p:nvSpPr>
+        <p:spPr>
+          <a:xfrm>
+            <a:off x="7199376" y="6638544"/>
+            <a:ext cx="128016" cy="141732"/>
           </a:xfrm>
           <a:prstGeom prst="rect">
             <a:avLst/>
@@ -6609,7 +6954,7 @@
             <a:r>
               <a:rPr lang="en-US" sz="800" dirty="0">
                 <a:solidFill>
-                  <a:srgbClr val="7E8882"/>
+                  <a:srgbClr val="6B6B6B"/>
                 </a:solidFill>
                 <a:latin typeface="Yu Gothic" pitchFamily="34" charset="0"/>
                 <a:ea typeface="Yu Gothic" pitchFamily="34" charset="-122"/>
@@ -6623,14 +6968,14 @@
       </p:sp>
       <p:sp>
         <p:nvSpPr>
-          <p:cNvPr id="90" name="Text 86"/>
-          <p:cNvSpPr/>
-          <p:nvPr/>
-        </p:nvSpPr>
-        <p:spPr>
-          <a:xfrm>
-            <a:off x="7626096" y="6803136"/>
-            <a:ext cx="2478024" cy="155448"/>
+          <p:cNvPr id="84" name="Text 79"/>
+          <p:cNvSpPr/>
+          <p:nvPr/>
+        </p:nvSpPr>
+        <p:spPr>
+          <a:xfrm>
+            <a:off x="7327392" y="6638544"/>
+            <a:ext cx="2977896" cy="141732"/>
           </a:xfrm>
           <a:prstGeom prst="rect">
             <a:avLst/>
@@ -6648,7 +6993,7 @@
             <a:r>
               <a:rPr lang="en-US" sz="800" dirty="0">
                 <a:solidFill>
-                  <a:srgbClr val="0A3D23"/>
+                  <a:srgbClr val="333333"/>
                 </a:solidFill>
                 <a:latin typeface="Yu Gothic" pitchFamily="34" charset="0"/>
                 <a:ea typeface="Yu Gothic" pitchFamily="34" charset="-122"/>
@@ -6662,14 +7007,34 @@
       </p:sp>
       <p:sp>
         <p:nvSpPr>
-          <p:cNvPr id="91" name="Text 87"/>
-          <p:cNvSpPr/>
-          <p:nvPr/>
-        </p:nvSpPr>
-        <p:spPr>
-          <a:xfrm>
-            <a:off x="384048" y="7260336"/>
-            <a:ext cx="9921240" cy="137160"/>
+          <p:cNvPr id="85" name="Shape 80"/>
+          <p:cNvSpPr/>
+          <p:nvPr/>
+        </p:nvSpPr>
+        <p:spPr>
+          <a:xfrm>
+            <a:off x="384048" y="6967728"/>
+            <a:ext cx="9921240" cy="7315"/>
+          </a:xfrm>
+          <a:prstGeom prst="rect">
+            <a:avLst/>
+          </a:prstGeom>
+          <a:solidFill>
+            <a:srgbClr val="DCDCDC"/>
+          </a:solidFill>
+          <a:ln/>
+        </p:spPr>
+      </p:sp>
+      <p:sp>
+        <p:nvSpPr>
+          <p:cNvPr id="86" name="Text 81"/>
+          <p:cNvSpPr/>
+          <p:nvPr/>
+        </p:nvSpPr>
+        <p:spPr>
+          <a:xfrm>
+            <a:off x="384048" y="7040880"/>
+            <a:ext cx="9921240" cy="128016"/>
           </a:xfrm>
           <a:prstGeom prst="rect">
             <a:avLst/>
@@ -6687,13 +7052,13 @@
             <a:r>
               <a:rPr lang="en-US" sz="750" dirty="0">
                 <a:solidFill>
-                  <a:srgbClr val="A8761F"/>
+                  <a:srgbClr val="6B6B6B"/>
                 </a:solidFill>
                 <a:latin typeface="Yu Gothic" pitchFamily="34" charset="0"/>
                 <a:ea typeface="Yu Gothic" pitchFamily="34" charset="-122"/>
                 <a:cs typeface="Yu Gothic" pitchFamily="34" charset="-120"/>
               </a:rPr>
-              <a:t>※ 業務委託型のため、工事費のお見積り提出はございません。御社にご負担いただくのは設置工事費（30〜50万円・税抜）のみです。</a:t>
+              <a:t>※1　工期約1か月は、造作・床・給排水・電気を残置いただくことを前提としております。スケルトン戻しとなる場合は工期が延長いたします。</a:t>
             </a:r>
             <a:endParaRPr lang="en-US" sz="750" dirty="0"/>
           </a:p>
@@ -6701,14 +7066,14 @@
       </p:sp>
       <p:sp>
         <p:nvSpPr>
-          <p:cNvPr id="92" name="Text 88"/>
-          <p:cNvSpPr/>
-          <p:nvPr/>
-        </p:nvSpPr>
-        <p:spPr>
-          <a:xfrm>
-            <a:off x="384048" y="7388352"/>
-            <a:ext cx="6400800" cy="137160"/>
+          <p:cNvPr id="87" name="Text 82"/>
+          <p:cNvSpPr/>
+          <p:nvPr/>
+        </p:nvSpPr>
+        <p:spPr>
+          <a:xfrm>
+            <a:off x="384048" y="7173468"/>
+            <a:ext cx="9921240" cy="128016"/>
           </a:xfrm>
           <a:prstGeom prst="rect">
             <a:avLst/>
@@ -6726,13 +7091,13 @@
             <a:r>
               <a:rPr lang="en-US" sz="750" dirty="0">
                 <a:solidFill>
-                  <a:srgbClr val="A8B0AA"/>
+                  <a:srgbClr val="6B6B6B"/>
                 </a:solidFill>
                 <a:latin typeface="Yu Gothic" pitchFamily="34" charset="0"/>
                 <a:ea typeface="Yu Gothic" pitchFamily="34" charset="-122"/>
                 <a:cs typeface="Yu Gothic" pitchFamily="34" charset="-120"/>
               </a:rPr>
-              <a:t>※ 業務委託契約書は別途ご送付済みです。別表は仕様確定後に作成いたします。工期・納期は目安で、館の工事申請期間は未織り込みです。</a:t>
+              <a:t>※2　業務委託型のため、工事費のお見積りのご提出はございません。貴社にご負担いただく費用は、設置工事費（30〜50万円・税抜）のみでございます。</a:t>
             </a:r>
             <a:endParaRPr lang="en-US" sz="750" dirty="0"/>
           </a:p>
@@ -6740,14 +7105,14 @@
       </p:sp>
       <p:sp>
         <p:nvSpPr>
-          <p:cNvPr id="93" name="Text 89"/>
-          <p:cNvSpPr/>
-          <p:nvPr/>
-        </p:nvSpPr>
-        <p:spPr>
-          <a:xfrm>
-            <a:off x="7013448" y="7388352"/>
-            <a:ext cx="3291840" cy="137160"/>
+          <p:cNvPr id="88" name="Text 83"/>
+          <p:cNvSpPr/>
+          <p:nvPr/>
+        </p:nvSpPr>
+        <p:spPr>
+          <a:xfrm>
+            <a:off x="384048" y="7306056"/>
+            <a:ext cx="9921240" cy="128016"/>
           </a:xfrm>
           <a:prstGeom prst="rect">
             <a:avLst/>
@@ -6759,19 +7124,19 @@
           <a:bodyPr wrap="square" lIns="0" tIns="0" rIns="0" bIns="0" rtlCol="0" anchor="ctr"/>
           <a:lstStyle/>
           <a:p>
-            <a:pPr algn="r" indent="0" marL="0">
+            <a:pPr indent="0" marL="0">
               <a:buNone/>
             </a:pPr>
             <a:r>
               <a:rPr lang="en-US" sz="750" dirty="0">
                 <a:solidFill>
-                  <a:srgbClr val="A8B0AA"/>
+                  <a:srgbClr val="6B6B6B"/>
                 </a:solidFill>
                 <a:latin typeface="Yu Gothic" pitchFamily="34" charset="0"/>
                 <a:ea typeface="Yu Gothic" pitchFamily="34" charset="-122"/>
                 <a:cs typeface="Yu Gothic" pitchFamily="34" charset="-120"/>
               </a:rPr>
-              <a:t>セルフカフェ株式会社　052-879-3557 ／ info@selfcafe.jp</a:t>
+              <a:t>※3　業務委託契約書は別途ご送付済みです。別表は仕様確定後に作成のうえ添付いたします。館の工事申請に要する期間は本表に織り込んでおりません。</a:t>
             </a:r>
             <a:endParaRPr lang="en-US" sz="750" dirty="0"/>
           </a:p>
